--- a/FinWebBuilder-changes-made.pptx
+++ b/FinWebBuilder-changes-made.pptx
@@ -19,10 +19,9 @@
     <p:sldId id="267" r:id="rId13"/>
     <p:sldId id="268" r:id="rId14"/>
     <p:sldId id="269" r:id="rId15"/>
-    <p:sldId id="270" r:id="rId16"/>
   </p:sldIdLst>
   <p:notesMasterIdLst>
-    <p:notesMasterId r:id="rId17"/>
+    <p:notesMasterId r:id="rId16"/>
   </p:notesMasterIdLst>
   <p:sldSz cx="12192000" cy="6858000"/>
   <p:notesSz cx="6858000" cy="12192000"/>
@@ -1408,7 +1407,7 @@
           <a:p>
             <a:r>
               <a:rPr lang="en-US" dirty="0"/>
-              <a:t/>
+              <a:t>Assumptions for the direct API agent: same tokens as the Claude Code run, Haiku page reading replaced by Sonnet at $2 input and $10 output per million, searches unchanged at $10 per 1,000, Opus lead unchanged with caching. Actual API-agent token counts would differ. The plan fees are placeholders; replace with the real plan price.</a:t>
             </a:r>
             <a:endParaRPr lang="en-US" dirty="0"/>
           </a:p>
@@ -1496,7 +1495,7 @@
           <a:p>
             <a:r>
               <a:rPr lang="en-US" dirty="0"/>
-              <a:t>Assumptions for the direct API agent: same tokens as the Claude Code run, Haiku page reading replaced by Sonnet at $2 input and $10 output per million, searches unchanged at $10 per 1,000, Opus lead unchanged with caching. Actual API-agent token counts would differ. The plan fees are placeholders; replace with the real plan price.</a:t>
+              <a:t/>
             </a:r>
             <a:endParaRPr lang="en-US" dirty="0"/>
           </a:p>
@@ -1784,94 +1783,6 @@
             <a:fld id="{F7021451-1387-4CA6-816F-3879F97B5CBC}" type="slidenum">
               <a:rPr lang="en-US"/>
               <a:t>14</a:t>
-            </a:fld>
-            <a:endParaRPr lang="en-US"/>
-          </a:p>
-        </p:txBody>
-      </p:sp>
-    </p:spTree>
-    <p:extLst>
-      <p:ext uri="{BB962C8B-B14F-4D97-AF65-F5344CB8AC3E}">
-        <p14:creationId xmlns:p14="http://schemas.microsoft.com/office/powerpoint/2010/main" val="1024086991"/>
-      </p:ext>
-    </p:extLst>
-  </p:cSld>
-  <p:clrMapOvr>
-    <a:masterClrMapping/>
-  </p:clrMapOvr>
-</p:notes>
-</file>
-
-<file path=ppt/notesSlides/notesSlide15.xml><?xml version="1.0" encoding="utf-8"?>
-<p:notes xmlns:a="http://schemas.openxmlformats.org/drawingml/2006/main" xmlns:r="http://schemas.openxmlformats.org/officeDocument/2006/relationships" xmlns:p="http://schemas.openxmlformats.org/presentationml/2006/main">
-  <p:cSld>
-    <p:spTree>
-      <p:nvGrpSpPr>
-        <p:cNvPr id="1" name=""/>
-        <p:cNvGrpSpPr/>
-        <p:nvPr/>
-      </p:nvGrpSpPr>
-      <p:grpSpPr>
-        <a:xfrm>
-          <a:off x="0" y="0"/>
-          <a:ext cx="0" cy="0"/>
-          <a:chOff x="0" y="0"/>
-          <a:chExt cx="0" cy="0"/>
-        </a:xfrm>
-      </p:grpSpPr>
-      <p:sp>
-        <p:nvSpPr>
-          <p:cNvPr id="2" name="Slide Image Placeholder 1"/>
-          <p:cNvSpPr>
-            <a:spLocks noGrp="1" noRot="1" noChangeAspect="1"/>
-          </p:cNvSpPr>
-          <p:nvPr>
-            <p:ph type="sldImg"/>
-          </p:nvPr>
-        </p:nvSpPr>
-        <p:spPr/>
-      </p:sp>
-      <p:sp>
-        <p:nvSpPr>
-          <p:cNvPr id="3" name="Notes Placeholder 2"/>
-          <p:cNvSpPr>
-            <a:spLocks noGrp="1"/>
-          </p:cNvSpPr>
-          <p:nvPr>
-            <p:ph type="body" idx="1"/>
-          </p:nvPr>
-        </p:nvSpPr>
-        <p:spPr/>
-        <p:txBody>
-          <a:bodyPr/>
-          <a:lstStyle/>
-          <a:p>
-            <a:r>
-              <a:rPr lang="en-US" dirty="0"/>
-              <a:t/>
-            </a:r>
-            <a:endParaRPr lang="en-US" dirty="0"/>
-          </a:p>
-        </p:txBody>
-      </p:sp>
-      <p:sp>
-        <p:nvSpPr>
-          <p:cNvPr id="4" name="Slide Number Placeholder 3"/>
-          <p:cNvSpPr>
-            <a:spLocks noGrp="1"/>
-          </p:cNvSpPr>
-          <p:nvPr>
-            <p:ph type="sldNum" sz="quarter" idx="10"/>
-          </p:nvPr>
-        </p:nvSpPr>
-        <p:spPr/>
-        <p:txBody>
-          <a:bodyPr/>
-          <a:lstStyle/>
-          <a:p>
-            <a:fld id="{F7021451-1387-4CA6-816F-3879F97B5CBC}" type="slidenum">
-              <a:rPr lang="en-US"/>
-              <a:t>15</a:t>
             </a:fld>
             <a:endParaRPr lang="en-US"/>
           </a:p>
@@ -2376,7 +2287,7 @@
           <a:p>
             <a:r>
               <a:rPr lang="en-US" dirty="0"/>
-              <a:t/>
+              <a:t>The cost estimator in lib/plan.ts uses base S$0.60 + S$0.40 per new item on Opus + S$0.08 per cached item, with a low to high range of 0.7x to 1.5x the midpoint. For 59 items that gives S$16.9 to S$36.3 against the measured S$12.80. Build time for the large builds was not logged; the earlier small builds took 4 to 6 minutes.</a:t>
             </a:r>
             <a:endParaRPr lang="en-US" dirty="0"/>
           </a:p>
@@ -2464,7 +2375,7 @@
           <a:p>
             <a:r>
               <a:rPr lang="en-US" dirty="0"/>
-              <a:t>The cost estimator in lib/plan.ts uses base S$0.60 + S$0.40 per new item on Opus + S$0.08 per cached item, with a low to high range of 0.7x to 1.5x the midpoint. For 59 items that gives S$16.9 to S$36.3 against the measured S$12.80. Build time for the large builds was not logged; the earlier small builds took 4 to 6 minutes.</a:t>
+              <a:t/>
             </a:r>
             <a:endParaRPr lang="en-US" dirty="0"/>
           </a:p>
@@ -3422,3471 +3333,6 @@
                 <a:ea typeface="Cambria" pitchFamily="34" charset="-122"/>
                 <a:cs typeface="Cambria" pitchFamily="34" charset="-120"/>
               </a:rPr>
-              <a:t>HDB renovation build: line-by-line cost</a:t>
-            </a:r>
-            <a:endParaRPr lang="en-US" sz="3200" dirty="0"/>
-          </a:p>
-        </p:txBody>
-      </p:sp>
-      <p:graphicFrame>
-        <p:nvGraphicFramePr>
-          <p:cNvPr id="11" name="line item table"/>
-          <p:cNvGraphicFramePr>
-            <a:graphicFrameLocks noGrp="1"/>
-          </p:cNvGraphicFramePr>
-          <p:nvPr>
-            <p:extLst>
-              <p:ext uri="{D42A27DB-BD31-4B8C-83A1-F6EECF244321}">
-                <p14:modId xmlns:p14="http://schemas.microsoft.com/office/powerpoint/2010/main" val="1579011935"/>
-              </p:ext>
-            </p:extLst>
-          </p:nvPr>
-        </p:nvGraphicFramePr>
-        <p:xfrm>
-          <a:off x="548640" y="1371600"/>
-          <a:ext cx="11064240" cy="914400"/>
-        </p:xfrm>
-        <a:graphic>
-          <a:graphicData uri="http://schemas.openxmlformats.org/drawingml/2006/table">
-            <a:tbl>
-              <a:tblPr/>
-              <a:tblGrid>
-                <a:gridCol w="4023360"/>
-                <a:gridCol w="2926080"/>
-                <a:gridCol w="1645920"/>
-                <a:gridCol w="1097280"/>
-                <a:gridCol w="1371600"/>
-              </a:tblGrid>
-              <a:tr h="411480">
-                <a:tc>
-                  <a:txBody>
-                    <a:bodyPr/>
-                    <a:lstStyle/>
-                    <a:p>
-                      <a:pPr indent="0" marL="0">
-                        <a:buNone/>
-                      </a:pPr>
-                      <a:r>
-                        <a:rPr lang="en-US" sz="1300" b="1" dirty="0">
-                          <a:solidFill>
-                            <a:srgbClr val="FFFFFF"/>
-                          </a:solidFill>
-                          <a:latin typeface="Calibri" pitchFamily="34" charset="0"/>
-                          <a:ea typeface="Calibri" pitchFamily="34" charset="-122"/>
-                          <a:cs typeface="Calibri" pitchFamily="34" charset="-120"/>
-                        </a:rPr>
-                        <a:t>Step</a:t>
-                      </a:r>
-                      <a:endParaRPr lang="en-US" sz="1300" dirty="0">
-                        <a:latin typeface="Calibri" charset="0"/>
-                        <a:ea typeface="Calibri" charset="0"/>
-                        <a:cs typeface="Calibri" charset="0"/>
-                      </a:endParaRPr>
-                    </a:p>
-                  </a:txBody>
-                  <a:tcPr marL="91440" marR="91440" marT="45720" marB="45720" anchor="ctr">
-                    <a:lnL w="12700" cap="flat" cmpd="sng" algn="ctr">
-                      <a:solidFill>
-                        <a:srgbClr val="D5DADD"/>
-                      </a:solidFill>
-                      <a:prstDash val="solid"/>
-                      <a:round/>
-                      <a:headEnd type="none" w="med" len="med"/>
-                      <a:tailEnd type="none" w="med" len="med"/>
-                    </a:lnL>
-                    <a:lnR w="12700" cap="flat" cmpd="sng" algn="ctr">
-                      <a:solidFill>
-                        <a:srgbClr val="D5DADD"/>
-                      </a:solidFill>
-                      <a:prstDash val="solid"/>
-                      <a:round/>
-                      <a:headEnd type="none" w="med" len="med"/>
-                      <a:tailEnd type="none" w="med" len="med"/>
-                    </a:lnR>
-                    <a:lnT w="12700" cap="flat" cmpd="sng" algn="ctr">
-                      <a:solidFill>
-                        <a:srgbClr val="D5DADD"/>
-                      </a:solidFill>
-                      <a:prstDash val="solid"/>
-                      <a:round/>
-                      <a:headEnd type="none" w="med" len="med"/>
-                      <a:tailEnd type="none" w="med" len="med"/>
-                    </a:lnT>
-                    <a:lnB w="12700" cap="flat" cmpd="sng" algn="ctr">
-                      <a:solidFill>
-                        <a:srgbClr val="D5DADD"/>
-                      </a:solidFill>
-                      <a:prstDash val="solid"/>
-                      <a:round/>
-                      <a:headEnd type="none" w="med" len="med"/>
-                      <a:tailEnd type="none" w="med" len="med"/>
-                    </a:lnB>
-                    <a:solidFill>
-                      <a:srgbClr val="006781"/>
-                    </a:solidFill>
-                  </a:tcPr>
-                </a:tc>
-                <a:tc>
-                  <a:txBody>
-                    <a:bodyPr/>
-                    <a:lstStyle/>
-                    <a:p>
-                      <a:pPr indent="0" marL="0">
-                        <a:buNone/>
-                      </a:pPr>
-                      <a:r>
-                        <a:rPr lang="en-US" sz="1300" b="1" dirty="0">
-                          <a:solidFill>
-                            <a:srgbClr val="FFFFFF"/>
-                          </a:solidFill>
-                          <a:latin typeface="Calibri" pitchFamily="34" charset="0"/>
-                          <a:ea typeface="Calibri" pitchFamily="34" charset="-122"/>
-                          <a:cs typeface="Calibri" pitchFamily="34" charset="-120"/>
-                        </a:rPr>
-                        <a:t>Measured usage</a:t>
-                      </a:r>
-                      <a:endParaRPr lang="en-US" sz="1300" dirty="0">
-                        <a:latin typeface="Calibri" charset="0"/>
-                        <a:ea typeface="Calibri" charset="0"/>
-                        <a:cs typeface="Calibri" charset="0"/>
-                      </a:endParaRPr>
-                    </a:p>
-                  </a:txBody>
-                  <a:tcPr marL="91440" marR="91440" marT="45720" marB="45720" anchor="ctr">
-                    <a:lnL w="12700" cap="flat" cmpd="sng" algn="ctr">
-                      <a:solidFill>
-                        <a:srgbClr val="D5DADD"/>
-                      </a:solidFill>
-                      <a:prstDash val="solid"/>
-                      <a:round/>
-                      <a:headEnd type="none" w="med" len="med"/>
-                      <a:tailEnd type="none" w="med" len="med"/>
-                    </a:lnL>
-                    <a:lnR w="12700" cap="flat" cmpd="sng" algn="ctr">
-                      <a:solidFill>
-                        <a:srgbClr val="D5DADD"/>
-                      </a:solidFill>
-                      <a:prstDash val="solid"/>
-                      <a:round/>
-                      <a:headEnd type="none" w="med" len="med"/>
-                      <a:tailEnd type="none" w="med" len="med"/>
-                    </a:lnR>
-                    <a:lnT w="12700" cap="flat" cmpd="sng" algn="ctr">
-                      <a:solidFill>
-                        <a:srgbClr val="D5DADD"/>
-                      </a:solidFill>
-                      <a:prstDash val="solid"/>
-                      <a:round/>
-                      <a:headEnd type="none" w="med" len="med"/>
-                      <a:tailEnd type="none" w="med" len="med"/>
-                    </a:lnT>
-                    <a:lnB w="12700" cap="flat" cmpd="sng" algn="ctr">
-                      <a:solidFill>
-                        <a:srgbClr val="D5DADD"/>
-                      </a:solidFill>
-                      <a:prstDash val="solid"/>
-                      <a:round/>
-                      <a:headEnd type="none" w="med" len="med"/>
-                      <a:tailEnd type="none" w="med" len="med"/>
-                    </a:lnB>
-                    <a:solidFill>
-                      <a:srgbClr val="006781"/>
-                    </a:solidFill>
-                  </a:tcPr>
-                </a:tc>
-                <a:tc>
-                  <a:txBody>
-                    <a:bodyPr/>
-                    <a:lstStyle/>
-                    <a:p>
-                      <a:pPr indent="0" marL="0">
-                        <a:buNone/>
-                      </a:pPr>
-                      <a:r>
-                        <a:rPr lang="en-US" sz="1300" b="1" dirty="0">
-                          <a:solidFill>
-                            <a:srgbClr val="FFFFFF"/>
-                          </a:solidFill>
-                          <a:latin typeface="Calibri" pitchFamily="34" charset="0"/>
-                          <a:ea typeface="Calibri" pitchFamily="34" charset="-122"/>
-                          <a:cs typeface="Calibri" pitchFamily="34" charset="-120"/>
-                        </a:rPr>
-                        <a:t>API rate</a:t>
-                      </a:r>
-                      <a:endParaRPr lang="en-US" sz="1300" dirty="0">
-                        <a:latin typeface="Calibri" charset="0"/>
-                        <a:ea typeface="Calibri" charset="0"/>
-                        <a:cs typeface="Calibri" charset="0"/>
-                      </a:endParaRPr>
-                    </a:p>
-                  </a:txBody>
-                  <a:tcPr marL="91440" marR="91440" marT="45720" marB="45720" anchor="ctr">
-                    <a:lnL w="12700" cap="flat" cmpd="sng" algn="ctr">
-                      <a:solidFill>
-                        <a:srgbClr val="D5DADD"/>
-                      </a:solidFill>
-                      <a:prstDash val="solid"/>
-                      <a:round/>
-                      <a:headEnd type="none" w="med" len="med"/>
-                      <a:tailEnd type="none" w="med" len="med"/>
-                    </a:lnL>
-                    <a:lnR w="12700" cap="flat" cmpd="sng" algn="ctr">
-                      <a:solidFill>
-                        <a:srgbClr val="D5DADD"/>
-                      </a:solidFill>
-                      <a:prstDash val="solid"/>
-                      <a:round/>
-                      <a:headEnd type="none" w="med" len="med"/>
-                      <a:tailEnd type="none" w="med" len="med"/>
-                    </a:lnR>
-                    <a:lnT w="12700" cap="flat" cmpd="sng" algn="ctr">
-                      <a:solidFill>
-                        <a:srgbClr val="D5DADD"/>
-                      </a:solidFill>
-                      <a:prstDash val="solid"/>
-                      <a:round/>
-                      <a:headEnd type="none" w="med" len="med"/>
-                      <a:tailEnd type="none" w="med" len="med"/>
-                    </a:lnT>
-                    <a:lnB w="12700" cap="flat" cmpd="sng" algn="ctr">
-                      <a:solidFill>
-                        <a:srgbClr val="D5DADD"/>
-                      </a:solidFill>
-                      <a:prstDash val="solid"/>
-                      <a:round/>
-                      <a:headEnd type="none" w="med" len="med"/>
-                      <a:tailEnd type="none" w="med" len="med"/>
-                    </a:lnB>
-                    <a:solidFill>
-                      <a:srgbClr val="006781"/>
-                    </a:solidFill>
-                  </a:tcPr>
-                </a:tc>
-                <a:tc>
-                  <a:txBody>
-                    <a:bodyPr/>
-                    <a:lstStyle/>
-                    <a:p>
-                      <a:pPr indent="0" marL="0">
-                        <a:buNone/>
-                      </a:pPr>
-                      <a:r>
-                        <a:rPr lang="en-US" sz="1300" b="1" dirty="0">
-                          <a:solidFill>
-                            <a:srgbClr val="FFFFFF"/>
-                          </a:solidFill>
-                          <a:latin typeface="Calibri" pitchFamily="34" charset="0"/>
-                          <a:ea typeface="Calibri" pitchFamily="34" charset="-122"/>
-                          <a:cs typeface="Calibri" pitchFamily="34" charset="-120"/>
-                        </a:rPr>
-                        <a:t>US$</a:t>
-                      </a:r>
-                      <a:endParaRPr lang="en-US" sz="1300" dirty="0">
-                        <a:latin typeface="Calibri" charset="0"/>
-                        <a:ea typeface="Calibri" charset="0"/>
-                        <a:cs typeface="Calibri" charset="0"/>
-                      </a:endParaRPr>
-                    </a:p>
-                  </a:txBody>
-                  <a:tcPr marL="91440" marR="91440" marT="45720" marB="45720" anchor="ctr">
-                    <a:lnL w="12700" cap="flat" cmpd="sng" algn="ctr">
-                      <a:solidFill>
-                        <a:srgbClr val="D5DADD"/>
-                      </a:solidFill>
-                      <a:prstDash val="solid"/>
-                      <a:round/>
-                      <a:headEnd type="none" w="med" len="med"/>
-                      <a:tailEnd type="none" w="med" len="med"/>
-                    </a:lnL>
-                    <a:lnR w="12700" cap="flat" cmpd="sng" algn="ctr">
-                      <a:solidFill>
-                        <a:srgbClr val="D5DADD"/>
-                      </a:solidFill>
-                      <a:prstDash val="solid"/>
-                      <a:round/>
-                      <a:headEnd type="none" w="med" len="med"/>
-                      <a:tailEnd type="none" w="med" len="med"/>
-                    </a:lnR>
-                    <a:lnT w="12700" cap="flat" cmpd="sng" algn="ctr">
-                      <a:solidFill>
-                        <a:srgbClr val="D5DADD"/>
-                      </a:solidFill>
-                      <a:prstDash val="solid"/>
-                      <a:round/>
-                      <a:headEnd type="none" w="med" len="med"/>
-                      <a:tailEnd type="none" w="med" len="med"/>
-                    </a:lnT>
-                    <a:lnB w="12700" cap="flat" cmpd="sng" algn="ctr">
-                      <a:solidFill>
-                        <a:srgbClr val="D5DADD"/>
-                      </a:solidFill>
-                      <a:prstDash val="solid"/>
-                      <a:round/>
-                      <a:headEnd type="none" w="med" len="med"/>
-                      <a:tailEnd type="none" w="med" len="med"/>
-                    </a:lnB>
-                    <a:solidFill>
-                      <a:srgbClr val="006781"/>
-                    </a:solidFill>
-                  </a:tcPr>
-                </a:tc>
-                <a:tc>
-                  <a:txBody>
-                    <a:bodyPr/>
-                    <a:lstStyle/>
-                    <a:p>
-                      <a:pPr indent="0" marL="0">
-                        <a:buNone/>
-                      </a:pPr>
-                      <a:r>
-                        <a:rPr lang="en-US" sz="1300" b="1" dirty="0">
-                          <a:solidFill>
-                            <a:srgbClr val="FFFFFF"/>
-                          </a:solidFill>
-                          <a:latin typeface="Calibri" pitchFamily="34" charset="0"/>
-                          <a:ea typeface="Calibri" pitchFamily="34" charset="-122"/>
-                          <a:cs typeface="Calibri" pitchFamily="34" charset="-120"/>
-                        </a:rPr>
-                        <a:t>S$</a:t>
-                      </a:r>
-                      <a:endParaRPr lang="en-US" sz="1300" dirty="0">
-                        <a:latin typeface="Calibri" charset="0"/>
-                        <a:ea typeface="Calibri" charset="0"/>
-                        <a:cs typeface="Calibri" charset="0"/>
-                      </a:endParaRPr>
-                    </a:p>
-                  </a:txBody>
-                  <a:tcPr marL="91440" marR="91440" marT="45720" marB="45720" anchor="ctr">
-                    <a:lnL w="12700" cap="flat" cmpd="sng" algn="ctr">
-                      <a:solidFill>
-                        <a:srgbClr val="D5DADD"/>
-                      </a:solidFill>
-                      <a:prstDash val="solid"/>
-                      <a:round/>
-                      <a:headEnd type="none" w="med" len="med"/>
-                      <a:tailEnd type="none" w="med" len="med"/>
-                    </a:lnL>
-                    <a:lnR w="12700" cap="flat" cmpd="sng" algn="ctr">
-                      <a:solidFill>
-                        <a:srgbClr val="D5DADD"/>
-                      </a:solidFill>
-                      <a:prstDash val="solid"/>
-                      <a:round/>
-                      <a:headEnd type="none" w="med" len="med"/>
-                      <a:tailEnd type="none" w="med" len="med"/>
-                    </a:lnR>
-                    <a:lnT w="12700" cap="flat" cmpd="sng" algn="ctr">
-                      <a:solidFill>
-                        <a:srgbClr val="D5DADD"/>
-                      </a:solidFill>
-                      <a:prstDash val="solid"/>
-                      <a:round/>
-                      <a:headEnd type="none" w="med" len="med"/>
-                      <a:tailEnd type="none" w="med" len="med"/>
-                    </a:lnT>
-                    <a:lnB w="12700" cap="flat" cmpd="sng" algn="ctr">
-                      <a:solidFill>
-                        <a:srgbClr val="D5DADD"/>
-                      </a:solidFill>
-                      <a:prstDash val="solid"/>
-                      <a:round/>
-                      <a:headEnd type="none" w="med" len="med"/>
-                      <a:tailEnd type="none" w="med" len="med"/>
-                    </a:lnB>
-                    <a:solidFill>
-                      <a:srgbClr val="006781"/>
-                    </a:solidFill>
-                  </a:tcPr>
-                </a:tc>
-              </a:tr>
-              <a:tr h="411480">
-                <a:tc>
-                  <a:txBody>
-                    <a:bodyPr/>
-                    <a:lstStyle/>
-                    <a:p>
-                      <a:pPr algn="l" indent="0" marL="0">
-                        <a:buNone/>
-                      </a:pPr>
-                      <a:r>
-                        <a:rPr lang="en-US" sz="1300" dirty="0">
-                          <a:solidFill>
-                            <a:srgbClr val="181C1E"/>
-                          </a:solidFill>
-                          <a:latin typeface="Calibri" pitchFamily="34" charset="0"/>
-                          <a:ea typeface="Calibri" pitchFamily="34" charset="-122"/>
-                          <a:cs typeface="Calibri" pitchFamily="34" charset="-120"/>
-                        </a:rPr>
-                        <a:t>Haiku reads pages: input</a:t>
-                      </a:r>
-                      <a:endParaRPr lang="en-US" sz="1300" dirty="0">
-                        <a:latin typeface="Calibri" charset="0"/>
-                        <a:ea typeface="Calibri" charset="0"/>
-                        <a:cs typeface="Calibri" charset="0"/>
-                      </a:endParaRPr>
-                    </a:p>
-                  </a:txBody>
-                  <a:tcPr marL="91440" marR="91440" marT="45720" marB="45720" anchor="ctr">
-                    <a:lnL w="12700" cap="flat" cmpd="sng" algn="ctr">
-                      <a:solidFill>
-                        <a:srgbClr val="D5DADD"/>
-                      </a:solidFill>
-                      <a:prstDash val="solid"/>
-                      <a:round/>
-                      <a:headEnd type="none" w="med" len="med"/>
-                      <a:tailEnd type="none" w="med" len="med"/>
-                    </a:lnL>
-                    <a:lnR w="12700" cap="flat" cmpd="sng" algn="ctr">
-                      <a:solidFill>
-                        <a:srgbClr val="D5DADD"/>
-                      </a:solidFill>
-                      <a:prstDash val="solid"/>
-                      <a:round/>
-                      <a:headEnd type="none" w="med" len="med"/>
-                      <a:tailEnd type="none" w="med" len="med"/>
-                    </a:lnR>
-                    <a:lnT w="12700" cap="flat" cmpd="sng" algn="ctr">
-                      <a:solidFill>
-                        <a:srgbClr val="D5DADD"/>
-                      </a:solidFill>
-                      <a:prstDash val="solid"/>
-                      <a:round/>
-                      <a:headEnd type="none" w="med" len="med"/>
-                      <a:tailEnd type="none" w="med" len="med"/>
-                    </a:lnT>
-                    <a:lnB w="12700" cap="flat" cmpd="sng" algn="ctr">
-                      <a:solidFill>
-                        <a:srgbClr val="D5DADD"/>
-                      </a:solidFill>
-                      <a:prstDash val="solid"/>
-                      <a:round/>
-                      <a:headEnd type="none" w="med" len="med"/>
-                      <a:tailEnd type="none" w="med" len="med"/>
-                    </a:lnB>
-                  </a:tcPr>
-                </a:tc>
-                <a:tc>
-                  <a:txBody>
-                    <a:bodyPr/>
-                    <a:lstStyle/>
-                    <a:p>
-                      <a:pPr algn="l" indent="0" marL="0">
-                        <a:buNone/>
-                      </a:pPr>
-                      <a:r>
-                        <a:rPr lang="en-US" sz="1300" dirty="0">
-                          <a:solidFill>
-                            <a:srgbClr val="181C1E"/>
-                          </a:solidFill>
-                          <a:latin typeface="Calibri" pitchFamily="34" charset="0"/>
-                          <a:ea typeface="Calibri" pitchFamily="34" charset="-122"/>
-                          <a:cs typeface="Calibri" pitchFamily="34" charset="-120"/>
-                        </a:rPr>
-                        <a:t>3,264,933 tokens</a:t>
-                      </a:r>
-                      <a:endParaRPr lang="en-US" sz="1300" dirty="0">
-                        <a:latin typeface="Calibri" charset="0"/>
-                        <a:ea typeface="Calibri" charset="0"/>
-                        <a:cs typeface="Calibri" charset="0"/>
-                      </a:endParaRPr>
-                    </a:p>
-                  </a:txBody>
-                  <a:tcPr marL="91440" marR="91440" marT="45720" marB="45720" anchor="ctr">
-                    <a:lnL w="12700" cap="flat" cmpd="sng" algn="ctr">
-                      <a:solidFill>
-                        <a:srgbClr val="D5DADD"/>
-                      </a:solidFill>
-                      <a:prstDash val="solid"/>
-                      <a:round/>
-                      <a:headEnd type="none" w="med" len="med"/>
-                      <a:tailEnd type="none" w="med" len="med"/>
-                    </a:lnL>
-                    <a:lnR w="12700" cap="flat" cmpd="sng" algn="ctr">
-                      <a:solidFill>
-                        <a:srgbClr val="D5DADD"/>
-                      </a:solidFill>
-                      <a:prstDash val="solid"/>
-                      <a:round/>
-                      <a:headEnd type="none" w="med" len="med"/>
-                      <a:tailEnd type="none" w="med" len="med"/>
-                    </a:lnR>
-                    <a:lnT w="12700" cap="flat" cmpd="sng" algn="ctr">
-                      <a:solidFill>
-                        <a:srgbClr val="D5DADD"/>
-                      </a:solidFill>
-                      <a:prstDash val="solid"/>
-                      <a:round/>
-                      <a:headEnd type="none" w="med" len="med"/>
-                      <a:tailEnd type="none" w="med" len="med"/>
-                    </a:lnT>
-                    <a:lnB w="12700" cap="flat" cmpd="sng" algn="ctr">
-                      <a:solidFill>
-                        <a:srgbClr val="D5DADD"/>
-                      </a:solidFill>
-                      <a:prstDash val="solid"/>
-                      <a:round/>
-                      <a:headEnd type="none" w="med" len="med"/>
-                      <a:tailEnd type="none" w="med" len="med"/>
-                    </a:lnB>
-                  </a:tcPr>
-                </a:tc>
-                <a:tc>
-                  <a:txBody>
-                    <a:bodyPr/>
-                    <a:lstStyle/>
-                    <a:p>
-                      <a:pPr algn="l" indent="0" marL="0">
-                        <a:buNone/>
-                      </a:pPr>
-                      <a:r>
-                        <a:rPr lang="en-US" sz="1300" dirty="0">
-                          <a:solidFill>
-                            <a:srgbClr val="181C1E"/>
-                          </a:solidFill>
-                          <a:latin typeface="Calibri" pitchFamily="34" charset="0"/>
-                          <a:ea typeface="Calibri" pitchFamily="34" charset="-122"/>
-                          <a:cs typeface="Calibri" pitchFamily="34" charset="-120"/>
-                        </a:rPr>
-                        <a:t>$0.10 / M</a:t>
-                      </a:r>
-                      <a:endParaRPr lang="en-US" sz="1300" dirty="0">
-                        <a:latin typeface="Calibri" charset="0"/>
-                        <a:ea typeface="Calibri" charset="0"/>
-                        <a:cs typeface="Calibri" charset="0"/>
-                      </a:endParaRPr>
-                    </a:p>
-                  </a:txBody>
-                  <a:tcPr marL="91440" marR="91440" marT="45720" marB="45720" anchor="ctr">
-                    <a:lnL w="12700" cap="flat" cmpd="sng" algn="ctr">
-                      <a:solidFill>
-                        <a:srgbClr val="D5DADD"/>
-                      </a:solidFill>
-                      <a:prstDash val="solid"/>
-                      <a:round/>
-                      <a:headEnd type="none" w="med" len="med"/>
-                      <a:tailEnd type="none" w="med" len="med"/>
-                    </a:lnL>
-                    <a:lnR w="12700" cap="flat" cmpd="sng" algn="ctr">
-                      <a:solidFill>
-                        <a:srgbClr val="D5DADD"/>
-                      </a:solidFill>
-                      <a:prstDash val="solid"/>
-                      <a:round/>
-                      <a:headEnd type="none" w="med" len="med"/>
-                      <a:tailEnd type="none" w="med" len="med"/>
-                    </a:lnR>
-                    <a:lnT w="12700" cap="flat" cmpd="sng" algn="ctr">
-                      <a:solidFill>
-                        <a:srgbClr val="D5DADD"/>
-                      </a:solidFill>
-                      <a:prstDash val="solid"/>
-                      <a:round/>
-                      <a:headEnd type="none" w="med" len="med"/>
-                      <a:tailEnd type="none" w="med" len="med"/>
-                    </a:lnT>
-                    <a:lnB w="12700" cap="flat" cmpd="sng" algn="ctr">
-                      <a:solidFill>
-                        <a:srgbClr val="D5DADD"/>
-                      </a:solidFill>
-                      <a:prstDash val="solid"/>
-                      <a:round/>
-                      <a:headEnd type="none" w="med" len="med"/>
-                      <a:tailEnd type="none" w="med" len="med"/>
-                    </a:lnB>
-                  </a:tcPr>
-                </a:tc>
-                <a:tc>
-                  <a:txBody>
-                    <a:bodyPr/>
-                    <a:lstStyle/>
-                    <a:p>
-                      <a:pPr algn="r" indent="0" marL="0">
-                        <a:buNone/>
-                      </a:pPr>
-                      <a:r>
-                        <a:rPr lang="en-US" sz="1300" dirty="0">
-                          <a:solidFill>
-                            <a:srgbClr val="181C1E"/>
-                          </a:solidFill>
-                          <a:latin typeface="Calibri" pitchFamily="34" charset="0"/>
-                          <a:ea typeface="Calibri" pitchFamily="34" charset="-122"/>
-                          <a:cs typeface="Calibri" pitchFamily="34" charset="-120"/>
-                        </a:rPr>
-                        <a:t>0.33</a:t>
-                      </a:r>
-                      <a:endParaRPr lang="en-US" sz="1300" dirty="0">
-                        <a:latin typeface="Calibri" charset="0"/>
-                        <a:ea typeface="Calibri" charset="0"/>
-                        <a:cs typeface="Calibri" charset="0"/>
-                      </a:endParaRPr>
-                    </a:p>
-                  </a:txBody>
-                  <a:tcPr marL="91440" marR="91440" marT="45720" marB="45720" anchor="ctr">
-                    <a:lnL w="12700" cap="flat" cmpd="sng" algn="ctr">
-                      <a:solidFill>
-                        <a:srgbClr val="D5DADD"/>
-                      </a:solidFill>
-                      <a:prstDash val="solid"/>
-                      <a:round/>
-                      <a:headEnd type="none" w="med" len="med"/>
-                      <a:tailEnd type="none" w="med" len="med"/>
-                    </a:lnL>
-                    <a:lnR w="12700" cap="flat" cmpd="sng" algn="ctr">
-                      <a:solidFill>
-                        <a:srgbClr val="D5DADD"/>
-                      </a:solidFill>
-                      <a:prstDash val="solid"/>
-                      <a:round/>
-                      <a:headEnd type="none" w="med" len="med"/>
-                      <a:tailEnd type="none" w="med" len="med"/>
-                    </a:lnR>
-                    <a:lnT w="12700" cap="flat" cmpd="sng" algn="ctr">
-                      <a:solidFill>
-                        <a:srgbClr val="D5DADD"/>
-                      </a:solidFill>
-                      <a:prstDash val="solid"/>
-                      <a:round/>
-                      <a:headEnd type="none" w="med" len="med"/>
-                      <a:tailEnd type="none" w="med" len="med"/>
-                    </a:lnT>
-                    <a:lnB w="12700" cap="flat" cmpd="sng" algn="ctr">
-                      <a:solidFill>
-                        <a:srgbClr val="D5DADD"/>
-                      </a:solidFill>
-                      <a:prstDash val="solid"/>
-                      <a:round/>
-                      <a:headEnd type="none" w="med" len="med"/>
-                      <a:tailEnd type="none" w="med" len="med"/>
-                    </a:lnB>
-                  </a:tcPr>
-                </a:tc>
-                <a:tc>
-                  <a:txBody>
-                    <a:bodyPr/>
-                    <a:lstStyle/>
-                    <a:p>
-                      <a:pPr algn="r" indent="0" marL="0">
-                        <a:buNone/>
-                      </a:pPr>
-                      <a:r>
-                        <a:rPr lang="en-US" sz="1300" dirty="0">
-                          <a:solidFill>
-                            <a:srgbClr val="181C1E"/>
-                          </a:solidFill>
-                          <a:latin typeface="Calibri" pitchFamily="34" charset="0"/>
-                          <a:ea typeface="Calibri" pitchFamily="34" charset="-122"/>
-                          <a:cs typeface="Calibri" pitchFamily="34" charset="-120"/>
-                        </a:rPr>
-                        <a:t>0.42</a:t>
-                      </a:r>
-                      <a:endParaRPr lang="en-US" sz="1300" dirty="0">
-                        <a:latin typeface="Calibri" charset="0"/>
-                        <a:ea typeface="Calibri" charset="0"/>
-                        <a:cs typeface="Calibri" charset="0"/>
-                      </a:endParaRPr>
-                    </a:p>
-                  </a:txBody>
-                  <a:tcPr marL="91440" marR="91440" marT="45720" marB="45720" anchor="ctr">
-                    <a:lnL w="12700" cap="flat" cmpd="sng" algn="ctr">
-                      <a:solidFill>
-                        <a:srgbClr val="D5DADD"/>
-                      </a:solidFill>
-                      <a:prstDash val="solid"/>
-                      <a:round/>
-                      <a:headEnd type="none" w="med" len="med"/>
-                      <a:tailEnd type="none" w="med" len="med"/>
-                    </a:lnL>
-                    <a:lnR w="12700" cap="flat" cmpd="sng" algn="ctr">
-                      <a:solidFill>
-                        <a:srgbClr val="D5DADD"/>
-                      </a:solidFill>
-                      <a:prstDash val="solid"/>
-                      <a:round/>
-                      <a:headEnd type="none" w="med" len="med"/>
-                      <a:tailEnd type="none" w="med" len="med"/>
-                    </a:lnR>
-                    <a:lnT w="12700" cap="flat" cmpd="sng" algn="ctr">
-                      <a:solidFill>
-                        <a:srgbClr val="D5DADD"/>
-                      </a:solidFill>
-                      <a:prstDash val="solid"/>
-                      <a:round/>
-                      <a:headEnd type="none" w="med" len="med"/>
-                      <a:tailEnd type="none" w="med" len="med"/>
-                    </a:lnT>
-                    <a:lnB w="12700" cap="flat" cmpd="sng" algn="ctr">
-                      <a:solidFill>
-                        <a:srgbClr val="D5DADD"/>
-                      </a:solidFill>
-                      <a:prstDash val="solid"/>
-                      <a:round/>
-                      <a:headEnd type="none" w="med" len="med"/>
-                      <a:tailEnd type="none" w="med" len="med"/>
-                    </a:lnB>
-                  </a:tcPr>
-                </a:tc>
-              </a:tr>
-              <a:tr h="411480">
-                <a:tc>
-                  <a:txBody>
-                    <a:bodyPr/>
-                    <a:lstStyle/>
-                    <a:p>
-                      <a:pPr algn="l" indent="0" marL="0">
-                        <a:buNone/>
-                      </a:pPr>
-                      <a:r>
-                        <a:rPr lang="en-US" sz="1300" dirty="0">
-                          <a:solidFill>
-                            <a:srgbClr val="181C1E"/>
-                          </a:solidFill>
-                          <a:latin typeface="Calibri" pitchFamily="34" charset="0"/>
-                          <a:ea typeface="Calibri" pitchFamily="34" charset="-122"/>
-                          <a:cs typeface="Calibri" pitchFamily="34" charset="-120"/>
-                        </a:rPr>
-                        <a:t>Haiku reads pages: output</a:t>
-                      </a:r>
-                      <a:endParaRPr lang="en-US" sz="1300" dirty="0">
-                        <a:latin typeface="Calibri" charset="0"/>
-                        <a:ea typeface="Calibri" charset="0"/>
-                        <a:cs typeface="Calibri" charset="0"/>
-                      </a:endParaRPr>
-                    </a:p>
-                  </a:txBody>
-                  <a:tcPr marL="91440" marR="91440" marT="45720" marB="45720" anchor="ctr">
-                    <a:lnL w="12700" cap="flat" cmpd="sng" algn="ctr">
-                      <a:solidFill>
-                        <a:srgbClr val="D5DADD"/>
-                      </a:solidFill>
-                      <a:prstDash val="solid"/>
-                      <a:round/>
-                      <a:headEnd type="none" w="med" len="med"/>
-                      <a:tailEnd type="none" w="med" len="med"/>
-                    </a:lnL>
-                    <a:lnR w="12700" cap="flat" cmpd="sng" algn="ctr">
-                      <a:solidFill>
-                        <a:srgbClr val="D5DADD"/>
-                      </a:solidFill>
-                      <a:prstDash val="solid"/>
-                      <a:round/>
-                      <a:headEnd type="none" w="med" len="med"/>
-                      <a:tailEnd type="none" w="med" len="med"/>
-                    </a:lnR>
-                    <a:lnT w="12700" cap="flat" cmpd="sng" algn="ctr">
-                      <a:solidFill>
-                        <a:srgbClr val="D5DADD"/>
-                      </a:solidFill>
-                      <a:prstDash val="solid"/>
-                      <a:round/>
-                      <a:headEnd type="none" w="med" len="med"/>
-                      <a:tailEnd type="none" w="med" len="med"/>
-                    </a:lnT>
-                    <a:lnB w="12700" cap="flat" cmpd="sng" algn="ctr">
-                      <a:solidFill>
-                        <a:srgbClr val="D5DADD"/>
-                      </a:solidFill>
-                      <a:prstDash val="solid"/>
-                      <a:round/>
-                      <a:headEnd type="none" w="med" len="med"/>
-                      <a:tailEnd type="none" w="med" len="med"/>
-                    </a:lnB>
-                  </a:tcPr>
-                </a:tc>
-                <a:tc>
-                  <a:txBody>
-                    <a:bodyPr/>
-                    <a:lstStyle/>
-                    <a:p>
-                      <a:pPr algn="l" indent="0" marL="0">
-                        <a:buNone/>
-                      </a:pPr>
-                      <a:r>
-                        <a:rPr lang="en-US" sz="1300" dirty="0">
-                          <a:solidFill>
-                            <a:srgbClr val="181C1E"/>
-                          </a:solidFill>
-                          <a:latin typeface="Calibri" pitchFamily="34" charset="0"/>
-                          <a:ea typeface="Calibri" pitchFamily="34" charset="-122"/>
-                          <a:cs typeface="Calibri" pitchFamily="34" charset="-120"/>
-                        </a:rPr>
-                        <a:t>233,360 tokens</a:t>
-                      </a:r>
-                      <a:endParaRPr lang="en-US" sz="1300" dirty="0">
-                        <a:latin typeface="Calibri" charset="0"/>
-                        <a:ea typeface="Calibri" charset="0"/>
-                        <a:cs typeface="Calibri" charset="0"/>
-                      </a:endParaRPr>
-                    </a:p>
-                  </a:txBody>
-                  <a:tcPr marL="91440" marR="91440" marT="45720" marB="45720" anchor="ctr">
-                    <a:lnL w="12700" cap="flat" cmpd="sng" algn="ctr">
-                      <a:solidFill>
-                        <a:srgbClr val="D5DADD"/>
-                      </a:solidFill>
-                      <a:prstDash val="solid"/>
-                      <a:round/>
-                      <a:headEnd type="none" w="med" len="med"/>
-                      <a:tailEnd type="none" w="med" len="med"/>
-                    </a:lnL>
-                    <a:lnR w="12700" cap="flat" cmpd="sng" algn="ctr">
-                      <a:solidFill>
-                        <a:srgbClr val="D5DADD"/>
-                      </a:solidFill>
-                      <a:prstDash val="solid"/>
-                      <a:round/>
-                      <a:headEnd type="none" w="med" len="med"/>
-                      <a:tailEnd type="none" w="med" len="med"/>
-                    </a:lnR>
-                    <a:lnT w="12700" cap="flat" cmpd="sng" algn="ctr">
-                      <a:solidFill>
-                        <a:srgbClr val="D5DADD"/>
-                      </a:solidFill>
-                      <a:prstDash val="solid"/>
-                      <a:round/>
-                      <a:headEnd type="none" w="med" len="med"/>
-                      <a:tailEnd type="none" w="med" len="med"/>
-                    </a:lnT>
-                    <a:lnB w="12700" cap="flat" cmpd="sng" algn="ctr">
-                      <a:solidFill>
-                        <a:srgbClr val="D5DADD"/>
-                      </a:solidFill>
-                      <a:prstDash val="solid"/>
-                      <a:round/>
-                      <a:headEnd type="none" w="med" len="med"/>
-                      <a:tailEnd type="none" w="med" len="med"/>
-                    </a:lnB>
-                  </a:tcPr>
-                </a:tc>
-                <a:tc>
-                  <a:txBody>
-                    <a:bodyPr/>
-                    <a:lstStyle/>
-                    <a:p>
-                      <a:pPr algn="l" indent="0" marL="0">
-                        <a:buNone/>
-                      </a:pPr>
-                      <a:r>
-                        <a:rPr lang="en-US" sz="1300" dirty="0">
-                          <a:solidFill>
-                            <a:srgbClr val="181C1E"/>
-                          </a:solidFill>
-                          <a:latin typeface="Calibri" pitchFamily="34" charset="0"/>
-                          <a:ea typeface="Calibri" pitchFamily="34" charset="-122"/>
-                          <a:cs typeface="Calibri" pitchFamily="34" charset="-120"/>
-                        </a:rPr>
-                        <a:t>$0.50 / M</a:t>
-                      </a:r>
-                      <a:endParaRPr lang="en-US" sz="1300" dirty="0">
-                        <a:latin typeface="Calibri" charset="0"/>
-                        <a:ea typeface="Calibri" charset="0"/>
-                        <a:cs typeface="Calibri" charset="0"/>
-                      </a:endParaRPr>
-                    </a:p>
-                  </a:txBody>
-                  <a:tcPr marL="91440" marR="91440" marT="45720" marB="45720" anchor="ctr">
-                    <a:lnL w="12700" cap="flat" cmpd="sng" algn="ctr">
-                      <a:solidFill>
-                        <a:srgbClr val="D5DADD"/>
-                      </a:solidFill>
-                      <a:prstDash val="solid"/>
-                      <a:round/>
-                      <a:headEnd type="none" w="med" len="med"/>
-                      <a:tailEnd type="none" w="med" len="med"/>
-                    </a:lnL>
-                    <a:lnR w="12700" cap="flat" cmpd="sng" algn="ctr">
-                      <a:solidFill>
-                        <a:srgbClr val="D5DADD"/>
-                      </a:solidFill>
-                      <a:prstDash val="solid"/>
-                      <a:round/>
-                      <a:headEnd type="none" w="med" len="med"/>
-                      <a:tailEnd type="none" w="med" len="med"/>
-                    </a:lnR>
-                    <a:lnT w="12700" cap="flat" cmpd="sng" algn="ctr">
-                      <a:solidFill>
-                        <a:srgbClr val="D5DADD"/>
-                      </a:solidFill>
-                      <a:prstDash val="solid"/>
-                      <a:round/>
-                      <a:headEnd type="none" w="med" len="med"/>
-                      <a:tailEnd type="none" w="med" len="med"/>
-                    </a:lnT>
-                    <a:lnB w="12700" cap="flat" cmpd="sng" algn="ctr">
-                      <a:solidFill>
-                        <a:srgbClr val="D5DADD"/>
-                      </a:solidFill>
-                      <a:prstDash val="solid"/>
-                      <a:round/>
-                      <a:headEnd type="none" w="med" len="med"/>
-                      <a:tailEnd type="none" w="med" len="med"/>
-                    </a:lnB>
-                  </a:tcPr>
-                </a:tc>
-                <a:tc>
-                  <a:txBody>
-                    <a:bodyPr/>
-                    <a:lstStyle/>
-                    <a:p>
-                      <a:pPr algn="r" indent="0" marL="0">
-                        <a:buNone/>
-                      </a:pPr>
-                      <a:r>
-                        <a:rPr lang="en-US" sz="1300" dirty="0">
-                          <a:solidFill>
-                            <a:srgbClr val="181C1E"/>
-                          </a:solidFill>
-                          <a:latin typeface="Calibri" pitchFamily="34" charset="0"/>
-                          <a:ea typeface="Calibri" pitchFamily="34" charset="-122"/>
-                          <a:cs typeface="Calibri" pitchFamily="34" charset="-120"/>
-                        </a:rPr>
-                        <a:t>0.12</a:t>
-                      </a:r>
-                      <a:endParaRPr lang="en-US" sz="1300" dirty="0">
-                        <a:latin typeface="Calibri" charset="0"/>
-                        <a:ea typeface="Calibri" charset="0"/>
-                        <a:cs typeface="Calibri" charset="0"/>
-                      </a:endParaRPr>
-                    </a:p>
-                  </a:txBody>
-                  <a:tcPr marL="91440" marR="91440" marT="45720" marB="45720" anchor="ctr">
-                    <a:lnL w="12700" cap="flat" cmpd="sng" algn="ctr">
-                      <a:solidFill>
-                        <a:srgbClr val="D5DADD"/>
-                      </a:solidFill>
-                      <a:prstDash val="solid"/>
-                      <a:round/>
-                      <a:headEnd type="none" w="med" len="med"/>
-                      <a:tailEnd type="none" w="med" len="med"/>
-                    </a:lnL>
-                    <a:lnR w="12700" cap="flat" cmpd="sng" algn="ctr">
-                      <a:solidFill>
-                        <a:srgbClr val="D5DADD"/>
-                      </a:solidFill>
-                      <a:prstDash val="solid"/>
-                      <a:round/>
-                      <a:headEnd type="none" w="med" len="med"/>
-                      <a:tailEnd type="none" w="med" len="med"/>
-                    </a:lnR>
-                    <a:lnT w="12700" cap="flat" cmpd="sng" algn="ctr">
-                      <a:solidFill>
-                        <a:srgbClr val="D5DADD"/>
-                      </a:solidFill>
-                      <a:prstDash val="solid"/>
-                      <a:round/>
-                      <a:headEnd type="none" w="med" len="med"/>
-                      <a:tailEnd type="none" w="med" len="med"/>
-                    </a:lnT>
-                    <a:lnB w="12700" cap="flat" cmpd="sng" algn="ctr">
-                      <a:solidFill>
-                        <a:srgbClr val="D5DADD"/>
-                      </a:solidFill>
-                      <a:prstDash val="solid"/>
-                      <a:round/>
-                      <a:headEnd type="none" w="med" len="med"/>
-                      <a:tailEnd type="none" w="med" len="med"/>
-                    </a:lnB>
-                  </a:tcPr>
-                </a:tc>
-                <a:tc>
-                  <a:txBody>
-                    <a:bodyPr/>
-                    <a:lstStyle/>
-                    <a:p>
-                      <a:pPr algn="r" indent="0" marL="0">
-                        <a:buNone/>
-                      </a:pPr>
-                      <a:r>
-                        <a:rPr lang="en-US" sz="1300" dirty="0">
-                          <a:solidFill>
-                            <a:srgbClr val="181C1E"/>
-                          </a:solidFill>
-                          <a:latin typeface="Calibri" pitchFamily="34" charset="0"/>
-                          <a:ea typeface="Calibri" pitchFamily="34" charset="-122"/>
-                          <a:cs typeface="Calibri" pitchFamily="34" charset="-120"/>
-                        </a:rPr>
-                        <a:t>0.15</a:t>
-                      </a:r>
-                      <a:endParaRPr lang="en-US" sz="1300" dirty="0">
-                        <a:latin typeface="Calibri" charset="0"/>
-                        <a:ea typeface="Calibri" charset="0"/>
-                        <a:cs typeface="Calibri" charset="0"/>
-                      </a:endParaRPr>
-                    </a:p>
-                  </a:txBody>
-                  <a:tcPr marL="91440" marR="91440" marT="45720" marB="45720" anchor="ctr">
-                    <a:lnL w="12700" cap="flat" cmpd="sng" algn="ctr">
-                      <a:solidFill>
-                        <a:srgbClr val="D5DADD"/>
-                      </a:solidFill>
-                      <a:prstDash val="solid"/>
-                      <a:round/>
-                      <a:headEnd type="none" w="med" len="med"/>
-                      <a:tailEnd type="none" w="med" len="med"/>
-                    </a:lnL>
-                    <a:lnR w="12700" cap="flat" cmpd="sng" algn="ctr">
-                      <a:solidFill>
-                        <a:srgbClr val="D5DADD"/>
-                      </a:solidFill>
-                      <a:prstDash val="solid"/>
-                      <a:round/>
-                      <a:headEnd type="none" w="med" len="med"/>
-                      <a:tailEnd type="none" w="med" len="med"/>
-                    </a:lnR>
-                    <a:lnT w="12700" cap="flat" cmpd="sng" algn="ctr">
-                      <a:solidFill>
-                        <a:srgbClr val="D5DADD"/>
-                      </a:solidFill>
-                      <a:prstDash val="solid"/>
-                      <a:round/>
-                      <a:headEnd type="none" w="med" len="med"/>
-                      <a:tailEnd type="none" w="med" len="med"/>
-                    </a:lnT>
-                    <a:lnB w="12700" cap="flat" cmpd="sng" algn="ctr">
-                      <a:solidFill>
-                        <a:srgbClr val="D5DADD"/>
-                      </a:solidFill>
-                      <a:prstDash val="solid"/>
-                      <a:round/>
-                      <a:headEnd type="none" w="med" len="med"/>
-                      <a:tailEnd type="none" w="med" len="med"/>
-                    </a:lnB>
-                  </a:tcPr>
-                </a:tc>
-              </a:tr>
-              <a:tr h="411480">
-                <a:tc>
-                  <a:txBody>
-                    <a:bodyPr/>
-                    <a:lstStyle/>
-                    <a:p>
-                      <a:pPr algn="l" indent="0" marL="0">
-                        <a:buNone/>
-                      </a:pPr>
-                      <a:r>
-                        <a:rPr lang="en-US" sz="1300" dirty="0">
-                          <a:solidFill>
-                            <a:srgbClr val="181C1E"/>
-                          </a:solidFill>
-                          <a:latin typeface="Calibri" pitchFamily="34" charset="0"/>
-                          <a:ea typeface="Calibri" pitchFamily="34" charset="-122"/>
-                          <a:cs typeface="Calibri" pitchFamily="34" charset="-120"/>
-                        </a:rPr>
-                        <a:t>Web searches</a:t>
-                      </a:r>
-                      <a:endParaRPr lang="en-US" sz="1300" dirty="0">
-                        <a:latin typeface="Calibri" charset="0"/>
-                        <a:ea typeface="Calibri" charset="0"/>
-                        <a:cs typeface="Calibri" charset="0"/>
-                      </a:endParaRPr>
-                    </a:p>
-                  </a:txBody>
-                  <a:tcPr marL="91440" marR="91440" marT="45720" marB="45720" anchor="ctr">
-                    <a:lnL w="12700" cap="flat" cmpd="sng" algn="ctr">
-                      <a:solidFill>
-                        <a:srgbClr val="D5DADD"/>
-                      </a:solidFill>
-                      <a:prstDash val="solid"/>
-                      <a:round/>
-                      <a:headEnd type="none" w="med" len="med"/>
-                      <a:tailEnd type="none" w="med" len="med"/>
-                    </a:lnL>
-                    <a:lnR w="12700" cap="flat" cmpd="sng" algn="ctr">
-                      <a:solidFill>
-                        <a:srgbClr val="D5DADD"/>
-                      </a:solidFill>
-                      <a:prstDash val="solid"/>
-                      <a:round/>
-                      <a:headEnd type="none" w="med" len="med"/>
-                      <a:tailEnd type="none" w="med" len="med"/>
-                    </a:lnR>
-                    <a:lnT w="12700" cap="flat" cmpd="sng" algn="ctr">
-                      <a:solidFill>
-                        <a:srgbClr val="D5DADD"/>
-                      </a:solidFill>
-                      <a:prstDash val="solid"/>
-                      <a:round/>
-                      <a:headEnd type="none" w="med" len="med"/>
-                      <a:tailEnd type="none" w="med" len="med"/>
-                    </a:lnT>
-                    <a:lnB w="12700" cap="flat" cmpd="sng" algn="ctr">
-                      <a:solidFill>
-                        <a:srgbClr val="D5DADD"/>
-                      </a:solidFill>
-                      <a:prstDash val="solid"/>
-                      <a:round/>
-                      <a:headEnd type="none" w="med" len="med"/>
-                      <a:tailEnd type="none" w="med" len="med"/>
-                    </a:lnB>
-                  </a:tcPr>
-                </a:tc>
-                <a:tc>
-                  <a:txBody>
-                    <a:bodyPr/>
-                    <a:lstStyle/>
-                    <a:p>
-                      <a:pPr algn="l" indent="0" marL="0">
-                        <a:buNone/>
-                      </a:pPr>
-                      <a:r>
-                        <a:rPr lang="en-US" sz="1300" dirty="0">
-                          <a:solidFill>
-                            <a:srgbClr val="181C1E"/>
-                          </a:solidFill>
-                          <a:latin typeface="Calibri" pitchFamily="34" charset="0"/>
-                          <a:ea typeface="Calibri" pitchFamily="34" charset="-122"/>
-                          <a:cs typeface="Calibri" pitchFamily="34" charset="-120"/>
-                        </a:rPr>
-                        <a:t>172 searches</a:t>
-                      </a:r>
-                      <a:endParaRPr lang="en-US" sz="1300" dirty="0">
-                        <a:latin typeface="Calibri" charset="0"/>
-                        <a:ea typeface="Calibri" charset="0"/>
-                        <a:cs typeface="Calibri" charset="0"/>
-                      </a:endParaRPr>
-                    </a:p>
-                  </a:txBody>
-                  <a:tcPr marL="91440" marR="91440" marT="45720" marB="45720" anchor="ctr">
-                    <a:lnL w="12700" cap="flat" cmpd="sng" algn="ctr">
-                      <a:solidFill>
-                        <a:srgbClr val="D5DADD"/>
-                      </a:solidFill>
-                      <a:prstDash val="solid"/>
-                      <a:round/>
-                      <a:headEnd type="none" w="med" len="med"/>
-                      <a:tailEnd type="none" w="med" len="med"/>
-                    </a:lnL>
-                    <a:lnR w="12700" cap="flat" cmpd="sng" algn="ctr">
-                      <a:solidFill>
-                        <a:srgbClr val="D5DADD"/>
-                      </a:solidFill>
-                      <a:prstDash val="solid"/>
-                      <a:round/>
-                      <a:headEnd type="none" w="med" len="med"/>
-                      <a:tailEnd type="none" w="med" len="med"/>
-                    </a:lnR>
-                    <a:lnT w="12700" cap="flat" cmpd="sng" algn="ctr">
-                      <a:solidFill>
-                        <a:srgbClr val="D5DADD"/>
-                      </a:solidFill>
-                      <a:prstDash val="solid"/>
-                      <a:round/>
-                      <a:headEnd type="none" w="med" len="med"/>
-                      <a:tailEnd type="none" w="med" len="med"/>
-                    </a:lnT>
-                    <a:lnB w="12700" cap="flat" cmpd="sng" algn="ctr">
-                      <a:solidFill>
-                        <a:srgbClr val="D5DADD"/>
-                      </a:solidFill>
-                      <a:prstDash val="solid"/>
-                      <a:round/>
-                      <a:headEnd type="none" w="med" len="med"/>
-                      <a:tailEnd type="none" w="med" len="med"/>
-                    </a:lnB>
-                  </a:tcPr>
-                </a:tc>
-                <a:tc>
-                  <a:txBody>
-                    <a:bodyPr/>
-                    <a:lstStyle/>
-                    <a:p>
-                      <a:pPr algn="l" indent="0" marL="0">
-                        <a:buNone/>
-                      </a:pPr>
-                      <a:r>
-                        <a:rPr lang="en-US" sz="1300" dirty="0">
-                          <a:solidFill>
-                            <a:srgbClr val="181C1E"/>
-                          </a:solidFill>
-                          <a:latin typeface="Calibri" pitchFamily="34" charset="0"/>
-                          <a:ea typeface="Calibri" pitchFamily="34" charset="-122"/>
-                          <a:cs typeface="Calibri" pitchFamily="34" charset="-120"/>
-                        </a:rPr>
-                        <a:t>$10 / 1,000</a:t>
-                      </a:r>
-                      <a:endParaRPr lang="en-US" sz="1300" dirty="0">
-                        <a:latin typeface="Calibri" charset="0"/>
-                        <a:ea typeface="Calibri" charset="0"/>
-                        <a:cs typeface="Calibri" charset="0"/>
-                      </a:endParaRPr>
-                    </a:p>
-                  </a:txBody>
-                  <a:tcPr marL="91440" marR="91440" marT="45720" marB="45720" anchor="ctr">
-                    <a:lnL w="12700" cap="flat" cmpd="sng" algn="ctr">
-                      <a:solidFill>
-                        <a:srgbClr val="D5DADD"/>
-                      </a:solidFill>
-                      <a:prstDash val="solid"/>
-                      <a:round/>
-                      <a:headEnd type="none" w="med" len="med"/>
-                      <a:tailEnd type="none" w="med" len="med"/>
-                    </a:lnL>
-                    <a:lnR w="12700" cap="flat" cmpd="sng" algn="ctr">
-                      <a:solidFill>
-                        <a:srgbClr val="D5DADD"/>
-                      </a:solidFill>
-                      <a:prstDash val="solid"/>
-                      <a:round/>
-                      <a:headEnd type="none" w="med" len="med"/>
-                      <a:tailEnd type="none" w="med" len="med"/>
-                    </a:lnR>
-                    <a:lnT w="12700" cap="flat" cmpd="sng" algn="ctr">
-                      <a:solidFill>
-                        <a:srgbClr val="D5DADD"/>
-                      </a:solidFill>
-                      <a:prstDash val="solid"/>
-                      <a:round/>
-                      <a:headEnd type="none" w="med" len="med"/>
-                      <a:tailEnd type="none" w="med" len="med"/>
-                    </a:lnT>
-                    <a:lnB w="12700" cap="flat" cmpd="sng" algn="ctr">
-                      <a:solidFill>
-                        <a:srgbClr val="D5DADD"/>
-                      </a:solidFill>
-                      <a:prstDash val="solid"/>
-                      <a:round/>
-                      <a:headEnd type="none" w="med" len="med"/>
-                      <a:tailEnd type="none" w="med" len="med"/>
-                    </a:lnB>
-                  </a:tcPr>
-                </a:tc>
-                <a:tc>
-                  <a:txBody>
-                    <a:bodyPr/>
-                    <a:lstStyle/>
-                    <a:p>
-                      <a:pPr algn="r" indent="0" marL="0">
-                        <a:buNone/>
-                      </a:pPr>
-                      <a:r>
-                        <a:rPr lang="en-US" sz="1300" dirty="0">
-                          <a:solidFill>
-                            <a:srgbClr val="181C1E"/>
-                          </a:solidFill>
-                          <a:latin typeface="Calibri" pitchFamily="34" charset="0"/>
-                          <a:ea typeface="Calibri" pitchFamily="34" charset="-122"/>
-                          <a:cs typeface="Calibri" pitchFamily="34" charset="-120"/>
-                        </a:rPr>
-                        <a:t>1.72</a:t>
-                      </a:r>
-                      <a:endParaRPr lang="en-US" sz="1300" dirty="0">
-                        <a:latin typeface="Calibri" charset="0"/>
-                        <a:ea typeface="Calibri" charset="0"/>
-                        <a:cs typeface="Calibri" charset="0"/>
-                      </a:endParaRPr>
-                    </a:p>
-                  </a:txBody>
-                  <a:tcPr marL="91440" marR="91440" marT="45720" marB="45720" anchor="ctr">
-                    <a:lnL w="12700" cap="flat" cmpd="sng" algn="ctr">
-                      <a:solidFill>
-                        <a:srgbClr val="D5DADD"/>
-                      </a:solidFill>
-                      <a:prstDash val="solid"/>
-                      <a:round/>
-                      <a:headEnd type="none" w="med" len="med"/>
-                      <a:tailEnd type="none" w="med" len="med"/>
-                    </a:lnL>
-                    <a:lnR w="12700" cap="flat" cmpd="sng" algn="ctr">
-                      <a:solidFill>
-                        <a:srgbClr val="D5DADD"/>
-                      </a:solidFill>
-                      <a:prstDash val="solid"/>
-                      <a:round/>
-                      <a:headEnd type="none" w="med" len="med"/>
-                      <a:tailEnd type="none" w="med" len="med"/>
-                    </a:lnR>
-                    <a:lnT w="12700" cap="flat" cmpd="sng" algn="ctr">
-                      <a:solidFill>
-                        <a:srgbClr val="D5DADD"/>
-                      </a:solidFill>
-                      <a:prstDash val="solid"/>
-                      <a:round/>
-                      <a:headEnd type="none" w="med" len="med"/>
-                      <a:tailEnd type="none" w="med" len="med"/>
-                    </a:lnT>
-                    <a:lnB w="12700" cap="flat" cmpd="sng" algn="ctr">
-                      <a:solidFill>
-                        <a:srgbClr val="D5DADD"/>
-                      </a:solidFill>
-                      <a:prstDash val="solid"/>
-                      <a:round/>
-                      <a:headEnd type="none" w="med" len="med"/>
-                      <a:tailEnd type="none" w="med" len="med"/>
-                    </a:lnB>
-                  </a:tcPr>
-                </a:tc>
-                <a:tc>
-                  <a:txBody>
-                    <a:bodyPr/>
-                    <a:lstStyle/>
-                    <a:p>
-                      <a:pPr algn="r" indent="0" marL="0">
-                        <a:buNone/>
-                      </a:pPr>
-                      <a:r>
-                        <a:rPr lang="en-US" sz="1300" dirty="0">
-                          <a:solidFill>
-                            <a:srgbClr val="181C1E"/>
-                          </a:solidFill>
-                          <a:latin typeface="Calibri" pitchFamily="34" charset="0"/>
-                          <a:ea typeface="Calibri" pitchFamily="34" charset="-122"/>
-                          <a:cs typeface="Calibri" pitchFamily="34" charset="-120"/>
-                        </a:rPr>
-                        <a:t>2.20</a:t>
-                      </a:r>
-                      <a:endParaRPr lang="en-US" sz="1300" dirty="0">
-                        <a:latin typeface="Calibri" charset="0"/>
-                        <a:ea typeface="Calibri" charset="0"/>
-                        <a:cs typeface="Calibri" charset="0"/>
-                      </a:endParaRPr>
-                    </a:p>
-                  </a:txBody>
-                  <a:tcPr marL="91440" marR="91440" marT="45720" marB="45720" anchor="ctr">
-                    <a:lnL w="12700" cap="flat" cmpd="sng" algn="ctr">
-                      <a:solidFill>
-                        <a:srgbClr val="D5DADD"/>
-                      </a:solidFill>
-                      <a:prstDash val="solid"/>
-                      <a:round/>
-                      <a:headEnd type="none" w="med" len="med"/>
-                      <a:tailEnd type="none" w="med" len="med"/>
-                    </a:lnL>
-                    <a:lnR w="12700" cap="flat" cmpd="sng" algn="ctr">
-                      <a:solidFill>
-                        <a:srgbClr val="D5DADD"/>
-                      </a:solidFill>
-                      <a:prstDash val="solid"/>
-                      <a:round/>
-                      <a:headEnd type="none" w="med" len="med"/>
-                      <a:tailEnd type="none" w="med" len="med"/>
-                    </a:lnR>
-                    <a:lnT w="12700" cap="flat" cmpd="sng" algn="ctr">
-                      <a:solidFill>
-                        <a:srgbClr val="D5DADD"/>
-                      </a:solidFill>
-                      <a:prstDash val="solid"/>
-                      <a:round/>
-                      <a:headEnd type="none" w="med" len="med"/>
-                      <a:tailEnd type="none" w="med" len="med"/>
-                    </a:lnT>
-                    <a:lnB w="12700" cap="flat" cmpd="sng" algn="ctr">
-                      <a:solidFill>
-                        <a:srgbClr val="D5DADD"/>
-                      </a:solidFill>
-                      <a:prstDash val="solid"/>
-                      <a:round/>
-                      <a:headEnd type="none" w="med" len="med"/>
-                      <a:tailEnd type="none" w="med" len="med"/>
-                    </a:lnB>
-                  </a:tcPr>
-                </a:tc>
-              </a:tr>
-              <a:tr h="411480">
-                <a:tc>
-                  <a:txBody>
-                    <a:bodyPr/>
-                    <a:lstStyle/>
-                    <a:p>
-                      <a:pPr algn="l" indent="0" marL="0">
-                        <a:buNone/>
-                      </a:pPr>
-                      <a:r>
-                        <a:rPr lang="en-US" sz="1300" dirty="0">
-                          <a:solidFill>
-                            <a:srgbClr val="181C1E"/>
-                          </a:solidFill>
-                          <a:latin typeface="Calibri" pitchFamily="34" charset="0"/>
-                          <a:ea typeface="Calibri" pitchFamily="34" charset="-122"/>
-                          <a:cs typeface="Calibri" pitchFamily="34" charset="-120"/>
-                        </a:rPr>
-                        <a:t>Opus: new input</a:t>
-                      </a:r>
-                      <a:endParaRPr lang="en-US" sz="1300" dirty="0">
-                        <a:latin typeface="Calibri" charset="0"/>
-                        <a:ea typeface="Calibri" charset="0"/>
-                        <a:cs typeface="Calibri" charset="0"/>
-                      </a:endParaRPr>
-                    </a:p>
-                  </a:txBody>
-                  <a:tcPr marL="91440" marR="91440" marT="45720" marB="45720" anchor="ctr">
-                    <a:lnL w="12700" cap="flat" cmpd="sng" algn="ctr">
-                      <a:solidFill>
-                        <a:srgbClr val="D5DADD"/>
-                      </a:solidFill>
-                      <a:prstDash val="solid"/>
-                      <a:round/>
-                      <a:headEnd type="none" w="med" len="med"/>
-                      <a:tailEnd type="none" w="med" len="med"/>
-                    </a:lnL>
-                    <a:lnR w="12700" cap="flat" cmpd="sng" algn="ctr">
-                      <a:solidFill>
-                        <a:srgbClr val="D5DADD"/>
-                      </a:solidFill>
-                      <a:prstDash val="solid"/>
-                      <a:round/>
-                      <a:headEnd type="none" w="med" len="med"/>
-                      <a:tailEnd type="none" w="med" len="med"/>
-                    </a:lnR>
-                    <a:lnT w="12700" cap="flat" cmpd="sng" algn="ctr">
-                      <a:solidFill>
-                        <a:srgbClr val="D5DADD"/>
-                      </a:solidFill>
-                      <a:prstDash val="solid"/>
-                      <a:round/>
-                      <a:headEnd type="none" w="med" len="med"/>
-                      <a:tailEnd type="none" w="med" len="med"/>
-                    </a:lnT>
-                    <a:lnB w="12700" cap="flat" cmpd="sng" algn="ctr">
-                      <a:solidFill>
-                        <a:srgbClr val="D5DADD"/>
-                      </a:solidFill>
-                      <a:prstDash val="solid"/>
-                      <a:round/>
-                      <a:headEnd type="none" w="med" len="med"/>
-                      <a:tailEnd type="none" w="med" len="med"/>
-                    </a:lnB>
-                  </a:tcPr>
-                </a:tc>
-                <a:tc>
-                  <a:txBody>
-                    <a:bodyPr/>
-                    <a:lstStyle/>
-                    <a:p>
-                      <a:pPr algn="l" indent="0" marL="0">
-                        <a:buNone/>
-                      </a:pPr>
-                      <a:r>
-                        <a:rPr lang="en-US" sz="1300" dirty="0">
-                          <a:solidFill>
-                            <a:srgbClr val="181C1E"/>
-                          </a:solidFill>
-                          <a:latin typeface="Calibri" pitchFamily="34" charset="0"/>
-                          <a:ea typeface="Calibri" pitchFamily="34" charset="-122"/>
-                          <a:cs typeface="Calibri" pitchFamily="34" charset="-120"/>
-                        </a:rPr>
-                        <a:t>298 tokens</a:t>
-                      </a:r>
-                      <a:endParaRPr lang="en-US" sz="1300" dirty="0">
-                        <a:latin typeface="Calibri" charset="0"/>
-                        <a:ea typeface="Calibri" charset="0"/>
-                        <a:cs typeface="Calibri" charset="0"/>
-                      </a:endParaRPr>
-                    </a:p>
-                  </a:txBody>
-                  <a:tcPr marL="91440" marR="91440" marT="45720" marB="45720" anchor="ctr">
-                    <a:lnL w="12700" cap="flat" cmpd="sng" algn="ctr">
-                      <a:solidFill>
-                        <a:srgbClr val="D5DADD"/>
-                      </a:solidFill>
-                      <a:prstDash val="solid"/>
-                      <a:round/>
-                      <a:headEnd type="none" w="med" len="med"/>
-                      <a:tailEnd type="none" w="med" len="med"/>
-                    </a:lnL>
-                    <a:lnR w="12700" cap="flat" cmpd="sng" algn="ctr">
-                      <a:solidFill>
-                        <a:srgbClr val="D5DADD"/>
-                      </a:solidFill>
-                      <a:prstDash val="solid"/>
-                      <a:round/>
-                      <a:headEnd type="none" w="med" len="med"/>
-                      <a:tailEnd type="none" w="med" len="med"/>
-                    </a:lnR>
-                    <a:lnT w="12700" cap="flat" cmpd="sng" algn="ctr">
-                      <a:solidFill>
-                        <a:srgbClr val="D5DADD"/>
-                      </a:solidFill>
-                      <a:prstDash val="solid"/>
-                      <a:round/>
-                      <a:headEnd type="none" w="med" len="med"/>
-                      <a:tailEnd type="none" w="med" len="med"/>
-                    </a:lnT>
-                    <a:lnB w="12700" cap="flat" cmpd="sng" algn="ctr">
-                      <a:solidFill>
-                        <a:srgbClr val="D5DADD"/>
-                      </a:solidFill>
-                      <a:prstDash val="solid"/>
-                      <a:round/>
-                      <a:headEnd type="none" w="med" len="med"/>
-                      <a:tailEnd type="none" w="med" len="med"/>
-                    </a:lnB>
-                  </a:tcPr>
-                </a:tc>
-                <a:tc>
-                  <a:txBody>
-                    <a:bodyPr/>
-                    <a:lstStyle/>
-                    <a:p>
-                      <a:pPr algn="l" indent="0" marL="0">
-                        <a:buNone/>
-                      </a:pPr>
-                      <a:r>
-                        <a:rPr lang="en-US" sz="1300" dirty="0">
-                          <a:solidFill>
-                            <a:srgbClr val="181C1E"/>
-                          </a:solidFill>
-                          <a:latin typeface="Calibri" pitchFamily="34" charset="0"/>
-                          <a:ea typeface="Calibri" pitchFamily="34" charset="-122"/>
-                          <a:cs typeface="Calibri" pitchFamily="34" charset="-120"/>
-                        </a:rPr>
-                        <a:t>$4 / M</a:t>
-                      </a:r>
-                      <a:endParaRPr lang="en-US" sz="1300" dirty="0">
-                        <a:latin typeface="Calibri" charset="0"/>
-                        <a:ea typeface="Calibri" charset="0"/>
-                        <a:cs typeface="Calibri" charset="0"/>
-                      </a:endParaRPr>
-                    </a:p>
-                  </a:txBody>
-                  <a:tcPr marL="91440" marR="91440" marT="45720" marB="45720" anchor="ctr">
-                    <a:lnL w="12700" cap="flat" cmpd="sng" algn="ctr">
-                      <a:solidFill>
-                        <a:srgbClr val="D5DADD"/>
-                      </a:solidFill>
-                      <a:prstDash val="solid"/>
-                      <a:round/>
-                      <a:headEnd type="none" w="med" len="med"/>
-                      <a:tailEnd type="none" w="med" len="med"/>
-                    </a:lnL>
-                    <a:lnR w="12700" cap="flat" cmpd="sng" algn="ctr">
-                      <a:solidFill>
-                        <a:srgbClr val="D5DADD"/>
-                      </a:solidFill>
-                      <a:prstDash val="solid"/>
-                      <a:round/>
-                      <a:headEnd type="none" w="med" len="med"/>
-                      <a:tailEnd type="none" w="med" len="med"/>
-                    </a:lnR>
-                    <a:lnT w="12700" cap="flat" cmpd="sng" algn="ctr">
-                      <a:solidFill>
-                        <a:srgbClr val="D5DADD"/>
-                      </a:solidFill>
-                      <a:prstDash val="solid"/>
-                      <a:round/>
-                      <a:headEnd type="none" w="med" len="med"/>
-                      <a:tailEnd type="none" w="med" len="med"/>
-                    </a:lnT>
-                    <a:lnB w="12700" cap="flat" cmpd="sng" algn="ctr">
-                      <a:solidFill>
-                        <a:srgbClr val="D5DADD"/>
-                      </a:solidFill>
-                      <a:prstDash val="solid"/>
-                      <a:round/>
-                      <a:headEnd type="none" w="med" len="med"/>
-                      <a:tailEnd type="none" w="med" len="med"/>
-                    </a:lnB>
-                  </a:tcPr>
-                </a:tc>
-                <a:tc>
-                  <a:txBody>
-                    <a:bodyPr/>
-                    <a:lstStyle/>
-                    <a:p>
-                      <a:pPr algn="r" indent="0" marL="0">
-                        <a:buNone/>
-                      </a:pPr>
-                      <a:r>
-                        <a:rPr lang="en-US" sz="1300" dirty="0">
-                          <a:solidFill>
-                            <a:srgbClr val="181C1E"/>
-                          </a:solidFill>
-                          <a:latin typeface="Calibri" pitchFamily="34" charset="0"/>
-                          <a:ea typeface="Calibri" pitchFamily="34" charset="-122"/>
-                          <a:cs typeface="Calibri" pitchFamily="34" charset="-120"/>
-                        </a:rPr>
-                        <a:t>0.00</a:t>
-                      </a:r>
-                      <a:endParaRPr lang="en-US" sz="1300" dirty="0">
-                        <a:latin typeface="Calibri" charset="0"/>
-                        <a:ea typeface="Calibri" charset="0"/>
-                        <a:cs typeface="Calibri" charset="0"/>
-                      </a:endParaRPr>
-                    </a:p>
-                  </a:txBody>
-                  <a:tcPr marL="91440" marR="91440" marT="45720" marB="45720" anchor="ctr">
-                    <a:lnL w="12700" cap="flat" cmpd="sng" algn="ctr">
-                      <a:solidFill>
-                        <a:srgbClr val="D5DADD"/>
-                      </a:solidFill>
-                      <a:prstDash val="solid"/>
-                      <a:round/>
-                      <a:headEnd type="none" w="med" len="med"/>
-                      <a:tailEnd type="none" w="med" len="med"/>
-                    </a:lnL>
-                    <a:lnR w="12700" cap="flat" cmpd="sng" algn="ctr">
-                      <a:solidFill>
-                        <a:srgbClr val="D5DADD"/>
-                      </a:solidFill>
-                      <a:prstDash val="solid"/>
-                      <a:round/>
-                      <a:headEnd type="none" w="med" len="med"/>
-                      <a:tailEnd type="none" w="med" len="med"/>
-                    </a:lnR>
-                    <a:lnT w="12700" cap="flat" cmpd="sng" algn="ctr">
-                      <a:solidFill>
-                        <a:srgbClr val="D5DADD"/>
-                      </a:solidFill>
-                      <a:prstDash val="solid"/>
-                      <a:round/>
-                      <a:headEnd type="none" w="med" len="med"/>
-                      <a:tailEnd type="none" w="med" len="med"/>
-                    </a:lnT>
-                    <a:lnB w="12700" cap="flat" cmpd="sng" algn="ctr">
-                      <a:solidFill>
-                        <a:srgbClr val="D5DADD"/>
-                      </a:solidFill>
-                      <a:prstDash val="solid"/>
-                      <a:round/>
-                      <a:headEnd type="none" w="med" len="med"/>
-                      <a:tailEnd type="none" w="med" len="med"/>
-                    </a:lnB>
-                  </a:tcPr>
-                </a:tc>
-                <a:tc>
-                  <a:txBody>
-                    <a:bodyPr/>
-                    <a:lstStyle/>
-                    <a:p>
-                      <a:pPr algn="r" indent="0" marL="0">
-                        <a:buNone/>
-                      </a:pPr>
-                      <a:r>
-                        <a:rPr lang="en-US" sz="1300" dirty="0">
-                          <a:solidFill>
-                            <a:srgbClr val="181C1E"/>
-                          </a:solidFill>
-                          <a:latin typeface="Calibri" pitchFamily="34" charset="0"/>
-                          <a:ea typeface="Calibri" pitchFamily="34" charset="-122"/>
-                          <a:cs typeface="Calibri" pitchFamily="34" charset="-120"/>
-                        </a:rPr>
-                        <a:t>0.00</a:t>
-                      </a:r>
-                      <a:endParaRPr lang="en-US" sz="1300" dirty="0">
-                        <a:latin typeface="Calibri" charset="0"/>
-                        <a:ea typeface="Calibri" charset="0"/>
-                        <a:cs typeface="Calibri" charset="0"/>
-                      </a:endParaRPr>
-                    </a:p>
-                  </a:txBody>
-                  <a:tcPr marL="91440" marR="91440" marT="45720" marB="45720" anchor="ctr">
-                    <a:lnL w="12700" cap="flat" cmpd="sng" algn="ctr">
-                      <a:solidFill>
-                        <a:srgbClr val="D5DADD"/>
-                      </a:solidFill>
-                      <a:prstDash val="solid"/>
-                      <a:round/>
-                      <a:headEnd type="none" w="med" len="med"/>
-                      <a:tailEnd type="none" w="med" len="med"/>
-                    </a:lnL>
-                    <a:lnR w="12700" cap="flat" cmpd="sng" algn="ctr">
-                      <a:solidFill>
-                        <a:srgbClr val="D5DADD"/>
-                      </a:solidFill>
-                      <a:prstDash val="solid"/>
-                      <a:round/>
-                      <a:headEnd type="none" w="med" len="med"/>
-                      <a:tailEnd type="none" w="med" len="med"/>
-                    </a:lnR>
-                    <a:lnT w="12700" cap="flat" cmpd="sng" algn="ctr">
-                      <a:solidFill>
-                        <a:srgbClr val="D5DADD"/>
-                      </a:solidFill>
-                      <a:prstDash val="solid"/>
-                      <a:round/>
-                      <a:headEnd type="none" w="med" len="med"/>
-                      <a:tailEnd type="none" w="med" len="med"/>
-                    </a:lnT>
-                    <a:lnB w="12700" cap="flat" cmpd="sng" algn="ctr">
-                      <a:solidFill>
-                        <a:srgbClr val="D5DADD"/>
-                      </a:solidFill>
-                      <a:prstDash val="solid"/>
-                      <a:round/>
-                      <a:headEnd type="none" w="med" len="med"/>
-                      <a:tailEnd type="none" w="med" len="med"/>
-                    </a:lnB>
-                  </a:tcPr>
-                </a:tc>
-              </a:tr>
-              <a:tr h="411480">
-                <a:tc>
-                  <a:txBody>
-                    <a:bodyPr/>
-                    <a:lstStyle/>
-                    <a:p>
-                      <a:pPr algn="l" indent="0" marL="0">
-                        <a:buNone/>
-                      </a:pPr>
-                      <a:r>
-                        <a:rPr lang="en-US" sz="1300" dirty="0">
-                          <a:solidFill>
-                            <a:srgbClr val="181C1E"/>
-                          </a:solidFill>
-                          <a:latin typeface="Calibri" pitchFamily="34" charset="0"/>
-                          <a:ea typeface="Calibri" pitchFamily="34" charset="-122"/>
-                          <a:cs typeface="Calibri" pitchFamily="34" charset="-120"/>
-                        </a:rPr>
-                        <a:t>Opus: cache reads</a:t>
-                      </a:r>
-                      <a:endParaRPr lang="en-US" sz="1300" dirty="0">
-                        <a:latin typeface="Calibri" charset="0"/>
-                        <a:ea typeface="Calibri" charset="0"/>
-                        <a:cs typeface="Calibri" charset="0"/>
-                      </a:endParaRPr>
-                    </a:p>
-                  </a:txBody>
-                  <a:tcPr marL="91440" marR="91440" marT="45720" marB="45720" anchor="ctr">
-                    <a:lnL w="12700" cap="flat" cmpd="sng" algn="ctr">
-                      <a:solidFill>
-                        <a:srgbClr val="D5DADD"/>
-                      </a:solidFill>
-                      <a:prstDash val="solid"/>
-                      <a:round/>
-                      <a:headEnd type="none" w="med" len="med"/>
-                      <a:tailEnd type="none" w="med" len="med"/>
-                    </a:lnL>
-                    <a:lnR w="12700" cap="flat" cmpd="sng" algn="ctr">
-                      <a:solidFill>
-                        <a:srgbClr val="D5DADD"/>
-                      </a:solidFill>
-                      <a:prstDash val="solid"/>
-                      <a:round/>
-                      <a:headEnd type="none" w="med" len="med"/>
-                      <a:tailEnd type="none" w="med" len="med"/>
-                    </a:lnR>
-                    <a:lnT w="12700" cap="flat" cmpd="sng" algn="ctr">
-                      <a:solidFill>
-                        <a:srgbClr val="D5DADD"/>
-                      </a:solidFill>
-                      <a:prstDash val="solid"/>
-                      <a:round/>
-                      <a:headEnd type="none" w="med" len="med"/>
-                      <a:tailEnd type="none" w="med" len="med"/>
-                    </a:lnT>
-                    <a:lnB w="12700" cap="flat" cmpd="sng" algn="ctr">
-                      <a:solidFill>
-                        <a:srgbClr val="D5DADD"/>
-                      </a:solidFill>
-                      <a:prstDash val="solid"/>
-                      <a:round/>
-                      <a:headEnd type="none" w="med" len="med"/>
-                      <a:tailEnd type="none" w="med" len="med"/>
-                    </a:lnB>
-                  </a:tcPr>
-                </a:tc>
-                <a:tc>
-                  <a:txBody>
-                    <a:bodyPr/>
-                    <a:lstStyle/>
-                    <a:p>
-                      <a:pPr algn="l" indent="0" marL="0">
-                        <a:buNone/>
-                      </a:pPr>
-                      <a:r>
-                        <a:rPr lang="en-US" sz="1300" dirty="0">
-                          <a:solidFill>
-                            <a:srgbClr val="181C1E"/>
-                          </a:solidFill>
-                          <a:latin typeface="Calibri" pitchFamily="34" charset="0"/>
-                          <a:ea typeface="Calibri" pitchFamily="34" charset="-122"/>
-                          <a:cs typeface="Calibri" pitchFamily="34" charset="-120"/>
-                        </a:rPr>
-                        <a:t>3,551,008 tokens</a:t>
-                      </a:r>
-                      <a:endParaRPr lang="en-US" sz="1300" dirty="0">
-                        <a:latin typeface="Calibri" charset="0"/>
-                        <a:ea typeface="Calibri" charset="0"/>
-                        <a:cs typeface="Calibri" charset="0"/>
-                      </a:endParaRPr>
-                    </a:p>
-                  </a:txBody>
-                  <a:tcPr marL="91440" marR="91440" marT="45720" marB="45720" anchor="ctr">
-                    <a:lnL w="12700" cap="flat" cmpd="sng" algn="ctr">
-                      <a:solidFill>
-                        <a:srgbClr val="D5DADD"/>
-                      </a:solidFill>
-                      <a:prstDash val="solid"/>
-                      <a:round/>
-                      <a:headEnd type="none" w="med" len="med"/>
-                      <a:tailEnd type="none" w="med" len="med"/>
-                    </a:lnL>
-                    <a:lnR w="12700" cap="flat" cmpd="sng" algn="ctr">
-                      <a:solidFill>
-                        <a:srgbClr val="D5DADD"/>
-                      </a:solidFill>
-                      <a:prstDash val="solid"/>
-                      <a:round/>
-                      <a:headEnd type="none" w="med" len="med"/>
-                      <a:tailEnd type="none" w="med" len="med"/>
-                    </a:lnR>
-                    <a:lnT w="12700" cap="flat" cmpd="sng" algn="ctr">
-                      <a:solidFill>
-                        <a:srgbClr val="D5DADD"/>
-                      </a:solidFill>
-                      <a:prstDash val="solid"/>
-                      <a:round/>
-                      <a:headEnd type="none" w="med" len="med"/>
-                      <a:tailEnd type="none" w="med" len="med"/>
-                    </a:lnT>
-                    <a:lnB w="12700" cap="flat" cmpd="sng" algn="ctr">
-                      <a:solidFill>
-                        <a:srgbClr val="D5DADD"/>
-                      </a:solidFill>
-                      <a:prstDash val="solid"/>
-                      <a:round/>
-                      <a:headEnd type="none" w="med" len="med"/>
-                      <a:tailEnd type="none" w="med" len="med"/>
-                    </a:lnB>
-                  </a:tcPr>
-                </a:tc>
-                <a:tc>
-                  <a:txBody>
-                    <a:bodyPr/>
-                    <a:lstStyle/>
-                    <a:p>
-                      <a:pPr algn="l" indent="0" marL="0">
-                        <a:buNone/>
-                      </a:pPr>
-                      <a:r>
-                        <a:rPr lang="en-US" sz="1300" dirty="0">
-                          <a:solidFill>
-                            <a:srgbClr val="181C1E"/>
-                          </a:solidFill>
-                          <a:latin typeface="Calibri" pitchFamily="34" charset="0"/>
-                          <a:ea typeface="Calibri" pitchFamily="34" charset="-122"/>
-                          <a:cs typeface="Calibri" pitchFamily="34" charset="-120"/>
-                        </a:rPr>
-                        <a:t>$0.40 / M</a:t>
-                      </a:r>
-                      <a:endParaRPr lang="en-US" sz="1300" dirty="0">
-                        <a:latin typeface="Calibri" charset="0"/>
-                        <a:ea typeface="Calibri" charset="0"/>
-                        <a:cs typeface="Calibri" charset="0"/>
-                      </a:endParaRPr>
-                    </a:p>
-                  </a:txBody>
-                  <a:tcPr marL="91440" marR="91440" marT="45720" marB="45720" anchor="ctr">
-                    <a:lnL w="12700" cap="flat" cmpd="sng" algn="ctr">
-                      <a:solidFill>
-                        <a:srgbClr val="D5DADD"/>
-                      </a:solidFill>
-                      <a:prstDash val="solid"/>
-                      <a:round/>
-                      <a:headEnd type="none" w="med" len="med"/>
-                      <a:tailEnd type="none" w="med" len="med"/>
-                    </a:lnL>
-                    <a:lnR w="12700" cap="flat" cmpd="sng" algn="ctr">
-                      <a:solidFill>
-                        <a:srgbClr val="D5DADD"/>
-                      </a:solidFill>
-                      <a:prstDash val="solid"/>
-                      <a:round/>
-                      <a:headEnd type="none" w="med" len="med"/>
-                      <a:tailEnd type="none" w="med" len="med"/>
-                    </a:lnR>
-                    <a:lnT w="12700" cap="flat" cmpd="sng" algn="ctr">
-                      <a:solidFill>
-                        <a:srgbClr val="D5DADD"/>
-                      </a:solidFill>
-                      <a:prstDash val="solid"/>
-                      <a:round/>
-                      <a:headEnd type="none" w="med" len="med"/>
-                      <a:tailEnd type="none" w="med" len="med"/>
-                    </a:lnT>
-                    <a:lnB w="12700" cap="flat" cmpd="sng" algn="ctr">
-                      <a:solidFill>
-                        <a:srgbClr val="D5DADD"/>
-                      </a:solidFill>
-                      <a:prstDash val="solid"/>
-                      <a:round/>
-                      <a:headEnd type="none" w="med" len="med"/>
-                      <a:tailEnd type="none" w="med" len="med"/>
-                    </a:lnB>
-                  </a:tcPr>
-                </a:tc>
-                <a:tc>
-                  <a:txBody>
-                    <a:bodyPr/>
-                    <a:lstStyle/>
-                    <a:p>
-                      <a:pPr algn="r" indent="0" marL="0">
-                        <a:buNone/>
-                      </a:pPr>
-                      <a:r>
-                        <a:rPr lang="en-US" sz="1300" dirty="0">
-                          <a:solidFill>
-                            <a:srgbClr val="181C1E"/>
-                          </a:solidFill>
-                          <a:latin typeface="Calibri" pitchFamily="34" charset="0"/>
-                          <a:ea typeface="Calibri" pitchFamily="34" charset="-122"/>
-                          <a:cs typeface="Calibri" pitchFamily="34" charset="-120"/>
-                        </a:rPr>
-                        <a:t>1.42</a:t>
-                      </a:r>
-                      <a:endParaRPr lang="en-US" sz="1300" dirty="0">
-                        <a:latin typeface="Calibri" charset="0"/>
-                        <a:ea typeface="Calibri" charset="0"/>
-                        <a:cs typeface="Calibri" charset="0"/>
-                      </a:endParaRPr>
-                    </a:p>
-                  </a:txBody>
-                  <a:tcPr marL="91440" marR="91440" marT="45720" marB="45720" anchor="ctr">
-                    <a:lnL w="12700" cap="flat" cmpd="sng" algn="ctr">
-                      <a:solidFill>
-                        <a:srgbClr val="D5DADD"/>
-                      </a:solidFill>
-                      <a:prstDash val="solid"/>
-                      <a:round/>
-                      <a:headEnd type="none" w="med" len="med"/>
-                      <a:tailEnd type="none" w="med" len="med"/>
-                    </a:lnL>
-                    <a:lnR w="12700" cap="flat" cmpd="sng" algn="ctr">
-                      <a:solidFill>
-                        <a:srgbClr val="D5DADD"/>
-                      </a:solidFill>
-                      <a:prstDash val="solid"/>
-                      <a:round/>
-                      <a:headEnd type="none" w="med" len="med"/>
-                      <a:tailEnd type="none" w="med" len="med"/>
-                    </a:lnR>
-                    <a:lnT w="12700" cap="flat" cmpd="sng" algn="ctr">
-                      <a:solidFill>
-                        <a:srgbClr val="D5DADD"/>
-                      </a:solidFill>
-                      <a:prstDash val="solid"/>
-                      <a:round/>
-                      <a:headEnd type="none" w="med" len="med"/>
-                      <a:tailEnd type="none" w="med" len="med"/>
-                    </a:lnT>
-                    <a:lnB w="12700" cap="flat" cmpd="sng" algn="ctr">
-                      <a:solidFill>
-                        <a:srgbClr val="D5DADD"/>
-                      </a:solidFill>
-                      <a:prstDash val="solid"/>
-                      <a:round/>
-                      <a:headEnd type="none" w="med" len="med"/>
-                      <a:tailEnd type="none" w="med" len="med"/>
-                    </a:lnB>
-                  </a:tcPr>
-                </a:tc>
-                <a:tc>
-                  <a:txBody>
-                    <a:bodyPr/>
-                    <a:lstStyle/>
-                    <a:p>
-                      <a:pPr algn="r" indent="0" marL="0">
-                        <a:buNone/>
-                      </a:pPr>
-                      <a:r>
-                        <a:rPr lang="en-US" sz="1300" dirty="0">
-                          <a:solidFill>
-                            <a:srgbClr val="181C1E"/>
-                          </a:solidFill>
-                          <a:latin typeface="Calibri" pitchFamily="34" charset="0"/>
-                          <a:ea typeface="Calibri" pitchFamily="34" charset="-122"/>
-                          <a:cs typeface="Calibri" pitchFamily="34" charset="-120"/>
-                        </a:rPr>
-                        <a:t>1.81</a:t>
-                      </a:r>
-                      <a:endParaRPr lang="en-US" sz="1300" dirty="0">
-                        <a:latin typeface="Calibri" charset="0"/>
-                        <a:ea typeface="Calibri" charset="0"/>
-                        <a:cs typeface="Calibri" charset="0"/>
-                      </a:endParaRPr>
-                    </a:p>
-                  </a:txBody>
-                  <a:tcPr marL="91440" marR="91440" marT="45720" marB="45720" anchor="ctr">
-                    <a:lnL w="12700" cap="flat" cmpd="sng" algn="ctr">
-                      <a:solidFill>
-                        <a:srgbClr val="D5DADD"/>
-                      </a:solidFill>
-                      <a:prstDash val="solid"/>
-                      <a:round/>
-                      <a:headEnd type="none" w="med" len="med"/>
-                      <a:tailEnd type="none" w="med" len="med"/>
-                    </a:lnL>
-                    <a:lnR w="12700" cap="flat" cmpd="sng" algn="ctr">
-                      <a:solidFill>
-                        <a:srgbClr val="D5DADD"/>
-                      </a:solidFill>
-                      <a:prstDash val="solid"/>
-                      <a:round/>
-                      <a:headEnd type="none" w="med" len="med"/>
-                      <a:tailEnd type="none" w="med" len="med"/>
-                    </a:lnR>
-                    <a:lnT w="12700" cap="flat" cmpd="sng" algn="ctr">
-                      <a:solidFill>
-                        <a:srgbClr val="D5DADD"/>
-                      </a:solidFill>
-                      <a:prstDash val="solid"/>
-                      <a:round/>
-                      <a:headEnd type="none" w="med" len="med"/>
-                      <a:tailEnd type="none" w="med" len="med"/>
-                    </a:lnT>
-                    <a:lnB w="12700" cap="flat" cmpd="sng" algn="ctr">
-                      <a:solidFill>
-                        <a:srgbClr val="D5DADD"/>
-                      </a:solidFill>
-                      <a:prstDash val="solid"/>
-                      <a:round/>
-                      <a:headEnd type="none" w="med" len="med"/>
-                      <a:tailEnd type="none" w="med" len="med"/>
-                    </a:lnB>
-                  </a:tcPr>
-                </a:tc>
-              </a:tr>
-              <a:tr h="411480">
-                <a:tc>
-                  <a:txBody>
-                    <a:bodyPr/>
-                    <a:lstStyle/>
-                    <a:p>
-                      <a:pPr algn="l" indent="0" marL="0">
-                        <a:buNone/>
-                      </a:pPr>
-                      <a:r>
-                        <a:rPr lang="en-US" sz="1300" dirty="0">
-                          <a:solidFill>
-                            <a:srgbClr val="181C1E"/>
-                          </a:solidFill>
-                          <a:latin typeface="Calibri" pitchFamily="34" charset="0"/>
-                          <a:ea typeface="Calibri" pitchFamily="34" charset="-122"/>
-                          <a:cs typeface="Calibri" pitchFamily="34" charset="-120"/>
-                        </a:rPr>
-                        <a:t>Opus: cache writes</a:t>
-                      </a:r>
-                      <a:endParaRPr lang="en-US" sz="1300" dirty="0">
-                        <a:latin typeface="Calibri" charset="0"/>
-                        <a:ea typeface="Calibri" charset="0"/>
-                        <a:cs typeface="Calibri" charset="0"/>
-                      </a:endParaRPr>
-                    </a:p>
-                  </a:txBody>
-                  <a:tcPr marL="91440" marR="91440" marT="45720" marB="45720" anchor="ctr">
-                    <a:lnL w="12700" cap="flat" cmpd="sng" algn="ctr">
-                      <a:solidFill>
-                        <a:srgbClr val="D5DADD"/>
-                      </a:solidFill>
-                      <a:prstDash val="solid"/>
-                      <a:round/>
-                      <a:headEnd type="none" w="med" len="med"/>
-                      <a:tailEnd type="none" w="med" len="med"/>
-                    </a:lnL>
-                    <a:lnR w="12700" cap="flat" cmpd="sng" algn="ctr">
-                      <a:solidFill>
-                        <a:srgbClr val="D5DADD"/>
-                      </a:solidFill>
-                      <a:prstDash val="solid"/>
-                      <a:round/>
-                      <a:headEnd type="none" w="med" len="med"/>
-                      <a:tailEnd type="none" w="med" len="med"/>
-                    </a:lnR>
-                    <a:lnT w="12700" cap="flat" cmpd="sng" algn="ctr">
-                      <a:solidFill>
-                        <a:srgbClr val="D5DADD"/>
-                      </a:solidFill>
-                      <a:prstDash val="solid"/>
-                      <a:round/>
-                      <a:headEnd type="none" w="med" len="med"/>
-                      <a:tailEnd type="none" w="med" len="med"/>
-                    </a:lnT>
-                    <a:lnB w="12700" cap="flat" cmpd="sng" algn="ctr">
-                      <a:solidFill>
-                        <a:srgbClr val="D5DADD"/>
-                      </a:solidFill>
-                      <a:prstDash val="solid"/>
-                      <a:round/>
-                      <a:headEnd type="none" w="med" len="med"/>
-                      <a:tailEnd type="none" w="med" len="med"/>
-                    </a:lnB>
-                  </a:tcPr>
-                </a:tc>
-                <a:tc>
-                  <a:txBody>
-                    <a:bodyPr/>
-                    <a:lstStyle/>
-                    <a:p>
-                      <a:pPr algn="l" indent="0" marL="0">
-                        <a:buNone/>
-                      </a:pPr>
-                      <a:r>
-                        <a:rPr lang="en-US" sz="1300" dirty="0">
-                          <a:solidFill>
-                            <a:srgbClr val="181C1E"/>
-                          </a:solidFill>
-                          <a:latin typeface="Calibri" pitchFamily="34" charset="0"/>
-                          <a:ea typeface="Calibri" pitchFamily="34" charset="-122"/>
-                          <a:cs typeface="Calibri" pitchFamily="34" charset="-120"/>
-                        </a:rPr>
-                        <a:t>540,300 tokens</a:t>
-                      </a:r>
-                      <a:endParaRPr lang="en-US" sz="1300" dirty="0">
-                        <a:latin typeface="Calibri" charset="0"/>
-                        <a:ea typeface="Calibri" charset="0"/>
-                        <a:cs typeface="Calibri" charset="0"/>
-                      </a:endParaRPr>
-                    </a:p>
-                  </a:txBody>
-                  <a:tcPr marL="91440" marR="91440" marT="45720" marB="45720" anchor="ctr">
-                    <a:lnL w="12700" cap="flat" cmpd="sng" algn="ctr">
-                      <a:solidFill>
-                        <a:srgbClr val="D5DADD"/>
-                      </a:solidFill>
-                      <a:prstDash val="solid"/>
-                      <a:round/>
-                      <a:headEnd type="none" w="med" len="med"/>
-                      <a:tailEnd type="none" w="med" len="med"/>
-                    </a:lnL>
-                    <a:lnR w="12700" cap="flat" cmpd="sng" algn="ctr">
-                      <a:solidFill>
-                        <a:srgbClr val="D5DADD"/>
-                      </a:solidFill>
-                      <a:prstDash val="solid"/>
-                      <a:round/>
-                      <a:headEnd type="none" w="med" len="med"/>
-                      <a:tailEnd type="none" w="med" len="med"/>
-                    </a:lnR>
-                    <a:lnT w="12700" cap="flat" cmpd="sng" algn="ctr">
-                      <a:solidFill>
-                        <a:srgbClr val="D5DADD"/>
-                      </a:solidFill>
-                      <a:prstDash val="solid"/>
-                      <a:round/>
-                      <a:headEnd type="none" w="med" len="med"/>
-                      <a:tailEnd type="none" w="med" len="med"/>
-                    </a:lnT>
-                    <a:lnB w="12700" cap="flat" cmpd="sng" algn="ctr">
-                      <a:solidFill>
-                        <a:srgbClr val="D5DADD"/>
-                      </a:solidFill>
-                      <a:prstDash val="solid"/>
-                      <a:round/>
-                      <a:headEnd type="none" w="med" len="med"/>
-                      <a:tailEnd type="none" w="med" len="med"/>
-                    </a:lnB>
-                  </a:tcPr>
-                </a:tc>
-                <a:tc>
-                  <a:txBody>
-                    <a:bodyPr/>
-                    <a:lstStyle/>
-                    <a:p>
-                      <a:pPr algn="l" indent="0" marL="0">
-                        <a:buNone/>
-                      </a:pPr>
-                      <a:r>
-                        <a:rPr lang="en-US" sz="1300" dirty="0">
-                          <a:solidFill>
-                            <a:srgbClr val="181C1E"/>
-                          </a:solidFill>
-                          <a:latin typeface="Calibri" pitchFamily="34" charset="0"/>
-                          <a:ea typeface="Calibri" pitchFamily="34" charset="-122"/>
-                          <a:cs typeface="Calibri" pitchFamily="34" charset="-120"/>
-                        </a:rPr>
-                        <a:t>$5 / M</a:t>
-                      </a:r>
-                      <a:endParaRPr lang="en-US" sz="1300" dirty="0">
-                        <a:latin typeface="Calibri" charset="0"/>
-                        <a:ea typeface="Calibri" charset="0"/>
-                        <a:cs typeface="Calibri" charset="0"/>
-                      </a:endParaRPr>
-                    </a:p>
-                  </a:txBody>
-                  <a:tcPr marL="91440" marR="91440" marT="45720" marB="45720" anchor="ctr">
-                    <a:lnL w="12700" cap="flat" cmpd="sng" algn="ctr">
-                      <a:solidFill>
-                        <a:srgbClr val="D5DADD"/>
-                      </a:solidFill>
-                      <a:prstDash val="solid"/>
-                      <a:round/>
-                      <a:headEnd type="none" w="med" len="med"/>
-                      <a:tailEnd type="none" w="med" len="med"/>
-                    </a:lnL>
-                    <a:lnR w="12700" cap="flat" cmpd="sng" algn="ctr">
-                      <a:solidFill>
-                        <a:srgbClr val="D5DADD"/>
-                      </a:solidFill>
-                      <a:prstDash val="solid"/>
-                      <a:round/>
-                      <a:headEnd type="none" w="med" len="med"/>
-                      <a:tailEnd type="none" w="med" len="med"/>
-                    </a:lnR>
-                    <a:lnT w="12700" cap="flat" cmpd="sng" algn="ctr">
-                      <a:solidFill>
-                        <a:srgbClr val="D5DADD"/>
-                      </a:solidFill>
-                      <a:prstDash val="solid"/>
-                      <a:round/>
-                      <a:headEnd type="none" w="med" len="med"/>
-                      <a:tailEnd type="none" w="med" len="med"/>
-                    </a:lnT>
-                    <a:lnB w="12700" cap="flat" cmpd="sng" algn="ctr">
-                      <a:solidFill>
-                        <a:srgbClr val="D5DADD"/>
-                      </a:solidFill>
-                      <a:prstDash val="solid"/>
-                      <a:round/>
-                      <a:headEnd type="none" w="med" len="med"/>
-                      <a:tailEnd type="none" w="med" len="med"/>
-                    </a:lnB>
-                  </a:tcPr>
-                </a:tc>
-                <a:tc>
-                  <a:txBody>
-                    <a:bodyPr/>
-                    <a:lstStyle/>
-                    <a:p>
-                      <a:pPr algn="r" indent="0" marL="0">
-                        <a:buNone/>
-                      </a:pPr>
-                      <a:r>
-                        <a:rPr lang="en-US" sz="1300" dirty="0">
-                          <a:solidFill>
-                            <a:srgbClr val="181C1E"/>
-                          </a:solidFill>
-                          <a:latin typeface="Calibri" pitchFamily="34" charset="0"/>
-                          <a:ea typeface="Calibri" pitchFamily="34" charset="-122"/>
-                          <a:cs typeface="Calibri" pitchFamily="34" charset="-120"/>
-                        </a:rPr>
-                        <a:t>2.70</a:t>
-                      </a:r>
-                      <a:endParaRPr lang="en-US" sz="1300" dirty="0">
-                        <a:latin typeface="Calibri" charset="0"/>
-                        <a:ea typeface="Calibri" charset="0"/>
-                        <a:cs typeface="Calibri" charset="0"/>
-                      </a:endParaRPr>
-                    </a:p>
-                  </a:txBody>
-                  <a:tcPr marL="91440" marR="91440" marT="45720" marB="45720" anchor="ctr">
-                    <a:lnL w="12700" cap="flat" cmpd="sng" algn="ctr">
-                      <a:solidFill>
-                        <a:srgbClr val="D5DADD"/>
-                      </a:solidFill>
-                      <a:prstDash val="solid"/>
-                      <a:round/>
-                      <a:headEnd type="none" w="med" len="med"/>
-                      <a:tailEnd type="none" w="med" len="med"/>
-                    </a:lnL>
-                    <a:lnR w="12700" cap="flat" cmpd="sng" algn="ctr">
-                      <a:solidFill>
-                        <a:srgbClr val="D5DADD"/>
-                      </a:solidFill>
-                      <a:prstDash val="solid"/>
-                      <a:round/>
-                      <a:headEnd type="none" w="med" len="med"/>
-                      <a:tailEnd type="none" w="med" len="med"/>
-                    </a:lnR>
-                    <a:lnT w="12700" cap="flat" cmpd="sng" algn="ctr">
-                      <a:solidFill>
-                        <a:srgbClr val="D5DADD"/>
-                      </a:solidFill>
-                      <a:prstDash val="solid"/>
-                      <a:round/>
-                      <a:headEnd type="none" w="med" len="med"/>
-                      <a:tailEnd type="none" w="med" len="med"/>
-                    </a:lnT>
-                    <a:lnB w="12700" cap="flat" cmpd="sng" algn="ctr">
-                      <a:solidFill>
-                        <a:srgbClr val="D5DADD"/>
-                      </a:solidFill>
-                      <a:prstDash val="solid"/>
-                      <a:round/>
-                      <a:headEnd type="none" w="med" len="med"/>
-                      <a:tailEnd type="none" w="med" len="med"/>
-                    </a:lnB>
-                  </a:tcPr>
-                </a:tc>
-                <a:tc>
-                  <a:txBody>
-                    <a:bodyPr/>
-                    <a:lstStyle/>
-                    <a:p>
-                      <a:pPr algn="r" indent="0" marL="0">
-                        <a:buNone/>
-                      </a:pPr>
-                      <a:r>
-                        <a:rPr lang="en-US" sz="1300" dirty="0">
-                          <a:solidFill>
-                            <a:srgbClr val="181C1E"/>
-                          </a:solidFill>
-                          <a:latin typeface="Calibri" pitchFamily="34" charset="0"/>
-                          <a:ea typeface="Calibri" pitchFamily="34" charset="-122"/>
-                          <a:cs typeface="Calibri" pitchFamily="34" charset="-120"/>
-                        </a:rPr>
-                        <a:t>3.45</a:t>
-                      </a:r>
-                      <a:endParaRPr lang="en-US" sz="1300" dirty="0">
-                        <a:latin typeface="Calibri" charset="0"/>
-                        <a:ea typeface="Calibri" charset="0"/>
-                        <a:cs typeface="Calibri" charset="0"/>
-                      </a:endParaRPr>
-                    </a:p>
-                  </a:txBody>
-                  <a:tcPr marL="91440" marR="91440" marT="45720" marB="45720" anchor="ctr">
-                    <a:lnL w="12700" cap="flat" cmpd="sng" algn="ctr">
-                      <a:solidFill>
-                        <a:srgbClr val="D5DADD"/>
-                      </a:solidFill>
-                      <a:prstDash val="solid"/>
-                      <a:round/>
-                      <a:headEnd type="none" w="med" len="med"/>
-                      <a:tailEnd type="none" w="med" len="med"/>
-                    </a:lnL>
-                    <a:lnR w="12700" cap="flat" cmpd="sng" algn="ctr">
-                      <a:solidFill>
-                        <a:srgbClr val="D5DADD"/>
-                      </a:solidFill>
-                      <a:prstDash val="solid"/>
-                      <a:round/>
-                      <a:headEnd type="none" w="med" len="med"/>
-                      <a:tailEnd type="none" w="med" len="med"/>
-                    </a:lnR>
-                    <a:lnT w="12700" cap="flat" cmpd="sng" algn="ctr">
-                      <a:solidFill>
-                        <a:srgbClr val="D5DADD"/>
-                      </a:solidFill>
-                      <a:prstDash val="solid"/>
-                      <a:round/>
-                      <a:headEnd type="none" w="med" len="med"/>
-                      <a:tailEnd type="none" w="med" len="med"/>
-                    </a:lnT>
-                    <a:lnB w="12700" cap="flat" cmpd="sng" algn="ctr">
-                      <a:solidFill>
-                        <a:srgbClr val="D5DADD"/>
-                      </a:solidFill>
-                      <a:prstDash val="solid"/>
-                      <a:round/>
-                      <a:headEnd type="none" w="med" len="med"/>
-                      <a:tailEnd type="none" w="med" len="med"/>
-                    </a:lnB>
-                  </a:tcPr>
-                </a:tc>
-              </a:tr>
-              <a:tr h="411480">
-                <a:tc>
-                  <a:txBody>
-                    <a:bodyPr/>
-                    <a:lstStyle/>
-                    <a:p>
-                      <a:pPr algn="l" indent="0" marL="0">
-                        <a:buNone/>
-                      </a:pPr>
-                      <a:r>
-                        <a:rPr lang="en-US" sz="1300" dirty="0">
-                          <a:solidFill>
-                            <a:srgbClr val="181C1E"/>
-                          </a:solidFill>
-                          <a:latin typeface="Calibri" pitchFamily="34" charset="0"/>
-                          <a:ea typeface="Calibri" pitchFamily="34" charset="-122"/>
-                          <a:cs typeface="Calibri" pitchFamily="34" charset="-120"/>
-                        </a:rPr>
-                        <a:t>Opus: output (the data file and checks)</a:t>
-                      </a:r>
-                      <a:endParaRPr lang="en-US" sz="1300" dirty="0">
-                        <a:latin typeface="Calibri" charset="0"/>
-                        <a:ea typeface="Calibri" charset="0"/>
-                        <a:cs typeface="Calibri" charset="0"/>
-                      </a:endParaRPr>
-                    </a:p>
-                  </a:txBody>
-                  <a:tcPr marL="91440" marR="91440" marT="45720" marB="45720" anchor="ctr">
-                    <a:lnL w="12700" cap="flat" cmpd="sng" algn="ctr">
-                      <a:solidFill>
-                        <a:srgbClr val="D5DADD"/>
-                      </a:solidFill>
-                      <a:prstDash val="solid"/>
-                      <a:round/>
-                      <a:headEnd type="none" w="med" len="med"/>
-                      <a:tailEnd type="none" w="med" len="med"/>
-                    </a:lnL>
-                    <a:lnR w="12700" cap="flat" cmpd="sng" algn="ctr">
-                      <a:solidFill>
-                        <a:srgbClr val="D5DADD"/>
-                      </a:solidFill>
-                      <a:prstDash val="solid"/>
-                      <a:round/>
-                      <a:headEnd type="none" w="med" len="med"/>
-                      <a:tailEnd type="none" w="med" len="med"/>
-                    </a:lnR>
-                    <a:lnT w="12700" cap="flat" cmpd="sng" algn="ctr">
-                      <a:solidFill>
-                        <a:srgbClr val="D5DADD"/>
-                      </a:solidFill>
-                      <a:prstDash val="solid"/>
-                      <a:round/>
-                      <a:headEnd type="none" w="med" len="med"/>
-                      <a:tailEnd type="none" w="med" len="med"/>
-                    </a:lnT>
-                    <a:lnB w="12700" cap="flat" cmpd="sng" algn="ctr">
-                      <a:solidFill>
-                        <a:srgbClr val="D5DADD"/>
-                      </a:solidFill>
-                      <a:prstDash val="solid"/>
-                      <a:round/>
-                      <a:headEnd type="none" w="med" len="med"/>
-                      <a:tailEnd type="none" w="med" len="med"/>
-                    </a:lnB>
-                  </a:tcPr>
-                </a:tc>
-                <a:tc>
-                  <a:txBody>
-                    <a:bodyPr/>
-                    <a:lstStyle/>
-                    <a:p>
-                      <a:pPr algn="l" indent="0" marL="0">
-                        <a:buNone/>
-                      </a:pPr>
-                      <a:r>
-                        <a:rPr lang="en-US" sz="1300" dirty="0">
-                          <a:solidFill>
-                            <a:srgbClr val="181C1E"/>
-                          </a:solidFill>
-                          <a:latin typeface="Calibri" pitchFamily="34" charset="0"/>
-                          <a:ea typeface="Calibri" pitchFamily="34" charset="-122"/>
-                          <a:cs typeface="Calibri" pitchFamily="34" charset="-120"/>
-                        </a:rPr>
-                        <a:t>186,650 tokens</a:t>
-                      </a:r>
-                      <a:endParaRPr lang="en-US" sz="1300" dirty="0">
-                        <a:latin typeface="Calibri" charset="0"/>
-                        <a:ea typeface="Calibri" charset="0"/>
-                        <a:cs typeface="Calibri" charset="0"/>
-                      </a:endParaRPr>
-                    </a:p>
-                  </a:txBody>
-                  <a:tcPr marL="91440" marR="91440" marT="45720" marB="45720" anchor="ctr">
-                    <a:lnL w="12700" cap="flat" cmpd="sng" algn="ctr">
-                      <a:solidFill>
-                        <a:srgbClr val="D5DADD"/>
-                      </a:solidFill>
-                      <a:prstDash val="solid"/>
-                      <a:round/>
-                      <a:headEnd type="none" w="med" len="med"/>
-                      <a:tailEnd type="none" w="med" len="med"/>
-                    </a:lnL>
-                    <a:lnR w="12700" cap="flat" cmpd="sng" algn="ctr">
-                      <a:solidFill>
-                        <a:srgbClr val="D5DADD"/>
-                      </a:solidFill>
-                      <a:prstDash val="solid"/>
-                      <a:round/>
-                      <a:headEnd type="none" w="med" len="med"/>
-                      <a:tailEnd type="none" w="med" len="med"/>
-                    </a:lnR>
-                    <a:lnT w="12700" cap="flat" cmpd="sng" algn="ctr">
-                      <a:solidFill>
-                        <a:srgbClr val="D5DADD"/>
-                      </a:solidFill>
-                      <a:prstDash val="solid"/>
-                      <a:round/>
-                      <a:headEnd type="none" w="med" len="med"/>
-                      <a:tailEnd type="none" w="med" len="med"/>
-                    </a:lnT>
-                    <a:lnB w="12700" cap="flat" cmpd="sng" algn="ctr">
-                      <a:solidFill>
-                        <a:srgbClr val="D5DADD"/>
-                      </a:solidFill>
-                      <a:prstDash val="solid"/>
-                      <a:round/>
-                      <a:headEnd type="none" w="med" len="med"/>
-                      <a:tailEnd type="none" w="med" len="med"/>
-                    </a:lnB>
-                  </a:tcPr>
-                </a:tc>
-                <a:tc>
-                  <a:txBody>
-                    <a:bodyPr/>
-                    <a:lstStyle/>
-                    <a:p>
-                      <a:pPr algn="l" indent="0" marL="0">
-                        <a:buNone/>
-                      </a:pPr>
-                      <a:r>
-                        <a:rPr lang="en-US" sz="1300" dirty="0">
-                          <a:solidFill>
-                            <a:srgbClr val="181C1E"/>
-                          </a:solidFill>
-                          <a:latin typeface="Calibri" pitchFamily="34" charset="0"/>
-                          <a:ea typeface="Calibri" pitchFamily="34" charset="-122"/>
-                          <a:cs typeface="Calibri" pitchFamily="34" charset="-120"/>
-                        </a:rPr>
-                        <a:t>$20 / M</a:t>
-                      </a:r>
-                      <a:endParaRPr lang="en-US" sz="1300" dirty="0">
-                        <a:latin typeface="Calibri" charset="0"/>
-                        <a:ea typeface="Calibri" charset="0"/>
-                        <a:cs typeface="Calibri" charset="0"/>
-                      </a:endParaRPr>
-                    </a:p>
-                  </a:txBody>
-                  <a:tcPr marL="91440" marR="91440" marT="45720" marB="45720" anchor="ctr">
-                    <a:lnL w="12700" cap="flat" cmpd="sng" algn="ctr">
-                      <a:solidFill>
-                        <a:srgbClr val="D5DADD"/>
-                      </a:solidFill>
-                      <a:prstDash val="solid"/>
-                      <a:round/>
-                      <a:headEnd type="none" w="med" len="med"/>
-                      <a:tailEnd type="none" w="med" len="med"/>
-                    </a:lnL>
-                    <a:lnR w="12700" cap="flat" cmpd="sng" algn="ctr">
-                      <a:solidFill>
-                        <a:srgbClr val="D5DADD"/>
-                      </a:solidFill>
-                      <a:prstDash val="solid"/>
-                      <a:round/>
-                      <a:headEnd type="none" w="med" len="med"/>
-                      <a:tailEnd type="none" w="med" len="med"/>
-                    </a:lnR>
-                    <a:lnT w="12700" cap="flat" cmpd="sng" algn="ctr">
-                      <a:solidFill>
-                        <a:srgbClr val="D5DADD"/>
-                      </a:solidFill>
-                      <a:prstDash val="solid"/>
-                      <a:round/>
-                      <a:headEnd type="none" w="med" len="med"/>
-                      <a:tailEnd type="none" w="med" len="med"/>
-                    </a:lnT>
-                    <a:lnB w="12700" cap="flat" cmpd="sng" algn="ctr">
-                      <a:solidFill>
-                        <a:srgbClr val="D5DADD"/>
-                      </a:solidFill>
-                      <a:prstDash val="solid"/>
-                      <a:round/>
-                      <a:headEnd type="none" w="med" len="med"/>
-                      <a:tailEnd type="none" w="med" len="med"/>
-                    </a:lnB>
-                  </a:tcPr>
-                </a:tc>
-                <a:tc>
-                  <a:txBody>
-                    <a:bodyPr/>
-                    <a:lstStyle/>
-                    <a:p>
-                      <a:pPr algn="r" indent="0" marL="0">
-                        <a:buNone/>
-                      </a:pPr>
-                      <a:r>
-                        <a:rPr lang="en-US" sz="1300" dirty="0">
-                          <a:solidFill>
-                            <a:srgbClr val="181C1E"/>
-                          </a:solidFill>
-                          <a:latin typeface="Calibri" pitchFamily="34" charset="0"/>
-                          <a:ea typeface="Calibri" pitchFamily="34" charset="-122"/>
-                          <a:cs typeface="Calibri" pitchFamily="34" charset="-120"/>
-                        </a:rPr>
-                        <a:t>3.73</a:t>
-                      </a:r>
-                      <a:endParaRPr lang="en-US" sz="1300" dirty="0">
-                        <a:latin typeface="Calibri" charset="0"/>
-                        <a:ea typeface="Calibri" charset="0"/>
-                        <a:cs typeface="Calibri" charset="0"/>
-                      </a:endParaRPr>
-                    </a:p>
-                  </a:txBody>
-                  <a:tcPr marL="91440" marR="91440" marT="45720" marB="45720" anchor="ctr">
-                    <a:lnL w="12700" cap="flat" cmpd="sng" algn="ctr">
-                      <a:solidFill>
-                        <a:srgbClr val="D5DADD"/>
-                      </a:solidFill>
-                      <a:prstDash val="solid"/>
-                      <a:round/>
-                      <a:headEnd type="none" w="med" len="med"/>
-                      <a:tailEnd type="none" w="med" len="med"/>
-                    </a:lnL>
-                    <a:lnR w="12700" cap="flat" cmpd="sng" algn="ctr">
-                      <a:solidFill>
-                        <a:srgbClr val="D5DADD"/>
-                      </a:solidFill>
-                      <a:prstDash val="solid"/>
-                      <a:round/>
-                      <a:headEnd type="none" w="med" len="med"/>
-                      <a:tailEnd type="none" w="med" len="med"/>
-                    </a:lnR>
-                    <a:lnT w="12700" cap="flat" cmpd="sng" algn="ctr">
-                      <a:solidFill>
-                        <a:srgbClr val="D5DADD"/>
-                      </a:solidFill>
-                      <a:prstDash val="solid"/>
-                      <a:round/>
-                      <a:headEnd type="none" w="med" len="med"/>
-                      <a:tailEnd type="none" w="med" len="med"/>
-                    </a:lnT>
-                    <a:lnB w="12700" cap="flat" cmpd="sng" algn="ctr">
-                      <a:solidFill>
-                        <a:srgbClr val="D5DADD"/>
-                      </a:solidFill>
-                      <a:prstDash val="solid"/>
-                      <a:round/>
-                      <a:headEnd type="none" w="med" len="med"/>
-                      <a:tailEnd type="none" w="med" len="med"/>
-                    </a:lnB>
-                  </a:tcPr>
-                </a:tc>
-                <a:tc>
-                  <a:txBody>
-                    <a:bodyPr/>
-                    <a:lstStyle/>
-                    <a:p>
-                      <a:pPr algn="r" indent="0" marL="0">
-                        <a:buNone/>
-                      </a:pPr>
-                      <a:r>
-                        <a:rPr lang="en-US" sz="1300" dirty="0">
-                          <a:solidFill>
-                            <a:srgbClr val="181C1E"/>
-                          </a:solidFill>
-                          <a:latin typeface="Calibri" pitchFamily="34" charset="0"/>
-                          <a:ea typeface="Calibri" pitchFamily="34" charset="-122"/>
-                          <a:cs typeface="Calibri" pitchFamily="34" charset="-120"/>
-                        </a:rPr>
-                        <a:t>4.77</a:t>
-                      </a:r>
-                      <a:endParaRPr lang="en-US" sz="1300" dirty="0">
-                        <a:latin typeface="Calibri" charset="0"/>
-                        <a:ea typeface="Calibri" charset="0"/>
-                        <a:cs typeface="Calibri" charset="0"/>
-                      </a:endParaRPr>
-                    </a:p>
-                  </a:txBody>
-                  <a:tcPr marL="91440" marR="91440" marT="45720" marB="45720" anchor="ctr">
-                    <a:lnL w="12700" cap="flat" cmpd="sng" algn="ctr">
-                      <a:solidFill>
-                        <a:srgbClr val="D5DADD"/>
-                      </a:solidFill>
-                      <a:prstDash val="solid"/>
-                      <a:round/>
-                      <a:headEnd type="none" w="med" len="med"/>
-                      <a:tailEnd type="none" w="med" len="med"/>
-                    </a:lnL>
-                    <a:lnR w="12700" cap="flat" cmpd="sng" algn="ctr">
-                      <a:solidFill>
-                        <a:srgbClr val="D5DADD"/>
-                      </a:solidFill>
-                      <a:prstDash val="solid"/>
-                      <a:round/>
-                      <a:headEnd type="none" w="med" len="med"/>
-                      <a:tailEnd type="none" w="med" len="med"/>
-                    </a:lnR>
-                    <a:lnT w="12700" cap="flat" cmpd="sng" algn="ctr">
-                      <a:solidFill>
-                        <a:srgbClr val="D5DADD"/>
-                      </a:solidFill>
-                      <a:prstDash val="solid"/>
-                      <a:round/>
-                      <a:headEnd type="none" w="med" len="med"/>
-                      <a:tailEnd type="none" w="med" len="med"/>
-                    </a:lnT>
-                    <a:lnB w="12700" cap="flat" cmpd="sng" algn="ctr">
-                      <a:solidFill>
-                        <a:srgbClr val="D5DADD"/>
-                      </a:solidFill>
-                      <a:prstDash val="solid"/>
-                      <a:round/>
-                      <a:headEnd type="none" w="med" len="med"/>
-                      <a:tailEnd type="none" w="med" len="med"/>
-                    </a:lnB>
-                  </a:tcPr>
-                </a:tc>
-              </a:tr>
-              <a:tr h="411480">
-                <a:tc>
-                  <a:txBody>
-                    <a:bodyPr/>
-                    <a:lstStyle/>
-                    <a:p>
-                      <a:pPr algn="l" indent="0" marL="0">
-                        <a:buNone/>
-                      </a:pPr>
-                      <a:r>
-                        <a:rPr lang="en-US" sz="1300" b="1" dirty="0">
-                          <a:solidFill>
-                            <a:srgbClr val="181C1E"/>
-                          </a:solidFill>
-                          <a:latin typeface="Calibri" pitchFamily="34" charset="0"/>
-                          <a:ea typeface="Calibri" pitchFamily="34" charset="-122"/>
-                          <a:cs typeface="Calibri" pitchFamily="34" charset="-120"/>
-                        </a:rPr>
-                        <a:t>Total, our estimate</a:t>
-                      </a:r>
-                      <a:endParaRPr lang="en-US" sz="1300" dirty="0">
-                        <a:latin typeface="Calibri" charset="0"/>
-                        <a:ea typeface="Calibri" charset="0"/>
-                        <a:cs typeface="Calibri" charset="0"/>
-                      </a:endParaRPr>
-                    </a:p>
-                  </a:txBody>
-                  <a:tcPr marL="91440" marR="91440" marT="45720" marB="45720" anchor="ctr">
-                    <a:lnL w="12700" cap="flat" cmpd="sng" algn="ctr">
-                      <a:solidFill>
-                        <a:srgbClr val="D5DADD"/>
-                      </a:solidFill>
-                      <a:prstDash val="solid"/>
-                      <a:round/>
-                      <a:headEnd type="none" w="med" len="med"/>
-                      <a:tailEnd type="none" w="med" len="med"/>
-                    </a:lnL>
-                    <a:lnR w="12700" cap="flat" cmpd="sng" algn="ctr">
-                      <a:solidFill>
-                        <a:srgbClr val="D5DADD"/>
-                      </a:solidFill>
-                      <a:prstDash val="solid"/>
-                      <a:round/>
-                      <a:headEnd type="none" w="med" len="med"/>
-                      <a:tailEnd type="none" w="med" len="med"/>
-                    </a:lnR>
-                    <a:lnT w="12700" cap="flat" cmpd="sng" algn="ctr">
-                      <a:solidFill>
-                        <a:srgbClr val="D5DADD"/>
-                      </a:solidFill>
-                      <a:prstDash val="solid"/>
-                      <a:round/>
-                      <a:headEnd type="none" w="med" len="med"/>
-                      <a:tailEnd type="none" w="med" len="med"/>
-                    </a:lnT>
-                    <a:lnB w="12700" cap="flat" cmpd="sng" algn="ctr">
-                      <a:solidFill>
-                        <a:srgbClr val="D5DADD"/>
-                      </a:solidFill>
-                      <a:prstDash val="solid"/>
-                      <a:round/>
-                      <a:headEnd type="none" w="med" len="med"/>
-                      <a:tailEnd type="none" w="med" len="med"/>
-                    </a:lnB>
-                    <a:solidFill>
-                      <a:srgbClr val="EEF1F3"/>
-                    </a:solidFill>
-                  </a:tcPr>
-                </a:tc>
-                <a:tc>
-                  <a:txBody>
-                    <a:bodyPr/>
-                    <a:lstStyle/>
-                    <a:p>
-                      <a:pPr algn="l" indent="0" marL="0">
-                        <a:buNone/>
-                      </a:pPr>
-                      <a:endParaRPr lang="en-US" sz="1300" dirty="0">
-                        <a:latin typeface="Calibri" charset="0"/>
-                        <a:ea typeface="Calibri" charset="0"/>
-                        <a:cs typeface="Calibri" charset="0"/>
-                      </a:endParaRPr>
-                    </a:p>
-                  </a:txBody>
-                  <a:tcPr marL="91440" marR="91440" marT="45720" marB="45720" anchor="ctr">
-                    <a:lnL w="12700" cap="flat" cmpd="sng" algn="ctr">
-                      <a:solidFill>
-                        <a:srgbClr val="D5DADD"/>
-                      </a:solidFill>
-                      <a:prstDash val="solid"/>
-                      <a:round/>
-                      <a:headEnd type="none" w="med" len="med"/>
-                      <a:tailEnd type="none" w="med" len="med"/>
-                    </a:lnL>
-                    <a:lnR w="12700" cap="flat" cmpd="sng" algn="ctr">
-                      <a:solidFill>
-                        <a:srgbClr val="D5DADD"/>
-                      </a:solidFill>
-                      <a:prstDash val="solid"/>
-                      <a:round/>
-                      <a:headEnd type="none" w="med" len="med"/>
-                      <a:tailEnd type="none" w="med" len="med"/>
-                    </a:lnR>
-                    <a:lnT w="12700" cap="flat" cmpd="sng" algn="ctr">
-                      <a:solidFill>
-                        <a:srgbClr val="D5DADD"/>
-                      </a:solidFill>
-                      <a:prstDash val="solid"/>
-                      <a:round/>
-                      <a:headEnd type="none" w="med" len="med"/>
-                      <a:tailEnd type="none" w="med" len="med"/>
-                    </a:lnT>
-                    <a:lnB w="12700" cap="flat" cmpd="sng" algn="ctr">
-                      <a:solidFill>
-                        <a:srgbClr val="D5DADD"/>
-                      </a:solidFill>
-                      <a:prstDash val="solid"/>
-                      <a:round/>
-                      <a:headEnd type="none" w="med" len="med"/>
-                      <a:tailEnd type="none" w="med" len="med"/>
-                    </a:lnB>
-                    <a:solidFill>
-                      <a:srgbClr val="EEF1F3"/>
-                    </a:solidFill>
-                  </a:tcPr>
-                </a:tc>
-                <a:tc>
-                  <a:txBody>
-                    <a:bodyPr/>
-                    <a:lstStyle/>
-                    <a:p>
-                      <a:pPr algn="l" indent="0" marL="0">
-                        <a:buNone/>
-                      </a:pPr>
-                      <a:endParaRPr lang="en-US" sz="1300" dirty="0">
-                        <a:latin typeface="Calibri" charset="0"/>
-                        <a:ea typeface="Calibri" charset="0"/>
-                        <a:cs typeface="Calibri" charset="0"/>
-                      </a:endParaRPr>
-                    </a:p>
-                  </a:txBody>
-                  <a:tcPr marL="91440" marR="91440" marT="45720" marB="45720" anchor="ctr">
-                    <a:lnL w="12700" cap="flat" cmpd="sng" algn="ctr">
-                      <a:solidFill>
-                        <a:srgbClr val="D5DADD"/>
-                      </a:solidFill>
-                      <a:prstDash val="solid"/>
-                      <a:round/>
-                      <a:headEnd type="none" w="med" len="med"/>
-                      <a:tailEnd type="none" w="med" len="med"/>
-                    </a:lnL>
-                    <a:lnR w="12700" cap="flat" cmpd="sng" algn="ctr">
-                      <a:solidFill>
-                        <a:srgbClr val="D5DADD"/>
-                      </a:solidFill>
-                      <a:prstDash val="solid"/>
-                      <a:round/>
-                      <a:headEnd type="none" w="med" len="med"/>
-                      <a:tailEnd type="none" w="med" len="med"/>
-                    </a:lnR>
-                    <a:lnT w="12700" cap="flat" cmpd="sng" algn="ctr">
-                      <a:solidFill>
-                        <a:srgbClr val="D5DADD"/>
-                      </a:solidFill>
-                      <a:prstDash val="solid"/>
-                      <a:round/>
-                      <a:headEnd type="none" w="med" len="med"/>
-                      <a:tailEnd type="none" w="med" len="med"/>
-                    </a:lnT>
-                    <a:lnB w="12700" cap="flat" cmpd="sng" algn="ctr">
-                      <a:solidFill>
-                        <a:srgbClr val="D5DADD"/>
-                      </a:solidFill>
-                      <a:prstDash val="solid"/>
-                      <a:round/>
-                      <a:headEnd type="none" w="med" len="med"/>
-                      <a:tailEnd type="none" w="med" len="med"/>
-                    </a:lnB>
-                    <a:solidFill>
-                      <a:srgbClr val="EEF1F3"/>
-                    </a:solidFill>
-                  </a:tcPr>
-                </a:tc>
-                <a:tc>
-                  <a:txBody>
-                    <a:bodyPr/>
-                    <a:lstStyle/>
-                    <a:p>
-                      <a:pPr algn="r" indent="0" marL="0">
-                        <a:buNone/>
-                      </a:pPr>
-                      <a:r>
-                        <a:rPr lang="en-US" sz="1300" b="1" dirty="0">
-                          <a:solidFill>
-                            <a:srgbClr val="181C1E"/>
-                          </a:solidFill>
-                          <a:latin typeface="Calibri" pitchFamily="34" charset="0"/>
-                          <a:ea typeface="Calibri" pitchFamily="34" charset="-122"/>
-                          <a:cs typeface="Calibri" pitchFamily="34" charset="-120"/>
-                        </a:rPr>
-                        <a:t>10.02</a:t>
-                      </a:r>
-                      <a:endParaRPr lang="en-US" sz="1300" dirty="0">
-                        <a:latin typeface="Calibri" charset="0"/>
-                        <a:ea typeface="Calibri" charset="0"/>
-                        <a:cs typeface="Calibri" charset="0"/>
-                      </a:endParaRPr>
-                    </a:p>
-                  </a:txBody>
-                  <a:tcPr marL="91440" marR="91440" marT="45720" marB="45720" anchor="ctr">
-                    <a:lnL w="12700" cap="flat" cmpd="sng" algn="ctr">
-                      <a:solidFill>
-                        <a:srgbClr val="D5DADD"/>
-                      </a:solidFill>
-                      <a:prstDash val="solid"/>
-                      <a:round/>
-                      <a:headEnd type="none" w="med" len="med"/>
-                      <a:tailEnd type="none" w="med" len="med"/>
-                    </a:lnL>
-                    <a:lnR w="12700" cap="flat" cmpd="sng" algn="ctr">
-                      <a:solidFill>
-                        <a:srgbClr val="D5DADD"/>
-                      </a:solidFill>
-                      <a:prstDash val="solid"/>
-                      <a:round/>
-                      <a:headEnd type="none" w="med" len="med"/>
-                      <a:tailEnd type="none" w="med" len="med"/>
-                    </a:lnR>
-                    <a:lnT w="12700" cap="flat" cmpd="sng" algn="ctr">
-                      <a:solidFill>
-                        <a:srgbClr val="D5DADD"/>
-                      </a:solidFill>
-                      <a:prstDash val="solid"/>
-                      <a:round/>
-                      <a:headEnd type="none" w="med" len="med"/>
-                      <a:tailEnd type="none" w="med" len="med"/>
-                    </a:lnT>
-                    <a:lnB w="12700" cap="flat" cmpd="sng" algn="ctr">
-                      <a:solidFill>
-                        <a:srgbClr val="D5DADD"/>
-                      </a:solidFill>
-                      <a:prstDash val="solid"/>
-                      <a:round/>
-                      <a:headEnd type="none" w="med" len="med"/>
-                      <a:tailEnd type="none" w="med" len="med"/>
-                    </a:lnB>
-                    <a:solidFill>
-                      <a:srgbClr val="EEF1F3"/>
-                    </a:solidFill>
-                  </a:tcPr>
-                </a:tc>
-                <a:tc>
-                  <a:txBody>
-                    <a:bodyPr/>
-                    <a:lstStyle/>
-                    <a:p>
-                      <a:pPr algn="r" indent="0" marL="0">
-                        <a:buNone/>
-                      </a:pPr>
-                      <a:r>
-                        <a:rPr lang="en-US" sz="1300" b="1" dirty="0">
-                          <a:solidFill>
-                            <a:srgbClr val="181C1E"/>
-                          </a:solidFill>
-                          <a:latin typeface="Calibri" pitchFamily="34" charset="0"/>
-                          <a:ea typeface="Calibri" pitchFamily="34" charset="-122"/>
-                          <a:cs typeface="Calibri" pitchFamily="34" charset="-120"/>
-                        </a:rPr>
-                        <a:t>12.80</a:t>
-                      </a:r>
-                      <a:endParaRPr lang="en-US" sz="1300" dirty="0">
-                        <a:latin typeface="Calibri" charset="0"/>
-                        <a:ea typeface="Calibri" charset="0"/>
-                        <a:cs typeface="Calibri" charset="0"/>
-                      </a:endParaRPr>
-                    </a:p>
-                  </a:txBody>
-                  <a:tcPr marL="91440" marR="91440" marT="45720" marB="45720" anchor="ctr">
-                    <a:lnL w="12700" cap="flat" cmpd="sng" algn="ctr">
-                      <a:solidFill>
-                        <a:srgbClr val="D5DADD"/>
-                      </a:solidFill>
-                      <a:prstDash val="solid"/>
-                      <a:round/>
-                      <a:headEnd type="none" w="med" len="med"/>
-                      <a:tailEnd type="none" w="med" len="med"/>
-                    </a:lnL>
-                    <a:lnR w="12700" cap="flat" cmpd="sng" algn="ctr">
-                      <a:solidFill>
-                        <a:srgbClr val="D5DADD"/>
-                      </a:solidFill>
-                      <a:prstDash val="solid"/>
-                      <a:round/>
-                      <a:headEnd type="none" w="med" len="med"/>
-                      <a:tailEnd type="none" w="med" len="med"/>
-                    </a:lnR>
-                    <a:lnT w="12700" cap="flat" cmpd="sng" algn="ctr">
-                      <a:solidFill>
-                        <a:srgbClr val="D5DADD"/>
-                      </a:solidFill>
-                      <a:prstDash val="solid"/>
-                      <a:round/>
-                      <a:headEnd type="none" w="med" len="med"/>
-                      <a:tailEnd type="none" w="med" len="med"/>
-                    </a:lnT>
-                    <a:lnB w="12700" cap="flat" cmpd="sng" algn="ctr">
-                      <a:solidFill>
-                        <a:srgbClr val="D5DADD"/>
-                      </a:solidFill>
-                      <a:prstDash val="solid"/>
-                      <a:round/>
-                      <a:headEnd type="none" w="med" len="med"/>
-                      <a:tailEnd type="none" w="med" len="med"/>
-                    </a:lnB>
-                    <a:solidFill>
-                      <a:srgbClr val="EEF1F3"/>
-                    </a:solidFill>
-                  </a:tcPr>
-                </a:tc>
-              </a:tr>
-              <a:tr h="411480">
-                <a:tc>
-                  <a:txBody>
-                    <a:bodyPr/>
-                    <a:lstStyle/>
-                    <a:p>
-                      <a:pPr algn="l" indent="0" marL="0">
-                        <a:buNone/>
-                      </a:pPr>
-                      <a:r>
-                        <a:rPr lang="en-US" sz="1300" b="1" dirty="0">
-                          <a:solidFill>
-                            <a:srgbClr val="181C1E"/>
-                          </a:solidFill>
-                          <a:latin typeface="Calibri" pitchFamily="34" charset="0"/>
-                          <a:ea typeface="Calibri" pitchFamily="34" charset="-122"/>
-                          <a:cs typeface="Calibri" pitchFamily="34" charset="-120"/>
-                        </a:rPr>
-                        <a:t>Claude Code’s own reported cost</a:t>
-                      </a:r>
-                      <a:endParaRPr lang="en-US" sz="1300" dirty="0">
-                        <a:latin typeface="Calibri" charset="0"/>
-                        <a:ea typeface="Calibri" charset="0"/>
-                        <a:cs typeface="Calibri" charset="0"/>
-                      </a:endParaRPr>
-                    </a:p>
-                  </a:txBody>
-                  <a:tcPr marL="91440" marR="91440" marT="45720" marB="45720" anchor="ctr">
-                    <a:lnL w="12700" cap="flat" cmpd="sng" algn="ctr">
-                      <a:solidFill>
-                        <a:srgbClr val="D5DADD"/>
-                      </a:solidFill>
-                      <a:prstDash val="solid"/>
-                      <a:round/>
-                      <a:headEnd type="none" w="med" len="med"/>
-                      <a:tailEnd type="none" w="med" len="med"/>
-                    </a:lnL>
-                    <a:lnR w="12700" cap="flat" cmpd="sng" algn="ctr">
-                      <a:solidFill>
-                        <a:srgbClr val="D5DADD"/>
-                      </a:solidFill>
-                      <a:prstDash val="solid"/>
-                      <a:round/>
-                      <a:headEnd type="none" w="med" len="med"/>
-                      <a:tailEnd type="none" w="med" len="med"/>
-                    </a:lnR>
-                    <a:lnT w="12700" cap="flat" cmpd="sng" algn="ctr">
-                      <a:solidFill>
-                        <a:srgbClr val="D5DADD"/>
-                      </a:solidFill>
-                      <a:prstDash val="solid"/>
-                      <a:round/>
-                      <a:headEnd type="none" w="med" len="med"/>
-                      <a:tailEnd type="none" w="med" len="med"/>
-                    </a:lnT>
-                    <a:lnB w="12700" cap="flat" cmpd="sng" algn="ctr">
-                      <a:solidFill>
-                        <a:srgbClr val="D5DADD"/>
-                      </a:solidFill>
-                      <a:prstDash val="solid"/>
-                      <a:round/>
-                      <a:headEnd type="none" w="med" len="med"/>
-                      <a:tailEnd type="none" w="med" len="med"/>
-                    </a:lnB>
-                    <a:solidFill>
-                      <a:srgbClr val="EEF1F3"/>
-                    </a:solidFill>
-                  </a:tcPr>
-                </a:tc>
-                <a:tc>
-                  <a:txBody>
-                    <a:bodyPr/>
-                    <a:lstStyle/>
-                    <a:p>
-                      <a:pPr algn="l" indent="0" marL="0">
-                        <a:buNone/>
-                      </a:pPr>
-                      <a:r>
-                        <a:rPr lang="en-US" sz="1300" b="1" dirty="0">
-                          <a:solidFill>
-                            <a:srgbClr val="181C1E"/>
-                          </a:solidFill>
-                          <a:latin typeface="Calibri" pitchFamily="34" charset="0"/>
-                          <a:ea typeface="Calibri" pitchFamily="34" charset="-122"/>
-                          <a:cs typeface="Calibri" pitchFamily="34" charset="-120"/>
-                        </a:rPr>
-                        <a:t>Haiku $2.16 + Opus $7.63</a:t>
-                      </a:r>
-                      <a:endParaRPr lang="en-US" sz="1300" dirty="0">
-                        <a:latin typeface="Calibri" charset="0"/>
-                        <a:ea typeface="Calibri" charset="0"/>
-                        <a:cs typeface="Calibri" charset="0"/>
-                      </a:endParaRPr>
-                    </a:p>
-                  </a:txBody>
-                  <a:tcPr marL="91440" marR="91440" marT="45720" marB="45720" anchor="ctr">
-                    <a:lnL w="12700" cap="flat" cmpd="sng" algn="ctr">
-                      <a:solidFill>
-                        <a:srgbClr val="D5DADD"/>
-                      </a:solidFill>
-                      <a:prstDash val="solid"/>
-                      <a:round/>
-                      <a:headEnd type="none" w="med" len="med"/>
-                      <a:tailEnd type="none" w="med" len="med"/>
-                    </a:lnL>
-                    <a:lnR w="12700" cap="flat" cmpd="sng" algn="ctr">
-                      <a:solidFill>
-                        <a:srgbClr val="D5DADD"/>
-                      </a:solidFill>
-                      <a:prstDash val="solid"/>
-                      <a:round/>
-                      <a:headEnd type="none" w="med" len="med"/>
-                      <a:tailEnd type="none" w="med" len="med"/>
-                    </a:lnR>
-                    <a:lnT w="12700" cap="flat" cmpd="sng" algn="ctr">
-                      <a:solidFill>
-                        <a:srgbClr val="D5DADD"/>
-                      </a:solidFill>
-                      <a:prstDash val="solid"/>
-                      <a:round/>
-                      <a:headEnd type="none" w="med" len="med"/>
-                      <a:tailEnd type="none" w="med" len="med"/>
-                    </a:lnT>
-                    <a:lnB w="12700" cap="flat" cmpd="sng" algn="ctr">
-                      <a:solidFill>
-                        <a:srgbClr val="D5DADD"/>
-                      </a:solidFill>
-                      <a:prstDash val="solid"/>
-                      <a:round/>
-                      <a:headEnd type="none" w="med" len="med"/>
-                      <a:tailEnd type="none" w="med" len="med"/>
-                    </a:lnB>
-                    <a:solidFill>
-                      <a:srgbClr val="EEF1F3"/>
-                    </a:solidFill>
-                  </a:tcPr>
-                </a:tc>
-                <a:tc>
-                  <a:txBody>
-                    <a:bodyPr/>
-                    <a:lstStyle/>
-                    <a:p>
-                      <a:pPr algn="l" indent="0" marL="0">
-                        <a:buNone/>
-                      </a:pPr>
-                      <a:endParaRPr lang="en-US" sz="1300" dirty="0">
-                        <a:latin typeface="Calibri" charset="0"/>
-                        <a:ea typeface="Calibri" charset="0"/>
-                        <a:cs typeface="Calibri" charset="0"/>
-                      </a:endParaRPr>
-                    </a:p>
-                  </a:txBody>
-                  <a:tcPr marL="91440" marR="91440" marT="45720" marB="45720" anchor="ctr">
-                    <a:lnL w="12700" cap="flat" cmpd="sng" algn="ctr">
-                      <a:solidFill>
-                        <a:srgbClr val="D5DADD"/>
-                      </a:solidFill>
-                      <a:prstDash val="solid"/>
-                      <a:round/>
-                      <a:headEnd type="none" w="med" len="med"/>
-                      <a:tailEnd type="none" w="med" len="med"/>
-                    </a:lnL>
-                    <a:lnR w="12700" cap="flat" cmpd="sng" algn="ctr">
-                      <a:solidFill>
-                        <a:srgbClr val="D5DADD"/>
-                      </a:solidFill>
-                      <a:prstDash val="solid"/>
-                      <a:round/>
-                      <a:headEnd type="none" w="med" len="med"/>
-                      <a:tailEnd type="none" w="med" len="med"/>
-                    </a:lnR>
-                    <a:lnT w="12700" cap="flat" cmpd="sng" algn="ctr">
-                      <a:solidFill>
-                        <a:srgbClr val="D5DADD"/>
-                      </a:solidFill>
-                      <a:prstDash val="solid"/>
-                      <a:round/>
-                      <a:headEnd type="none" w="med" len="med"/>
-                      <a:tailEnd type="none" w="med" len="med"/>
-                    </a:lnT>
-                    <a:lnB w="12700" cap="flat" cmpd="sng" algn="ctr">
-                      <a:solidFill>
-                        <a:srgbClr val="D5DADD"/>
-                      </a:solidFill>
-                      <a:prstDash val="solid"/>
-                      <a:round/>
-                      <a:headEnd type="none" w="med" len="med"/>
-                      <a:tailEnd type="none" w="med" len="med"/>
-                    </a:lnB>
-                    <a:solidFill>
-                      <a:srgbClr val="EEF1F3"/>
-                    </a:solidFill>
-                  </a:tcPr>
-                </a:tc>
-                <a:tc>
-                  <a:txBody>
-                    <a:bodyPr/>
-                    <a:lstStyle/>
-                    <a:p>
-                      <a:pPr algn="r" indent="0" marL="0">
-                        <a:buNone/>
-                      </a:pPr>
-                      <a:r>
-                        <a:rPr lang="en-US" sz="1300" b="1" dirty="0">
-                          <a:solidFill>
-                            <a:srgbClr val="181C1E"/>
-                          </a:solidFill>
-                          <a:latin typeface="Calibri" pitchFamily="34" charset="0"/>
-                          <a:ea typeface="Calibri" pitchFamily="34" charset="-122"/>
-                          <a:cs typeface="Calibri" pitchFamily="34" charset="-120"/>
-                        </a:rPr>
-                        <a:t>9.80</a:t>
-                      </a:r>
-                      <a:endParaRPr lang="en-US" sz="1300" dirty="0">
-                        <a:latin typeface="Calibri" charset="0"/>
-                        <a:ea typeface="Calibri" charset="0"/>
-                        <a:cs typeface="Calibri" charset="0"/>
-                      </a:endParaRPr>
-                    </a:p>
-                  </a:txBody>
-                  <a:tcPr marL="91440" marR="91440" marT="45720" marB="45720" anchor="ctr">
-                    <a:lnL w="12700" cap="flat" cmpd="sng" algn="ctr">
-                      <a:solidFill>
-                        <a:srgbClr val="D5DADD"/>
-                      </a:solidFill>
-                      <a:prstDash val="solid"/>
-                      <a:round/>
-                      <a:headEnd type="none" w="med" len="med"/>
-                      <a:tailEnd type="none" w="med" len="med"/>
-                    </a:lnL>
-                    <a:lnR w="12700" cap="flat" cmpd="sng" algn="ctr">
-                      <a:solidFill>
-                        <a:srgbClr val="D5DADD"/>
-                      </a:solidFill>
-                      <a:prstDash val="solid"/>
-                      <a:round/>
-                      <a:headEnd type="none" w="med" len="med"/>
-                      <a:tailEnd type="none" w="med" len="med"/>
-                    </a:lnR>
-                    <a:lnT w="12700" cap="flat" cmpd="sng" algn="ctr">
-                      <a:solidFill>
-                        <a:srgbClr val="D5DADD"/>
-                      </a:solidFill>
-                      <a:prstDash val="solid"/>
-                      <a:round/>
-                      <a:headEnd type="none" w="med" len="med"/>
-                      <a:tailEnd type="none" w="med" len="med"/>
-                    </a:lnT>
-                    <a:lnB w="12700" cap="flat" cmpd="sng" algn="ctr">
-                      <a:solidFill>
-                        <a:srgbClr val="D5DADD"/>
-                      </a:solidFill>
-                      <a:prstDash val="solid"/>
-                      <a:round/>
-                      <a:headEnd type="none" w="med" len="med"/>
-                      <a:tailEnd type="none" w="med" len="med"/>
-                    </a:lnB>
-                    <a:solidFill>
-                      <a:srgbClr val="EEF1F3"/>
-                    </a:solidFill>
-                  </a:tcPr>
-                </a:tc>
-                <a:tc>
-                  <a:txBody>
-                    <a:bodyPr/>
-                    <a:lstStyle/>
-                    <a:p>
-                      <a:pPr algn="r" indent="0" marL="0">
-                        <a:buNone/>
-                      </a:pPr>
-                      <a:r>
-                        <a:rPr lang="en-US" sz="1300" b="1" dirty="0">
-                          <a:solidFill>
-                            <a:srgbClr val="181C1E"/>
-                          </a:solidFill>
-                          <a:latin typeface="Calibri" pitchFamily="34" charset="0"/>
-                          <a:ea typeface="Calibri" pitchFamily="34" charset="-122"/>
-                          <a:cs typeface="Calibri" pitchFamily="34" charset="-120"/>
-                        </a:rPr>
-                        <a:t>12.51</a:t>
-                      </a:r>
-                      <a:endParaRPr lang="en-US" sz="1300" dirty="0">
-                        <a:latin typeface="Calibri" charset="0"/>
-                        <a:ea typeface="Calibri" charset="0"/>
-                        <a:cs typeface="Calibri" charset="0"/>
-                      </a:endParaRPr>
-                    </a:p>
-                  </a:txBody>
-                  <a:tcPr marL="91440" marR="91440" marT="45720" marB="45720" anchor="ctr">
-                    <a:lnL w="12700" cap="flat" cmpd="sng" algn="ctr">
-                      <a:solidFill>
-                        <a:srgbClr val="D5DADD"/>
-                      </a:solidFill>
-                      <a:prstDash val="solid"/>
-                      <a:round/>
-                      <a:headEnd type="none" w="med" len="med"/>
-                      <a:tailEnd type="none" w="med" len="med"/>
-                    </a:lnL>
-                    <a:lnR w="12700" cap="flat" cmpd="sng" algn="ctr">
-                      <a:solidFill>
-                        <a:srgbClr val="D5DADD"/>
-                      </a:solidFill>
-                      <a:prstDash val="solid"/>
-                      <a:round/>
-                      <a:headEnd type="none" w="med" len="med"/>
-                      <a:tailEnd type="none" w="med" len="med"/>
-                    </a:lnR>
-                    <a:lnT w="12700" cap="flat" cmpd="sng" algn="ctr">
-                      <a:solidFill>
-                        <a:srgbClr val="D5DADD"/>
-                      </a:solidFill>
-                      <a:prstDash val="solid"/>
-                      <a:round/>
-                      <a:headEnd type="none" w="med" len="med"/>
-                      <a:tailEnd type="none" w="med" len="med"/>
-                    </a:lnT>
-                    <a:lnB w="12700" cap="flat" cmpd="sng" algn="ctr">
-                      <a:solidFill>
-                        <a:srgbClr val="D5DADD"/>
-                      </a:solidFill>
-                      <a:prstDash val="solid"/>
-                      <a:round/>
-                      <a:headEnd type="none" w="med" len="med"/>
-                      <a:tailEnd type="none" w="med" len="med"/>
-                    </a:lnB>
-                    <a:solidFill>
-                      <a:srgbClr val="EEF1F3"/>
-                    </a:solidFill>
-                  </a:tcPr>
-                </a:tc>
-              </a:tr>
-            </a:tbl>
-          </a:graphicData>
-        </a:graphic>
-      </p:graphicFrame>
-      <p:sp>
-        <p:nvSpPr>
-          <p:cNvPr id="4" name="Text 1"/>
-          <p:cNvSpPr txBox="1"/>
-          <p:nvPr/>
-        </p:nvSpPr>
-        <p:spPr>
-          <a:xfrm>
-            <a:off x="548640" y="6172200"/>
-            <a:ext cx="10607040" cy="365760"/>
-          </a:xfrm>
-          <a:prstGeom prst="rect">
-            <a:avLst/>
-          </a:prstGeom>
-          <a:noFill/>
-          <a:ln/>
-        </p:spPr>
-        <p:txBody>
-          <a:bodyPr wrap="square" lIns="0" tIns="0" rIns="0" bIns="0" rtlCol="0" anchor="t"/>
-          <a:lstStyle/>
-          <a:p>
-            <a:pPr indent="0" marL="0">
-              <a:buNone/>
-            </a:pPr>
-            <a:r>
-              <a:rPr lang="en-US" sz="1100" dirty="0">
-                <a:solidFill>
-                  <a:srgbClr val="3F484D"/>
-                </a:solidFill>
-                <a:latin typeface="Calibri" pitchFamily="34" charset="0"/>
-                <a:ea typeface="Calibri" pitchFamily="34" charset="-122"/>
-                <a:cs typeface="Calibri" pitchFamily="34" charset="-120"/>
-              </a:rPr>
-              <a:t>Token counts are measured (28 Oct build log). Rates: lib/pricing.ts. Ours runs 2.2% above Claude Code’s figure, all in the Opus part.</a:t>
-            </a:r>
-            <a:endParaRPr lang="en-US" sz="1100" dirty="0"/>
-          </a:p>
-        </p:txBody>
-      </p:sp>
-      <p:sp>
-        <p:nvSpPr>
-          <p:cNvPr id="25" name="Slide Number Placeholder 0"/>
-          <p:cNvSpPr>
-            <a:spLocks noGrp="1"/>
-          </p:cNvSpPr>
-          <p:nvPr>
-            <p:ph type="sldNum" sz="quarter" idx="4294967295"/>
-          </p:nvPr>
-        </p:nvSpPr>
-        <p:spPr>
-          <a:xfrm>
-            <a:off x="11247120" y="6446520"/>
-            <a:ext cx="548640" cy="274320"/>
-          </a:xfrm>
-          <a:prstGeom prst="rect">
-            <a:avLst/>
-          </a:prstGeom>
-          <a:extLst>
-            <a:ext uri="{C572A759-6A51-4108-AA02-DFA0A04FC94B}">
-              <ma14:wrappingTextBoxFlag xmlns:ma14="http://schemas.microsoft.com/office/mac/drawingml/2011/main" val="0"/>
-            </a:ext>
-          </a:extLst>
-        </p:spPr>
-        <p:txBody>
-          <a:bodyPr/>
-          <a:lstStyle>
-            <a:lvl1pPr>
-              <a:defRPr sz="1000">
-                <a:solidFill>
-                  <a:srgbClr val="3F484D"/>
-                </a:solidFill>
-              </a:defRPr>
-            </a:lvl1pPr>
-          </a:lstStyle>
-          <a:p>
-            <a:pPr algn="l"/>
-            <a:fld id="{F7021451-1387-4CA6-816F-3879F97B5CBC}" type="slidenum">
-              <a:rPr b="0" lang="en-US"/>
-              <a:t>10</a:t>
-            </a:fld>
-            <a:endParaRPr lang="en-US"/>
-          </a:p>
-        </p:txBody>
-      </p:sp>
-    </p:spTree>
-  </p:cSld>
-  <p:clrMapOvr>
-    <a:masterClrMapping/>
-  </p:clrMapOvr>
-</p:sld>
-</file>
-
-<file path=ppt/slides/slide11.xml><?xml version="1.0" encoding="utf-8"?>
-<p:sld xmlns:a="http://schemas.openxmlformats.org/drawingml/2006/main" xmlns:r="http://schemas.openxmlformats.org/officeDocument/2006/relationships" xmlns:p="http://schemas.openxmlformats.org/presentationml/2006/main">
-  <p:cSld name="Slide 11">
-    <p:spTree>
-      <p:nvGrpSpPr>
-        <p:cNvPr id="1" name=""/>
-        <p:cNvGrpSpPr/>
-        <p:nvPr/>
-      </p:nvGrpSpPr>
-      <p:grpSpPr>
-        <a:xfrm>
-          <a:off x="0" y="0"/>
-          <a:ext cx="0" cy="0"/>
-          <a:chOff x="0" y="0"/>
-          <a:chExt cx="0" cy="0"/>
-        </a:xfrm>
-      </p:grpSpPr>
-      <p:sp>
-        <p:nvSpPr>
-          <p:cNvPr id="2" name="Text 0"/>
-          <p:cNvSpPr/>
-          <p:nvPr>
-            <p:ph idx="100" type="title" hasCustomPrompt="1"/>
-          </p:nvPr>
-        </p:nvSpPr>
-        <p:spPr>
-          <a:xfrm>
-            <a:off x="548640" y="365760"/>
-            <a:ext cx="11064240" cy="822960"/>
-          </a:xfrm>
-          <a:prstGeom prst="rect">
-            <a:avLst/>
-          </a:prstGeom>
-          <a:noFill/>
-          <a:ln/>
-        </p:spPr>
-        <p:txBody>
-          <a:bodyPr wrap="square" lIns="0" tIns="0" rIns="0" bIns="0" rtlCol="0" anchor="ctr"/>
-          <a:lstStyle/>
-          <a:p>
-            <a:pPr algn="l" indent="0" marL="0">
-              <a:buNone/>
-            </a:pPr>
-            <a:r>
-              <a:rPr lang="en-US" sz="3200" b="1" dirty="0">
-                <a:solidFill>
-                  <a:srgbClr val="001F29"/>
-                </a:solidFill>
-                <a:latin typeface="Cambria" pitchFamily="34" charset="0"/>
-                <a:ea typeface="Cambria" pitchFamily="34" charset="-122"/>
-                <a:cs typeface="Cambria" pitchFamily="34" charset="-120"/>
-              </a:rPr>
               <a:t>Claude Code against API only, same build</a:t>
             </a:r>
             <a:endParaRPr lang="en-US" sz="3200" dirty="0"/>
@@ -7264,7 +3710,7 @@
             <a:pPr algn="l"/>
             <a:fld id="{F7021451-1387-4CA6-816F-3879F97B5CBC}" type="slidenum">
               <a:rPr b="0" lang="en-US"/>
-              <a:t>11</a:t>
+              <a:t>10</a:t>
             </a:fld>
             <a:endParaRPr lang="en-US"/>
           </a:p>
@@ -7278,9 +3724,9 @@
 </p:sld>
 </file>
 
-<file path=ppt/slides/slide12.xml><?xml version="1.0" encoding="utf-8"?>
+<file path=ppt/slides/slide11.xml><?xml version="1.0" encoding="utf-8"?>
 <p:sld xmlns:a="http://schemas.openxmlformats.org/drawingml/2006/main" xmlns:r="http://schemas.openxmlformats.org/officeDocument/2006/relationships" xmlns:p="http://schemas.openxmlformats.org/presentationml/2006/main">
-  <p:cSld name="Slide 12">
+  <p:cSld name="Slide 11">
     <p:spTree>
       <p:nvGrpSpPr>
         <p:cNvPr id="1" name=""/>
@@ -7338,7 +3784,7 @@
       </p:sp>
       <p:graphicFrame>
         <p:nvGraphicFramePr>
-          <p:cNvPr id="13" name="api vs subscription table"/>
+          <p:cNvPr id="12" name="api vs subscription table"/>
           <p:cNvGraphicFramePr>
             <a:graphicFrameLocks noGrp="1"/>
           </p:cNvGraphicFramePr>
@@ -7706,7 +4152,7 @@
                           <a:ea typeface="Calibri" pitchFamily="34" charset="-122"/>
                           <a:cs typeface="Calibri" pitchFamily="34" charset="-120"/>
                         </a:rPr>
-                        <a:t>S$0 extra; draws on plan usage limits</a:t>
+                        <a:t>$100 a month for the plan, however many builds you run</a:t>
                       </a:r>
                       <a:endParaRPr lang="en-US" sz="1400" dirty="0">
                         <a:latin typeface="Calibri" charset="0"/>
@@ -8297,7 +4743,7 @@
                           <a:ea typeface="Calibri" pitchFamily="34" charset="-122"/>
                           <a:cs typeface="Calibri" pitchFamily="34" charset="-120"/>
                         </a:rPr>
-                        <a:t>Hits plan limits rather than a bill; large builds use more of them</a:t>
+                        <a:t>The more builds you run, the more of the plan allowance they use (large builds use more); plan limits reset weekly</a:t>
                       </a:r>
                       <a:endParaRPr lang="en-US" sz="1400" dirty="0">
                         <a:latin typeface="Calibri" charset="0"/>
@@ -8625,7 +5071,7 @@
             <a:pPr algn="l"/>
             <a:fld id="{F7021451-1387-4CA6-816F-3879F97B5CBC}" type="slidenum">
               <a:rPr b="0" lang="en-US"/>
-              <a:t>12</a:t>
+              <a:t>11</a:t>
             </a:fld>
             <a:endParaRPr lang="en-US"/>
           </a:p>
@@ -8639,9 +5085,9 @@
 </p:sld>
 </file>
 
-<file path=ppt/slides/slide13.xml><?xml version="1.0" encoding="utf-8"?>
+<file path=ppt/slides/slide12.xml><?xml version="1.0" encoding="utf-8"?>
 <p:sld xmlns:a="http://schemas.openxmlformats.org/drawingml/2006/main" xmlns:r="http://schemas.openxmlformats.org/officeDocument/2006/relationships" xmlns:p="http://schemas.openxmlformats.org/presentationml/2006/main">
-  <p:cSld name="Slide 13">
+  <p:cSld name="Slide 12">
     <p:spTree>
       <p:nvGrpSpPr>
         <p:cNvPr id="1" name=""/>
@@ -9435,7 +5881,7 @@
             <a:pPr algn="l"/>
             <a:fld id="{F7021451-1387-4CA6-816F-3879F97B5CBC}" type="slidenum">
               <a:rPr b="0" lang="en-US"/>
-              <a:t>13</a:t>
+              <a:t>12</a:t>
             </a:fld>
             <a:endParaRPr lang="en-US"/>
           </a:p>
@@ -9449,9 +5895,9 @@
 </p:sld>
 </file>
 
-<file path=ppt/slides/slide14.xml><?xml version="1.0" encoding="utf-8"?>
+<file path=ppt/slides/slide13.xml><?xml version="1.0" encoding="utf-8"?>
 <p:sld xmlns:a="http://schemas.openxmlformats.org/drawingml/2006/main" xmlns:r="http://schemas.openxmlformats.org/officeDocument/2006/relationships" xmlns:p="http://schemas.openxmlformats.org/presentationml/2006/main">
-  <p:cSld name="Slide 14">
+  <p:cSld name="Slide 13">
     <p:spTree>
       <p:nvGrpSpPr>
         <p:cNvPr id="1" name=""/>
@@ -9668,7 +6114,7 @@
             <a:pPr algn="l"/>
             <a:fld id="{F7021451-1387-4CA6-816F-3879F97B5CBC}" type="slidenum">
               <a:rPr b="0" lang="en-US"/>
-              <a:t>14</a:t>
+              <a:t>13</a:t>
             </a:fld>
             <a:endParaRPr lang="en-US"/>
           </a:p>
@@ -9682,9 +6128,9 @@
 </p:sld>
 </file>
 
-<file path=ppt/slides/slide15.xml><?xml version="1.0" encoding="utf-8"?>
+<file path=ppt/slides/slide14.xml><?xml version="1.0" encoding="utf-8"?>
 <p:sld xmlns:a="http://schemas.openxmlformats.org/drawingml/2006/main" xmlns:r="http://schemas.openxmlformats.org/officeDocument/2006/relationships" xmlns:p="http://schemas.openxmlformats.org/presentationml/2006/main">
-  <p:cSld name="Slide 15">
+  <p:cSld name="Slide 14">
     <p:spTree>
       <p:nvGrpSpPr>
         <p:cNvPr id="1" name=""/>
@@ -9927,7 +6373,7 @@
             <a:pPr algn="l"/>
             <a:fld id="{F7021451-1387-4CA6-816F-3879F97B5CBC}" type="slidenum">
               <a:rPr b="0" lang="en-US"/>
-              <a:t>15</a:t>
+              <a:t>14</a:t>
             </a:fld>
             <a:endParaRPr lang="en-US"/>
           </a:p>
@@ -12831,576 +9277,6 @@
                 <a:ea typeface="Cambria" pitchFamily="34" charset="-122"/>
                 <a:cs typeface="Cambria" pitchFamily="34" charset="-120"/>
               </a:rPr>
-              <a:t>What Opus-level research added</a:t>
-            </a:r>
-            <a:endParaRPr lang="en-US" sz="3200" dirty="0"/>
-          </a:p>
-        </p:txBody>
-      </p:sp>
-      <p:sp>
-        <p:nvSpPr>
-          <p:cNvPr id="3" name="card"/>
-          <p:cNvSpPr/>
-          <p:nvPr/>
-        </p:nvSpPr>
-        <p:spPr>
-          <a:xfrm>
-            <a:off x="548640" y="1417320"/>
-            <a:ext cx="5440680" cy="2103120"/>
-          </a:xfrm>
-          <a:prstGeom prst="roundRect">
-            <a:avLst>
-              <a:gd name="adj" fmla="val 3478"/>
-            </a:avLst>
-          </a:prstGeom>
-          <a:solidFill>
-            <a:srgbClr val="006781"/>
-          </a:solidFill>
-          <a:ln w="12700">
-            <a:solidFill>
-              <a:srgbClr val="006781"/>
-            </a:solidFill>
-            <a:prstDash val="solid"/>
-          </a:ln>
-        </p:spPr>
-      </p:sp>
-      <p:sp>
-        <p:nvSpPr>
-          <p:cNvPr id="4" name="Text 2"/>
-          <p:cNvSpPr txBox="1"/>
-          <p:nvPr/>
-        </p:nvSpPr>
-        <p:spPr>
-          <a:xfrm>
-            <a:off x="822960" y="1645920"/>
-            <a:ext cx="4892040" cy="411480"/>
-          </a:xfrm>
-          <a:prstGeom prst="rect">
-            <a:avLst/>
-          </a:prstGeom>
-          <a:noFill/>
-          <a:ln/>
-        </p:spPr>
-        <p:txBody>
-          <a:bodyPr wrap="square" lIns="0" tIns="0" rIns="0" bIns="0" rtlCol="0" anchor="t"/>
-          <a:lstStyle/>
-          <a:p>
-            <a:pPr indent="0" marL="0">
-              <a:buNone/>
-            </a:pPr>
-            <a:r>
-              <a:rPr lang="en-US" sz="2000" b="1" dirty="0">
-                <a:solidFill>
-                  <a:srgbClr val="FFFFFF"/>
-                </a:solidFill>
-                <a:latin typeface="Cambria" pitchFamily="34" charset="0"/>
-                <a:ea typeface="Cambria" pitchFamily="34" charset="-122"/>
-                <a:cs typeface="Cambria" pitchFamily="34" charset="-120"/>
-              </a:rPr>
-              <a:t>Real dated price histories</a:t>
-            </a:r>
-            <a:endParaRPr lang="en-US" sz="2000" dirty="0"/>
-          </a:p>
-        </p:txBody>
-      </p:sp>
-      <p:sp>
-        <p:nvSpPr>
-          <p:cNvPr id="5" name="Text 3"/>
-          <p:cNvSpPr txBox="1"/>
-          <p:nvPr/>
-        </p:nvSpPr>
-        <p:spPr>
-          <a:xfrm>
-            <a:off x="822960" y="2194560"/>
-            <a:ext cx="4892040" cy="1188720"/>
-          </a:xfrm>
-          <a:prstGeom prst="rect">
-            <a:avLst/>
-          </a:prstGeom>
-          <a:noFill/>
-          <a:ln/>
-        </p:spPr>
-        <p:txBody>
-          <a:bodyPr wrap="square" lIns="0" tIns="0" rIns="0" bIns="0" rtlCol="0" anchor="t"/>
-          <a:lstStyle/>
-          <a:p>
-            <a:pPr indent="0" marL="0">
-              <a:buNone/>
-            </a:pPr>
-            <a:r>
-              <a:rPr lang="en-US" sz="1500" dirty="0">
-                <a:solidFill>
-                  <a:srgbClr val="FFFFFF"/>
-                </a:solidFill>
-                <a:latin typeface="Calibri" pitchFamily="34" charset="0"/>
-                <a:ea typeface="Calibri" pitchFamily="34" charset="-122"/>
-                <a:cs typeface="Calibri" pitchFamily="34" charset="-120"/>
-              </a:rPr>
-              <a:t>Twelve renovation providers carry 3 to 4 yearly prices each (43 points in total). Twenty come from archived provider pages found with the archive-prices tool.</a:t>
-            </a:r>
-            <a:endParaRPr lang="en-US" sz="1500" dirty="0"/>
-          </a:p>
-        </p:txBody>
-      </p:sp>
-      <p:sp>
-        <p:nvSpPr>
-          <p:cNvPr id="6" name="card"/>
-          <p:cNvSpPr/>
-          <p:nvPr/>
-        </p:nvSpPr>
-        <p:spPr>
-          <a:xfrm>
-            <a:off x="6172200" y="1417320"/>
-            <a:ext cx="5440680" cy="2103120"/>
-          </a:xfrm>
-          <a:prstGeom prst="roundRect">
-            <a:avLst>
-              <a:gd name="adj" fmla="val 3478"/>
-            </a:avLst>
-          </a:prstGeom>
-          <a:solidFill>
-            <a:srgbClr val="EEF1F3"/>
-          </a:solidFill>
-          <a:ln w="12700">
-            <a:solidFill>
-              <a:srgbClr val="EEF1F3"/>
-            </a:solidFill>
-            <a:prstDash val="solid"/>
-          </a:ln>
-        </p:spPr>
-      </p:sp>
-      <p:sp>
-        <p:nvSpPr>
-          <p:cNvPr id="7" name="Text 5"/>
-          <p:cNvSpPr txBox="1"/>
-          <p:nvPr/>
-        </p:nvSpPr>
-        <p:spPr>
-          <a:xfrm>
-            <a:off x="6446520" y="1645920"/>
-            <a:ext cx="4892040" cy="411480"/>
-          </a:xfrm>
-          <a:prstGeom prst="rect">
-            <a:avLst/>
-          </a:prstGeom>
-          <a:noFill/>
-          <a:ln/>
-        </p:spPr>
-        <p:txBody>
-          <a:bodyPr wrap="square" lIns="0" tIns="0" rIns="0" bIns="0" rtlCol="0" anchor="t"/>
-          <a:lstStyle/>
-          <a:p>
-            <a:pPr indent="0" marL="0">
-              <a:buNone/>
-            </a:pPr>
-            <a:r>
-              <a:rPr lang="en-US" sz="2000" b="1" dirty="0">
-                <a:solidFill>
-                  <a:srgbClr val="006781"/>
-                </a:solidFill>
-                <a:latin typeface="Cambria" pitchFamily="34" charset="0"/>
-                <a:ea typeface="Cambria" pitchFamily="34" charset="-122"/>
-                <a:cs typeface="Cambria" pitchFamily="34" charset="-120"/>
-              </a:rPr>
-              <a:t>Official data, not articles</a:t>
-            </a:r>
-            <a:endParaRPr lang="en-US" sz="2000" dirty="0"/>
-          </a:p>
-        </p:txBody>
-      </p:sp>
-      <p:sp>
-        <p:nvSpPr>
-          <p:cNvPr id="8" name="Text 6"/>
-          <p:cNvSpPr txBox="1"/>
-          <p:nvPr/>
-        </p:nvSpPr>
-        <p:spPr>
-          <a:xfrm>
-            <a:off x="6446520" y="2194560"/>
-            <a:ext cx="4892040" cy="1188720"/>
-          </a:xfrm>
-          <a:prstGeom prst="rect">
-            <a:avLst/>
-          </a:prstGeom>
-          <a:noFill/>
-          <a:ln/>
-        </p:spPr>
-        <p:txBody>
-          <a:bodyPr wrap="square" lIns="0" tIns="0" rIns="0" bIns="0" rtlCol="0" anchor="t"/>
-          <a:lstStyle/>
-          <a:p>
-            <a:pPr indent="0" marL="0">
-              <a:buNone/>
-            </a:pPr>
-            <a:r>
-              <a:rPr lang="en-US" sz="1500" dirty="0">
-                <a:solidFill>
-                  <a:srgbClr val="181C1E"/>
-                </a:solidFill>
-                <a:latin typeface="Calibri" pitchFamily="34" charset="0"/>
-                <a:ea typeface="Calibri" pitchFamily="34" charset="-122"/>
-                <a:cs typeface="Calibri" pitchFamily="34" charset="-120"/>
-              </a:rPr>
-              <a:t>HDB resale medians by town and flat type from data.gov.sg (about 244k sales since 2017) and URA private indices from SingStat.</a:t>
-            </a:r>
-            <a:endParaRPr lang="en-US" sz="1500" dirty="0"/>
-          </a:p>
-        </p:txBody>
-      </p:sp>
-      <p:sp>
-        <p:nvSpPr>
-          <p:cNvPr id="9" name="card"/>
-          <p:cNvSpPr/>
-          <p:nvPr/>
-        </p:nvSpPr>
-        <p:spPr>
-          <a:xfrm>
-            <a:off x="548640" y="3749040"/>
-            <a:ext cx="5440680" cy="2103120"/>
-          </a:xfrm>
-          <a:prstGeom prst="roundRect">
-            <a:avLst>
-              <a:gd name="adj" fmla="val 3478"/>
-            </a:avLst>
-          </a:prstGeom>
-          <a:solidFill>
-            <a:srgbClr val="EEF1F3"/>
-          </a:solidFill>
-          <a:ln w="12700">
-            <a:solidFill>
-              <a:srgbClr val="EEF1F3"/>
-            </a:solidFill>
-            <a:prstDash val="solid"/>
-          </a:ln>
-        </p:spPr>
-      </p:sp>
-      <p:sp>
-        <p:nvSpPr>
-          <p:cNvPr id="10" name="Text 8"/>
-          <p:cNvSpPr txBox="1"/>
-          <p:nvPr/>
-        </p:nvSpPr>
-        <p:spPr>
-          <a:xfrm>
-            <a:off x="822960" y="3977640"/>
-            <a:ext cx="4892040" cy="411480"/>
-          </a:xfrm>
-          <a:prstGeom prst="rect">
-            <a:avLst/>
-          </a:prstGeom>
-          <a:noFill/>
-          <a:ln/>
-        </p:spPr>
-        <p:txBody>
-          <a:bodyPr wrap="square" lIns="0" tIns="0" rIns="0" bIns="0" rtlCol="0" anchor="t"/>
-          <a:lstStyle/>
-          <a:p>
-            <a:pPr indent="0" marL="0">
-              <a:buNone/>
-            </a:pPr>
-            <a:r>
-              <a:rPr lang="en-US" sz="2000" b="1" dirty="0">
-                <a:solidFill>
-                  <a:srgbClr val="006781"/>
-                </a:solidFill>
-                <a:latin typeface="Cambria" pitchFamily="34" charset="0"/>
-                <a:ea typeface="Cambria" pitchFamily="34" charset="-122"/>
-                <a:cs typeface="Cambria" pitchFamily="34" charset="-120"/>
-              </a:rPr>
-              <a:t>Rates from history</a:t>
-            </a:r>
-            <a:endParaRPr lang="en-US" sz="2000" dirty="0"/>
-          </a:p>
-        </p:txBody>
-      </p:sp>
-      <p:sp>
-        <p:nvSpPr>
-          <p:cNvPr id="11" name="Text 9"/>
-          <p:cNvSpPr txBox="1"/>
-          <p:nvPr/>
-        </p:nvSpPr>
-        <p:spPr>
-          <a:xfrm>
-            <a:off x="822960" y="4526280"/>
-            <a:ext cx="4892040" cy="1188720"/>
-          </a:xfrm>
-          <a:prstGeom prst="rect">
-            <a:avLst/>
-          </a:prstGeom>
-          <a:noFill/>
-          <a:ln/>
-        </p:spPr>
-        <p:txBody>
-          <a:bodyPr wrap="square" lIns="0" tIns="0" rIns="0" bIns="0" rtlCol="0" anchor="t"/>
-          <a:lstStyle/>
-          <a:p>
-            <a:pPr indent="0" marL="0">
-              <a:buNone/>
-            </a:pPr>
-            <a:r>
-              <a:rPr lang="en-US" sz="1500" dirty="0">
-                <a:solidFill>
-                  <a:srgbClr val="181C1E"/>
-                </a:solidFill>
-                <a:latin typeface="Calibri" pitchFamily="34" charset="0"/>
-                <a:ea typeface="Calibri" pitchFamily="34" charset="-122"/>
-                <a:cs typeface="Calibri" pitchFamily="34" charset="-120"/>
-              </a:rPr>
-              <a:t>Future prices compound the previous 3 years, the method you set. Low and high rates are the weakest and strongest of those years.</a:t>
-            </a:r>
-            <a:endParaRPr lang="en-US" sz="1500" dirty="0"/>
-          </a:p>
-        </p:txBody>
-      </p:sp>
-      <p:sp>
-        <p:nvSpPr>
-          <p:cNvPr id="12" name="card"/>
-          <p:cNvSpPr/>
-          <p:nvPr/>
-        </p:nvSpPr>
-        <p:spPr>
-          <a:xfrm>
-            <a:off x="6172200" y="3749040"/>
-            <a:ext cx="5440680" cy="2103120"/>
-          </a:xfrm>
-          <a:prstGeom prst="roundRect">
-            <a:avLst>
-              <a:gd name="adj" fmla="val 3478"/>
-            </a:avLst>
-          </a:prstGeom>
-          <a:solidFill>
-            <a:srgbClr val="EEF1F3"/>
-          </a:solidFill>
-          <a:ln w="12700">
-            <a:solidFill>
-              <a:srgbClr val="EEF1F3"/>
-            </a:solidFill>
-            <a:prstDash val="solid"/>
-          </a:ln>
-        </p:spPr>
-      </p:sp>
-      <p:sp>
-        <p:nvSpPr>
-          <p:cNvPr id="13" name="Text 11"/>
-          <p:cNvSpPr txBox="1"/>
-          <p:nvPr/>
-        </p:nvSpPr>
-        <p:spPr>
-          <a:xfrm>
-            <a:off x="6446520" y="3977640"/>
-            <a:ext cx="4892040" cy="411480"/>
-          </a:xfrm>
-          <a:prstGeom prst="rect">
-            <a:avLst/>
-          </a:prstGeom>
-          <a:noFill/>
-          <a:ln/>
-        </p:spPr>
-        <p:txBody>
-          <a:bodyPr wrap="square" lIns="0" tIns="0" rIns="0" bIns="0" rtlCol="0" anchor="t"/>
-          <a:lstStyle/>
-          <a:p>
-            <a:pPr indent="0" marL="0">
-              <a:buNone/>
-            </a:pPr>
-            <a:r>
-              <a:rPr lang="en-US" sz="2000" b="1" dirty="0">
-                <a:solidFill>
-                  <a:srgbClr val="006781"/>
-                </a:solidFill>
-                <a:latin typeface="Cambria" pitchFamily="34" charset="0"/>
-                <a:ea typeface="Cambria" pitchFamily="34" charset="-122"/>
-                <a:cs typeface="Cambria" pitchFamily="34" charset="-120"/>
-              </a:rPr>
-              <a:t>Reasons on hover</a:t>
-            </a:r>
-            <a:endParaRPr lang="en-US" sz="2000" dirty="0"/>
-          </a:p>
-        </p:txBody>
-      </p:sp>
-      <p:sp>
-        <p:nvSpPr>
-          <p:cNvPr id="14" name="Text 12"/>
-          <p:cNvSpPr txBox="1"/>
-          <p:nvPr/>
-        </p:nvSpPr>
-        <p:spPr>
-          <a:xfrm>
-            <a:off x="6446520" y="4526280"/>
-            <a:ext cx="4892040" cy="1188720"/>
-          </a:xfrm>
-          <a:prstGeom prst="rect">
-            <a:avLst/>
-          </a:prstGeom>
-          <a:noFill/>
-          <a:ln/>
-        </p:spPr>
-        <p:txBody>
-          <a:bodyPr wrap="square" lIns="0" tIns="0" rIns="0" bIns="0" rtlCol="0" anchor="t"/>
-          <a:lstStyle/>
-          <a:p>
-            <a:pPr indent="0" marL="0">
-              <a:buNone/>
-            </a:pPr>
-            <a:r>
-              <a:rPr lang="en-US" sz="1500" dirty="0">
-                <a:solidFill>
-                  <a:srgbClr val="181C1E"/>
-                </a:solidFill>
-                <a:latin typeface="Calibri" pitchFamily="34" charset="0"/>
-                <a:ea typeface="Calibri" pitchFamily="34" charset="-122"/>
-                <a:cs typeface="Calibri" pitchFamily="34" charset="-120"/>
-              </a:rPr>
-              <a:t>Every assumption has a written rationale: where the figure came from and how it was worked out.</a:t>
-            </a:r>
-            <a:endParaRPr lang="en-US" sz="1500" dirty="0"/>
-          </a:p>
-        </p:txBody>
-      </p:sp>
-      <p:sp>
-        <p:nvSpPr>
-          <p:cNvPr id="15" name="Text 13"/>
-          <p:cNvSpPr txBox="1"/>
-          <p:nvPr/>
-        </p:nvSpPr>
-        <p:spPr>
-          <a:xfrm>
-            <a:off x="548640" y="6172200"/>
-            <a:ext cx="10607040" cy="365760"/>
-          </a:xfrm>
-          <a:prstGeom prst="rect">
-            <a:avLst/>
-          </a:prstGeom>
-          <a:noFill/>
-          <a:ln/>
-        </p:spPr>
-        <p:txBody>
-          <a:bodyPr wrap="square" lIns="0" tIns="0" rIns="0" bIns="0" rtlCol="0" anchor="t"/>
-          <a:lstStyle/>
-          <a:p>
-            <a:pPr indent="0" marL="0">
-              <a:buNone/>
-            </a:pPr>
-            <a:r>
-              <a:rPr lang="en-US" sz="1100" dirty="0">
-                <a:solidFill>
-                  <a:srgbClr val="3F484D"/>
-                </a:solidFill>
-                <a:latin typeface="Calibri" pitchFamily="34" charset="0"/>
-                <a:ea typeface="Calibri" pitchFamily="34" charset="-122"/>
-                <a:cs typeface="Calibri" pitchFamily="34" charset="-120"/>
-              </a:rPr>
-              <a:t>Source: hdb-renovation-cost and singapore-property-value calculators.</a:t>
-            </a:r>
-            <a:endParaRPr lang="en-US" sz="1100" dirty="0"/>
-          </a:p>
-        </p:txBody>
-      </p:sp>
-      <p:sp>
-        <p:nvSpPr>
-          <p:cNvPr id="25" name="Slide Number Placeholder 0"/>
-          <p:cNvSpPr>
-            <a:spLocks noGrp="1"/>
-          </p:cNvSpPr>
-          <p:nvPr>
-            <p:ph type="sldNum" sz="quarter" idx="4294967295"/>
-          </p:nvPr>
-        </p:nvSpPr>
-        <p:spPr>
-          <a:xfrm>
-            <a:off x="11247120" y="6446520"/>
-            <a:ext cx="548640" cy="274320"/>
-          </a:xfrm>
-          <a:prstGeom prst="rect">
-            <a:avLst/>
-          </a:prstGeom>
-          <a:extLst>
-            <a:ext uri="{C572A759-6A51-4108-AA02-DFA0A04FC94B}">
-              <ma14:wrappingTextBoxFlag xmlns:ma14="http://schemas.microsoft.com/office/mac/drawingml/2011/main" val="0"/>
-            </a:ext>
-          </a:extLst>
-        </p:spPr>
-        <p:txBody>
-          <a:bodyPr/>
-          <a:lstStyle>
-            <a:lvl1pPr>
-              <a:defRPr sz="1000">
-                <a:solidFill>
-                  <a:srgbClr val="3F484D"/>
-                </a:solidFill>
-              </a:defRPr>
-            </a:lvl1pPr>
-          </a:lstStyle>
-          <a:p>
-            <a:pPr algn="l"/>
-            <a:fld id="{F7021451-1387-4CA6-816F-3879F97B5CBC}" type="slidenum">
-              <a:rPr b="0" lang="en-US"/>
-              <a:t>5</a:t>
-            </a:fld>
-            <a:endParaRPr lang="en-US"/>
-          </a:p>
-        </p:txBody>
-      </p:sp>
-    </p:spTree>
-  </p:cSld>
-  <p:clrMapOvr>
-    <a:masterClrMapping/>
-  </p:clrMapOvr>
-</p:sld>
-</file>
-
-<file path=ppt/slides/slide6.xml><?xml version="1.0" encoding="utf-8"?>
-<p:sld xmlns:a="http://schemas.openxmlformats.org/drawingml/2006/main" xmlns:r="http://schemas.openxmlformats.org/officeDocument/2006/relationships" xmlns:p="http://schemas.openxmlformats.org/presentationml/2006/main">
-  <p:cSld name="Slide 6">
-    <p:spTree>
-      <p:nvGrpSpPr>
-        <p:cNvPr id="1" name=""/>
-        <p:cNvGrpSpPr/>
-        <p:nvPr/>
-      </p:nvGrpSpPr>
-      <p:grpSpPr>
-        <a:xfrm>
-          <a:off x="0" y="0"/>
-          <a:ext cx="0" cy="0"/>
-          <a:chOff x="0" y="0"/>
-          <a:chExt cx="0" cy="0"/>
-        </a:xfrm>
-      </p:grpSpPr>
-      <p:sp>
-        <p:nvSpPr>
-          <p:cNvPr id="2" name="Text 0"/>
-          <p:cNvSpPr/>
-          <p:nvPr>
-            <p:ph idx="100" type="title" hasCustomPrompt="1"/>
-          </p:nvPr>
-        </p:nvSpPr>
-        <p:spPr>
-          <a:xfrm>
-            <a:off x="548640" y="365760"/>
-            <a:ext cx="11064240" cy="822960"/>
-          </a:xfrm>
-          <a:prstGeom prst="rect">
-            <a:avLst/>
-          </a:prstGeom>
-          <a:noFill/>
-          <a:ln/>
-        </p:spPr>
-        <p:txBody>
-          <a:bodyPr wrap="square" lIns="0" tIns="0" rIns="0" bIns="0" rtlCol="0" anchor="ctr"/>
-          <a:lstStyle/>
-          <a:p>
-            <a:pPr algn="l" indent="0" marL="0">
-              <a:buNone/>
-            </a:pPr>
-            <a:r>
-              <a:rPr lang="en-US" sz="3200" b="1" dirty="0">
-                <a:solidFill>
-                  <a:srgbClr val="001F29"/>
-                </a:solidFill>
-                <a:latin typeface="Cambria" pitchFamily="34" charset="0"/>
-                <a:ea typeface="Cambria" pitchFamily="34" charset="-122"/>
-                <a:cs typeface="Cambria" pitchFamily="34" charset="-120"/>
-              </a:rPr>
               <a:t>Three rounds of improvements</a:t>
             </a:r>
             <a:endParaRPr lang="en-US" sz="3200" dirty="0"/>
@@ -14109,7 +9985,7 @@
             <a:pPr algn="l"/>
             <a:fld id="{F7021451-1387-4CA6-816F-3879F97B5CBC}" type="slidenum">
               <a:rPr b="0" lang="en-US"/>
-              <a:t>6</a:t>
+              <a:t>5</a:t>
             </a:fld>
             <a:endParaRPr lang="en-US"/>
           </a:p>
@@ -14123,9 +9999,9 @@
 </p:sld>
 </file>
 
-<file path=ppt/slides/slide7.xml><?xml version="1.0" encoding="utf-8"?>
+<file path=ppt/slides/slide6.xml><?xml version="1.0" encoding="utf-8"?>
 <p:sld xmlns:a="http://schemas.openxmlformats.org/drawingml/2006/main" xmlns:r="http://schemas.openxmlformats.org/officeDocument/2006/relationships" xmlns:p="http://schemas.openxmlformats.org/presentationml/2006/main">
-  <p:cSld name="Slide 7">
+  <p:cSld name="Slide 6">
     <p:spTree>
       <p:nvGrpSpPr>
         <p:cNvPr id="1" name=""/>
@@ -14183,7 +10059,7 @@
       </p:sp>
       <p:graphicFrame>
         <p:nvGraphicFramePr>
-          <p:cNvPr id="8" name="improvements table"/>
+          <p:cNvPr id="7" name="improvements table"/>
           <p:cNvGraphicFramePr>
             <a:graphicFrameLocks noGrp="1"/>
           </p:cNvGraphicFramePr>
@@ -16072,7 +11948,7 @@
             <a:pPr algn="l"/>
             <a:fld id="{F7021451-1387-4CA6-816F-3879F97B5CBC}" type="slidenum">
               <a:rPr b="0" lang="en-US"/>
-              <a:t>7</a:t>
+              <a:t>6</a:t>
             </a:fld>
             <a:endParaRPr lang="en-US"/>
           </a:p>
@@ -16086,9 +11962,9 @@
 </p:sld>
 </file>
 
-<file path=ppt/slides/slide8.xml><?xml version="1.0" encoding="utf-8"?>
+<file path=ppt/slides/slide7.xml><?xml version="1.0" encoding="utf-8"?>
 <p:sld xmlns:a="http://schemas.openxmlformats.org/drawingml/2006/main" xmlns:r="http://schemas.openxmlformats.org/officeDocument/2006/relationships" xmlns:p="http://schemas.openxmlformats.org/presentationml/2006/main">
-  <p:cSld name="Slide 8">
+  <p:cSld name="Slide 7">
     <p:spTree>
       <p:nvGrpSpPr>
         <p:cNvPr id="1" name=""/>
@@ -16146,7 +12022,7 @@
       </p:sp>
       <p:graphicFrame>
         <p:nvGraphicFramePr>
-          <p:cNvPr id="9" name="additions table"/>
+          <p:cNvPr id="8" name="additions table"/>
           <p:cNvGraphicFramePr>
             <a:graphicFrameLocks noGrp="1"/>
           </p:cNvGraphicFramePr>
@@ -17641,7 +13517,7 @@
             <a:pPr algn="l"/>
             <a:fld id="{F7021451-1387-4CA6-816F-3879F97B5CBC}" type="slidenum">
               <a:rPr b="0" lang="en-US"/>
-              <a:t>8</a:t>
+              <a:t>7</a:t>
             </a:fld>
             <a:endParaRPr lang="en-US"/>
           </a:p>
@@ -17655,9 +13531,9 @@
 </p:sld>
 </file>
 
-<file path=ppt/slides/slide9.xml><?xml version="1.0" encoding="utf-8"?>
+<file path=ppt/slides/slide8.xml><?xml version="1.0" encoding="utf-8"?>
 <p:sld xmlns:a="http://schemas.openxmlformats.org/drawingml/2006/main" xmlns:r="http://schemas.openxmlformats.org/officeDocument/2006/relationships" xmlns:p="http://schemas.openxmlformats.org/presentationml/2006/main">
-  <p:cSld name="Slide 9">
+  <p:cSld name="Slide 8">
     <p:spTree>
       <p:nvGrpSpPr>
         <p:cNvPr id="1" name=""/>
@@ -17935,6 +13811,3471 @@
                 <a:cs typeface="Calibri" pitchFamily="34" charset="-120"/>
               </a:rPr>
               <a:t>Measured token counts from each build log; SGD price is our estimate. The Pokémon build had 4 later refinements (S$8.9 more).</a:t>
+            </a:r>
+            <a:endParaRPr lang="en-US" sz="1100" dirty="0"/>
+          </a:p>
+        </p:txBody>
+      </p:sp>
+      <p:sp>
+        <p:nvSpPr>
+          <p:cNvPr id="25" name="Slide Number Placeholder 0"/>
+          <p:cNvSpPr>
+            <a:spLocks noGrp="1"/>
+          </p:cNvSpPr>
+          <p:nvPr>
+            <p:ph type="sldNum" sz="quarter" idx="4294967295"/>
+          </p:nvPr>
+        </p:nvSpPr>
+        <p:spPr>
+          <a:xfrm>
+            <a:off x="11247120" y="6446520"/>
+            <a:ext cx="548640" cy="274320"/>
+          </a:xfrm>
+          <a:prstGeom prst="rect">
+            <a:avLst/>
+          </a:prstGeom>
+          <a:extLst>
+            <a:ext uri="{C572A759-6A51-4108-AA02-DFA0A04FC94B}">
+              <ma14:wrappingTextBoxFlag xmlns:ma14="http://schemas.microsoft.com/office/mac/drawingml/2011/main" val="0"/>
+            </a:ext>
+          </a:extLst>
+        </p:spPr>
+        <p:txBody>
+          <a:bodyPr/>
+          <a:lstStyle>
+            <a:lvl1pPr>
+              <a:defRPr sz="1000">
+                <a:solidFill>
+                  <a:srgbClr val="3F484D"/>
+                </a:solidFill>
+              </a:defRPr>
+            </a:lvl1pPr>
+          </a:lstStyle>
+          <a:p>
+            <a:pPr algn="l"/>
+            <a:fld id="{F7021451-1387-4CA6-816F-3879F97B5CBC}" type="slidenum">
+              <a:rPr b="0" lang="en-US"/>
+              <a:t>8</a:t>
+            </a:fld>
+            <a:endParaRPr lang="en-US"/>
+          </a:p>
+        </p:txBody>
+      </p:sp>
+    </p:spTree>
+  </p:cSld>
+  <p:clrMapOvr>
+    <a:masterClrMapping/>
+  </p:clrMapOvr>
+</p:sld>
+</file>
+
+<file path=ppt/slides/slide9.xml><?xml version="1.0" encoding="utf-8"?>
+<p:sld xmlns:a="http://schemas.openxmlformats.org/drawingml/2006/main" xmlns:r="http://schemas.openxmlformats.org/officeDocument/2006/relationships" xmlns:p="http://schemas.openxmlformats.org/presentationml/2006/main">
+  <p:cSld name="Slide 9">
+    <p:spTree>
+      <p:nvGrpSpPr>
+        <p:cNvPr id="1" name=""/>
+        <p:cNvGrpSpPr/>
+        <p:nvPr/>
+      </p:nvGrpSpPr>
+      <p:grpSpPr>
+        <a:xfrm>
+          <a:off x="0" y="0"/>
+          <a:ext cx="0" cy="0"/>
+          <a:chOff x="0" y="0"/>
+          <a:chExt cx="0" cy="0"/>
+        </a:xfrm>
+      </p:grpSpPr>
+      <p:sp>
+        <p:nvSpPr>
+          <p:cNvPr id="2" name="Text 0"/>
+          <p:cNvSpPr/>
+          <p:nvPr>
+            <p:ph idx="100" type="title" hasCustomPrompt="1"/>
+          </p:nvPr>
+        </p:nvSpPr>
+        <p:spPr>
+          <a:xfrm>
+            <a:off x="548640" y="365760"/>
+            <a:ext cx="11064240" cy="822960"/>
+          </a:xfrm>
+          <a:prstGeom prst="rect">
+            <a:avLst/>
+          </a:prstGeom>
+          <a:noFill/>
+          <a:ln/>
+        </p:spPr>
+        <p:txBody>
+          <a:bodyPr wrap="square" lIns="0" tIns="0" rIns="0" bIns="0" rtlCol="0" anchor="ctr"/>
+          <a:lstStyle/>
+          <a:p>
+            <a:pPr algn="l" indent="0" marL="0">
+              <a:buNone/>
+            </a:pPr>
+            <a:r>
+              <a:rPr lang="en-US" sz="3200" b="1" dirty="0">
+                <a:solidFill>
+                  <a:srgbClr val="001F29"/>
+                </a:solidFill>
+                <a:latin typeface="Cambria" pitchFamily="34" charset="0"/>
+                <a:ea typeface="Cambria" pitchFamily="34" charset="-122"/>
+                <a:cs typeface="Cambria" pitchFamily="34" charset="-120"/>
+              </a:rPr>
+              <a:t>HDB renovation build: line-by-line cost</a:t>
+            </a:r>
+            <a:endParaRPr lang="en-US" sz="3200" dirty="0"/>
+          </a:p>
+        </p:txBody>
+      </p:sp>
+      <p:graphicFrame>
+        <p:nvGraphicFramePr>
+          <p:cNvPr id="10" name="line item table"/>
+          <p:cNvGraphicFramePr>
+            <a:graphicFrameLocks noGrp="1"/>
+          </p:cNvGraphicFramePr>
+          <p:nvPr>
+            <p:extLst>
+              <p:ext uri="{D42A27DB-BD31-4B8C-83A1-F6EECF244321}">
+                <p14:modId xmlns:p14="http://schemas.microsoft.com/office/powerpoint/2010/main" val="1579011935"/>
+              </p:ext>
+            </p:extLst>
+          </p:nvPr>
+        </p:nvGraphicFramePr>
+        <p:xfrm>
+          <a:off x="548640" y="1371600"/>
+          <a:ext cx="11064240" cy="914400"/>
+        </p:xfrm>
+        <a:graphic>
+          <a:graphicData uri="http://schemas.openxmlformats.org/drawingml/2006/table">
+            <a:tbl>
+              <a:tblPr/>
+              <a:tblGrid>
+                <a:gridCol w="4023360"/>
+                <a:gridCol w="2926080"/>
+                <a:gridCol w="1645920"/>
+                <a:gridCol w="1097280"/>
+                <a:gridCol w="1371600"/>
+              </a:tblGrid>
+              <a:tr h="411480">
+                <a:tc>
+                  <a:txBody>
+                    <a:bodyPr/>
+                    <a:lstStyle/>
+                    <a:p>
+                      <a:pPr indent="0" marL="0">
+                        <a:buNone/>
+                      </a:pPr>
+                      <a:r>
+                        <a:rPr lang="en-US" sz="1300" b="1" dirty="0">
+                          <a:solidFill>
+                            <a:srgbClr val="FFFFFF"/>
+                          </a:solidFill>
+                          <a:latin typeface="Calibri" pitchFamily="34" charset="0"/>
+                          <a:ea typeface="Calibri" pitchFamily="34" charset="-122"/>
+                          <a:cs typeface="Calibri" pitchFamily="34" charset="-120"/>
+                        </a:rPr>
+                        <a:t>Step</a:t>
+                      </a:r>
+                      <a:endParaRPr lang="en-US" sz="1300" dirty="0">
+                        <a:latin typeface="Calibri" charset="0"/>
+                        <a:ea typeface="Calibri" charset="0"/>
+                        <a:cs typeface="Calibri" charset="0"/>
+                      </a:endParaRPr>
+                    </a:p>
+                  </a:txBody>
+                  <a:tcPr marL="91440" marR="91440" marT="45720" marB="45720" anchor="ctr">
+                    <a:lnL w="12700" cap="flat" cmpd="sng" algn="ctr">
+                      <a:solidFill>
+                        <a:srgbClr val="D5DADD"/>
+                      </a:solidFill>
+                      <a:prstDash val="solid"/>
+                      <a:round/>
+                      <a:headEnd type="none" w="med" len="med"/>
+                      <a:tailEnd type="none" w="med" len="med"/>
+                    </a:lnL>
+                    <a:lnR w="12700" cap="flat" cmpd="sng" algn="ctr">
+                      <a:solidFill>
+                        <a:srgbClr val="D5DADD"/>
+                      </a:solidFill>
+                      <a:prstDash val="solid"/>
+                      <a:round/>
+                      <a:headEnd type="none" w="med" len="med"/>
+                      <a:tailEnd type="none" w="med" len="med"/>
+                    </a:lnR>
+                    <a:lnT w="12700" cap="flat" cmpd="sng" algn="ctr">
+                      <a:solidFill>
+                        <a:srgbClr val="D5DADD"/>
+                      </a:solidFill>
+                      <a:prstDash val="solid"/>
+                      <a:round/>
+                      <a:headEnd type="none" w="med" len="med"/>
+                      <a:tailEnd type="none" w="med" len="med"/>
+                    </a:lnT>
+                    <a:lnB w="12700" cap="flat" cmpd="sng" algn="ctr">
+                      <a:solidFill>
+                        <a:srgbClr val="D5DADD"/>
+                      </a:solidFill>
+                      <a:prstDash val="solid"/>
+                      <a:round/>
+                      <a:headEnd type="none" w="med" len="med"/>
+                      <a:tailEnd type="none" w="med" len="med"/>
+                    </a:lnB>
+                    <a:solidFill>
+                      <a:srgbClr val="006781"/>
+                    </a:solidFill>
+                  </a:tcPr>
+                </a:tc>
+                <a:tc>
+                  <a:txBody>
+                    <a:bodyPr/>
+                    <a:lstStyle/>
+                    <a:p>
+                      <a:pPr indent="0" marL="0">
+                        <a:buNone/>
+                      </a:pPr>
+                      <a:r>
+                        <a:rPr lang="en-US" sz="1300" b="1" dirty="0">
+                          <a:solidFill>
+                            <a:srgbClr val="FFFFFF"/>
+                          </a:solidFill>
+                          <a:latin typeface="Calibri" pitchFamily="34" charset="0"/>
+                          <a:ea typeface="Calibri" pitchFamily="34" charset="-122"/>
+                          <a:cs typeface="Calibri" pitchFamily="34" charset="-120"/>
+                        </a:rPr>
+                        <a:t>Measured usage</a:t>
+                      </a:r>
+                      <a:endParaRPr lang="en-US" sz="1300" dirty="0">
+                        <a:latin typeface="Calibri" charset="0"/>
+                        <a:ea typeface="Calibri" charset="0"/>
+                        <a:cs typeface="Calibri" charset="0"/>
+                      </a:endParaRPr>
+                    </a:p>
+                  </a:txBody>
+                  <a:tcPr marL="91440" marR="91440" marT="45720" marB="45720" anchor="ctr">
+                    <a:lnL w="12700" cap="flat" cmpd="sng" algn="ctr">
+                      <a:solidFill>
+                        <a:srgbClr val="D5DADD"/>
+                      </a:solidFill>
+                      <a:prstDash val="solid"/>
+                      <a:round/>
+                      <a:headEnd type="none" w="med" len="med"/>
+                      <a:tailEnd type="none" w="med" len="med"/>
+                    </a:lnL>
+                    <a:lnR w="12700" cap="flat" cmpd="sng" algn="ctr">
+                      <a:solidFill>
+                        <a:srgbClr val="D5DADD"/>
+                      </a:solidFill>
+                      <a:prstDash val="solid"/>
+                      <a:round/>
+                      <a:headEnd type="none" w="med" len="med"/>
+                      <a:tailEnd type="none" w="med" len="med"/>
+                    </a:lnR>
+                    <a:lnT w="12700" cap="flat" cmpd="sng" algn="ctr">
+                      <a:solidFill>
+                        <a:srgbClr val="D5DADD"/>
+                      </a:solidFill>
+                      <a:prstDash val="solid"/>
+                      <a:round/>
+                      <a:headEnd type="none" w="med" len="med"/>
+                      <a:tailEnd type="none" w="med" len="med"/>
+                    </a:lnT>
+                    <a:lnB w="12700" cap="flat" cmpd="sng" algn="ctr">
+                      <a:solidFill>
+                        <a:srgbClr val="D5DADD"/>
+                      </a:solidFill>
+                      <a:prstDash val="solid"/>
+                      <a:round/>
+                      <a:headEnd type="none" w="med" len="med"/>
+                      <a:tailEnd type="none" w="med" len="med"/>
+                    </a:lnB>
+                    <a:solidFill>
+                      <a:srgbClr val="006781"/>
+                    </a:solidFill>
+                  </a:tcPr>
+                </a:tc>
+                <a:tc>
+                  <a:txBody>
+                    <a:bodyPr/>
+                    <a:lstStyle/>
+                    <a:p>
+                      <a:pPr indent="0" marL="0">
+                        <a:buNone/>
+                      </a:pPr>
+                      <a:r>
+                        <a:rPr lang="en-US" sz="1300" b="1" dirty="0">
+                          <a:solidFill>
+                            <a:srgbClr val="FFFFFF"/>
+                          </a:solidFill>
+                          <a:latin typeface="Calibri" pitchFamily="34" charset="0"/>
+                          <a:ea typeface="Calibri" pitchFamily="34" charset="-122"/>
+                          <a:cs typeface="Calibri" pitchFamily="34" charset="-120"/>
+                        </a:rPr>
+                        <a:t>API rate</a:t>
+                      </a:r>
+                      <a:endParaRPr lang="en-US" sz="1300" dirty="0">
+                        <a:latin typeface="Calibri" charset="0"/>
+                        <a:ea typeface="Calibri" charset="0"/>
+                        <a:cs typeface="Calibri" charset="0"/>
+                      </a:endParaRPr>
+                    </a:p>
+                  </a:txBody>
+                  <a:tcPr marL="91440" marR="91440" marT="45720" marB="45720" anchor="ctr">
+                    <a:lnL w="12700" cap="flat" cmpd="sng" algn="ctr">
+                      <a:solidFill>
+                        <a:srgbClr val="D5DADD"/>
+                      </a:solidFill>
+                      <a:prstDash val="solid"/>
+                      <a:round/>
+                      <a:headEnd type="none" w="med" len="med"/>
+                      <a:tailEnd type="none" w="med" len="med"/>
+                    </a:lnL>
+                    <a:lnR w="12700" cap="flat" cmpd="sng" algn="ctr">
+                      <a:solidFill>
+                        <a:srgbClr val="D5DADD"/>
+                      </a:solidFill>
+                      <a:prstDash val="solid"/>
+                      <a:round/>
+                      <a:headEnd type="none" w="med" len="med"/>
+                      <a:tailEnd type="none" w="med" len="med"/>
+                    </a:lnR>
+                    <a:lnT w="12700" cap="flat" cmpd="sng" algn="ctr">
+                      <a:solidFill>
+                        <a:srgbClr val="D5DADD"/>
+                      </a:solidFill>
+                      <a:prstDash val="solid"/>
+                      <a:round/>
+                      <a:headEnd type="none" w="med" len="med"/>
+                      <a:tailEnd type="none" w="med" len="med"/>
+                    </a:lnT>
+                    <a:lnB w="12700" cap="flat" cmpd="sng" algn="ctr">
+                      <a:solidFill>
+                        <a:srgbClr val="D5DADD"/>
+                      </a:solidFill>
+                      <a:prstDash val="solid"/>
+                      <a:round/>
+                      <a:headEnd type="none" w="med" len="med"/>
+                      <a:tailEnd type="none" w="med" len="med"/>
+                    </a:lnB>
+                    <a:solidFill>
+                      <a:srgbClr val="006781"/>
+                    </a:solidFill>
+                  </a:tcPr>
+                </a:tc>
+                <a:tc>
+                  <a:txBody>
+                    <a:bodyPr/>
+                    <a:lstStyle/>
+                    <a:p>
+                      <a:pPr indent="0" marL="0">
+                        <a:buNone/>
+                      </a:pPr>
+                      <a:r>
+                        <a:rPr lang="en-US" sz="1300" b="1" dirty="0">
+                          <a:solidFill>
+                            <a:srgbClr val="FFFFFF"/>
+                          </a:solidFill>
+                          <a:latin typeface="Calibri" pitchFamily="34" charset="0"/>
+                          <a:ea typeface="Calibri" pitchFamily="34" charset="-122"/>
+                          <a:cs typeface="Calibri" pitchFamily="34" charset="-120"/>
+                        </a:rPr>
+                        <a:t>US$</a:t>
+                      </a:r>
+                      <a:endParaRPr lang="en-US" sz="1300" dirty="0">
+                        <a:latin typeface="Calibri" charset="0"/>
+                        <a:ea typeface="Calibri" charset="0"/>
+                        <a:cs typeface="Calibri" charset="0"/>
+                      </a:endParaRPr>
+                    </a:p>
+                  </a:txBody>
+                  <a:tcPr marL="91440" marR="91440" marT="45720" marB="45720" anchor="ctr">
+                    <a:lnL w="12700" cap="flat" cmpd="sng" algn="ctr">
+                      <a:solidFill>
+                        <a:srgbClr val="D5DADD"/>
+                      </a:solidFill>
+                      <a:prstDash val="solid"/>
+                      <a:round/>
+                      <a:headEnd type="none" w="med" len="med"/>
+                      <a:tailEnd type="none" w="med" len="med"/>
+                    </a:lnL>
+                    <a:lnR w="12700" cap="flat" cmpd="sng" algn="ctr">
+                      <a:solidFill>
+                        <a:srgbClr val="D5DADD"/>
+                      </a:solidFill>
+                      <a:prstDash val="solid"/>
+                      <a:round/>
+                      <a:headEnd type="none" w="med" len="med"/>
+                      <a:tailEnd type="none" w="med" len="med"/>
+                    </a:lnR>
+                    <a:lnT w="12700" cap="flat" cmpd="sng" algn="ctr">
+                      <a:solidFill>
+                        <a:srgbClr val="D5DADD"/>
+                      </a:solidFill>
+                      <a:prstDash val="solid"/>
+                      <a:round/>
+                      <a:headEnd type="none" w="med" len="med"/>
+                      <a:tailEnd type="none" w="med" len="med"/>
+                    </a:lnT>
+                    <a:lnB w="12700" cap="flat" cmpd="sng" algn="ctr">
+                      <a:solidFill>
+                        <a:srgbClr val="D5DADD"/>
+                      </a:solidFill>
+                      <a:prstDash val="solid"/>
+                      <a:round/>
+                      <a:headEnd type="none" w="med" len="med"/>
+                      <a:tailEnd type="none" w="med" len="med"/>
+                    </a:lnB>
+                    <a:solidFill>
+                      <a:srgbClr val="006781"/>
+                    </a:solidFill>
+                  </a:tcPr>
+                </a:tc>
+                <a:tc>
+                  <a:txBody>
+                    <a:bodyPr/>
+                    <a:lstStyle/>
+                    <a:p>
+                      <a:pPr indent="0" marL="0">
+                        <a:buNone/>
+                      </a:pPr>
+                      <a:r>
+                        <a:rPr lang="en-US" sz="1300" b="1" dirty="0">
+                          <a:solidFill>
+                            <a:srgbClr val="FFFFFF"/>
+                          </a:solidFill>
+                          <a:latin typeface="Calibri" pitchFamily="34" charset="0"/>
+                          <a:ea typeface="Calibri" pitchFamily="34" charset="-122"/>
+                          <a:cs typeface="Calibri" pitchFamily="34" charset="-120"/>
+                        </a:rPr>
+                        <a:t>S$</a:t>
+                      </a:r>
+                      <a:endParaRPr lang="en-US" sz="1300" dirty="0">
+                        <a:latin typeface="Calibri" charset="0"/>
+                        <a:ea typeface="Calibri" charset="0"/>
+                        <a:cs typeface="Calibri" charset="0"/>
+                      </a:endParaRPr>
+                    </a:p>
+                  </a:txBody>
+                  <a:tcPr marL="91440" marR="91440" marT="45720" marB="45720" anchor="ctr">
+                    <a:lnL w="12700" cap="flat" cmpd="sng" algn="ctr">
+                      <a:solidFill>
+                        <a:srgbClr val="D5DADD"/>
+                      </a:solidFill>
+                      <a:prstDash val="solid"/>
+                      <a:round/>
+                      <a:headEnd type="none" w="med" len="med"/>
+                      <a:tailEnd type="none" w="med" len="med"/>
+                    </a:lnL>
+                    <a:lnR w="12700" cap="flat" cmpd="sng" algn="ctr">
+                      <a:solidFill>
+                        <a:srgbClr val="D5DADD"/>
+                      </a:solidFill>
+                      <a:prstDash val="solid"/>
+                      <a:round/>
+                      <a:headEnd type="none" w="med" len="med"/>
+                      <a:tailEnd type="none" w="med" len="med"/>
+                    </a:lnR>
+                    <a:lnT w="12700" cap="flat" cmpd="sng" algn="ctr">
+                      <a:solidFill>
+                        <a:srgbClr val="D5DADD"/>
+                      </a:solidFill>
+                      <a:prstDash val="solid"/>
+                      <a:round/>
+                      <a:headEnd type="none" w="med" len="med"/>
+                      <a:tailEnd type="none" w="med" len="med"/>
+                    </a:lnT>
+                    <a:lnB w="12700" cap="flat" cmpd="sng" algn="ctr">
+                      <a:solidFill>
+                        <a:srgbClr val="D5DADD"/>
+                      </a:solidFill>
+                      <a:prstDash val="solid"/>
+                      <a:round/>
+                      <a:headEnd type="none" w="med" len="med"/>
+                      <a:tailEnd type="none" w="med" len="med"/>
+                    </a:lnB>
+                    <a:solidFill>
+                      <a:srgbClr val="006781"/>
+                    </a:solidFill>
+                  </a:tcPr>
+                </a:tc>
+              </a:tr>
+              <a:tr h="411480">
+                <a:tc>
+                  <a:txBody>
+                    <a:bodyPr/>
+                    <a:lstStyle/>
+                    <a:p>
+                      <a:pPr algn="l" indent="0" marL="0">
+                        <a:buNone/>
+                      </a:pPr>
+                      <a:r>
+                        <a:rPr lang="en-US" sz="1300" dirty="0">
+                          <a:solidFill>
+                            <a:srgbClr val="181C1E"/>
+                          </a:solidFill>
+                          <a:latin typeface="Calibri" pitchFamily="34" charset="0"/>
+                          <a:ea typeface="Calibri" pitchFamily="34" charset="-122"/>
+                          <a:cs typeface="Calibri" pitchFamily="34" charset="-120"/>
+                        </a:rPr>
+                        <a:t>Haiku reads pages: input</a:t>
+                      </a:r>
+                      <a:endParaRPr lang="en-US" sz="1300" dirty="0">
+                        <a:latin typeface="Calibri" charset="0"/>
+                        <a:ea typeface="Calibri" charset="0"/>
+                        <a:cs typeface="Calibri" charset="0"/>
+                      </a:endParaRPr>
+                    </a:p>
+                  </a:txBody>
+                  <a:tcPr marL="91440" marR="91440" marT="45720" marB="45720" anchor="ctr">
+                    <a:lnL w="12700" cap="flat" cmpd="sng" algn="ctr">
+                      <a:solidFill>
+                        <a:srgbClr val="D5DADD"/>
+                      </a:solidFill>
+                      <a:prstDash val="solid"/>
+                      <a:round/>
+                      <a:headEnd type="none" w="med" len="med"/>
+                      <a:tailEnd type="none" w="med" len="med"/>
+                    </a:lnL>
+                    <a:lnR w="12700" cap="flat" cmpd="sng" algn="ctr">
+                      <a:solidFill>
+                        <a:srgbClr val="D5DADD"/>
+                      </a:solidFill>
+                      <a:prstDash val="solid"/>
+                      <a:round/>
+                      <a:headEnd type="none" w="med" len="med"/>
+                      <a:tailEnd type="none" w="med" len="med"/>
+                    </a:lnR>
+                    <a:lnT w="12700" cap="flat" cmpd="sng" algn="ctr">
+                      <a:solidFill>
+                        <a:srgbClr val="D5DADD"/>
+                      </a:solidFill>
+                      <a:prstDash val="solid"/>
+                      <a:round/>
+                      <a:headEnd type="none" w="med" len="med"/>
+                      <a:tailEnd type="none" w="med" len="med"/>
+                    </a:lnT>
+                    <a:lnB w="12700" cap="flat" cmpd="sng" algn="ctr">
+                      <a:solidFill>
+                        <a:srgbClr val="D5DADD"/>
+                      </a:solidFill>
+                      <a:prstDash val="solid"/>
+                      <a:round/>
+                      <a:headEnd type="none" w="med" len="med"/>
+                      <a:tailEnd type="none" w="med" len="med"/>
+                    </a:lnB>
+                  </a:tcPr>
+                </a:tc>
+                <a:tc>
+                  <a:txBody>
+                    <a:bodyPr/>
+                    <a:lstStyle/>
+                    <a:p>
+                      <a:pPr algn="l" indent="0" marL="0">
+                        <a:buNone/>
+                      </a:pPr>
+                      <a:r>
+                        <a:rPr lang="en-US" sz="1300" dirty="0">
+                          <a:solidFill>
+                            <a:srgbClr val="181C1E"/>
+                          </a:solidFill>
+                          <a:latin typeface="Calibri" pitchFamily="34" charset="0"/>
+                          <a:ea typeface="Calibri" pitchFamily="34" charset="-122"/>
+                          <a:cs typeface="Calibri" pitchFamily="34" charset="-120"/>
+                        </a:rPr>
+                        <a:t>3,264,933 tokens</a:t>
+                      </a:r>
+                      <a:endParaRPr lang="en-US" sz="1300" dirty="0">
+                        <a:latin typeface="Calibri" charset="0"/>
+                        <a:ea typeface="Calibri" charset="0"/>
+                        <a:cs typeface="Calibri" charset="0"/>
+                      </a:endParaRPr>
+                    </a:p>
+                  </a:txBody>
+                  <a:tcPr marL="91440" marR="91440" marT="45720" marB="45720" anchor="ctr">
+                    <a:lnL w="12700" cap="flat" cmpd="sng" algn="ctr">
+                      <a:solidFill>
+                        <a:srgbClr val="D5DADD"/>
+                      </a:solidFill>
+                      <a:prstDash val="solid"/>
+                      <a:round/>
+                      <a:headEnd type="none" w="med" len="med"/>
+                      <a:tailEnd type="none" w="med" len="med"/>
+                    </a:lnL>
+                    <a:lnR w="12700" cap="flat" cmpd="sng" algn="ctr">
+                      <a:solidFill>
+                        <a:srgbClr val="D5DADD"/>
+                      </a:solidFill>
+                      <a:prstDash val="solid"/>
+                      <a:round/>
+                      <a:headEnd type="none" w="med" len="med"/>
+                      <a:tailEnd type="none" w="med" len="med"/>
+                    </a:lnR>
+                    <a:lnT w="12700" cap="flat" cmpd="sng" algn="ctr">
+                      <a:solidFill>
+                        <a:srgbClr val="D5DADD"/>
+                      </a:solidFill>
+                      <a:prstDash val="solid"/>
+                      <a:round/>
+                      <a:headEnd type="none" w="med" len="med"/>
+                      <a:tailEnd type="none" w="med" len="med"/>
+                    </a:lnT>
+                    <a:lnB w="12700" cap="flat" cmpd="sng" algn="ctr">
+                      <a:solidFill>
+                        <a:srgbClr val="D5DADD"/>
+                      </a:solidFill>
+                      <a:prstDash val="solid"/>
+                      <a:round/>
+                      <a:headEnd type="none" w="med" len="med"/>
+                      <a:tailEnd type="none" w="med" len="med"/>
+                    </a:lnB>
+                  </a:tcPr>
+                </a:tc>
+                <a:tc>
+                  <a:txBody>
+                    <a:bodyPr/>
+                    <a:lstStyle/>
+                    <a:p>
+                      <a:pPr algn="l" indent="0" marL="0">
+                        <a:buNone/>
+                      </a:pPr>
+                      <a:r>
+                        <a:rPr lang="en-US" sz="1300" dirty="0">
+                          <a:solidFill>
+                            <a:srgbClr val="181C1E"/>
+                          </a:solidFill>
+                          <a:latin typeface="Calibri" pitchFamily="34" charset="0"/>
+                          <a:ea typeface="Calibri" pitchFamily="34" charset="-122"/>
+                          <a:cs typeface="Calibri" pitchFamily="34" charset="-120"/>
+                        </a:rPr>
+                        <a:t>$0.10 / M</a:t>
+                      </a:r>
+                      <a:endParaRPr lang="en-US" sz="1300" dirty="0">
+                        <a:latin typeface="Calibri" charset="0"/>
+                        <a:ea typeface="Calibri" charset="0"/>
+                        <a:cs typeface="Calibri" charset="0"/>
+                      </a:endParaRPr>
+                    </a:p>
+                  </a:txBody>
+                  <a:tcPr marL="91440" marR="91440" marT="45720" marB="45720" anchor="ctr">
+                    <a:lnL w="12700" cap="flat" cmpd="sng" algn="ctr">
+                      <a:solidFill>
+                        <a:srgbClr val="D5DADD"/>
+                      </a:solidFill>
+                      <a:prstDash val="solid"/>
+                      <a:round/>
+                      <a:headEnd type="none" w="med" len="med"/>
+                      <a:tailEnd type="none" w="med" len="med"/>
+                    </a:lnL>
+                    <a:lnR w="12700" cap="flat" cmpd="sng" algn="ctr">
+                      <a:solidFill>
+                        <a:srgbClr val="D5DADD"/>
+                      </a:solidFill>
+                      <a:prstDash val="solid"/>
+                      <a:round/>
+                      <a:headEnd type="none" w="med" len="med"/>
+                      <a:tailEnd type="none" w="med" len="med"/>
+                    </a:lnR>
+                    <a:lnT w="12700" cap="flat" cmpd="sng" algn="ctr">
+                      <a:solidFill>
+                        <a:srgbClr val="D5DADD"/>
+                      </a:solidFill>
+                      <a:prstDash val="solid"/>
+                      <a:round/>
+                      <a:headEnd type="none" w="med" len="med"/>
+                      <a:tailEnd type="none" w="med" len="med"/>
+                    </a:lnT>
+                    <a:lnB w="12700" cap="flat" cmpd="sng" algn="ctr">
+                      <a:solidFill>
+                        <a:srgbClr val="D5DADD"/>
+                      </a:solidFill>
+                      <a:prstDash val="solid"/>
+                      <a:round/>
+                      <a:headEnd type="none" w="med" len="med"/>
+                      <a:tailEnd type="none" w="med" len="med"/>
+                    </a:lnB>
+                  </a:tcPr>
+                </a:tc>
+                <a:tc>
+                  <a:txBody>
+                    <a:bodyPr/>
+                    <a:lstStyle/>
+                    <a:p>
+                      <a:pPr algn="r" indent="0" marL="0">
+                        <a:buNone/>
+                      </a:pPr>
+                      <a:r>
+                        <a:rPr lang="en-US" sz="1300" dirty="0">
+                          <a:solidFill>
+                            <a:srgbClr val="181C1E"/>
+                          </a:solidFill>
+                          <a:latin typeface="Calibri" pitchFamily="34" charset="0"/>
+                          <a:ea typeface="Calibri" pitchFamily="34" charset="-122"/>
+                          <a:cs typeface="Calibri" pitchFamily="34" charset="-120"/>
+                        </a:rPr>
+                        <a:t>0.33</a:t>
+                      </a:r>
+                      <a:endParaRPr lang="en-US" sz="1300" dirty="0">
+                        <a:latin typeface="Calibri" charset="0"/>
+                        <a:ea typeface="Calibri" charset="0"/>
+                        <a:cs typeface="Calibri" charset="0"/>
+                      </a:endParaRPr>
+                    </a:p>
+                  </a:txBody>
+                  <a:tcPr marL="91440" marR="91440" marT="45720" marB="45720" anchor="ctr">
+                    <a:lnL w="12700" cap="flat" cmpd="sng" algn="ctr">
+                      <a:solidFill>
+                        <a:srgbClr val="D5DADD"/>
+                      </a:solidFill>
+                      <a:prstDash val="solid"/>
+                      <a:round/>
+                      <a:headEnd type="none" w="med" len="med"/>
+                      <a:tailEnd type="none" w="med" len="med"/>
+                    </a:lnL>
+                    <a:lnR w="12700" cap="flat" cmpd="sng" algn="ctr">
+                      <a:solidFill>
+                        <a:srgbClr val="D5DADD"/>
+                      </a:solidFill>
+                      <a:prstDash val="solid"/>
+                      <a:round/>
+                      <a:headEnd type="none" w="med" len="med"/>
+                      <a:tailEnd type="none" w="med" len="med"/>
+                    </a:lnR>
+                    <a:lnT w="12700" cap="flat" cmpd="sng" algn="ctr">
+                      <a:solidFill>
+                        <a:srgbClr val="D5DADD"/>
+                      </a:solidFill>
+                      <a:prstDash val="solid"/>
+                      <a:round/>
+                      <a:headEnd type="none" w="med" len="med"/>
+                      <a:tailEnd type="none" w="med" len="med"/>
+                    </a:lnT>
+                    <a:lnB w="12700" cap="flat" cmpd="sng" algn="ctr">
+                      <a:solidFill>
+                        <a:srgbClr val="D5DADD"/>
+                      </a:solidFill>
+                      <a:prstDash val="solid"/>
+                      <a:round/>
+                      <a:headEnd type="none" w="med" len="med"/>
+                      <a:tailEnd type="none" w="med" len="med"/>
+                    </a:lnB>
+                  </a:tcPr>
+                </a:tc>
+                <a:tc>
+                  <a:txBody>
+                    <a:bodyPr/>
+                    <a:lstStyle/>
+                    <a:p>
+                      <a:pPr algn="r" indent="0" marL="0">
+                        <a:buNone/>
+                      </a:pPr>
+                      <a:r>
+                        <a:rPr lang="en-US" sz="1300" dirty="0">
+                          <a:solidFill>
+                            <a:srgbClr val="181C1E"/>
+                          </a:solidFill>
+                          <a:latin typeface="Calibri" pitchFamily="34" charset="0"/>
+                          <a:ea typeface="Calibri" pitchFamily="34" charset="-122"/>
+                          <a:cs typeface="Calibri" pitchFamily="34" charset="-120"/>
+                        </a:rPr>
+                        <a:t>0.42</a:t>
+                      </a:r>
+                      <a:endParaRPr lang="en-US" sz="1300" dirty="0">
+                        <a:latin typeface="Calibri" charset="0"/>
+                        <a:ea typeface="Calibri" charset="0"/>
+                        <a:cs typeface="Calibri" charset="0"/>
+                      </a:endParaRPr>
+                    </a:p>
+                  </a:txBody>
+                  <a:tcPr marL="91440" marR="91440" marT="45720" marB="45720" anchor="ctr">
+                    <a:lnL w="12700" cap="flat" cmpd="sng" algn="ctr">
+                      <a:solidFill>
+                        <a:srgbClr val="D5DADD"/>
+                      </a:solidFill>
+                      <a:prstDash val="solid"/>
+                      <a:round/>
+                      <a:headEnd type="none" w="med" len="med"/>
+                      <a:tailEnd type="none" w="med" len="med"/>
+                    </a:lnL>
+                    <a:lnR w="12700" cap="flat" cmpd="sng" algn="ctr">
+                      <a:solidFill>
+                        <a:srgbClr val="D5DADD"/>
+                      </a:solidFill>
+                      <a:prstDash val="solid"/>
+                      <a:round/>
+                      <a:headEnd type="none" w="med" len="med"/>
+                      <a:tailEnd type="none" w="med" len="med"/>
+                    </a:lnR>
+                    <a:lnT w="12700" cap="flat" cmpd="sng" algn="ctr">
+                      <a:solidFill>
+                        <a:srgbClr val="D5DADD"/>
+                      </a:solidFill>
+                      <a:prstDash val="solid"/>
+                      <a:round/>
+                      <a:headEnd type="none" w="med" len="med"/>
+                      <a:tailEnd type="none" w="med" len="med"/>
+                    </a:lnT>
+                    <a:lnB w="12700" cap="flat" cmpd="sng" algn="ctr">
+                      <a:solidFill>
+                        <a:srgbClr val="D5DADD"/>
+                      </a:solidFill>
+                      <a:prstDash val="solid"/>
+                      <a:round/>
+                      <a:headEnd type="none" w="med" len="med"/>
+                      <a:tailEnd type="none" w="med" len="med"/>
+                    </a:lnB>
+                  </a:tcPr>
+                </a:tc>
+              </a:tr>
+              <a:tr h="411480">
+                <a:tc>
+                  <a:txBody>
+                    <a:bodyPr/>
+                    <a:lstStyle/>
+                    <a:p>
+                      <a:pPr algn="l" indent="0" marL="0">
+                        <a:buNone/>
+                      </a:pPr>
+                      <a:r>
+                        <a:rPr lang="en-US" sz="1300" dirty="0">
+                          <a:solidFill>
+                            <a:srgbClr val="181C1E"/>
+                          </a:solidFill>
+                          <a:latin typeface="Calibri" pitchFamily="34" charset="0"/>
+                          <a:ea typeface="Calibri" pitchFamily="34" charset="-122"/>
+                          <a:cs typeface="Calibri" pitchFamily="34" charset="-120"/>
+                        </a:rPr>
+                        <a:t>Haiku reads pages: output</a:t>
+                      </a:r>
+                      <a:endParaRPr lang="en-US" sz="1300" dirty="0">
+                        <a:latin typeface="Calibri" charset="0"/>
+                        <a:ea typeface="Calibri" charset="0"/>
+                        <a:cs typeface="Calibri" charset="0"/>
+                      </a:endParaRPr>
+                    </a:p>
+                  </a:txBody>
+                  <a:tcPr marL="91440" marR="91440" marT="45720" marB="45720" anchor="ctr">
+                    <a:lnL w="12700" cap="flat" cmpd="sng" algn="ctr">
+                      <a:solidFill>
+                        <a:srgbClr val="D5DADD"/>
+                      </a:solidFill>
+                      <a:prstDash val="solid"/>
+                      <a:round/>
+                      <a:headEnd type="none" w="med" len="med"/>
+                      <a:tailEnd type="none" w="med" len="med"/>
+                    </a:lnL>
+                    <a:lnR w="12700" cap="flat" cmpd="sng" algn="ctr">
+                      <a:solidFill>
+                        <a:srgbClr val="D5DADD"/>
+                      </a:solidFill>
+                      <a:prstDash val="solid"/>
+                      <a:round/>
+                      <a:headEnd type="none" w="med" len="med"/>
+                      <a:tailEnd type="none" w="med" len="med"/>
+                    </a:lnR>
+                    <a:lnT w="12700" cap="flat" cmpd="sng" algn="ctr">
+                      <a:solidFill>
+                        <a:srgbClr val="D5DADD"/>
+                      </a:solidFill>
+                      <a:prstDash val="solid"/>
+                      <a:round/>
+                      <a:headEnd type="none" w="med" len="med"/>
+                      <a:tailEnd type="none" w="med" len="med"/>
+                    </a:lnT>
+                    <a:lnB w="12700" cap="flat" cmpd="sng" algn="ctr">
+                      <a:solidFill>
+                        <a:srgbClr val="D5DADD"/>
+                      </a:solidFill>
+                      <a:prstDash val="solid"/>
+                      <a:round/>
+                      <a:headEnd type="none" w="med" len="med"/>
+                      <a:tailEnd type="none" w="med" len="med"/>
+                    </a:lnB>
+                  </a:tcPr>
+                </a:tc>
+                <a:tc>
+                  <a:txBody>
+                    <a:bodyPr/>
+                    <a:lstStyle/>
+                    <a:p>
+                      <a:pPr algn="l" indent="0" marL="0">
+                        <a:buNone/>
+                      </a:pPr>
+                      <a:r>
+                        <a:rPr lang="en-US" sz="1300" dirty="0">
+                          <a:solidFill>
+                            <a:srgbClr val="181C1E"/>
+                          </a:solidFill>
+                          <a:latin typeface="Calibri" pitchFamily="34" charset="0"/>
+                          <a:ea typeface="Calibri" pitchFamily="34" charset="-122"/>
+                          <a:cs typeface="Calibri" pitchFamily="34" charset="-120"/>
+                        </a:rPr>
+                        <a:t>233,360 tokens</a:t>
+                      </a:r>
+                      <a:endParaRPr lang="en-US" sz="1300" dirty="0">
+                        <a:latin typeface="Calibri" charset="0"/>
+                        <a:ea typeface="Calibri" charset="0"/>
+                        <a:cs typeface="Calibri" charset="0"/>
+                      </a:endParaRPr>
+                    </a:p>
+                  </a:txBody>
+                  <a:tcPr marL="91440" marR="91440" marT="45720" marB="45720" anchor="ctr">
+                    <a:lnL w="12700" cap="flat" cmpd="sng" algn="ctr">
+                      <a:solidFill>
+                        <a:srgbClr val="D5DADD"/>
+                      </a:solidFill>
+                      <a:prstDash val="solid"/>
+                      <a:round/>
+                      <a:headEnd type="none" w="med" len="med"/>
+                      <a:tailEnd type="none" w="med" len="med"/>
+                    </a:lnL>
+                    <a:lnR w="12700" cap="flat" cmpd="sng" algn="ctr">
+                      <a:solidFill>
+                        <a:srgbClr val="D5DADD"/>
+                      </a:solidFill>
+                      <a:prstDash val="solid"/>
+                      <a:round/>
+                      <a:headEnd type="none" w="med" len="med"/>
+                      <a:tailEnd type="none" w="med" len="med"/>
+                    </a:lnR>
+                    <a:lnT w="12700" cap="flat" cmpd="sng" algn="ctr">
+                      <a:solidFill>
+                        <a:srgbClr val="D5DADD"/>
+                      </a:solidFill>
+                      <a:prstDash val="solid"/>
+                      <a:round/>
+                      <a:headEnd type="none" w="med" len="med"/>
+                      <a:tailEnd type="none" w="med" len="med"/>
+                    </a:lnT>
+                    <a:lnB w="12700" cap="flat" cmpd="sng" algn="ctr">
+                      <a:solidFill>
+                        <a:srgbClr val="D5DADD"/>
+                      </a:solidFill>
+                      <a:prstDash val="solid"/>
+                      <a:round/>
+                      <a:headEnd type="none" w="med" len="med"/>
+                      <a:tailEnd type="none" w="med" len="med"/>
+                    </a:lnB>
+                  </a:tcPr>
+                </a:tc>
+                <a:tc>
+                  <a:txBody>
+                    <a:bodyPr/>
+                    <a:lstStyle/>
+                    <a:p>
+                      <a:pPr algn="l" indent="0" marL="0">
+                        <a:buNone/>
+                      </a:pPr>
+                      <a:r>
+                        <a:rPr lang="en-US" sz="1300" dirty="0">
+                          <a:solidFill>
+                            <a:srgbClr val="181C1E"/>
+                          </a:solidFill>
+                          <a:latin typeface="Calibri" pitchFamily="34" charset="0"/>
+                          <a:ea typeface="Calibri" pitchFamily="34" charset="-122"/>
+                          <a:cs typeface="Calibri" pitchFamily="34" charset="-120"/>
+                        </a:rPr>
+                        <a:t>$0.50 / M</a:t>
+                      </a:r>
+                      <a:endParaRPr lang="en-US" sz="1300" dirty="0">
+                        <a:latin typeface="Calibri" charset="0"/>
+                        <a:ea typeface="Calibri" charset="0"/>
+                        <a:cs typeface="Calibri" charset="0"/>
+                      </a:endParaRPr>
+                    </a:p>
+                  </a:txBody>
+                  <a:tcPr marL="91440" marR="91440" marT="45720" marB="45720" anchor="ctr">
+                    <a:lnL w="12700" cap="flat" cmpd="sng" algn="ctr">
+                      <a:solidFill>
+                        <a:srgbClr val="D5DADD"/>
+                      </a:solidFill>
+                      <a:prstDash val="solid"/>
+                      <a:round/>
+                      <a:headEnd type="none" w="med" len="med"/>
+                      <a:tailEnd type="none" w="med" len="med"/>
+                    </a:lnL>
+                    <a:lnR w="12700" cap="flat" cmpd="sng" algn="ctr">
+                      <a:solidFill>
+                        <a:srgbClr val="D5DADD"/>
+                      </a:solidFill>
+                      <a:prstDash val="solid"/>
+                      <a:round/>
+                      <a:headEnd type="none" w="med" len="med"/>
+                      <a:tailEnd type="none" w="med" len="med"/>
+                    </a:lnR>
+                    <a:lnT w="12700" cap="flat" cmpd="sng" algn="ctr">
+                      <a:solidFill>
+                        <a:srgbClr val="D5DADD"/>
+                      </a:solidFill>
+                      <a:prstDash val="solid"/>
+                      <a:round/>
+                      <a:headEnd type="none" w="med" len="med"/>
+                      <a:tailEnd type="none" w="med" len="med"/>
+                    </a:lnT>
+                    <a:lnB w="12700" cap="flat" cmpd="sng" algn="ctr">
+                      <a:solidFill>
+                        <a:srgbClr val="D5DADD"/>
+                      </a:solidFill>
+                      <a:prstDash val="solid"/>
+                      <a:round/>
+                      <a:headEnd type="none" w="med" len="med"/>
+                      <a:tailEnd type="none" w="med" len="med"/>
+                    </a:lnB>
+                  </a:tcPr>
+                </a:tc>
+                <a:tc>
+                  <a:txBody>
+                    <a:bodyPr/>
+                    <a:lstStyle/>
+                    <a:p>
+                      <a:pPr algn="r" indent="0" marL="0">
+                        <a:buNone/>
+                      </a:pPr>
+                      <a:r>
+                        <a:rPr lang="en-US" sz="1300" dirty="0">
+                          <a:solidFill>
+                            <a:srgbClr val="181C1E"/>
+                          </a:solidFill>
+                          <a:latin typeface="Calibri" pitchFamily="34" charset="0"/>
+                          <a:ea typeface="Calibri" pitchFamily="34" charset="-122"/>
+                          <a:cs typeface="Calibri" pitchFamily="34" charset="-120"/>
+                        </a:rPr>
+                        <a:t>0.12</a:t>
+                      </a:r>
+                      <a:endParaRPr lang="en-US" sz="1300" dirty="0">
+                        <a:latin typeface="Calibri" charset="0"/>
+                        <a:ea typeface="Calibri" charset="0"/>
+                        <a:cs typeface="Calibri" charset="0"/>
+                      </a:endParaRPr>
+                    </a:p>
+                  </a:txBody>
+                  <a:tcPr marL="91440" marR="91440" marT="45720" marB="45720" anchor="ctr">
+                    <a:lnL w="12700" cap="flat" cmpd="sng" algn="ctr">
+                      <a:solidFill>
+                        <a:srgbClr val="D5DADD"/>
+                      </a:solidFill>
+                      <a:prstDash val="solid"/>
+                      <a:round/>
+                      <a:headEnd type="none" w="med" len="med"/>
+                      <a:tailEnd type="none" w="med" len="med"/>
+                    </a:lnL>
+                    <a:lnR w="12700" cap="flat" cmpd="sng" algn="ctr">
+                      <a:solidFill>
+                        <a:srgbClr val="D5DADD"/>
+                      </a:solidFill>
+                      <a:prstDash val="solid"/>
+                      <a:round/>
+                      <a:headEnd type="none" w="med" len="med"/>
+                      <a:tailEnd type="none" w="med" len="med"/>
+                    </a:lnR>
+                    <a:lnT w="12700" cap="flat" cmpd="sng" algn="ctr">
+                      <a:solidFill>
+                        <a:srgbClr val="D5DADD"/>
+                      </a:solidFill>
+                      <a:prstDash val="solid"/>
+                      <a:round/>
+                      <a:headEnd type="none" w="med" len="med"/>
+                      <a:tailEnd type="none" w="med" len="med"/>
+                    </a:lnT>
+                    <a:lnB w="12700" cap="flat" cmpd="sng" algn="ctr">
+                      <a:solidFill>
+                        <a:srgbClr val="D5DADD"/>
+                      </a:solidFill>
+                      <a:prstDash val="solid"/>
+                      <a:round/>
+                      <a:headEnd type="none" w="med" len="med"/>
+                      <a:tailEnd type="none" w="med" len="med"/>
+                    </a:lnB>
+                  </a:tcPr>
+                </a:tc>
+                <a:tc>
+                  <a:txBody>
+                    <a:bodyPr/>
+                    <a:lstStyle/>
+                    <a:p>
+                      <a:pPr algn="r" indent="0" marL="0">
+                        <a:buNone/>
+                      </a:pPr>
+                      <a:r>
+                        <a:rPr lang="en-US" sz="1300" dirty="0">
+                          <a:solidFill>
+                            <a:srgbClr val="181C1E"/>
+                          </a:solidFill>
+                          <a:latin typeface="Calibri" pitchFamily="34" charset="0"/>
+                          <a:ea typeface="Calibri" pitchFamily="34" charset="-122"/>
+                          <a:cs typeface="Calibri" pitchFamily="34" charset="-120"/>
+                        </a:rPr>
+                        <a:t>0.15</a:t>
+                      </a:r>
+                      <a:endParaRPr lang="en-US" sz="1300" dirty="0">
+                        <a:latin typeface="Calibri" charset="0"/>
+                        <a:ea typeface="Calibri" charset="0"/>
+                        <a:cs typeface="Calibri" charset="0"/>
+                      </a:endParaRPr>
+                    </a:p>
+                  </a:txBody>
+                  <a:tcPr marL="91440" marR="91440" marT="45720" marB="45720" anchor="ctr">
+                    <a:lnL w="12700" cap="flat" cmpd="sng" algn="ctr">
+                      <a:solidFill>
+                        <a:srgbClr val="D5DADD"/>
+                      </a:solidFill>
+                      <a:prstDash val="solid"/>
+                      <a:round/>
+                      <a:headEnd type="none" w="med" len="med"/>
+                      <a:tailEnd type="none" w="med" len="med"/>
+                    </a:lnL>
+                    <a:lnR w="12700" cap="flat" cmpd="sng" algn="ctr">
+                      <a:solidFill>
+                        <a:srgbClr val="D5DADD"/>
+                      </a:solidFill>
+                      <a:prstDash val="solid"/>
+                      <a:round/>
+                      <a:headEnd type="none" w="med" len="med"/>
+                      <a:tailEnd type="none" w="med" len="med"/>
+                    </a:lnR>
+                    <a:lnT w="12700" cap="flat" cmpd="sng" algn="ctr">
+                      <a:solidFill>
+                        <a:srgbClr val="D5DADD"/>
+                      </a:solidFill>
+                      <a:prstDash val="solid"/>
+                      <a:round/>
+                      <a:headEnd type="none" w="med" len="med"/>
+                      <a:tailEnd type="none" w="med" len="med"/>
+                    </a:lnT>
+                    <a:lnB w="12700" cap="flat" cmpd="sng" algn="ctr">
+                      <a:solidFill>
+                        <a:srgbClr val="D5DADD"/>
+                      </a:solidFill>
+                      <a:prstDash val="solid"/>
+                      <a:round/>
+                      <a:headEnd type="none" w="med" len="med"/>
+                      <a:tailEnd type="none" w="med" len="med"/>
+                    </a:lnB>
+                  </a:tcPr>
+                </a:tc>
+              </a:tr>
+              <a:tr h="411480">
+                <a:tc>
+                  <a:txBody>
+                    <a:bodyPr/>
+                    <a:lstStyle/>
+                    <a:p>
+                      <a:pPr algn="l" indent="0" marL="0">
+                        <a:buNone/>
+                      </a:pPr>
+                      <a:r>
+                        <a:rPr lang="en-US" sz="1300" dirty="0">
+                          <a:solidFill>
+                            <a:srgbClr val="181C1E"/>
+                          </a:solidFill>
+                          <a:latin typeface="Calibri" pitchFamily="34" charset="0"/>
+                          <a:ea typeface="Calibri" pitchFamily="34" charset="-122"/>
+                          <a:cs typeface="Calibri" pitchFamily="34" charset="-120"/>
+                        </a:rPr>
+                        <a:t>Web searches</a:t>
+                      </a:r>
+                      <a:endParaRPr lang="en-US" sz="1300" dirty="0">
+                        <a:latin typeface="Calibri" charset="0"/>
+                        <a:ea typeface="Calibri" charset="0"/>
+                        <a:cs typeface="Calibri" charset="0"/>
+                      </a:endParaRPr>
+                    </a:p>
+                  </a:txBody>
+                  <a:tcPr marL="91440" marR="91440" marT="45720" marB="45720" anchor="ctr">
+                    <a:lnL w="12700" cap="flat" cmpd="sng" algn="ctr">
+                      <a:solidFill>
+                        <a:srgbClr val="D5DADD"/>
+                      </a:solidFill>
+                      <a:prstDash val="solid"/>
+                      <a:round/>
+                      <a:headEnd type="none" w="med" len="med"/>
+                      <a:tailEnd type="none" w="med" len="med"/>
+                    </a:lnL>
+                    <a:lnR w="12700" cap="flat" cmpd="sng" algn="ctr">
+                      <a:solidFill>
+                        <a:srgbClr val="D5DADD"/>
+                      </a:solidFill>
+                      <a:prstDash val="solid"/>
+                      <a:round/>
+                      <a:headEnd type="none" w="med" len="med"/>
+                      <a:tailEnd type="none" w="med" len="med"/>
+                    </a:lnR>
+                    <a:lnT w="12700" cap="flat" cmpd="sng" algn="ctr">
+                      <a:solidFill>
+                        <a:srgbClr val="D5DADD"/>
+                      </a:solidFill>
+                      <a:prstDash val="solid"/>
+                      <a:round/>
+                      <a:headEnd type="none" w="med" len="med"/>
+                      <a:tailEnd type="none" w="med" len="med"/>
+                    </a:lnT>
+                    <a:lnB w="12700" cap="flat" cmpd="sng" algn="ctr">
+                      <a:solidFill>
+                        <a:srgbClr val="D5DADD"/>
+                      </a:solidFill>
+                      <a:prstDash val="solid"/>
+                      <a:round/>
+                      <a:headEnd type="none" w="med" len="med"/>
+                      <a:tailEnd type="none" w="med" len="med"/>
+                    </a:lnB>
+                  </a:tcPr>
+                </a:tc>
+                <a:tc>
+                  <a:txBody>
+                    <a:bodyPr/>
+                    <a:lstStyle/>
+                    <a:p>
+                      <a:pPr algn="l" indent="0" marL="0">
+                        <a:buNone/>
+                      </a:pPr>
+                      <a:r>
+                        <a:rPr lang="en-US" sz="1300" dirty="0">
+                          <a:solidFill>
+                            <a:srgbClr val="181C1E"/>
+                          </a:solidFill>
+                          <a:latin typeface="Calibri" pitchFamily="34" charset="0"/>
+                          <a:ea typeface="Calibri" pitchFamily="34" charset="-122"/>
+                          <a:cs typeface="Calibri" pitchFamily="34" charset="-120"/>
+                        </a:rPr>
+                        <a:t>172 searches</a:t>
+                      </a:r>
+                      <a:endParaRPr lang="en-US" sz="1300" dirty="0">
+                        <a:latin typeface="Calibri" charset="0"/>
+                        <a:ea typeface="Calibri" charset="0"/>
+                        <a:cs typeface="Calibri" charset="0"/>
+                      </a:endParaRPr>
+                    </a:p>
+                  </a:txBody>
+                  <a:tcPr marL="91440" marR="91440" marT="45720" marB="45720" anchor="ctr">
+                    <a:lnL w="12700" cap="flat" cmpd="sng" algn="ctr">
+                      <a:solidFill>
+                        <a:srgbClr val="D5DADD"/>
+                      </a:solidFill>
+                      <a:prstDash val="solid"/>
+                      <a:round/>
+                      <a:headEnd type="none" w="med" len="med"/>
+                      <a:tailEnd type="none" w="med" len="med"/>
+                    </a:lnL>
+                    <a:lnR w="12700" cap="flat" cmpd="sng" algn="ctr">
+                      <a:solidFill>
+                        <a:srgbClr val="D5DADD"/>
+                      </a:solidFill>
+                      <a:prstDash val="solid"/>
+                      <a:round/>
+                      <a:headEnd type="none" w="med" len="med"/>
+                      <a:tailEnd type="none" w="med" len="med"/>
+                    </a:lnR>
+                    <a:lnT w="12700" cap="flat" cmpd="sng" algn="ctr">
+                      <a:solidFill>
+                        <a:srgbClr val="D5DADD"/>
+                      </a:solidFill>
+                      <a:prstDash val="solid"/>
+                      <a:round/>
+                      <a:headEnd type="none" w="med" len="med"/>
+                      <a:tailEnd type="none" w="med" len="med"/>
+                    </a:lnT>
+                    <a:lnB w="12700" cap="flat" cmpd="sng" algn="ctr">
+                      <a:solidFill>
+                        <a:srgbClr val="D5DADD"/>
+                      </a:solidFill>
+                      <a:prstDash val="solid"/>
+                      <a:round/>
+                      <a:headEnd type="none" w="med" len="med"/>
+                      <a:tailEnd type="none" w="med" len="med"/>
+                    </a:lnB>
+                  </a:tcPr>
+                </a:tc>
+                <a:tc>
+                  <a:txBody>
+                    <a:bodyPr/>
+                    <a:lstStyle/>
+                    <a:p>
+                      <a:pPr algn="l" indent="0" marL="0">
+                        <a:buNone/>
+                      </a:pPr>
+                      <a:r>
+                        <a:rPr lang="en-US" sz="1300" dirty="0">
+                          <a:solidFill>
+                            <a:srgbClr val="181C1E"/>
+                          </a:solidFill>
+                          <a:latin typeface="Calibri" pitchFamily="34" charset="0"/>
+                          <a:ea typeface="Calibri" pitchFamily="34" charset="-122"/>
+                          <a:cs typeface="Calibri" pitchFamily="34" charset="-120"/>
+                        </a:rPr>
+                        <a:t>$10 / 1,000</a:t>
+                      </a:r>
+                      <a:endParaRPr lang="en-US" sz="1300" dirty="0">
+                        <a:latin typeface="Calibri" charset="0"/>
+                        <a:ea typeface="Calibri" charset="0"/>
+                        <a:cs typeface="Calibri" charset="0"/>
+                      </a:endParaRPr>
+                    </a:p>
+                  </a:txBody>
+                  <a:tcPr marL="91440" marR="91440" marT="45720" marB="45720" anchor="ctr">
+                    <a:lnL w="12700" cap="flat" cmpd="sng" algn="ctr">
+                      <a:solidFill>
+                        <a:srgbClr val="D5DADD"/>
+                      </a:solidFill>
+                      <a:prstDash val="solid"/>
+                      <a:round/>
+                      <a:headEnd type="none" w="med" len="med"/>
+                      <a:tailEnd type="none" w="med" len="med"/>
+                    </a:lnL>
+                    <a:lnR w="12700" cap="flat" cmpd="sng" algn="ctr">
+                      <a:solidFill>
+                        <a:srgbClr val="D5DADD"/>
+                      </a:solidFill>
+                      <a:prstDash val="solid"/>
+                      <a:round/>
+                      <a:headEnd type="none" w="med" len="med"/>
+                      <a:tailEnd type="none" w="med" len="med"/>
+                    </a:lnR>
+                    <a:lnT w="12700" cap="flat" cmpd="sng" algn="ctr">
+                      <a:solidFill>
+                        <a:srgbClr val="D5DADD"/>
+                      </a:solidFill>
+                      <a:prstDash val="solid"/>
+                      <a:round/>
+                      <a:headEnd type="none" w="med" len="med"/>
+                      <a:tailEnd type="none" w="med" len="med"/>
+                    </a:lnT>
+                    <a:lnB w="12700" cap="flat" cmpd="sng" algn="ctr">
+                      <a:solidFill>
+                        <a:srgbClr val="D5DADD"/>
+                      </a:solidFill>
+                      <a:prstDash val="solid"/>
+                      <a:round/>
+                      <a:headEnd type="none" w="med" len="med"/>
+                      <a:tailEnd type="none" w="med" len="med"/>
+                    </a:lnB>
+                  </a:tcPr>
+                </a:tc>
+                <a:tc>
+                  <a:txBody>
+                    <a:bodyPr/>
+                    <a:lstStyle/>
+                    <a:p>
+                      <a:pPr algn="r" indent="0" marL="0">
+                        <a:buNone/>
+                      </a:pPr>
+                      <a:r>
+                        <a:rPr lang="en-US" sz="1300" dirty="0">
+                          <a:solidFill>
+                            <a:srgbClr val="181C1E"/>
+                          </a:solidFill>
+                          <a:latin typeface="Calibri" pitchFamily="34" charset="0"/>
+                          <a:ea typeface="Calibri" pitchFamily="34" charset="-122"/>
+                          <a:cs typeface="Calibri" pitchFamily="34" charset="-120"/>
+                        </a:rPr>
+                        <a:t>1.72</a:t>
+                      </a:r>
+                      <a:endParaRPr lang="en-US" sz="1300" dirty="0">
+                        <a:latin typeface="Calibri" charset="0"/>
+                        <a:ea typeface="Calibri" charset="0"/>
+                        <a:cs typeface="Calibri" charset="0"/>
+                      </a:endParaRPr>
+                    </a:p>
+                  </a:txBody>
+                  <a:tcPr marL="91440" marR="91440" marT="45720" marB="45720" anchor="ctr">
+                    <a:lnL w="12700" cap="flat" cmpd="sng" algn="ctr">
+                      <a:solidFill>
+                        <a:srgbClr val="D5DADD"/>
+                      </a:solidFill>
+                      <a:prstDash val="solid"/>
+                      <a:round/>
+                      <a:headEnd type="none" w="med" len="med"/>
+                      <a:tailEnd type="none" w="med" len="med"/>
+                    </a:lnL>
+                    <a:lnR w="12700" cap="flat" cmpd="sng" algn="ctr">
+                      <a:solidFill>
+                        <a:srgbClr val="D5DADD"/>
+                      </a:solidFill>
+                      <a:prstDash val="solid"/>
+                      <a:round/>
+                      <a:headEnd type="none" w="med" len="med"/>
+                      <a:tailEnd type="none" w="med" len="med"/>
+                    </a:lnR>
+                    <a:lnT w="12700" cap="flat" cmpd="sng" algn="ctr">
+                      <a:solidFill>
+                        <a:srgbClr val="D5DADD"/>
+                      </a:solidFill>
+                      <a:prstDash val="solid"/>
+                      <a:round/>
+                      <a:headEnd type="none" w="med" len="med"/>
+                      <a:tailEnd type="none" w="med" len="med"/>
+                    </a:lnT>
+                    <a:lnB w="12700" cap="flat" cmpd="sng" algn="ctr">
+                      <a:solidFill>
+                        <a:srgbClr val="D5DADD"/>
+                      </a:solidFill>
+                      <a:prstDash val="solid"/>
+                      <a:round/>
+                      <a:headEnd type="none" w="med" len="med"/>
+                      <a:tailEnd type="none" w="med" len="med"/>
+                    </a:lnB>
+                  </a:tcPr>
+                </a:tc>
+                <a:tc>
+                  <a:txBody>
+                    <a:bodyPr/>
+                    <a:lstStyle/>
+                    <a:p>
+                      <a:pPr algn="r" indent="0" marL="0">
+                        <a:buNone/>
+                      </a:pPr>
+                      <a:r>
+                        <a:rPr lang="en-US" sz="1300" dirty="0">
+                          <a:solidFill>
+                            <a:srgbClr val="181C1E"/>
+                          </a:solidFill>
+                          <a:latin typeface="Calibri" pitchFamily="34" charset="0"/>
+                          <a:ea typeface="Calibri" pitchFamily="34" charset="-122"/>
+                          <a:cs typeface="Calibri" pitchFamily="34" charset="-120"/>
+                        </a:rPr>
+                        <a:t>2.20</a:t>
+                      </a:r>
+                      <a:endParaRPr lang="en-US" sz="1300" dirty="0">
+                        <a:latin typeface="Calibri" charset="0"/>
+                        <a:ea typeface="Calibri" charset="0"/>
+                        <a:cs typeface="Calibri" charset="0"/>
+                      </a:endParaRPr>
+                    </a:p>
+                  </a:txBody>
+                  <a:tcPr marL="91440" marR="91440" marT="45720" marB="45720" anchor="ctr">
+                    <a:lnL w="12700" cap="flat" cmpd="sng" algn="ctr">
+                      <a:solidFill>
+                        <a:srgbClr val="D5DADD"/>
+                      </a:solidFill>
+                      <a:prstDash val="solid"/>
+                      <a:round/>
+                      <a:headEnd type="none" w="med" len="med"/>
+                      <a:tailEnd type="none" w="med" len="med"/>
+                    </a:lnL>
+                    <a:lnR w="12700" cap="flat" cmpd="sng" algn="ctr">
+                      <a:solidFill>
+                        <a:srgbClr val="D5DADD"/>
+                      </a:solidFill>
+                      <a:prstDash val="solid"/>
+                      <a:round/>
+                      <a:headEnd type="none" w="med" len="med"/>
+                      <a:tailEnd type="none" w="med" len="med"/>
+                    </a:lnR>
+                    <a:lnT w="12700" cap="flat" cmpd="sng" algn="ctr">
+                      <a:solidFill>
+                        <a:srgbClr val="D5DADD"/>
+                      </a:solidFill>
+                      <a:prstDash val="solid"/>
+                      <a:round/>
+                      <a:headEnd type="none" w="med" len="med"/>
+                      <a:tailEnd type="none" w="med" len="med"/>
+                    </a:lnT>
+                    <a:lnB w="12700" cap="flat" cmpd="sng" algn="ctr">
+                      <a:solidFill>
+                        <a:srgbClr val="D5DADD"/>
+                      </a:solidFill>
+                      <a:prstDash val="solid"/>
+                      <a:round/>
+                      <a:headEnd type="none" w="med" len="med"/>
+                      <a:tailEnd type="none" w="med" len="med"/>
+                    </a:lnB>
+                  </a:tcPr>
+                </a:tc>
+              </a:tr>
+              <a:tr h="411480">
+                <a:tc>
+                  <a:txBody>
+                    <a:bodyPr/>
+                    <a:lstStyle/>
+                    <a:p>
+                      <a:pPr algn="l" indent="0" marL="0">
+                        <a:buNone/>
+                      </a:pPr>
+                      <a:r>
+                        <a:rPr lang="en-US" sz="1300" dirty="0">
+                          <a:solidFill>
+                            <a:srgbClr val="181C1E"/>
+                          </a:solidFill>
+                          <a:latin typeface="Calibri" pitchFamily="34" charset="0"/>
+                          <a:ea typeface="Calibri" pitchFamily="34" charset="-122"/>
+                          <a:cs typeface="Calibri" pitchFamily="34" charset="-120"/>
+                        </a:rPr>
+                        <a:t>Opus: new input</a:t>
+                      </a:r>
+                      <a:endParaRPr lang="en-US" sz="1300" dirty="0">
+                        <a:latin typeface="Calibri" charset="0"/>
+                        <a:ea typeface="Calibri" charset="0"/>
+                        <a:cs typeface="Calibri" charset="0"/>
+                      </a:endParaRPr>
+                    </a:p>
+                  </a:txBody>
+                  <a:tcPr marL="91440" marR="91440" marT="45720" marB="45720" anchor="ctr">
+                    <a:lnL w="12700" cap="flat" cmpd="sng" algn="ctr">
+                      <a:solidFill>
+                        <a:srgbClr val="D5DADD"/>
+                      </a:solidFill>
+                      <a:prstDash val="solid"/>
+                      <a:round/>
+                      <a:headEnd type="none" w="med" len="med"/>
+                      <a:tailEnd type="none" w="med" len="med"/>
+                    </a:lnL>
+                    <a:lnR w="12700" cap="flat" cmpd="sng" algn="ctr">
+                      <a:solidFill>
+                        <a:srgbClr val="D5DADD"/>
+                      </a:solidFill>
+                      <a:prstDash val="solid"/>
+                      <a:round/>
+                      <a:headEnd type="none" w="med" len="med"/>
+                      <a:tailEnd type="none" w="med" len="med"/>
+                    </a:lnR>
+                    <a:lnT w="12700" cap="flat" cmpd="sng" algn="ctr">
+                      <a:solidFill>
+                        <a:srgbClr val="D5DADD"/>
+                      </a:solidFill>
+                      <a:prstDash val="solid"/>
+                      <a:round/>
+                      <a:headEnd type="none" w="med" len="med"/>
+                      <a:tailEnd type="none" w="med" len="med"/>
+                    </a:lnT>
+                    <a:lnB w="12700" cap="flat" cmpd="sng" algn="ctr">
+                      <a:solidFill>
+                        <a:srgbClr val="D5DADD"/>
+                      </a:solidFill>
+                      <a:prstDash val="solid"/>
+                      <a:round/>
+                      <a:headEnd type="none" w="med" len="med"/>
+                      <a:tailEnd type="none" w="med" len="med"/>
+                    </a:lnB>
+                  </a:tcPr>
+                </a:tc>
+                <a:tc>
+                  <a:txBody>
+                    <a:bodyPr/>
+                    <a:lstStyle/>
+                    <a:p>
+                      <a:pPr algn="l" indent="0" marL="0">
+                        <a:buNone/>
+                      </a:pPr>
+                      <a:r>
+                        <a:rPr lang="en-US" sz="1300" dirty="0">
+                          <a:solidFill>
+                            <a:srgbClr val="181C1E"/>
+                          </a:solidFill>
+                          <a:latin typeface="Calibri" pitchFamily="34" charset="0"/>
+                          <a:ea typeface="Calibri" pitchFamily="34" charset="-122"/>
+                          <a:cs typeface="Calibri" pitchFamily="34" charset="-120"/>
+                        </a:rPr>
+                        <a:t>298 tokens</a:t>
+                      </a:r>
+                      <a:endParaRPr lang="en-US" sz="1300" dirty="0">
+                        <a:latin typeface="Calibri" charset="0"/>
+                        <a:ea typeface="Calibri" charset="0"/>
+                        <a:cs typeface="Calibri" charset="0"/>
+                      </a:endParaRPr>
+                    </a:p>
+                  </a:txBody>
+                  <a:tcPr marL="91440" marR="91440" marT="45720" marB="45720" anchor="ctr">
+                    <a:lnL w="12700" cap="flat" cmpd="sng" algn="ctr">
+                      <a:solidFill>
+                        <a:srgbClr val="D5DADD"/>
+                      </a:solidFill>
+                      <a:prstDash val="solid"/>
+                      <a:round/>
+                      <a:headEnd type="none" w="med" len="med"/>
+                      <a:tailEnd type="none" w="med" len="med"/>
+                    </a:lnL>
+                    <a:lnR w="12700" cap="flat" cmpd="sng" algn="ctr">
+                      <a:solidFill>
+                        <a:srgbClr val="D5DADD"/>
+                      </a:solidFill>
+                      <a:prstDash val="solid"/>
+                      <a:round/>
+                      <a:headEnd type="none" w="med" len="med"/>
+                      <a:tailEnd type="none" w="med" len="med"/>
+                    </a:lnR>
+                    <a:lnT w="12700" cap="flat" cmpd="sng" algn="ctr">
+                      <a:solidFill>
+                        <a:srgbClr val="D5DADD"/>
+                      </a:solidFill>
+                      <a:prstDash val="solid"/>
+                      <a:round/>
+                      <a:headEnd type="none" w="med" len="med"/>
+                      <a:tailEnd type="none" w="med" len="med"/>
+                    </a:lnT>
+                    <a:lnB w="12700" cap="flat" cmpd="sng" algn="ctr">
+                      <a:solidFill>
+                        <a:srgbClr val="D5DADD"/>
+                      </a:solidFill>
+                      <a:prstDash val="solid"/>
+                      <a:round/>
+                      <a:headEnd type="none" w="med" len="med"/>
+                      <a:tailEnd type="none" w="med" len="med"/>
+                    </a:lnB>
+                  </a:tcPr>
+                </a:tc>
+                <a:tc>
+                  <a:txBody>
+                    <a:bodyPr/>
+                    <a:lstStyle/>
+                    <a:p>
+                      <a:pPr algn="l" indent="0" marL="0">
+                        <a:buNone/>
+                      </a:pPr>
+                      <a:r>
+                        <a:rPr lang="en-US" sz="1300" dirty="0">
+                          <a:solidFill>
+                            <a:srgbClr val="181C1E"/>
+                          </a:solidFill>
+                          <a:latin typeface="Calibri" pitchFamily="34" charset="0"/>
+                          <a:ea typeface="Calibri" pitchFamily="34" charset="-122"/>
+                          <a:cs typeface="Calibri" pitchFamily="34" charset="-120"/>
+                        </a:rPr>
+                        <a:t>$4 / M</a:t>
+                      </a:r>
+                      <a:endParaRPr lang="en-US" sz="1300" dirty="0">
+                        <a:latin typeface="Calibri" charset="0"/>
+                        <a:ea typeface="Calibri" charset="0"/>
+                        <a:cs typeface="Calibri" charset="0"/>
+                      </a:endParaRPr>
+                    </a:p>
+                  </a:txBody>
+                  <a:tcPr marL="91440" marR="91440" marT="45720" marB="45720" anchor="ctr">
+                    <a:lnL w="12700" cap="flat" cmpd="sng" algn="ctr">
+                      <a:solidFill>
+                        <a:srgbClr val="D5DADD"/>
+                      </a:solidFill>
+                      <a:prstDash val="solid"/>
+                      <a:round/>
+                      <a:headEnd type="none" w="med" len="med"/>
+                      <a:tailEnd type="none" w="med" len="med"/>
+                    </a:lnL>
+                    <a:lnR w="12700" cap="flat" cmpd="sng" algn="ctr">
+                      <a:solidFill>
+                        <a:srgbClr val="D5DADD"/>
+                      </a:solidFill>
+                      <a:prstDash val="solid"/>
+                      <a:round/>
+                      <a:headEnd type="none" w="med" len="med"/>
+                      <a:tailEnd type="none" w="med" len="med"/>
+                    </a:lnR>
+                    <a:lnT w="12700" cap="flat" cmpd="sng" algn="ctr">
+                      <a:solidFill>
+                        <a:srgbClr val="D5DADD"/>
+                      </a:solidFill>
+                      <a:prstDash val="solid"/>
+                      <a:round/>
+                      <a:headEnd type="none" w="med" len="med"/>
+                      <a:tailEnd type="none" w="med" len="med"/>
+                    </a:lnT>
+                    <a:lnB w="12700" cap="flat" cmpd="sng" algn="ctr">
+                      <a:solidFill>
+                        <a:srgbClr val="D5DADD"/>
+                      </a:solidFill>
+                      <a:prstDash val="solid"/>
+                      <a:round/>
+                      <a:headEnd type="none" w="med" len="med"/>
+                      <a:tailEnd type="none" w="med" len="med"/>
+                    </a:lnB>
+                  </a:tcPr>
+                </a:tc>
+                <a:tc>
+                  <a:txBody>
+                    <a:bodyPr/>
+                    <a:lstStyle/>
+                    <a:p>
+                      <a:pPr algn="r" indent="0" marL="0">
+                        <a:buNone/>
+                      </a:pPr>
+                      <a:r>
+                        <a:rPr lang="en-US" sz="1300" dirty="0">
+                          <a:solidFill>
+                            <a:srgbClr val="181C1E"/>
+                          </a:solidFill>
+                          <a:latin typeface="Calibri" pitchFamily="34" charset="0"/>
+                          <a:ea typeface="Calibri" pitchFamily="34" charset="-122"/>
+                          <a:cs typeface="Calibri" pitchFamily="34" charset="-120"/>
+                        </a:rPr>
+                        <a:t>0.00</a:t>
+                      </a:r>
+                      <a:endParaRPr lang="en-US" sz="1300" dirty="0">
+                        <a:latin typeface="Calibri" charset="0"/>
+                        <a:ea typeface="Calibri" charset="0"/>
+                        <a:cs typeface="Calibri" charset="0"/>
+                      </a:endParaRPr>
+                    </a:p>
+                  </a:txBody>
+                  <a:tcPr marL="91440" marR="91440" marT="45720" marB="45720" anchor="ctr">
+                    <a:lnL w="12700" cap="flat" cmpd="sng" algn="ctr">
+                      <a:solidFill>
+                        <a:srgbClr val="D5DADD"/>
+                      </a:solidFill>
+                      <a:prstDash val="solid"/>
+                      <a:round/>
+                      <a:headEnd type="none" w="med" len="med"/>
+                      <a:tailEnd type="none" w="med" len="med"/>
+                    </a:lnL>
+                    <a:lnR w="12700" cap="flat" cmpd="sng" algn="ctr">
+                      <a:solidFill>
+                        <a:srgbClr val="D5DADD"/>
+                      </a:solidFill>
+                      <a:prstDash val="solid"/>
+                      <a:round/>
+                      <a:headEnd type="none" w="med" len="med"/>
+                      <a:tailEnd type="none" w="med" len="med"/>
+                    </a:lnR>
+                    <a:lnT w="12700" cap="flat" cmpd="sng" algn="ctr">
+                      <a:solidFill>
+                        <a:srgbClr val="D5DADD"/>
+                      </a:solidFill>
+                      <a:prstDash val="solid"/>
+                      <a:round/>
+                      <a:headEnd type="none" w="med" len="med"/>
+                      <a:tailEnd type="none" w="med" len="med"/>
+                    </a:lnT>
+                    <a:lnB w="12700" cap="flat" cmpd="sng" algn="ctr">
+                      <a:solidFill>
+                        <a:srgbClr val="D5DADD"/>
+                      </a:solidFill>
+                      <a:prstDash val="solid"/>
+                      <a:round/>
+                      <a:headEnd type="none" w="med" len="med"/>
+                      <a:tailEnd type="none" w="med" len="med"/>
+                    </a:lnB>
+                  </a:tcPr>
+                </a:tc>
+                <a:tc>
+                  <a:txBody>
+                    <a:bodyPr/>
+                    <a:lstStyle/>
+                    <a:p>
+                      <a:pPr algn="r" indent="0" marL="0">
+                        <a:buNone/>
+                      </a:pPr>
+                      <a:r>
+                        <a:rPr lang="en-US" sz="1300" dirty="0">
+                          <a:solidFill>
+                            <a:srgbClr val="181C1E"/>
+                          </a:solidFill>
+                          <a:latin typeface="Calibri" pitchFamily="34" charset="0"/>
+                          <a:ea typeface="Calibri" pitchFamily="34" charset="-122"/>
+                          <a:cs typeface="Calibri" pitchFamily="34" charset="-120"/>
+                        </a:rPr>
+                        <a:t>0.00</a:t>
+                      </a:r>
+                      <a:endParaRPr lang="en-US" sz="1300" dirty="0">
+                        <a:latin typeface="Calibri" charset="0"/>
+                        <a:ea typeface="Calibri" charset="0"/>
+                        <a:cs typeface="Calibri" charset="0"/>
+                      </a:endParaRPr>
+                    </a:p>
+                  </a:txBody>
+                  <a:tcPr marL="91440" marR="91440" marT="45720" marB="45720" anchor="ctr">
+                    <a:lnL w="12700" cap="flat" cmpd="sng" algn="ctr">
+                      <a:solidFill>
+                        <a:srgbClr val="D5DADD"/>
+                      </a:solidFill>
+                      <a:prstDash val="solid"/>
+                      <a:round/>
+                      <a:headEnd type="none" w="med" len="med"/>
+                      <a:tailEnd type="none" w="med" len="med"/>
+                    </a:lnL>
+                    <a:lnR w="12700" cap="flat" cmpd="sng" algn="ctr">
+                      <a:solidFill>
+                        <a:srgbClr val="D5DADD"/>
+                      </a:solidFill>
+                      <a:prstDash val="solid"/>
+                      <a:round/>
+                      <a:headEnd type="none" w="med" len="med"/>
+                      <a:tailEnd type="none" w="med" len="med"/>
+                    </a:lnR>
+                    <a:lnT w="12700" cap="flat" cmpd="sng" algn="ctr">
+                      <a:solidFill>
+                        <a:srgbClr val="D5DADD"/>
+                      </a:solidFill>
+                      <a:prstDash val="solid"/>
+                      <a:round/>
+                      <a:headEnd type="none" w="med" len="med"/>
+                      <a:tailEnd type="none" w="med" len="med"/>
+                    </a:lnT>
+                    <a:lnB w="12700" cap="flat" cmpd="sng" algn="ctr">
+                      <a:solidFill>
+                        <a:srgbClr val="D5DADD"/>
+                      </a:solidFill>
+                      <a:prstDash val="solid"/>
+                      <a:round/>
+                      <a:headEnd type="none" w="med" len="med"/>
+                      <a:tailEnd type="none" w="med" len="med"/>
+                    </a:lnB>
+                  </a:tcPr>
+                </a:tc>
+              </a:tr>
+              <a:tr h="411480">
+                <a:tc>
+                  <a:txBody>
+                    <a:bodyPr/>
+                    <a:lstStyle/>
+                    <a:p>
+                      <a:pPr algn="l" indent="0" marL="0">
+                        <a:buNone/>
+                      </a:pPr>
+                      <a:r>
+                        <a:rPr lang="en-US" sz="1300" dirty="0">
+                          <a:solidFill>
+                            <a:srgbClr val="181C1E"/>
+                          </a:solidFill>
+                          <a:latin typeface="Calibri" pitchFamily="34" charset="0"/>
+                          <a:ea typeface="Calibri" pitchFamily="34" charset="-122"/>
+                          <a:cs typeface="Calibri" pitchFamily="34" charset="-120"/>
+                        </a:rPr>
+                        <a:t>Opus: cache reads</a:t>
+                      </a:r>
+                      <a:endParaRPr lang="en-US" sz="1300" dirty="0">
+                        <a:latin typeface="Calibri" charset="0"/>
+                        <a:ea typeface="Calibri" charset="0"/>
+                        <a:cs typeface="Calibri" charset="0"/>
+                      </a:endParaRPr>
+                    </a:p>
+                  </a:txBody>
+                  <a:tcPr marL="91440" marR="91440" marT="45720" marB="45720" anchor="ctr">
+                    <a:lnL w="12700" cap="flat" cmpd="sng" algn="ctr">
+                      <a:solidFill>
+                        <a:srgbClr val="D5DADD"/>
+                      </a:solidFill>
+                      <a:prstDash val="solid"/>
+                      <a:round/>
+                      <a:headEnd type="none" w="med" len="med"/>
+                      <a:tailEnd type="none" w="med" len="med"/>
+                    </a:lnL>
+                    <a:lnR w="12700" cap="flat" cmpd="sng" algn="ctr">
+                      <a:solidFill>
+                        <a:srgbClr val="D5DADD"/>
+                      </a:solidFill>
+                      <a:prstDash val="solid"/>
+                      <a:round/>
+                      <a:headEnd type="none" w="med" len="med"/>
+                      <a:tailEnd type="none" w="med" len="med"/>
+                    </a:lnR>
+                    <a:lnT w="12700" cap="flat" cmpd="sng" algn="ctr">
+                      <a:solidFill>
+                        <a:srgbClr val="D5DADD"/>
+                      </a:solidFill>
+                      <a:prstDash val="solid"/>
+                      <a:round/>
+                      <a:headEnd type="none" w="med" len="med"/>
+                      <a:tailEnd type="none" w="med" len="med"/>
+                    </a:lnT>
+                    <a:lnB w="12700" cap="flat" cmpd="sng" algn="ctr">
+                      <a:solidFill>
+                        <a:srgbClr val="D5DADD"/>
+                      </a:solidFill>
+                      <a:prstDash val="solid"/>
+                      <a:round/>
+                      <a:headEnd type="none" w="med" len="med"/>
+                      <a:tailEnd type="none" w="med" len="med"/>
+                    </a:lnB>
+                  </a:tcPr>
+                </a:tc>
+                <a:tc>
+                  <a:txBody>
+                    <a:bodyPr/>
+                    <a:lstStyle/>
+                    <a:p>
+                      <a:pPr algn="l" indent="0" marL="0">
+                        <a:buNone/>
+                      </a:pPr>
+                      <a:r>
+                        <a:rPr lang="en-US" sz="1300" dirty="0">
+                          <a:solidFill>
+                            <a:srgbClr val="181C1E"/>
+                          </a:solidFill>
+                          <a:latin typeface="Calibri" pitchFamily="34" charset="0"/>
+                          <a:ea typeface="Calibri" pitchFamily="34" charset="-122"/>
+                          <a:cs typeface="Calibri" pitchFamily="34" charset="-120"/>
+                        </a:rPr>
+                        <a:t>3,551,008 tokens</a:t>
+                      </a:r>
+                      <a:endParaRPr lang="en-US" sz="1300" dirty="0">
+                        <a:latin typeface="Calibri" charset="0"/>
+                        <a:ea typeface="Calibri" charset="0"/>
+                        <a:cs typeface="Calibri" charset="0"/>
+                      </a:endParaRPr>
+                    </a:p>
+                  </a:txBody>
+                  <a:tcPr marL="91440" marR="91440" marT="45720" marB="45720" anchor="ctr">
+                    <a:lnL w="12700" cap="flat" cmpd="sng" algn="ctr">
+                      <a:solidFill>
+                        <a:srgbClr val="D5DADD"/>
+                      </a:solidFill>
+                      <a:prstDash val="solid"/>
+                      <a:round/>
+                      <a:headEnd type="none" w="med" len="med"/>
+                      <a:tailEnd type="none" w="med" len="med"/>
+                    </a:lnL>
+                    <a:lnR w="12700" cap="flat" cmpd="sng" algn="ctr">
+                      <a:solidFill>
+                        <a:srgbClr val="D5DADD"/>
+                      </a:solidFill>
+                      <a:prstDash val="solid"/>
+                      <a:round/>
+                      <a:headEnd type="none" w="med" len="med"/>
+                      <a:tailEnd type="none" w="med" len="med"/>
+                    </a:lnR>
+                    <a:lnT w="12700" cap="flat" cmpd="sng" algn="ctr">
+                      <a:solidFill>
+                        <a:srgbClr val="D5DADD"/>
+                      </a:solidFill>
+                      <a:prstDash val="solid"/>
+                      <a:round/>
+                      <a:headEnd type="none" w="med" len="med"/>
+                      <a:tailEnd type="none" w="med" len="med"/>
+                    </a:lnT>
+                    <a:lnB w="12700" cap="flat" cmpd="sng" algn="ctr">
+                      <a:solidFill>
+                        <a:srgbClr val="D5DADD"/>
+                      </a:solidFill>
+                      <a:prstDash val="solid"/>
+                      <a:round/>
+                      <a:headEnd type="none" w="med" len="med"/>
+                      <a:tailEnd type="none" w="med" len="med"/>
+                    </a:lnB>
+                  </a:tcPr>
+                </a:tc>
+                <a:tc>
+                  <a:txBody>
+                    <a:bodyPr/>
+                    <a:lstStyle/>
+                    <a:p>
+                      <a:pPr algn="l" indent="0" marL="0">
+                        <a:buNone/>
+                      </a:pPr>
+                      <a:r>
+                        <a:rPr lang="en-US" sz="1300" dirty="0">
+                          <a:solidFill>
+                            <a:srgbClr val="181C1E"/>
+                          </a:solidFill>
+                          <a:latin typeface="Calibri" pitchFamily="34" charset="0"/>
+                          <a:ea typeface="Calibri" pitchFamily="34" charset="-122"/>
+                          <a:cs typeface="Calibri" pitchFamily="34" charset="-120"/>
+                        </a:rPr>
+                        <a:t>$0.40 / M</a:t>
+                      </a:r>
+                      <a:endParaRPr lang="en-US" sz="1300" dirty="0">
+                        <a:latin typeface="Calibri" charset="0"/>
+                        <a:ea typeface="Calibri" charset="0"/>
+                        <a:cs typeface="Calibri" charset="0"/>
+                      </a:endParaRPr>
+                    </a:p>
+                  </a:txBody>
+                  <a:tcPr marL="91440" marR="91440" marT="45720" marB="45720" anchor="ctr">
+                    <a:lnL w="12700" cap="flat" cmpd="sng" algn="ctr">
+                      <a:solidFill>
+                        <a:srgbClr val="D5DADD"/>
+                      </a:solidFill>
+                      <a:prstDash val="solid"/>
+                      <a:round/>
+                      <a:headEnd type="none" w="med" len="med"/>
+                      <a:tailEnd type="none" w="med" len="med"/>
+                    </a:lnL>
+                    <a:lnR w="12700" cap="flat" cmpd="sng" algn="ctr">
+                      <a:solidFill>
+                        <a:srgbClr val="D5DADD"/>
+                      </a:solidFill>
+                      <a:prstDash val="solid"/>
+                      <a:round/>
+                      <a:headEnd type="none" w="med" len="med"/>
+                      <a:tailEnd type="none" w="med" len="med"/>
+                    </a:lnR>
+                    <a:lnT w="12700" cap="flat" cmpd="sng" algn="ctr">
+                      <a:solidFill>
+                        <a:srgbClr val="D5DADD"/>
+                      </a:solidFill>
+                      <a:prstDash val="solid"/>
+                      <a:round/>
+                      <a:headEnd type="none" w="med" len="med"/>
+                      <a:tailEnd type="none" w="med" len="med"/>
+                    </a:lnT>
+                    <a:lnB w="12700" cap="flat" cmpd="sng" algn="ctr">
+                      <a:solidFill>
+                        <a:srgbClr val="D5DADD"/>
+                      </a:solidFill>
+                      <a:prstDash val="solid"/>
+                      <a:round/>
+                      <a:headEnd type="none" w="med" len="med"/>
+                      <a:tailEnd type="none" w="med" len="med"/>
+                    </a:lnB>
+                  </a:tcPr>
+                </a:tc>
+                <a:tc>
+                  <a:txBody>
+                    <a:bodyPr/>
+                    <a:lstStyle/>
+                    <a:p>
+                      <a:pPr algn="r" indent="0" marL="0">
+                        <a:buNone/>
+                      </a:pPr>
+                      <a:r>
+                        <a:rPr lang="en-US" sz="1300" dirty="0">
+                          <a:solidFill>
+                            <a:srgbClr val="181C1E"/>
+                          </a:solidFill>
+                          <a:latin typeface="Calibri" pitchFamily="34" charset="0"/>
+                          <a:ea typeface="Calibri" pitchFamily="34" charset="-122"/>
+                          <a:cs typeface="Calibri" pitchFamily="34" charset="-120"/>
+                        </a:rPr>
+                        <a:t>1.42</a:t>
+                      </a:r>
+                      <a:endParaRPr lang="en-US" sz="1300" dirty="0">
+                        <a:latin typeface="Calibri" charset="0"/>
+                        <a:ea typeface="Calibri" charset="0"/>
+                        <a:cs typeface="Calibri" charset="0"/>
+                      </a:endParaRPr>
+                    </a:p>
+                  </a:txBody>
+                  <a:tcPr marL="91440" marR="91440" marT="45720" marB="45720" anchor="ctr">
+                    <a:lnL w="12700" cap="flat" cmpd="sng" algn="ctr">
+                      <a:solidFill>
+                        <a:srgbClr val="D5DADD"/>
+                      </a:solidFill>
+                      <a:prstDash val="solid"/>
+                      <a:round/>
+                      <a:headEnd type="none" w="med" len="med"/>
+                      <a:tailEnd type="none" w="med" len="med"/>
+                    </a:lnL>
+                    <a:lnR w="12700" cap="flat" cmpd="sng" algn="ctr">
+                      <a:solidFill>
+                        <a:srgbClr val="D5DADD"/>
+                      </a:solidFill>
+                      <a:prstDash val="solid"/>
+                      <a:round/>
+                      <a:headEnd type="none" w="med" len="med"/>
+                      <a:tailEnd type="none" w="med" len="med"/>
+                    </a:lnR>
+                    <a:lnT w="12700" cap="flat" cmpd="sng" algn="ctr">
+                      <a:solidFill>
+                        <a:srgbClr val="D5DADD"/>
+                      </a:solidFill>
+                      <a:prstDash val="solid"/>
+                      <a:round/>
+                      <a:headEnd type="none" w="med" len="med"/>
+                      <a:tailEnd type="none" w="med" len="med"/>
+                    </a:lnT>
+                    <a:lnB w="12700" cap="flat" cmpd="sng" algn="ctr">
+                      <a:solidFill>
+                        <a:srgbClr val="D5DADD"/>
+                      </a:solidFill>
+                      <a:prstDash val="solid"/>
+                      <a:round/>
+                      <a:headEnd type="none" w="med" len="med"/>
+                      <a:tailEnd type="none" w="med" len="med"/>
+                    </a:lnB>
+                  </a:tcPr>
+                </a:tc>
+                <a:tc>
+                  <a:txBody>
+                    <a:bodyPr/>
+                    <a:lstStyle/>
+                    <a:p>
+                      <a:pPr algn="r" indent="0" marL="0">
+                        <a:buNone/>
+                      </a:pPr>
+                      <a:r>
+                        <a:rPr lang="en-US" sz="1300" dirty="0">
+                          <a:solidFill>
+                            <a:srgbClr val="181C1E"/>
+                          </a:solidFill>
+                          <a:latin typeface="Calibri" pitchFamily="34" charset="0"/>
+                          <a:ea typeface="Calibri" pitchFamily="34" charset="-122"/>
+                          <a:cs typeface="Calibri" pitchFamily="34" charset="-120"/>
+                        </a:rPr>
+                        <a:t>1.81</a:t>
+                      </a:r>
+                      <a:endParaRPr lang="en-US" sz="1300" dirty="0">
+                        <a:latin typeface="Calibri" charset="0"/>
+                        <a:ea typeface="Calibri" charset="0"/>
+                        <a:cs typeface="Calibri" charset="0"/>
+                      </a:endParaRPr>
+                    </a:p>
+                  </a:txBody>
+                  <a:tcPr marL="91440" marR="91440" marT="45720" marB="45720" anchor="ctr">
+                    <a:lnL w="12700" cap="flat" cmpd="sng" algn="ctr">
+                      <a:solidFill>
+                        <a:srgbClr val="D5DADD"/>
+                      </a:solidFill>
+                      <a:prstDash val="solid"/>
+                      <a:round/>
+                      <a:headEnd type="none" w="med" len="med"/>
+                      <a:tailEnd type="none" w="med" len="med"/>
+                    </a:lnL>
+                    <a:lnR w="12700" cap="flat" cmpd="sng" algn="ctr">
+                      <a:solidFill>
+                        <a:srgbClr val="D5DADD"/>
+                      </a:solidFill>
+                      <a:prstDash val="solid"/>
+                      <a:round/>
+                      <a:headEnd type="none" w="med" len="med"/>
+                      <a:tailEnd type="none" w="med" len="med"/>
+                    </a:lnR>
+                    <a:lnT w="12700" cap="flat" cmpd="sng" algn="ctr">
+                      <a:solidFill>
+                        <a:srgbClr val="D5DADD"/>
+                      </a:solidFill>
+                      <a:prstDash val="solid"/>
+                      <a:round/>
+                      <a:headEnd type="none" w="med" len="med"/>
+                      <a:tailEnd type="none" w="med" len="med"/>
+                    </a:lnT>
+                    <a:lnB w="12700" cap="flat" cmpd="sng" algn="ctr">
+                      <a:solidFill>
+                        <a:srgbClr val="D5DADD"/>
+                      </a:solidFill>
+                      <a:prstDash val="solid"/>
+                      <a:round/>
+                      <a:headEnd type="none" w="med" len="med"/>
+                      <a:tailEnd type="none" w="med" len="med"/>
+                    </a:lnB>
+                  </a:tcPr>
+                </a:tc>
+              </a:tr>
+              <a:tr h="411480">
+                <a:tc>
+                  <a:txBody>
+                    <a:bodyPr/>
+                    <a:lstStyle/>
+                    <a:p>
+                      <a:pPr algn="l" indent="0" marL="0">
+                        <a:buNone/>
+                      </a:pPr>
+                      <a:r>
+                        <a:rPr lang="en-US" sz="1300" dirty="0">
+                          <a:solidFill>
+                            <a:srgbClr val="181C1E"/>
+                          </a:solidFill>
+                          <a:latin typeface="Calibri" pitchFamily="34" charset="0"/>
+                          <a:ea typeface="Calibri" pitchFamily="34" charset="-122"/>
+                          <a:cs typeface="Calibri" pitchFamily="34" charset="-120"/>
+                        </a:rPr>
+                        <a:t>Opus: cache writes</a:t>
+                      </a:r>
+                      <a:endParaRPr lang="en-US" sz="1300" dirty="0">
+                        <a:latin typeface="Calibri" charset="0"/>
+                        <a:ea typeface="Calibri" charset="0"/>
+                        <a:cs typeface="Calibri" charset="0"/>
+                      </a:endParaRPr>
+                    </a:p>
+                  </a:txBody>
+                  <a:tcPr marL="91440" marR="91440" marT="45720" marB="45720" anchor="ctr">
+                    <a:lnL w="12700" cap="flat" cmpd="sng" algn="ctr">
+                      <a:solidFill>
+                        <a:srgbClr val="D5DADD"/>
+                      </a:solidFill>
+                      <a:prstDash val="solid"/>
+                      <a:round/>
+                      <a:headEnd type="none" w="med" len="med"/>
+                      <a:tailEnd type="none" w="med" len="med"/>
+                    </a:lnL>
+                    <a:lnR w="12700" cap="flat" cmpd="sng" algn="ctr">
+                      <a:solidFill>
+                        <a:srgbClr val="D5DADD"/>
+                      </a:solidFill>
+                      <a:prstDash val="solid"/>
+                      <a:round/>
+                      <a:headEnd type="none" w="med" len="med"/>
+                      <a:tailEnd type="none" w="med" len="med"/>
+                    </a:lnR>
+                    <a:lnT w="12700" cap="flat" cmpd="sng" algn="ctr">
+                      <a:solidFill>
+                        <a:srgbClr val="D5DADD"/>
+                      </a:solidFill>
+                      <a:prstDash val="solid"/>
+                      <a:round/>
+                      <a:headEnd type="none" w="med" len="med"/>
+                      <a:tailEnd type="none" w="med" len="med"/>
+                    </a:lnT>
+                    <a:lnB w="12700" cap="flat" cmpd="sng" algn="ctr">
+                      <a:solidFill>
+                        <a:srgbClr val="D5DADD"/>
+                      </a:solidFill>
+                      <a:prstDash val="solid"/>
+                      <a:round/>
+                      <a:headEnd type="none" w="med" len="med"/>
+                      <a:tailEnd type="none" w="med" len="med"/>
+                    </a:lnB>
+                  </a:tcPr>
+                </a:tc>
+                <a:tc>
+                  <a:txBody>
+                    <a:bodyPr/>
+                    <a:lstStyle/>
+                    <a:p>
+                      <a:pPr algn="l" indent="0" marL="0">
+                        <a:buNone/>
+                      </a:pPr>
+                      <a:r>
+                        <a:rPr lang="en-US" sz="1300" dirty="0">
+                          <a:solidFill>
+                            <a:srgbClr val="181C1E"/>
+                          </a:solidFill>
+                          <a:latin typeface="Calibri" pitchFamily="34" charset="0"/>
+                          <a:ea typeface="Calibri" pitchFamily="34" charset="-122"/>
+                          <a:cs typeface="Calibri" pitchFamily="34" charset="-120"/>
+                        </a:rPr>
+                        <a:t>540,300 tokens</a:t>
+                      </a:r>
+                      <a:endParaRPr lang="en-US" sz="1300" dirty="0">
+                        <a:latin typeface="Calibri" charset="0"/>
+                        <a:ea typeface="Calibri" charset="0"/>
+                        <a:cs typeface="Calibri" charset="0"/>
+                      </a:endParaRPr>
+                    </a:p>
+                  </a:txBody>
+                  <a:tcPr marL="91440" marR="91440" marT="45720" marB="45720" anchor="ctr">
+                    <a:lnL w="12700" cap="flat" cmpd="sng" algn="ctr">
+                      <a:solidFill>
+                        <a:srgbClr val="D5DADD"/>
+                      </a:solidFill>
+                      <a:prstDash val="solid"/>
+                      <a:round/>
+                      <a:headEnd type="none" w="med" len="med"/>
+                      <a:tailEnd type="none" w="med" len="med"/>
+                    </a:lnL>
+                    <a:lnR w="12700" cap="flat" cmpd="sng" algn="ctr">
+                      <a:solidFill>
+                        <a:srgbClr val="D5DADD"/>
+                      </a:solidFill>
+                      <a:prstDash val="solid"/>
+                      <a:round/>
+                      <a:headEnd type="none" w="med" len="med"/>
+                      <a:tailEnd type="none" w="med" len="med"/>
+                    </a:lnR>
+                    <a:lnT w="12700" cap="flat" cmpd="sng" algn="ctr">
+                      <a:solidFill>
+                        <a:srgbClr val="D5DADD"/>
+                      </a:solidFill>
+                      <a:prstDash val="solid"/>
+                      <a:round/>
+                      <a:headEnd type="none" w="med" len="med"/>
+                      <a:tailEnd type="none" w="med" len="med"/>
+                    </a:lnT>
+                    <a:lnB w="12700" cap="flat" cmpd="sng" algn="ctr">
+                      <a:solidFill>
+                        <a:srgbClr val="D5DADD"/>
+                      </a:solidFill>
+                      <a:prstDash val="solid"/>
+                      <a:round/>
+                      <a:headEnd type="none" w="med" len="med"/>
+                      <a:tailEnd type="none" w="med" len="med"/>
+                    </a:lnB>
+                  </a:tcPr>
+                </a:tc>
+                <a:tc>
+                  <a:txBody>
+                    <a:bodyPr/>
+                    <a:lstStyle/>
+                    <a:p>
+                      <a:pPr algn="l" indent="0" marL="0">
+                        <a:buNone/>
+                      </a:pPr>
+                      <a:r>
+                        <a:rPr lang="en-US" sz="1300" dirty="0">
+                          <a:solidFill>
+                            <a:srgbClr val="181C1E"/>
+                          </a:solidFill>
+                          <a:latin typeface="Calibri" pitchFamily="34" charset="0"/>
+                          <a:ea typeface="Calibri" pitchFamily="34" charset="-122"/>
+                          <a:cs typeface="Calibri" pitchFamily="34" charset="-120"/>
+                        </a:rPr>
+                        <a:t>$5 / M</a:t>
+                      </a:r>
+                      <a:endParaRPr lang="en-US" sz="1300" dirty="0">
+                        <a:latin typeface="Calibri" charset="0"/>
+                        <a:ea typeface="Calibri" charset="0"/>
+                        <a:cs typeface="Calibri" charset="0"/>
+                      </a:endParaRPr>
+                    </a:p>
+                  </a:txBody>
+                  <a:tcPr marL="91440" marR="91440" marT="45720" marB="45720" anchor="ctr">
+                    <a:lnL w="12700" cap="flat" cmpd="sng" algn="ctr">
+                      <a:solidFill>
+                        <a:srgbClr val="D5DADD"/>
+                      </a:solidFill>
+                      <a:prstDash val="solid"/>
+                      <a:round/>
+                      <a:headEnd type="none" w="med" len="med"/>
+                      <a:tailEnd type="none" w="med" len="med"/>
+                    </a:lnL>
+                    <a:lnR w="12700" cap="flat" cmpd="sng" algn="ctr">
+                      <a:solidFill>
+                        <a:srgbClr val="D5DADD"/>
+                      </a:solidFill>
+                      <a:prstDash val="solid"/>
+                      <a:round/>
+                      <a:headEnd type="none" w="med" len="med"/>
+                      <a:tailEnd type="none" w="med" len="med"/>
+                    </a:lnR>
+                    <a:lnT w="12700" cap="flat" cmpd="sng" algn="ctr">
+                      <a:solidFill>
+                        <a:srgbClr val="D5DADD"/>
+                      </a:solidFill>
+                      <a:prstDash val="solid"/>
+                      <a:round/>
+                      <a:headEnd type="none" w="med" len="med"/>
+                      <a:tailEnd type="none" w="med" len="med"/>
+                    </a:lnT>
+                    <a:lnB w="12700" cap="flat" cmpd="sng" algn="ctr">
+                      <a:solidFill>
+                        <a:srgbClr val="D5DADD"/>
+                      </a:solidFill>
+                      <a:prstDash val="solid"/>
+                      <a:round/>
+                      <a:headEnd type="none" w="med" len="med"/>
+                      <a:tailEnd type="none" w="med" len="med"/>
+                    </a:lnB>
+                  </a:tcPr>
+                </a:tc>
+                <a:tc>
+                  <a:txBody>
+                    <a:bodyPr/>
+                    <a:lstStyle/>
+                    <a:p>
+                      <a:pPr algn="r" indent="0" marL="0">
+                        <a:buNone/>
+                      </a:pPr>
+                      <a:r>
+                        <a:rPr lang="en-US" sz="1300" dirty="0">
+                          <a:solidFill>
+                            <a:srgbClr val="181C1E"/>
+                          </a:solidFill>
+                          <a:latin typeface="Calibri" pitchFamily="34" charset="0"/>
+                          <a:ea typeface="Calibri" pitchFamily="34" charset="-122"/>
+                          <a:cs typeface="Calibri" pitchFamily="34" charset="-120"/>
+                        </a:rPr>
+                        <a:t>2.70</a:t>
+                      </a:r>
+                      <a:endParaRPr lang="en-US" sz="1300" dirty="0">
+                        <a:latin typeface="Calibri" charset="0"/>
+                        <a:ea typeface="Calibri" charset="0"/>
+                        <a:cs typeface="Calibri" charset="0"/>
+                      </a:endParaRPr>
+                    </a:p>
+                  </a:txBody>
+                  <a:tcPr marL="91440" marR="91440" marT="45720" marB="45720" anchor="ctr">
+                    <a:lnL w="12700" cap="flat" cmpd="sng" algn="ctr">
+                      <a:solidFill>
+                        <a:srgbClr val="D5DADD"/>
+                      </a:solidFill>
+                      <a:prstDash val="solid"/>
+                      <a:round/>
+                      <a:headEnd type="none" w="med" len="med"/>
+                      <a:tailEnd type="none" w="med" len="med"/>
+                    </a:lnL>
+                    <a:lnR w="12700" cap="flat" cmpd="sng" algn="ctr">
+                      <a:solidFill>
+                        <a:srgbClr val="D5DADD"/>
+                      </a:solidFill>
+                      <a:prstDash val="solid"/>
+                      <a:round/>
+                      <a:headEnd type="none" w="med" len="med"/>
+                      <a:tailEnd type="none" w="med" len="med"/>
+                    </a:lnR>
+                    <a:lnT w="12700" cap="flat" cmpd="sng" algn="ctr">
+                      <a:solidFill>
+                        <a:srgbClr val="D5DADD"/>
+                      </a:solidFill>
+                      <a:prstDash val="solid"/>
+                      <a:round/>
+                      <a:headEnd type="none" w="med" len="med"/>
+                      <a:tailEnd type="none" w="med" len="med"/>
+                    </a:lnT>
+                    <a:lnB w="12700" cap="flat" cmpd="sng" algn="ctr">
+                      <a:solidFill>
+                        <a:srgbClr val="D5DADD"/>
+                      </a:solidFill>
+                      <a:prstDash val="solid"/>
+                      <a:round/>
+                      <a:headEnd type="none" w="med" len="med"/>
+                      <a:tailEnd type="none" w="med" len="med"/>
+                    </a:lnB>
+                  </a:tcPr>
+                </a:tc>
+                <a:tc>
+                  <a:txBody>
+                    <a:bodyPr/>
+                    <a:lstStyle/>
+                    <a:p>
+                      <a:pPr algn="r" indent="0" marL="0">
+                        <a:buNone/>
+                      </a:pPr>
+                      <a:r>
+                        <a:rPr lang="en-US" sz="1300" dirty="0">
+                          <a:solidFill>
+                            <a:srgbClr val="181C1E"/>
+                          </a:solidFill>
+                          <a:latin typeface="Calibri" pitchFamily="34" charset="0"/>
+                          <a:ea typeface="Calibri" pitchFamily="34" charset="-122"/>
+                          <a:cs typeface="Calibri" pitchFamily="34" charset="-120"/>
+                        </a:rPr>
+                        <a:t>3.45</a:t>
+                      </a:r>
+                      <a:endParaRPr lang="en-US" sz="1300" dirty="0">
+                        <a:latin typeface="Calibri" charset="0"/>
+                        <a:ea typeface="Calibri" charset="0"/>
+                        <a:cs typeface="Calibri" charset="0"/>
+                      </a:endParaRPr>
+                    </a:p>
+                  </a:txBody>
+                  <a:tcPr marL="91440" marR="91440" marT="45720" marB="45720" anchor="ctr">
+                    <a:lnL w="12700" cap="flat" cmpd="sng" algn="ctr">
+                      <a:solidFill>
+                        <a:srgbClr val="D5DADD"/>
+                      </a:solidFill>
+                      <a:prstDash val="solid"/>
+                      <a:round/>
+                      <a:headEnd type="none" w="med" len="med"/>
+                      <a:tailEnd type="none" w="med" len="med"/>
+                    </a:lnL>
+                    <a:lnR w="12700" cap="flat" cmpd="sng" algn="ctr">
+                      <a:solidFill>
+                        <a:srgbClr val="D5DADD"/>
+                      </a:solidFill>
+                      <a:prstDash val="solid"/>
+                      <a:round/>
+                      <a:headEnd type="none" w="med" len="med"/>
+                      <a:tailEnd type="none" w="med" len="med"/>
+                    </a:lnR>
+                    <a:lnT w="12700" cap="flat" cmpd="sng" algn="ctr">
+                      <a:solidFill>
+                        <a:srgbClr val="D5DADD"/>
+                      </a:solidFill>
+                      <a:prstDash val="solid"/>
+                      <a:round/>
+                      <a:headEnd type="none" w="med" len="med"/>
+                      <a:tailEnd type="none" w="med" len="med"/>
+                    </a:lnT>
+                    <a:lnB w="12700" cap="flat" cmpd="sng" algn="ctr">
+                      <a:solidFill>
+                        <a:srgbClr val="D5DADD"/>
+                      </a:solidFill>
+                      <a:prstDash val="solid"/>
+                      <a:round/>
+                      <a:headEnd type="none" w="med" len="med"/>
+                      <a:tailEnd type="none" w="med" len="med"/>
+                    </a:lnB>
+                  </a:tcPr>
+                </a:tc>
+              </a:tr>
+              <a:tr h="411480">
+                <a:tc>
+                  <a:txBody>
+                    <a:bodyPr/>
+                    <a:lstStyle/>
+                    <a:p>
+                      <a:pPr algn="l" indent="0" marL="0">
+                        <a:buNone/>
+                      </a:pPr>
+                      <a:r>
+                        <a:rPr lang="en-US" sz="1300" dirty="0">
+                          <a:solidFill>
+                            <a:srgbClr val="181C1E"/>
+                          </a:solidFill>
+                          <a:latin typeface="Calibri" pitchFamily="34" charset="0"/>
+                          <a:ea typeface="Calibri" pitchFamily="34" charset="-122"/>
+                          <a:cs typeface="Calibri" pitchFamily="34" charset="-120"/>
+                        </a:rPr>
+                        <a:t>Opus: output (the data file and checks)</a:t>
+                      </a:r>
+                      <a:endParaRPr lang="en-US" sz="1300" dirty="0">
+                        <a:latin typeface="Calibri" charset="0"/>
+                        <a:ea typeface="Calibri" charset="0"/>
+                        <a:cs typeface="Calibri" charset="0"/>
+                      </a:endParaRPr>
+                    </a:p>
+                  </a:txBody>
+                  <a:tcPr marL="91440" marR="91440" marT="45720" marB="45720" anchor="ctr">
+                    <a:lnL w="12700" cap="flat" cmpd="sng" algn="ctr">
+                      <a:solidFill>
+                        <a:srgbClr val="D5DADD"/>
+                      </a:solidFill>
+                      <a:prstDash val="solid"/>
+                      <a:round/>
+                      <a:headEnd type="none" w="med" len="med"/>
+                      <a:tailEnd type="none" w="med" len="med"/>
+                    </a:lnL>
+                    <a:lnR w="12700" cap="flat" cmpd="sng" algn="ctr">
+                      <a:solidFill>
+                        <a:srgbClr val="D5DADD"/>
+                      </a:solidFill>
+                      <a:prstDash val="solid"/>
+                      <a:round/>
+                      <a:headEnd type="none" w="med" len="med"/>
+                      <a:tailEnd type="none" w="med" len="med"/>
+                    </a:lnR>
+                    <a:lnT w="12700" cap="flat" cmpd="sng" algn="ctr">
+                      <a:solidFill>
+                        <a:srgbClr val="D5DADD"/>
+                      </a:solidFill>
+                      <a:prstDash val="solid"/>
+                      <a:round/>
+                      <a:headEnd type="none" w="med" len="med"/>
+                      <a:tailEnd type="none" w="med" len="med"/>
+                    </a:lnT>
+                    <a:lnB w="12700" cap="flat" cmpd="sng" algn="ctr">
+                      <a:solidFill>
+                        <a:srgbClr val="D5DADD"/>
+                      </a:solidFill>
+                      <a:prstDash val="solid"/>
+                      <a:round/>
+                      <a:headEnd type="none" w="med" len="med"/>
+                      <a:tailEnd type="none" w="med" len="med"/>
+                    </a:lnB>
+                  </a:tcPr>
+                </a:tc>
+                <a:tc>
+                  <a:txBody>
+                    <a:bodyPr/>
+                    <a:lstStyle/>
+                    <a:p>
+                      <a:pPr algn="l" indent="0" marL="0">
+                        <a:buNone/>
+                      </a:pPr>
+                      <a:r>
+                        <a:rPr lang="en-US" sz="1300" dirty="0">
+                          <a:solidFill>
+                            <a:srgbClr val="181C1E"/>
+                          </a:solidFill>
+                          <a:latin typeface="Calibri" pitchFamily="34" charset="0"/>
+                          <a:ea typeface="Calibri" pitchFamily="34" charset="-122"/>
+                          <a:cs typeface="Calibri" pitchFamily="34" charset="-120"/>
+                        </a:rPr>
+                        <a:t>186,650 tokens</a:t>
+                      </a:r>
+                      <a:endParaRPr lang="en-US" sz="1300" dirty="0">
+                        <a:latin typeface="Calibri" charset="0"/>
+                        <a:ea typeface="Calibri" charset="0"/>
+                        <a:cs typeface="Calibri" charset="0"/>
+                      </a:endParaRPr>
+                    </a:p>
+                  </a:txBody>
+                  <a:tcPr marL="91440" marR="91440" marT="45720" marB="45720" anchor="ctr">
+                    <a:lnL w="12700" cap="flat" cmpd="sng" algn="ctr">
+                      <a:solidFill>
+                        <a:srgbClr val="D5DADD"/>
+                      </a:solidFill>
+                      <a:prstDash val="solid"/>
+                      <a:round/>
+                      <a:headEnd type="none" w="med" len="med"/>
+                      <a:tailEnd type="none" w="med" len="med"/>
+                    </a:lnL>
+                    <a:lnR w="12700" cap="flat" cmpd="sng" algn="ctr">
+                      <a:solidFill>
+                        <a:srgbClr val="D5DADD"/>
+                      </a:solidFill>
+                      <a:prstDash val="solid"/>
+                      <a:round/>
+                      <a:headEnd type="none" w="med" len="med"/>
+                      <a:tailEnd type="none" w="med" len="med"/>
+                    </a:lnR>
+                    <a:lnT w="12700" cap="flat" cmpd="sng" algn="ctr">
+                      <a:solidFill>
+                        <a:srgbClr val="D5DADD"/>
+                      </a:solidFill>
+                      <a:prstDash val="solid"/>
+                      <a:round/>
+                      <a:headEnd type="none" w="med" len="med"/>
+                      <a:tailEnd type="none" w="med" len="med"/>
+                    </a:lnT>
+                    <a:lnB w="12700" cap="flat" cmpd="sng" algn="ctr">
+                      <a:solidFill>
+                        <a:srgbClr val="D5DADD"/>
+                      </a:solidFill>
+                      <a:prstDash val="solid"/>
+                      <a:round/>
+                      <a:headEnd type="none" w="med" len="med"/>
+                      <a:tailEnd type="none" w="med" len="med"/>
+                    </a:lnB>
+                  </a:tcPr>
+                </a:tc>
+                <a:tc>
+                  <a:txBody>
+                    <a:bodyPr/>
+                    <a:lstStyle/>
+                    <a:p>
+                      <a:pPr algn="l" indent="0" marL="0">
+                        <a:buNone/>
+                      </a:pPr>
+                      <a:r>
+                        <a:rPr lang="en-US" sz="1300" dirty="0">
+                          <a:solidFill>
+                            <a:srgbClr val="181C1E"/>
+                          </a:solidFill>
+                          <a:latin typeface="Calibri" pitchFamily="34" charset="0"/>
+                          <a:ea typeface="Calibri" pitchFamily="34" charset="-122"/>
+                          <a:cs typeface="Calibri" pitchFamily="34" charset="-120"/>
+                        </a:rPr>
+                        <a:t>$20 / M</a:t>
+                      </a:r>
+                      <a:endParaRPr lang="en-US" sz="1300" dirty="0">
+                        <a:latin typeface="Calibri" charset="0"/>
+                        <a:ea typeface="Calibri" charset="0"/>
+                        <a:cs typeface="Calibri" charset="0"/>
+                      </a:endParaRPr>
+                    </a:p>
+                  </a:txBody>
+                  <a:tcPr marL="91440" marR="91440" marT="45720" marB="45720" anchor="ctr">
+                    <a:lnL w="12700" cap="flat" cmpd="sng" algn="ctr">
+                      <a:solidFill>
+                        <a:srgbClr val="D5DADD"/>
+                      </a:solidFill>
+                      <a:prstDash val="solid"/>
+                      <a:round/>
+                      <a:headEnd type="none" w="med" len="med"/>
+                      <a:tailEnd type="none" w="med" len="med"/>
+                    </a:lnL>
+                    <a:lnR w="12700" cap="flat" cmpd="sng" algn="ctr">
+                      <a:solidFill>
+                        <a:srgbClr val="D5DADD"/>
+                      </a:solidFill>
+                      <a:prstDash val="solid"/>
+                      <a:round/>
+                      <a:headEnd type="none" w="med" len="med"/>
+                      <a:tailEnd type="none" w="med" len="med"/>
+                    </a:lnR>
+                    <a:lnT w="12700" cap="flat" cmpd="sng" algn="ctr">
+                      <a:solidFill>
+                        <a:srgbClr val="D5DADD"/>
+                      </a:solidFill>
+                      <a:prstDash val="solid"/>
+                      <a:round/>
+                      <a:headEnd type="none" w="med" len="med"/>
+                      <a:tailEnd type="none" w="med" len="med"/>
+                    </a:lnT>
+                    <a:lnB w="12700" cap="flat" cmpd="sng" algn="ctr">
+                      <a:solidFill>
+                        <a:srgbClr val="D5DADD"/>
+                      </a:solidFill>
+                      <a:prstDash val="solid"/>
+                      <a:round/>
+                      <a:headEnd type="none" w="med" len="med"/>
+                      <a:tailEnd type="none" w="med" len="med"/>
+                    </a:lnB>
+                  </a:tcPr>
+                </a:tc>
+                <a:tc>
+                  <a:txBody>
+                    <a:bodyPr/>
+                    <a:lstStyle/>
+                    <a:p>
+                      <a:pPr algn="r" indent="0" marL="0">
+                        <a:buNone/>
+                      </a:pPr>
+                      <a:r>
+                        <a:rPr lang="en-US" sz="1300" dirty="0">
+                          <a:solidFill>
+                            <a:srgbClr val="181C1E"/>
+                          </a:solidFill>
+                          <a:latin typeface="Calibri" pitchFamily="34" charset="0"/>
+                          <a:ea typeface="Calibri" pitchFamily="34" charset="-122"/>
+                          <a:cs typeface="Calibri" pitchFamily="34" charset="-120"/>
+                        </a:rPr>
+                        <a:t>3.73</a:t>
+                      </a:r>
+                      <a:endParaRPr lang="en-US" sz="1300" dirty="0">
+                        <a:latin typeface="Calibri" charset="0"/>
+                        <a:ea typeface="Calibri" charset="0"/>
+                        <a:cs typeface="Calibri" charset="0"/>
+                      </a:endParaRPr>
+                    </a:p>
+                  </a:txBody>
+                  <a:tcPr marL="91440" marR="91440" marT="45720" marB="45720" anchor="ctr">
+                    <a:lnL w="12700" cap="flat" cmpd="sng" algn="ctr">
+                      <a:solidFill>
+                        <a:srgbClr val="D5DADD"/>
+                      </a:solidFill>
+                      <a:prstDash val="solid"/>
+                      <a:round/>
+                      <a:headEnd type="none" w="med" len="med"/>
+                      <a:tailEnd type="none" w="med" len="med"/>
+                    </a:lnL>
+                    <a:lnR w="12700" cap="flat" cmpd="sng" algn="ctr">
+                      <a:solidFill>
+                        <a:srgbClr val="D5DADD"/>
+                      </a:solidFill>
+                      <a:prstDash val="solid"/>
+                      <a:round/>
+                      <a:headEnd type="none" w="med" len="med"/>
+                      <a:tailEnd type="none" w="med" len="med"/>
+                    </a:lnR>
+                    <a:lnT w="12700" cap="flat" cmpd="sng" algn="ctr">
+                      <a:solidFill>
+                        <a:srgbClr val="D5DADD"/>
+                      </a:solidFill>
+                      <a:prstDash val="solid"/>
+                      <a:round/>
+                      <a:headEnd type="none" w="med" len="med"/>
+                      <a:tailEnd type="none" w="med" len="med"/>
+                    </a:lnT>
+                    <a:lnB w="12700" cap="flat" cmpd="sng" algn="ctr">
+                      <a:solidFill>
+                        <a:srgbClr val="D5DADD"/>
+                      </a:solidFill>
+                      <a:prstDash val="solid"/>
+                      <a:round/>
+                      <a:headEnd type="none" w="med" len="med"/>
+                      <a:tailEnd type="none" w="med" len="med"/>
+                    </a:lnB>
+                  </a:tcPr>
+                </a:tc>
+                <a:tc>
+                  <a:txBody>
+                    <a:bodyPr/>
+                    <a:lstStyle/>
+                    <a:p>
+                      <a:pPr algn="r" indent="0" marL="0">
+                        <a:buNone/>
+                      </a:pPr>
+                      <a:r>
+                        <a:rPr lang="en-US" sz="1300" dirty="0">
+                          <a:solidFill>
+                            <a:srgbClr val="181C1E"/>
+                          </a:solidFill>
+                          <a:latin typeface="Calibri" pitchFamily="34" charset="0"/>
+                          <a:ea typeface="Calibri" pitchFamily="34" charset="-122"/>
+                          <a:cs typeface="Calibri" pitchFamily="34" charset="-120"/>
+                        </a:rPr>
+                        <a:t>4.77</a:t>
+                      </a:r>
+                      <a:endParaRPr lang="en-US" sz="1300" dirty="0">
+                        <a:latin typeface="Calibri" charset="0"/>
+                        <a:ea typeface="Calibri" charset="0"/>
+                        <a:cs typeface="Calibri" charset="0"/>
+                      </a:endParaRPr>
+                    </a:p>
+                  </a:txBody>
+                  <a:tcPr marL="91440" marR="91440" marT="45720" marB="45720" anchor="ctr">
+                    <a:lnL w="12700" cap="flat" cmpd="sng" algn="ctr">
+                      <a:solidFill>
+                        <a:srgbClr val="D5DADD"/>
+                      </a:solidFill>
+                      <a:prstDash val="solid"/>
+                      <a:round/>
+                      <a:headEnd type="none" w="med" len="med"/>
+                      <a:tailEnd type="none" w="med" len="med"/>
+                    </a:lnL>
+                    <a:lnR w="12700" cap="flat" cmpd="sng" algn="ctr">
+                      <a:solidFill>
+                        <a:srgbClr val="D5DADD"/>
+                      </a:solidFill>
+                      <a:prstDash val="solid"/>
+                      <a:round/>
+                      <a:headEnd type="none" w="med" len="med"/>
+                      <a:tailEnd type="none" w="med" len="med"/>
+                    </a:lnR>
+                    <a:lnT w="12700" cap="flat" cmpd="sng" algn="ctr">
+                      <a:solidFill>
+                        <a:srgbClr val="D5DADD"/>
+                      </a:solidFill>
+                      <a:prstDash val="solid"/>
+                      <a:round/>
+                      <a:headEnd type="none" w="med" len="med"/>
+                      <a:tailEnd type="none" w="med" len="med"/>
+                    </a:lnT>
+                    <a:lnB w="12700" cap="flat" cmpd="sng" algn="ctr">
+                      <a:solidFill>
+                        <a:srgbClr val="D5DADD"/>
+                      </a:solidFill>
+                      <a:prstDash val="solid"/>
+                      <a:round/>
+                      <a:headEnd type="none" w="med" len="med"/>
+                      <a:tailEnd type="none" w="med" len="med"/>
+                    </a:lnB>
+                  </a:tcPr>
+                </a:tc>
+              </a:tr>
+              <a:tr h="411480">
+                <a:tc>
+                  <a:txBody>
+                    <a:bodyPr/>
+                    <a:lstStyle/>
+                    <a:p>
+                      <a:pPr algn="l" indent="0" marL="0">
+                        <a:buNone/>
+                      </a:pPr>
+                      <a:r>
+                        <a:rPr lang="en-US" sz="1300" b="1" dirty="0">
+                          <a:solidFill>
+                            <a:srgbClr val="181C1E"/>
+                          </a:solidFill>
+                          <a:latin typeface="Calibri" pitchFamily="34" charset="0"/>
+                          <a:ea typeface="Calibri" pitchFamily="34" charset="-122"/>
+                          <a:cs typeface="Calibri" pitchFamily="34" charset="-120"/>
+                        </a:rPr>
+                        <a:t>Total, our estimate</a:t>
+                      </a:r>
+                      <a:endParaRPr lang="en-US" sz="1300" dirty="0">
+                        <a:latin typeface="Calibri" charset="0"/>
+                        <a:ea typeface="Calibri" charset="0"/>
+                        <a:cs typeface="Calibri" charset="0"/>
+                      </a:endParaRPr>
+                    </a:p>
+                  </a:txBody>
+                  <a:tcPr marL="91440" marR="91440" marT="45720" marB="45720" anchor="ctr">
+                    <a:lnL w="12700" cap="flat" cmpd="sng" algn="ctr">
+                      <a:solidFill>
+                        <a:srgbClr val="D5DADD"/>
+                      </a:solidFill>
+                      <a:prstDash val="solid"/>
+                      <a:round/>
+                      <a:headEnd type="none" w="med" len="med"/>
+                      <a:tailEnd type="none" w="med" len="med"/>
+                    </a:lnL>
+                    <a:lnR w="12700" cap="flat" cmpd="sng" algn="ctr">
+                      <a:solidFill>
+                        <a:srgbClr val="D5DADD"/>
+                      </a:solidFill>
+                      <a:prstDash val="solid"/>
+                      <a:round/>
+                      <a:headEnd type="none" w="med" len="med"/>
+                      <a:tailEnd type="none" w="med" len="med"/>
+                    </a:lnR>
+                    <a:lnT w="12700" cap="flat" cmpd="sng" algn="ctr">
+                      <a:solidFill>
+                        <a:srgbClr val="D5DADD"/>
+                      </a:solidFill>
+                      <a:prstDash val="solid"/>
+                      <a:round/>
+                      <a:headEnd type="none" w="med" len="med"/>
+                      <a:tailEnd type="none" w="med" len="med"/>
+                    </a:lnT>
+                    <a:lnB w="12700" cap="flat" cmpd="sng" algn="ctr">
+                      <a:solidFill>
+                        <a:srgbClr val="D5DADD"/>
+                      </a:solidFill>
+                      <a:prstDash val="solid"/>
+                      <a:round/>
+                      <a:headEnd type="none" w="med" len="med"/>
+                      <a:tailEnd type="none" w="med" len="med"/>
+                    </a:lnB>
+                    <a:solidFill>
+                      <a:srgbClr val="EEF1F3"/>
+                    </a:solidFill>
+                  </a:tcPr>
+                </a:tc>
+                <a:tc>
+                  <a:txBody>
+                    <a:bodyPr/>
+                    <a:lstStyle/>
+                    <a:p>
+                      <a:pPr algn="l" indent="0" marL="0">
+                        <a:buNone/>
+                      </a:pPr>
+                      <a:endParaRPr lang="en-US" sz="1300" dirty="0">
+                        <a:latin typeface="Calibri" charset="0"/>
+                        <a:ea typeface="Calibri" charset="0"/>
+                        <a:cs typeface="Calibri" charset="0"/>
+                      </a:endParaRPr>
+                    </a:p>
+                  </a:txBody>
+                  <a:tcPr marL="91440" marR="91440" marT="45720" marB="45720" anchor="ctr">
+                    <a:lnL w="12700" cap="flat" cmpd="sng" algn="ctr">
+                      <a:solidFill>
+                        <a:srgbClr val="D5DADD"/>
+                      </a:solidFill>
+                      <a:prstDash val="solid"/>
+                      <a:round/>
+                      <a:headEnd type="none" w="med" len="med"/>
+                      <a:tailEnd type="none" w="med" len="med"/>
+                    </a:lnL>
+                    <a:lnR w="12700" cap="flat" cmpd="sng" algn="ctr">
+                      <a:solidFill>
+                        <a:srgbClr val="D5DADD"/>
+                      </a:solidFill>
+                      <a:prstDash val="solid"/>
+                      <a:round/>
+                      <a:headEnd type="none" w="med" len="med"/>
+                      <a:tailEnd type="none" w="med" len="med"/>
+                    </a:lnR>
+                    <a:lnT w="12700" cap="flat" cmpd="sng" algn="ctr">
+                      <a:solidFill>
+                        <a:srgbClr val="D5DADD"/>
+                      </a:solidFill>
+                      <a:prstDash val="solid"/>
+                      <a:round/>
+                      <a:headEnd type="none" w="med" len="med"/>
+                      <a:tailEnd type="none" w="med" len="med"/>
+                    </a:lnT>
+                    <a:lnB w="12700" cap="flat" cmpd="sng" algn="ctr">
+                      <a:solidFill>
+                        <a:srgbClr val="D5DADD"/>
+                      </a:solidFill>
+                      <a:prstDash val="solid"/>
+                      <a:round/>
+                      <a:headEnd type="none" w="med" len="med"/>
+                      <a:tailEnd type="none" w="med" len="med"/>
+                    </a:lnB>
+                    <a:solidFill>
+                      <a:srgbClr val="EEF1F3"/>
+                    </a:solidFill>
+                  </a:tcPr>
+                </a:tc>
+                <a:tc>
+                  <a:txBody>
+                    <a:bodyPr/>
+                    <a:lstStyle/>
+                    <a:p>
+                      <a:pPr algn="l" indent="0" marL="0">
+                        <a:buNone/>
+                      </a:pPr>
+                      <a:endParaRPr lang="en-US" sz="1300" dirty="0">
+                        <a:latin typeface="Calibri" charset="0"/>
+                        <a:ea typeface="Calibri" charset="0"/>
+                        <a:cs typeface="Calibri" charset="0"/>
+                      </a:endParaRPr>
+                    </a:p>
+                  </a:txBody>
+                  <a:tcPr marL="91440" marR="91440" marT="45720" marB="45720" anchor="ctr">
+                    <a:lnL w="12700" cap="flat" cmpd="sng" algn="ctr">
+                      <a:solidFill>
+                        <a:srgbClr val="D5DADD"/>
+                      </a:solidFill>
+                      <a:prstDash val="solid"/>
+                      <a:round/>
+                      <a:headEnd type="none" w="med" len="med"/>
+                      <a:tailEnd type="none" w="med" len="med"/>
+                    </a:lnL>
+                    <a:lnR w="12700" cap="flat" cmpd="sng" algn="ctr">
+                      <a:solidFill>
+                        <a:srgbClr val="D5DADD"/>
+                      </a:solidFill>
+                      <a:prstDash val="solid"/>
+                      <a:round/>
+                      <a:headEnd type="none" w="med" len="med"/>
+                      <a:tailEnd type="none" w="med" len="med"/>
+                    </a:lnR>
+                    <a:lnT w="12700" cap="flat" cmpd="sng" algn="ctr">
+                      <a:solidFill>
+                        <a:srgbClr val="D5DADD"/>
+                      </a:solidFill>
+                      <a:prstDash val="solid"/>
+                      <a:round/>
+                      <a:headEnd type="none" w="med" len="med"/>
+                      <a:tailEnd type="none" w="med" len="med"/>
+                    </a:lnT>
+                    <a:lnB w="12700" cap="flat" cmpd="sng" algn="ctr">
+                      <a:solidFill>
+                        <a:srgbClr val="D5DADD"/>
+                      </a:solidFill>
+                      <a:prstDash val="solid"/>
+                      <a:round/>
+                      <a:headEnd type="none" w="med" len="med"/>
+                      <a:tailEnd type="none" w="med" len="med"/>
+                    </a:lnB>
+                    <a:solidFill>
+                      <a:srgbClr val="EEF1F3"/>
+                    </a:solidFill>
+                  </a:tcPr>
+                </a:tc>
+                <a:tc>
+                  <a:txBody>
+                    <a:bodyPr/>
+                    <a:lstStyle/>
+                    <a:p>
+                      <a:pPr algn="r" indent="0" marL="0">
+                        <a:buNone/>
+                      </a:pPr>
+                      <a:r>
+                        <a:rPr lang="en-US" sz="1300" b="1" dirty="0">
+                          <a:solidFill>
+                            <a:srgbClr val="181C1E"/>
+                          </a:solidFill>
+                          <a:latin typeface="Calibri" pitchFamily="34" charset="0"/>
+                          <a:ea typeface="Calibri" pitchFamily="34" charset="-122"/>
+                          <a:cs typeface="Calibri" pitchFamily="34" charset="-120"/>
+                        </a:rPr>
+                        <a:t>10.02</a:t>
+                      </a:r>
+                      <a:endParaRPr lang="en-US" sz="1300" dirty="0">
+                        <a:latin typeface="Calibri" charset="0"/>
+                        <a:ea typeface="Calibri" charset="0"/>
+                        <a:cs typeface="Calibri" charset="0"/>
+                      </a:endParaRPr>
+                    </a:p>
+                  </a:txBody>
+                  <a:tcPr marL="91440" marR="91440" marT="45720" marB="45720" anchor="ctr">
+                    <a:lnL w="12700" cap="flat" cmpd="sng" algn="ctr">
+                      <a:solidFill>
+                        <a:srgbClr val="D5DADD"/>
+                      </a:solidFill>
+                      <a:prstDash val="solid"/>
+                      <a:round/>
+                      <a:headEnd type="none" w="med" len="med"/>
+                      <a:tailEnd type="none" w="med" len="med"/>
+                    </a:lnL>
+                    <a:lnR w="12700" cap="flat" cmpd="sng" algn="ctr">
+                      <a:solidFill>
+                        <a:srgbClr val="D5DADD"/>
+                      </a:solidFill>
+                      <a:prstDash val="solid"/>
+                      <a:round/>
+                      <a:headEnd type="none" w="med" len="med"/>
+                      <a:tailEnd type="none" w="med" len="med"/>
+                    </a:lnR>
+                    <a:lnT w="12700" cap="flat" cmpd="sng" algn="ctr">
+                      <a:solidFill>
+                        <a:srgbClr val="D5DADD"/>
+                      </a:solidFill>
+                      <a:prstDash val="solid"/>
+                      <a:round/>
+                      <a:headEnd type="none" w="med" len="med"/>
+                      <a:tailEnd type="none" w="med" len="med"/>
+                    </a:lnT>
+                    <a:lnB w="12700" cap="flat" cmpd="sng" algn="ctr">
+                      <a:solidFill>
+                        <a:srgbClr val="D5DADD"/>
+                      </a:solidFill>
+                      <a:prstDash val="solid"/>
+                      <a:round/>
+                      <a:headEnd type="none" w="med" len="med"/>
+                      <a:tailEnd type="none" w="med" len="med"/>
+                    </a:lnB>
+                    <a:solidFill>
+                      <a:srgbClr val="EEF1F3"/>
+                    </a:solidFill>
+                  </a:tcPr>
+                </a:tc>
+                <a:tc>
+                  <a:txBody>
+                    <a:bodyPr/>
+                    <a:lstStyle/>
+                    <a:p>
+                      <a:pPr algn="r" indent="0" marL="0">
+                        <a:buNone/>
+                      </a:pPr>
+                      <a:r>
+                        <a:rPr lang="en-US" sz="1300" b="1" dirty="0">
+                          <a:solidFill>
+                            <a:srgbClr val="181C1E"/>
+                          </a:solidFill>
+                          <a:latin typeface="Calibri" pitchFamily="34" charset="0"/>
+                          <a:ea typeface="Calibri" pitchFamily="34" charset="-122"/>
+                          <a:cs typeface="Calibri" pitchFamily="34" charset="-120"/>
+                        </a:rPr>
+                        <a:t>12.80</a:t>
+                      </a:r>
+                      <a:endParaRPr lang="en-US" sz="1300" dirty="0">
+                        <a:latin typeface="Calibri" charset="0"/>
+                        <a:ea typeface="Calibri" charset="0"/>
+                        <a:cs typeface="Calibri" charset="0"/>
+                      </a:endParaRPr>
+                    </a:p>
+                  </a:txBody>
+                  <a:tcPr marL="91440" marR="91440" marT="45720" marB="45720" anchor="ctr">
+                    <a:lnL w="12700" cap="flat" cmpd="sng" algn="ctr">
+                      <a:solidFill>
+                        <a:srgbClr val="D5DADD"/>
+                      </a:solidFill>
+                      <a:prstDash val="solid"/>
+                      <a:round/>
+                      <a:headEnd type="none" w="med" len="med"/>
+                      <a:tailEnd type="none" w="med" len="med"/>
+                    </a:lnL>
+                    <a:lnR w="12700" cap="flat" cmpd="sng" algn="ctr">
+                      <a:solidFill>
+                        <a:srgbClr val="D5DADD"/>
+                      </a:solidFill>
+                      <a:prstDash val="solid"/>
+                      <a:round/>
+                      <a:headEnd type="none" w="med" len="med"/>
+                      <a:tailEnd type="none" w="med" len="med"/>
+                    </a:lnR>
+                    <a:lnT w="12700" cap="flat" cmpd="sng" algn="ctr">
+                      <a:solidFill>
+                        <a:srgbClr val="D5DADD"/>
+                      </a:solidFill>
+                      <a:prstDash val="solid"/>
+                      <a:round/>
+                      <a:headEnd type="none" w="med" len="med"/>
+                      <a:tailEnd type="none" w="med" len="med"/>
+                    </a:lnT>
+                    <a:lnB w="12700" cap="flat" cmpd="sng" algn="ctr">
+                      <a:solidFill>
+                        <a:srgbClr val="D5DADD"/>
+                      </a:solidFill>
+                      <a:prstDash val="solid"/>
+                      <a:round/>
+                      <a:headEnd type="none" w="med" len="med"/>
+                      <a:tailEnd type="none" w="med" len="med"/>
+                    </a:lnB>
+                    <a:solidFill>
+                      <a:srgbClr val="EEF1F3"/>
+                    </a:solidFill>
+                  </a:tcPr>
+                </a:tc>
+              </a:tr>
+              <a:tr h="411480">
+                <a:tc>
+                  <a:txBody>
+                    <a:bodyPr/>
+                    <a:lstStyle/>
+                    <a:p>
+                      <a:pPr algn="l" indent="0" marL="0">
+                        <a:buNone/>
+                      </a:pPr>
+                      <a:r>
+                        <a:rPr lang="en-US" sz="1300" b="1" dirty="0">
+                          <a:solidFill>
+                            <a:srgbClr val="181C1E"/>
+                          </a:solidFill>
+                          <a:latin typeface="Calibri" pitchFamily="34" charset="0"/>
+                          <a:ea typeface="Calibri" pitchFamily="34" charset="-122"/>
+                          <a:cs typeface="Calibri" pitchFamily="34" charset="-120"/>
+                        </a:rPr>
+                        <a:t>Claude Code’s own reported cost</a:t>
+                      </a:r>
+                      <a:endParaRPr lang="en-US" sz="1300" dirty="0">
+                        <a:latin typeface="Calibri" charset="0"/>
+                        <a:ea typeface="Calibri" charset="0"/>
+                        <a:cs typeface="Calibri" charset="0"/>
+                      </a:endParaRPr>
+                    </a:p>
+                  </a:txBody>
+                  <a:tcPr marL="91440" marR="91440" marT="45720" marB="45720" anchor="ctr">
+                    <a:lnL w="12700" cap="flat" cmpd="sng" algn="ctr">
+                      <a:solidFill>
+                        <a:srgbClr val="D5DADD"/>
+                      </a:solidFill>
+                      <a:prstDash val="solid"/>
+                      <a:round/>
+                      <a:headEnd type="none" w="med" len="med"/>
+                      <a:tailEnd type="none" w="med" len="med"/>
+                    </a:lnL>
+                    <a:lnR w="12700" cap="flat" cmpd="sng" algn="ctr">
+                      <a:solidFill>
+                        <a:srgbClr val="D5DADD"/>
+                      </a:solidFill>
+                      <a:prstDash val="solid"/>
+                      <a:round/>
+                      <a:headEnd type="none" w="med" len="med"/>
+                      <a:tailEnd type="none" w="med" len="med"/>
+                    </a:lnR>
+                    <a:lnT w="12700" cap="flat" cmpd="sng" algn="ctr">
+                      <a:solidFill>
+                        <a:srgbClr val="D5DADD"/>
+                      </a:solidFill>
+                      <a:prstDash val="solid"/>
+                      <a:round/>
+                      <a:headEnd type="none" w="med" len="med"/>
+                      <a:tailEnd type="none" w="med" len="med"/>
+                    </a:lnT>
+                    <a:lnB w="12700" cap="flat" cmpd="sng" algn="ctr">
+                      <a:solidFill>
+                        <a:srgbClr val="D5DADD"/>
+                      </a:solidFill>
+                      <a:prstDash val="solid"/>
+                      <a:round/>
+                      <a:headEnd type="none" w="med" len="med"/>
+                      <a:tailEnd type="none" w="med" len="med"/>
+                    </a:lnB>
+                    <a:solidFill>
+                      <a:srgbClr val="EEF1F3"/>
+                    </a:solidFill>
+                  </a:tcPr>
+                </a:tc>
+                <a:tc>
+                  <a:txBody>
+                    <a:bodyPr/>
+                    <a:lstStyle/>
+                    <a:p>
+                      <a:pPr algn="l" indent="0" marL="0">
+                        <a:buNone/>
+                      </a:pPr>
+                      <a:r>
+                        <a:rPr lang="en-US" sz="1300" b="1" dirty="0">
+                          <a:solidFill>
+                            <a:srgbClr val="181C1E"/>
+                          </a:solidFill>
+                          <a:latin typeface="Calibri" pitchFamily="34" charset="0"/>
+                          <a:ea typeface="Calibri" pitchFamily="34" charset="-122"/>
+                          <a:cs typeface="Calibri" pitchFamily="34" charset="-120"/>
+                        </a:rPr>
+                        <a:t>Haiku $2.16 + Opus $7.63</a:t>
+                      </a:r>
+                      <a:endParaRPr lang="en-US" sz="1300" dirty="0">
+                        <a:latin typeface="Calibri" charset="0"/>
+                        <a:ea typeface="Calibri" charset="0"/>
+                        <a:cs typeface="Calibri" charset="0"/>
+                      </a:endParaRPr>
+                    </a:p>
+                  </a:txBody>
+                  <a:tcPr marL="91440" marR="91440" marT="45720" marB="45720" anchor="ctr">
+                    <a:lnL w="12700" cap="flat" cmpd="sng" algn="ctr">
+                      <a:solidFill>
+                        <a:srgbClr val="D5DADD"/>
+                      </a:solidFill>
+                      <a:prstDash val="solid"/>
+                      <a:round/>
+                      <a:headEnd type="none" w="med" len="med"/>
+                      <a:tailEnd type="none" w="med" len="med"/>
+                    </a:lnL>
+                    <a:lnR w="12700" cap="flat" cmpd="sng" algn="ctr">
+                      <a:solidFill>
+                        <a:srgbClr val="D5DADD"/>
+                      </a:solidFill>
+                      <a:prstDash val="solid"/>
+                      <a:round/>
+                      <a:headEnd type="none" w="med" len="med"/>
+                      <a:tailEnd type="none" w="med" len="med"/>
+                    </a:lnR>
+                    <a:lnT w="12700" cap="flat" cmpd="sng" algn="ctr">
+                      <a:solidFill>
+                        <a:srgbClr val="D5DADD"/>
+                      </a:solidFill>
+                      <a:prstDash val="solid"/>
+                      <a:round/>
+                      <a:headEnd type="none" w="med" len="med"/>
+                      <a:tailEnd type="none" w="med" len="med"/>
+                    </a:lnT>
+                    <a:lnB w="12700" cap="flat" cmpd="sng" algn="ctr">
+                      <a:solidFill>
+                        <a:srgbClr val="D5DADD"/>
+                      </a:solidFill>
+                      <a:prstDash val="solid"/>
+                      <a:round/>
+                      <a:headEnd type="none" w="med" len="med"/>
+                      <a:tailEnd type="none" w="med" len="med"/>
+                    </a:lnB>
+                    <a:solidFill>
+                      <a:srgbClr val="EEF1F3"/>
+                    </a:solidFill>
+                  </a:tcPr>
+                </a:tc>
+                <a:tc>
+                  <a:txBody>
+                    <a:bodyPr/>
+                    <a:lstStyle/>
+                    <a:p>
+                      <a:pPr algn="l" indent="0" marL="0">
+                        <a:buNone/>
+                      </a:pPr>
+                      <a:endParaRPr lang="en-US" sz="1300" dirty="0">
+                        <a:latin typeface="Calibri" charset="0"/>
+                        <a:ea typeface="Calibri" charset="0"/>
+                        <a:cs typeface="Calibri" charset="0"/>
+                      </a:endParaRPr>
+                    </a:p>
+                  </a:txBody>
+                  <a:tcPr marL="91440" marR="91440" marT="45720" marB="45720" anchor="ctr">
+                    <a:lnL w="12700" cap="flat" cmpd="sng" algn="ctr">
+                      <a:solidFill>
+                        <a:srgbClr val="D5DADD"/>
+                      </a:solidFill>
+                      <a:prstDash val="solid"/>
+                      <a:round/>
+                      <a:headEnd type="none" w="med" len="med"/>
+                      <a:tailEnd type="none" w="med" len="med"/>
+                    </a:lnL>
+                    <a:lnR w="12700" cap="flat" cmpd="sng" algn="ctr">
+                      <a:solidFill>
+                        <a:srgbClr val="D5DADD"/>
+                      </a:solidFill>
+                      <a:prstDash val="solid"/>
+                      <a:round/>
+                      <a:headEnd type="none" w="med" len="med"/>
+                      <a:tailEnd type="none" w="med" len="med"/>
+                    </a:lnR>
+                    <a:lnT w="12700" cap="flat" cmpd="sng" algn="ctr">
+                      <a:solidFill>
+                        <a:srgbClr val="D5DADD"/>
+                      </a:solidFill>
+                      <a:prstDash val="solid"/>
+                      <a:round/>
+                      <a:headEnd type="none" w="med" len="med"/>
+                      <a:tailEnd type="none" w="med" len="med"/>
+                    </a:lnT>
+                    <a:lnB w="12700" cap="flat" cmpd="sng" algn="ctr">
+                      <a:solidFill>
+                        <a:srgbClr val="D5DADD"/>
+                      </a:solidFill>
+                      <a:prstDash val="solid"/>
+                      <a:round/>
+                      <a:headEnd type="none" w="med" len="med"/>
+                      <a:tailEnd type="none" w="med" len="med"/>
+                    </a:lnB>
+                    <a:solidFill>
+                      <a:srgbClr val="EEF1F3"/>
+                    </a:solidFill>
+                  </a:tcPr>
+                </a:tc>
+                <a:tc>
+                  <a:txBody>
+                    <a:bodyPr/>
+                    <a:lstStyle/>
+                    <a:p>
+                      <a:pPr algn="r" indent="0" marL="0">
+                        <a:buNone/>
+                      </a:pPr>
+                      <a:r>
+                        <a:rPr lang="en-US" sz="1300" b="1" dirty="0">
+                          <a:solidFill>
+                            <a:srgbClr val="181C1E"/>
+                          </a:solidFill>
+                          <a:latin typeface="Calibri" pitchFamily="34" charset="0"/>
+                          <a:ea typeface="Calibri" pitchFamily="34" charset="-122"/>
+                          <a:cs typeface="Calibri" pitchFamily="34" charset="-120"/>
+                        </a:rPr>
+                        <a:t>9.80</a:t>
+                      </a:r>
+                      <a:endParaRPr lang="en-US" sz="1300" dirty="0">
+                        <a:latin typeface="Calibri" charset="0"/>
+                        <a:ea typeface="Calibri" charset="0"/>
+                        <a:cs typeface="Calibri" charset="0"/>
+                      </a:endParaRPr>
+                    </a:p>
+                  </a:txBody>
+                  <a:tcPr marL="91440" marR="91440" marT="45720" marB="45720" anchor="ctr">
+                    <a:lnL w="12700" cap="flat" cmpd="sng" algn="ctr">
+                      <a:solidFill>
+                        <a:srgbClr val="D5DADD"/>
+                      </a:solidFill>
+                      <a:prstDash val="solid"/>
+                      <a:round/>
+                      <a:headEnd type="none" w="med" len="med"/>
+                      <a:tailEnd type="none" w="med" len="med"/>
+                    </a:lnL>
+                    <a:lnR w="12700" cap="flat" cmpd="sng" algn="ctr">
+                      <a:solidFill>
+                        <a:srgbClr val="D5DADD"/>
+                      </a:solidFill>
+                      <a:prstDash val="solid"/>
+                      <a:round/>
+                      <a:headEnd type="none" w="med" len="med"/>
+                      <a:tailEnd type="none" w="med" len="med"/>
+                    </a:lnR>
+                    <a:lnT w="12700" cap="flat" cmpd="sng" algn="ctr">
+                      <a:solidFill>
+                        <a:srgbClr val="D5DADD"/>
+                      </a:solidFill>
+                      <a:prstDash val="solid"/>
+                      <a:round/>
+                      <a:headEnd type="none" w="med" len="med"/>
+                      <a:tailEnd type="none" w="med" len="med"/>
+                    </a:lnT>
+                    <a:lnB w="12700" cap="flat" cmpd="sng" algn="ctr">
+                      <a:solidFill>
+                        <a:srgbClr val="D5DADD"/>
+                      </a:solidFill>
+                      <a:prstDash val="solid"/>
+                      <a:round/>
+                      <a:headEnd type="none" w="med" len="med"/>
+                      <a:tailEnd type="none" w="med" len="med"/>
+                    </a:lnB>
+                    <a:solidFill>
+                      <a:srgbClr val="EEF1F3"/>
+                    </a:solidFill>
+                  </a:tcPr>
+                </a:tc>
+                <a:tc>
+                  <a:txBody>
+                    <a:bodyPr/>
+                    <a:lstStyle/>
+                    <a:p>
+                      <a:pPr algn="r" indent="0" marL="0">
+                        <a:buNone/>
+                      </a:pPr>
+                      <a:r>
+                        <a:rPr lang="en-US" sz="1300" b="1" dirty="0">
+                          <a:solidFill>
+                            <a:srgbClr val="181C1E"/>
+                          </a:solidFill>
+                          <a:latin typeface="Calibri" pitchFamily="34" charset="0"/>
+                          <a:ea typeface="Calibri" pitchFamily="34" charset="-122"/>
+                          <a:cs typeface="Calibri" pitchFamily="34" charset="-120"/>
+                        </a:rPr>
+                        <a:t>12.51</a:t>
+                      </a:r>
+                      <a:endParaRPr lang="en-US" sz="1300" dirty="0">
+                        <a:latin typeface="Calibri" charset="0"/>
+                        <a:ea typeface="Calibri" charset="0"/>
+                        <a:cs typeface="Calibri" charset="0"/>
+                      </a:endParaRPr>
+                    </a:p>
+                  </a:txBody>
+                  <a:tcPr marL="91440" marR="91440" marT="45720" marB="45720" anchor="ctr">
+                    <a:lnL w="12700" cap="flat" cmpd="sng" algn="ctr">
+                      <a:solidFill>
+                        <a:srgbClr val="D5DADD"/>
+                      </a:solidFill>
+                      <a:prstDash val="solid"/>
+                      <a:round/>
+                      <a:headEnd type="none" w="med" len="med"/>
+                      <a:tailEnd type="none" w="med" len="med"/>
+                    </a:lnL>
+                    <a:lnR w="12700" cap="flat" cmpd="sng" algn="ctr">
+                      <a:solidFill>
+                        <a:srgbClr val="D5DADD"/>
+                      </a:solidFill>
+                      <a:prstDash val="solid"/>
+                      <a:round/>
+                      <a:headEnd type="none" w="med" len="med"/>
+                      <a:tailEnd type="none" w="med" len="med"/>
+                    </a:lnR>
+                    <a:lnT w="12700" cap="flat" cmpd="sng" algn="ctr">
+                      <a:solidFill>
+                        <a:srgbClr val="D5DADD"/>
+                      </a:solidFill>
+                      <a:prstDash val="solid"/>
+                      <a:round/>
+                      <a:headEnd type="none" w="med" len="med"/>
+                      <a:tailEnd type="none" w="med" len="med"/>
+                    </a:lnT>
+                    <a:lnB w="12700" cap="flat" cmpd="sng" algn="ctr">
+                      <a:solidFill>
+                        <a:srgbClr val="D5DADD"/>
+                      </a:solidFill>
+                      <a:prstDash val="solid"/>
+                      <a:round/>
+                      <a:headEnd type="none" w="med" len="med"/>
+                      <a:tailEnd type="none" w="med" len="med"/>
+                    </a:lnB>
+                    <a:solidFill>
+                      <a:srgbClr val="EEF1F3"/>
+                    </a:solidFill>
+                  </a:tcPr>
+                </a:tc>
+              </a:tr>
+            </a:tbl>
+          </a:graphicData>
+        </a:graphic>
+      </p:graphicFrame>
+      <p:sp>
+        <p:nvSpPr>
+          <p:cNvPr id="4" name="Text 1"/>
+          <p:cNvSpPr txBox="1"/>
+          <p:nvPr/>
+        </p:nvSpPr>
+        <p:spPr>
+          <a:xfrm>
+            <a:off x="548640" y="6172200"/>
+            <a:ext cx="10607040" cy="365760"/>
+          </a:xfrm>
+          <a:prstGeom prst="rect">
+            <a:avLst/>
+          </a:prstGeom>
+          <a:noFill/>
+          <a:ln/>
+        </p:spPr>
+        <p:txBody>
+          <a:bodyPr wrap="square" lIns="0" tIns="0" rIns="0" bIns="0" rtlCol="0" anchor="t"/>
+          <a:lstStyle/>
+          <a:p>
+            <a:pPr indent="0" marL="0">
+              <a:buNone/>
+            </a:pPr>
+            <a:r>
+              <a:rPr lang="en-US" sz="1100" dirty="0">
+                <a:solidFill>
+                  <a:srgbClr val="3F484D"/>
+                </a:solidFill>
+                <a:latin typeface="Calibri" pitchFamily="34" charset="0"/>
+                <a:ea typeface="Calibri" pitchFamily="34" charset="-122"/>
+                <a:cs typeface="Calibri" pitchFamily="34" charset="-120"/>
+              </a:rPr>
+              <a:t>Token counts are measured (28 Oct build log). Rates: lib/pricing.ts. Ours runs 2.2% above Claude Code’s figure, all in the Opus part.</a:t>
             </a:r>
             <a:endParaRPr lang="en-US" sz="1100" dirty="0"/>
           </a:p>

--- a/FinWebBuilder-changes-made.pptx
+++ b/FinWebBuilder-changes-made.pptx
@@ -759,7 +759,7 @@
                 <c:ptCount val="3"/>
                 <c:lvl>
                   <c:pt idx="0">
-                    <c:v>Claude Code, subscription (extra cash)</c:v>
+                    <c:v>Claude Code, $100/month plan (no charge per build)</c:v>
                   </c:pt>
                   <c:pt idx="1">
                     <c:v>Claude Code billed to an API key</c:v>
@@ -1407,7 +1407,7 @@
           <a:p>
             <a:r>
               <a:rPr lang="en-US" dirty="0"/>
-              <a:t>Assumptions for the direct API agent: same tokens as the Claude Code run, Haiku page reading replaced by Sonnet at $2 input and $10 output per million, searches unchanged at $10 per 1,000, Opus lead unchanged with caching. Actual API-agent token counts would differ. The plan fees are placeholders; replace with the real plan price.</a:t>
+              <a:t>Assumptions for the direct API agent: same tokens as the Claude Code run, Haiku page reading replaced by Sonnet at $2 input and $10 output per million, searches unchanged at $10 per 1,000, Opus lead unchanged with caching. Actual API-agent token counts would differ. The plan fee is $100 a month as Kumar stated; treated as US$ at the deck exchange rate (S$127.7), so break-even is 127.7 / 12.80 = about 10 large builds or 127.7 / 2 = 64 small ones.</a:t>
             </a:r>
             <a:endParaRPr lang="en-US" dirty="0"/>
           </a:p>
@@ -3563,7 +3563,7 @@
                 <a:ea typeface="Calibri" pitchFamily="34" charset="-122"/>
                 <a:cs typeface="Calibri" pitchFamily="34" charset="-120"/>
               </a:rPr>
-              <a:t>Subscription: S$0.00 extra. The run uses plan allowance worth S$12.51 at API rates, as Claude Code reports.</a:t>
+              <a:t>Subscription: the $100 a month plan covers it, with no charge per build. The run uses plan allowance worth S$12.51 at API rates, as Claude Code reports; limits reset weekly.</a:t>
             </a:r>
             <a:endParaRPr lang="en-US" sz="1400" dirty="0"/>
           </a:p>
@@ -3626,7 +3626,7 @@
                 <a:ea typeface="Calibri" pitchFamily="34" charset="-122"/>
                 <a:cs typeface="Calibri" pitchFamily="34" charset="-120"/>
               </a:rPr>
-              <a:t>A plan fee only pays off if you build enough: plan fee ÷ S$12.80 large builds a month. S$130 ≈ 10; S$260 ≈ 20 (example fees, not yours).</a:t>
+              <a:t>Taking $100 as US$ (about S$128), the plan matches the API bill at about 10 large builds a month (S$12.80 each) or 64 small ones (S$2 each).</a:t>
             </a:r>
             <a:endParaRPr lang="en-US" sz="1400" dirty="0"/>
           </a:p>
@@ -3665,7 +3665,7 @@
                 <a:ea typeface="Calibri" pitchFamily="34" charset="-122"/>
                 <a:cs typeface="Calibri" pitchFamily="34" charset="-120"/>
               </a:rPr>
-              <a:t>Measured: S$12.51 reported, S$12.80 estimated. Estimated: the direct API figure and the plan examples.</a:t>
+              <a:t>Measured: S$12.51 reported, S$12.80 estimated. Estimated: the direct API figure and the break-even (taking $100 as US$).</a:t>
             </a:r>
             <a:endParaRPr lang="en-US" sz="1100" dirty="0"/>
           </a:p>
@@ -6048,7 +6048,7 @@
                 <a:ea typeface="Calibri" pitchFamily="34" charset="-122"/>
                 <a:cs typeface="Calibri" pitchFamily="34" charset="-120"/>
               </a:rPr>
-              <a:t>The HDB build costs S$0.00 extra on the subscription and S$12.80 on an API key; a direct API agent would likely cost nearer S$23.55.</a:t>
+              <a:t>The $100 a month plan covers the HDB build, against S$12.80 on an API key; a direct API agent would likely cost nearer S$23.55.</a:t>
             </a:r>
             <a:endParaRPr lang="en-US" sz="1900" dirty="0"/>
           </a:p>
@@ -6286,7 +6286,7 @@
                 <a:ea typeface="Calibri" pitchFamily="34" charset="-122"/>
                 <a:cs typeface="Calibri" pitchFamily="34" charset="-120"/>
               </a:rPr>
-              <a:t>Estimated: every S$ figure other than reported ones, the direct API agent, the cache savings and the plan examples.</a:t>
+              <a:t>Estimated: every S$ figure other than reported ones, the direct API agent, the cache savings and the plan break-even.</a:t>
             </a:r>
             <a:endParaRPr lang="en-US" sz="1600" dirty="0"/>
           </a:p>
@@ -6992,7 +6992,7 @@
                 <a:ea typeface="Calibri" pitchFamily="34" charset="-122"/>
                 <a:cs typeface="Calibri" pitchFamily="34" charset="-120"/>
               </a:rPr>
-              <a:t>the HDB build costs S$0.00 extra on the subscription and S$12.80 if billed to an API key (Claude Code reported S$12.51).</a:t>
+              <a:t>the $100 a month plan covers the HDB build with no charge per build; billed to an API key it is S$12.80 (Claude Code reported S$12.51).</a:t>
             </a:r>
             <a:endParaRPr lang="en-US" sz="1800" dirty="0"/>
           </a:p>

--- a/FinWebBuilder-changes-made.pptx
+++ b/FinWebBuilder-changes-made.pptx
@@ -17,11 +17,9 @@
     <p:sldId id="265" r:id="rId11"/>
     <p:sldId id="266" r:id="rId12"/>
     <p:sldId id="267" r:id="rId13"/>
-    <p:sldId id="268" r:id="rId14"/>
-    <p:sldId id="269" r:id="rId15"/>
   </p:sldIdLst>
   <p:notesMasterIdLst>
-    <p:notesMasterId r:id="rId16"/>
+    <p:notesMasterId r:id="rId14"/>
   </p:notesMasterIdLst>
   <p:sldSz cx="12192000" cy="6858000"/>
   <p:notesSz cx="6858000" cy="12192000"/>
@@ -414,288 +412,6 @@
 </file>
 
 <file path=ppt/charts/chart2.xml><?xml version="1.0" encoding="utf-8"?>
-<c:chartSpace xmlns:c="http://schemas.openxmlformats.org/drawingml/2006/chart" xmlns:a="http://schemas.openxmlformats.org/drawingml/2006/main" xmlns:r="http://schemas.openxmlformats.org/officeDocument/2006/relationships">
-  <c:date1904 val="0"/>
-  <c:roundedCorners val="1"/>
-  <c:chart>
-    <c:title>
-      <c:tx>
-        <c:rich>
-          <a:bodyPr/>
-          <a:lstStyle/>
-          <a:p>
-            <a:pPr>
-              <a:defRPr sz="1400" b="0" i="0" u="none" strike="noStrike">
-                <a:solidFill>
-                  <a:srgbClr val="181C1E"/>
-                </a:solidFill>
-                <a:latin typeface="+mn-lt"/>
-              </a:defRPr>
-            </a:pPr>
-            <a:r>
-              <a:rPr sz="1400" b="0" i="0" u="none" strike="noStrike">
-                <a:solidFill>
-                  <a:srgbClr val="181C1E"/>
-                </a:solidFill>
-                <a:latin typeface="+mn-lt"/>
-              </a:rPr>
-              <a:t>Estimated at published token and search prices</a:t>
-            </a:r>
-          </a:p>
-        </c:rich>
-      </c:tx>
-      <c:layout/>
-      <c:overlay val="0"/>
-    </c:title>
-    <c:autoTitleDeleted val="0"/>
-    <c:plotArea>
-      <c:layout/>
-      <c:barChart>
-        <c:barDir val="bar"/>
-        <c:grouping val="clustered"/>
-        <c:varyColors val="0"/>
-        <c:ser>
-          <c:idx val="0"/>
-          <c:order val="0"/>
-          <c:tx>
-            <c:strRef>
-              <c:f>Sheet1!$B$1</c:f>
-              <c:strCache>
-                <c:ptCount val="1"/>
-                <c:pt idx="0">
-                  <c:v>S$ per first build</c:v>
-                </c:pt>
-              </c:strCache>
-            </c:strRef>
-          </c:tx>
-          <c:spPr>
-            <a:solidFill>
-              <a:srgbClr val="006781"/>
-            </a:solidFill>
-            <a:effectLst/>
-          </c:spPr>
-          <c:invertIfNegative val="0"/>
-          <c:dLbls>
-            <c:numFmt formatCode="&quot;S$&quot;0.00" sourceLinked="0"/>
-            <c:txPr>
-              <a:bodyPr/>
-              <a:lstStyle/>
-              <a:p>
-                <a:pPr>
-                  <a:defRPr b="0" i="0" strike="noStrike" sz="1200" u="none">
-                    <a:solidFill>
-                      <a:srgbClr val="181C1E"/>
-                    </a:solidFill>
-                    <a:latin typeface="+mn-lt"/>
-                  </a:defRPr>
-                </a:pPr>
-              </a:p>
-            </c:txPr>
-            <c:showLegendKey val="0"/>
-            <c:showVal val="1"/>
-            <c:showCatName val="0"/>
-            <c:showSerName val="0"/>
-            <c:showPercent val="0"/>
-            <c:showBubbleSize val="0"/>
-            <c:showLeaderLines val="0"/>
-          </c:dLbls>
-          <c:cat>
-            <c:multiLvlStrRef>
-              <c:f>Sheet1!$A$2:$A$8</c:f>
-              <c:multiLvlStrCache>
-                <c:ptCount val="7"/>
-                <c:lvl>
-                  <c:pt idx="0">
-                    <c:v>E-bike</c:v>
-                  </c:pt>
-                  <c:pt idx="1">
-                    <c:v>JB transport</c:v>
-                  </c:pt>
-                  <c:pt idx="2">
-                    <c:v>Wedding venue</c:v>
-                  </c:pt>
-                  <c:pt idx="3">
-                    <c:v>Baby cost</c:v>
-                  </c:pt>
-                  <c:pt idx="4">
-                    <c:v>100 Pokémon cards</c:v>
-                  </c:pt>
-                  <c:pt idx="5">
-                    <c:v>Property value</c:v>
-                  </c:pt>
-                  <c:pt idx="6">
-                    <c:v>HDB renovation</c:v>
-                  </c:pt>
-                </c:lvl>
-              </c:multiLvlStrCache>
-            </c:multiLvlStrRef>
-          </c:cat>
-          <c:val>
-            <c:numRef>
-              <c:f>Sheet1!$B$2:$B$8</c:f>
-              <c:numCache>
-                <c:formatCode>General</c:formatCode>
-                <c:ptCount val="7"/>
-                <c:pt idx="0">
-                  <c:v>1.81</c:v>
-                </c:pt>
-                <c:pt idx="1">
-                  <c:v>1.36</c:v>
-                </c:pt>
-                <c:pt idx="2">
-                  <c:v>2.52</c:v>
-                </c:pt>
-                <c:pt idx="3">
-                  <c:v>3.02</c:v>
-                </c:pt>
-                <c:pt idx="4">
-                  <c:v>3.43</c:v>
-                </c:pt>
-                <c:pt idx="5">
-                  <c:v>7.19</c:v>
-                </c:pt>
-                <c:pt idx="6">
-                  <c:v>12.8</c:v>
-                </c:pt>
-              </c:numCache>
-            </c:numRef>
-          </c:val>
-        </c:ser>
-        <c:dLbls>
-          <c:numFmt formatCode="&quot;S$&quot;0.00" sourceLinked="0"/>
-          <c:txPr>
-            <a:bodyPr/>
-            <a:lstStyle/>
-            <a:p>
-              <a:pPr>
-                <a:defRPr b="0" i="0" strike="noStrike" sz="1200" u="none">
-                  <a:solidFill>
-                    <a:srgbClr val="181C1E"/>
-                  </a:solidFill>
-                  <a:latin typeface="+mn-lt"/>
-                </a:defRPr>
-              </a:pPr>
-            </a:p>
-          </c:txPr>
-          <c:showLegendKey val="0"/>
-          <c:showVal val="1"/>
-          <c:showCatName val="0"/>
-          <c:showSerName val="0"/>
-          <c:showPercent val="0"/>
-          <c:showBubbleSize val="0"/>
-          <c:showLeaderLines val="0"/>
-        </c:dLbls>
-        <c:gapWidth val="150"/>
-        <c:overlap val="0"/>
-        <c:axId val="2094734554"/>
-        <c:axId val="2094734552"/>
-        <c:axId val="2094734556"/>
-      </c:barChart>
-      <c:catAx>
-        <c:axId val="2094734554"/>
-        <c:scaling>
-          <c:orientation val="maxMin"/>
-        </c:scaling>
-        <c:delete val="0"/>
-        <c:axPos val="l"/>
-        <c:numFmt formatCode="General" sourceLinked="1"/>
-        <c:majorTickMark val="out"/>
-        <c:minorTickMark val="none"/>
-        <c:tickLblPos val="nextTo"/>
-        <c:spPr>
-          <a:ln w="12700" cap="flat">
-            <a:solidFill>
-              <a:srgbClr val="888888"/>
-            </a:solidFill>
-            <a:prstDash val="solid"/>
-            <a:round/>
-          </a:ln>
-        </c:spPr>
-        <c:txPr>
-          <a:bodyPr/>
-          <a:lstStyle/>
-          <a:p>
-            <a:pPr>
-              <a:defRPr sz="1200" b="0" i="0" u="none" strike="noStrike">
-                <a:solidFill>
-                  <a:srgbClr val="3F484D"/>
-                </a:solidFill>
-                <a:latin typeface="+mn-lt"/>
-              </a:defRPr>
-            </a:pPr>
-            <a:endParaRPr lang="en-US"/>
-          </a:p>
-        </c:txPr>
-        <c:crossAx val="2094734552"/>
-        <c:crosses val="autoZero"/>
-        <c:auto val="1"/>
-        <c:lblAlgn val="ctr"/>
-        <c:noMultiLvlLbl val="1"/>
-      </c:catAx>
-      <c:valAx>
-        <c:axId val="2094734552"/>
-        <c:scaling>
-          <c:orientation val="minMax"/>
-        </c:scaling>
-        <c:delete val="1"/>
-        <c:axPos val="b"/>
-        <c:numFmt formatCode="General" sourceLinked="0"/>
-        <c:majorTickMark val="out"/>
-        <c:minorTickMark val="none"/>
-        <c:tickLblPos val="low"/>
-        <c:spPr>
-          <a:ln w="12700" cap="flat">
-            <a:solidFill>
-              <a:srgbClr val="888888"/>
-            </a:solidFill>
-            <a:prstDash val="solid"/>
-            <a:round/>
-          </a:ln>
-        </c:spPr>
-        <c:txPr>
-          <a:bodyPr/>
-          <a:lstStyle/>
-          <a:p>
-            <a:pPr>
-              <a:defRPr sz="1100" b="0" i="0" u="none" strike="noStrike">
-                <a:solidFill>
-                  <a:srgbClr val="3F484D"/>
-                </a:solidFill>
-                <a:latin typeface="+mn-lt"/>
-              </a:defRPr>
-            </a:pPr>
-            <a:endParaRPr lang="en-US"/>
-          </a:p>
-        </c:txPr>
-        <c:crossAx val="2094734554"/>
-        <c:crosses val="autoZero"/>
-        <c:crossBetween val="between"/>
-      </c:valAx>
-      <c:spPr>
-        <a:noFill/>
-        <a:ln>
-          <a:noFill/>
-        </a:ln>
-        <a:effectLst/>
-      </c:spPr>
-    </c:plotArea>
-    <c:plotVisOnly val="1"/>
-    <c:dispBlanksAs val="span"/>
-  </c:chart>
-  <c:spPr>
-    <a:noFill/>
-    <a:ln>
-      <a:noFill/>
-    </a:ln>
-    <a:effectLst/>
-  </c:spPr>
-  <c:externalData r:id="rId1">
-    <c:autoUpdate val="0"/>
-  </c:externalData>
-</c:chartSpace>
-</file>
-
-<file path=ppt/charts/chart3.xml><?xml version="1.0" encoding="utf-8"?>
 <c:chartSpace xmlns:c="http://schemas.openxmlformats.org/drawingml/2006/chart" xmlns:a="http://schemas.openxmlformats.org/drawingml/2006/main" xmlns:r="http://schemas.openxmlformats.org/officeDocument/2006/relationships">
   <c:date1904 val="0"/>
   <c:roundedCorners val="1"/>
@@ -1407,7 +1123,7 @@
           <a:p>
             <a:r>
               <a:rPr lang="en-US" dirty="0"/>
-              <a:t>Assumptions for the direct API agent: same tokens as the Claude Code run, Haiku page reading replaced by Sonnet at $2 input and $10 output per million, searches unchanged at $10 per 1,000, Opus lead unchanged with caching. Actual API-agent token counts would differ. The plan fee is $100 a month as Kumar stated; treated as US$ at the deck exchange rate (S$127.7), so break-even is 127.7 / 12.80 = about 10 large builds or 127.7 / 2 = 64 small ones.</a:t>
+              <a:t/>
             </a:r>
             <a:endParaRPr lang="en-US" dirty="0"/>
           </a:p>
@@ -1607,182 +1323,6 @@
             <a:fld id="{F7021451-1387-4CA6-816F-3879F97B5CBC}" type="slidenum">
               <a:rPr lang="en-US"/>
               <a:t>12</a:t>
-            </a:fld>
-            <a:endParaRPr lang="en-US"/>
-          </a:p>
-        </p:txBody>
-      </p:sp>
-    </p:spTree>
-    <p:extLst>
-      <p:ext uri="{BB962C8B-B14F-4D97-AF65-F5344CB8AC3E}">
-        <p14:creationId xmlns:p14="http://schemas.microsoft.com/office/powerpoint/2010/main" val="1024086991"/>
-      </p:ext>
-    </p:extLst>
-  </p:cSld>
-  <p:clrMapOvr>
-    <a:masterClrMapping/>
-  </p:clrMapOvr>
-</p:notes>
-</file>
-
-<file path=ppt/notesSlides/notesSlide13.xml><?xml version="1.0" encoding="utf-8"?>
-<p:notes xmlns:a="http://schemas.openxmlformats.org/drawingml/2006/main" xmlns:r="http://schemas.openxmlformats.org/officeDocument/2006/relationships" xmlns:p="http://schemas.openxmlformats.org/presentationml/2006/main">
-  <p:cSld>
-    <p:spTree>
-      <p:nvGrpSpPr>
-        <p:cNvPr id="1" name=""/>
-        <p:cNvGrpSpPr/>
-        <p:nvPr/>
-      </p:nvGrpSpPr>
-      <p:grpSpPr>
-        <a:xfrm>
-          <a:off x="0" y="0"/>
-          <a:ext cx="0" cy="0"/>
-          <a:chOff x="0" y="0"/>
-          <a:chExt cx="0" cy="0"/>
-        </a:xfrm>
-      </p:grpSpPr>
-      <p:sp>
-        <p:nvSpPr>
-          <p:cNvPr id="2" name="Slide Image Placeholder 1"/>
-          <p:cNvSpPr>
-            <a:spLocks noGrp="1" noRot="1" noChangeAspect="1"/>
-          </p:cNvSpPr>
-          <p:nvPr>
-            <p:ph type="sldImg"/>
-          </p:nvPr>
-        </p:nvSpPr>
-        <p:spPr/>
-      </p:sp>
-      <p:sp>
-        <p:nvSpPr>
-          <p:cNvPr id="3" name="Notes Placeholder 2"/>
-          <p:cNvSpPr>
-            <a:spLocks noGrp="1"/>
-          </p:cNvSpPr>
-          <p:nvPr>
-            <p:ph type="body" idx="1"/>
-          </p:nvPr>
-        </p:nvSpPr>
-        <p:spPr/>
-        <p:txBody>
-          <a:bodyPr/>
-          <a:lstStyle/>
-          <a:p>
-            <a:r>
-              <a:rPr lang="en-US" dirty="0"/>
-              <a:t/>
-            </a:r>
-            <a:endParaRPr lang="en-US" dirty="0"/>
-          </a:p>
-        </p:txBody>
-      </p:sp>
-      <p:sp>
-        <p:nvSpPr>
-          <p:cNvPr id="4" name="Slide Number Placeholder 3"/>
-          <p:cNvSpPr>
-            <a:spLocks noGrp="1"/>
-          </p:cNvSpPr>
-          <p:nvPr>
-            <p:ph type="sldNum" sz="quarter" idx="10"/>
-          </p:nvPr>
-        </p:nvSpPr>
-        <p:spPr/>
-        <p:txBody>
-          <a:bodyPr/>
-          <a:lstStyle/>
-          <a:p>
-            <a:fld id="{F7021451-1387-4CA6-816F-3879F97B5CBC}" type="slidenum">
-              <a:rPr lang="en-US"/>
-              <a:t>13</a:t>
-            </a:fld>
-            <a:endParaRPr lang="en-US"/>
-          </a:p>
-        </p:txBody>
-      </p:sp>
-    </p:spTree>
-    <p:extLst>
-      <p:ext uri="{BB962C8B-B14F-4D97-AF65-F5344CB8AC3E}">
-        <p14:creationId xmlns:p14="http://schemas.microsoft.com/office/powerpoint/2010/main" val="1024086991"/>
-      </p:ext>
-    </p:extLst>
-  </p:cSld>
-  <p:clrMapOvr>
-    <a:masterClrMapping/>
-  </p:clrMapOvr>
-</p:notes>
-</file>
-
-<file path=ppt/notesSlides/notesSlide14.xml><?xml version="1.0" encoding="utf-8"?>
-<p:notes xmlns:a="http://schemas.openxmlformats.org/drawingml/2006/main" xmlns:r="http://schemas.openxmlformats.org/officeDocument/2006/relationships" xmlns:p="http://schemas.openxmlformats.org/presentationml/2006/main">
-  <p:cSld>
-    <p:spTree>
-      <p:nvGrpSpPr>
-        <p:cNvPr id="1" name=""/>
-        <p:cNvGrpSpPr/>
-        <p:nvPr/>
-      </p:nvGrpSpPr>
-      <p:grpSpPr>
-        <a:xfrm>
-          <a:off x="0" y="0"/>
-          <a:ext cx="0" cy="0"/>
-          <a:chOff x="0" y="0"/>
-          <a:chExt cx="0" cy="0"/>
-        </a:xfrm>
-      </p:grpSpPr>
-      <p:sp>
-        <p:nvSpPr>
-          <p:cNvPr id="2" name="Slide Image Placeholder 1"/>
-          <p:cNvSpPr>
-            <a:spLocks noGrp="1" noRot="1" noChangeAspect="1"/>
-          </p:cNvSpPr>
-          <p:nvPr>
-            <p:ph type="sldImg"/>
-          </p:nvPr>
-        </p:nvSpPr>
-        <p:spPr/>
-      </p:sp>
-      <p:sp>
-        <p:nvSpPr>
-          <p:cNvPr id="3" name="Notes Placeholder 2"/>
-          <p:cNvSpPr>
-            <a:spLocks noGrp="1"/>
-          </p:cNvSpPr>
-          <p:nvPr>
-            <p:ph type="body" idx="1"/>
-          </p:nvPr>
-        </p:nvSpPr>
-        <p:spPr/>
-        <p:txBody>
-          <a:bodyPr/>
-          <a:lstStyle/>
-          <a:p>
-            <a:r>
-              <a:rPr lang="en-US" dirty="0"/>
-              <a:t/>
-            </a:r>
-            <a:endParaRPr lang="en-US" dirty="0"/>
-          </a:p>
-        </p:txBody>
-      </p:sp>
-      <p:sp>
-        <p:nvSpPr>
-          <p:cNvPr id="4" name="Slide Number Placeholder 3"/>
-          <p:cNvSpPr>
-            <a:spLocks noGrp="1"/>
-          </p:cNvSpPr>
-          <p:nvPr>
-            <p:ph type="sldNum" sz="quarter" idx="10"/>
-          </p:nvPr>
-        </p:nvSpPr>
-        <p:spPr/>
-        <p:txBody>
-          <a:bodyPr/>
-          <a:lstStyle/>
-          <a:p>
-            <a:fld id="{F7021451-1387-4CA6-816F-3879F97B5CBC}" type="slidenum">
-              <a:rPr lang="en-US"/>
-              <a:t>14</a:t>
             </a:fld>
             <a:endParaRPr lang="en-US"/>
           </a:p>
@@ -2463,7 +2003,7 @@
           <a:p>
             <a:r>
               <a:rPr lang="en-US" dirty="0"/>
-              <a:t/>
+              <a:t>Assumptions for the direct API agent: same tokens as the Claude Code run, Haiku page reading replaced by Sonnet at $2 input and $10 output per million, searches unchanged at $10 per 1,000, Opus lead unchanged with caching. Actual API-agent token counts would differ. The plan fee is $100 a month as Kumar stated; treated as US$ at the deck exchange rate (S$127.7), so break-even is 127.7 / 12.80 = about 10 large builds or 127.7 / 2 = 64 small ones.</a:t>
             </a:r>
             <a:endParaRPr lang="en-US" dirty="0"/>
           </a:p>
@@ -3333,449 +2873,6 @@
                 <a:ea typeface="Cambria" pitchFamily="34" charset="-122"/>
                 <a:cs typeface="Cambria" pitchFamily="34" charset="-120"/>
               </a:rPr>
-              <a:t>Claude Code against API only, same build</a:t>
-            </a:r>
-            <a:endParaRPr lang="en-US" sz="3200" dirty="0"/>
-          </a:p>
-        </p:txBody>
-      </p:sp>
-      <p:sp>
-        <p:nvSpPr>
-          <p:cNvPr id="3" name="scenario a"/>
-          <p:cNvSpPr/>
-          <p:nvPr/>
-        </p:nvSpPr>
-        <p:spPr>
-          <a:xfrm>
-            <a:off x="548640" y="1371600"/>
-            <a:ext cx="5852160" cy="4480560"/>
-          </a:xfrm>
-          <a:prstGeom prst="roundRect">
-            <a:avLst>
-              <a:gd name="adj" fmla="val 1633"/>
-            </a:avLst>
-          </a:prstGeom>
-          <a:solidFill>
-            <a:srgbClr val="EEF1F3"/>
-          </a:solidFill>
-          <a:ln w="12700">
-            <a:solidFill>
-              <a:srgbClr val="EEF1F3"/>
-            </a:solidFill>
-            <a:prstDash val="solid"/>
-          </a:ln>
-        </p:spPr>
-      </p:sp>
-      <p:sp>
-        <p:nvSpPr>
-          <p:cNvPr id="4" name="Text 2"/>
-          <p:cNvSpPr txBox="1"/>
-          <p:nvPr/>
-        </p:nvSpPr>
-        <p:spPr>
-          <a:xfrm>
-            <a:off x="822960" y="1554480"/>
-            <a:ext cx="5303520" cy="365760"/>
-          </a:xfrm>
-          <a:prstGeom prst="rect">
-            <a:avLst/>
-          </a:prstGeom>
-          <a:noFill/>
-          <a:ln/>
-        </p:spPr>
-        <p:txBody>
-          <a:bodyPr wrap="square" lIns="0" tIns="0" rIns="0" bIns="0" rtlCol="0" anchor="t"/>
-          <a:lstStyle/>
-          <a:p>
-            <a:pPr indent="0" marL="0">
-              <a:buNone/>
-            </a:pPr>
-            <a:r>
-              <a:rPr lang="en-US" sz="1800" b="1" dirty="0">
-                <a:solidFill>
-                  <a:srgbClr val="001F29"/>
-                </a:solidFill>
-                <a:latin typeface="Cambria" pitchFamily="34" charset="0"/>
-                <a:ea typeface="Cambria" pitchFamily="34" charset="-122"/>
-                <a:cs typeface="Cambria" pitchFamily="34" charset="-120"/>
-              </a:rPr>
-              <a:t>What the HDB build costs, S$</a:t>
-            </a:r>
-            <a:endParaRPr lang="en-US" sz="1800" dirty="0"/>
-          </a:p>
-        </p:txBody>
-      </p:sp>
-      <p:graphicFrame>
-        <p:nvGraphicFramePr>
-          <p:cNvPr id="5" name="Chart 0" descr=""/>
-          <p:cNvGraphicFramePr/>
-          <p:nvPr/>
-        </p:nvGraphicFramePr>
-        <p:xfrm>
-          <a:off x="731520" y="1965960"/>
-          <a:ext cx="5486400" cy="3017520"/>
-        </p:xfrm>
-        <a:graphic xmlns:a="http://schemas.openxmlformats.org/drawingml/2006/main">
-          <a:graphicData uri="http://schemas.openxmlformats.org/drawingml/2006/chart">
-            <c:chart xmlns:c="http://schemas.openxmlformats.org/drawingml/2006/chart" r:id="rId1"/>
-          </a:graphicData>
-        </a:graphic>
-      </p:graphicFrame>
-      <p:sp>
-        <p:nvSpPr>
-          <p:cNvPr id="6" name="Text 3"/>
-          <p:cNvSpPr txBox="1"/>
-          <p:nvPr/>
-        </p:nvSpPr>
-        <p:spPr>
-          <a:xfrm>
-            <a:off x="822960" y="5029200"/>
-            <a:ext cx="5303520" cy="777240"/>
-          </a:xfrm>
-          <a:prstGeom prst="rect">
-            <a:avLst/>
-          </a:prstGeom>
-          <a:noFill/>
-          <a:ln/>
-        </p:spPr>
-        <p:txBody>
-          <a:bodyPr wrap="square" lIns="0" tIns="0" rIns="0" bIns="0" rtlCol="0" anchor="t"/>
-          <a:lstStyle/>
-          <a:p>
-            <a:pPr indent="0" marL="0">
-              <a:buNone/>
-            </a:pPr>
-            <a:r>
-              <a:rPr lang="en-US" sz="1200" dirty="0">
-                <a:solidFill>
-                  <a:srgbClr val="3F484D"/>
-                </a:solidFill>
-                <a:latin typeface="Calibri" pitchFamily="34" charset="0"/>
-                <a:ea typeface="Calibri" pitchFamily="34" charset="-122"/>
-                <a:cs typeface="Calibri" pitchFamily="34" charset="-120"/>
-              </a:rPr>
-              <a:t>The third bar swaps Haiku page reading for Sonnet at the same token counts ($2 / $10 per million): S$23.55. It is an estimate, not a run, and sits close to the agent’s default S$25 spending cap.</a:t>
-            </a:r>
-            <a:endParaRPr lang="en-US" sz="1200" dirty="0"/>
-          </a:p>
-        </p:txBody>
-      </p:sp>
-      <p:sp>
-        <p:nvSpPr>
-          <p:cNvPr id="7" name="scenario b"/>
-          <p:cNvSpPr/>
-          <p:nvPr/>
-        </p:nvSpPr>
-        <p:spPr>
-          <a:xfrm>
-            <a:off x="6675120" y="1371600"/>
-            <a:ext cx="4937760" cy="4480560"/>
-          </a:xfrm>
-          <a:prstGeom prst="roundRect">
-            <a:avLst>
-              <a:gd name="adj" fmla="val 1633"/>
-            </a:avLst>
-          </a:prstGeom>
-          <a:solidFill>
-            <a:srgbClr val="EEF1F3"/>
-          </a:solidFill>
-          <a:ln w="12700">
-            <a:solidFill>
-              <a:srgbClr val="EEF1F3"/>
-            </a:solidFill>
-            <a:prstDash val="solid"/>
-          </a:ln>
-        </p:spPr>
-      </p:sp>
-      <p:sp>
-        <p:nvSpPr>
-          <p:cNvPr id="8" name="Text 5"/>
-          <p:cNvSpPr txBox="1"/>
-          <p:nvPr/>
-        </p:nvSpPr>
-        <p:spPr>
-          <a:xfrm>
-            <a:off x="6949440" y="1554480"/>
-            <a:ext cx="4389120" cy="365760"/>
-          </a:xfrm>
-          <a:prstGeom prst="rect">
-            <a:avLst/>
-          </a:prstGeom>
-          <a:noFill/>
-          <a:ln/>
-        </p:spPr>
-        <p:txBody>
-          <a:bodyPr wrap="square" lIns="0" tIns="0" rIns="0" bIns="0" rtlCol="0" anchor="t"/>
-          <a:lstStyle/>
-          <a:p>
-            <a:pPr indent="0" marL="0">
-              <a:buNone/>
-            </a:pPr>
-            <a:r>
-              <a:rPr lang="en-US" sz="1800" b="1" dirty="0">
-                <a:solidFill>
-                  <a:srgbClr val="001F29"/>
-                </a:solidFill>
-                <a:latin typeface="Cambria" pitchFamily="34" charset="0"/>
-                <a:ea typeface="Cambria" pitchFamily="34" charset="-122"/>
-                <a:cs typeface="Cambria" pitchFamily="34" charset="-120"/>
-              </a:rPr>
-              <a:t>What the figures mean</a:t>
-            </a:r>
-            <a:endParaRPr lang="en-US" sz="1800" dirty="0"/>
-          </a:p>
-        </p:txBody>
-      </p:sp>
-      <p:sp>
-        <p:nvSpPr>
-          <p:cNvPr id="9" name="Text 6"/>
-          <p:cNvSpPr txBox="1"/>
-          <p:nvPr/>
-        </p:nvSpPr>
-        <p:spPr>
-          <a:xfrm>
-            <a:off x="6949440" y="2103120"/>
-            <a:ext cx="4389120" cy="3657600"/>
-          </a:xfrm>
-          <a:prstGeom prst="rect">
-            <a:avLst/>
-          </a:prstGeom>
-          <a:noFill/>
-          <a:ln/>
-        </p:spPr>
-        <p:txBody>
-          <a:bodyPr wrap="square" lIns="0" tIns="0" rIns="0" bIns="0" rtlCol="0" anchor="t"/>
-          <a:lstStyle/>
-          <a:p>
-            <a:pPr marL="342900" indent="-342900">
-              <a:spcAft>
-                <a:spcPts val="900"/>
-              </a:spcAft>
-              <a:buSzPct val="100000"/>
-              <a:buChar char="•"/>
-            </a:pPr>
-            <a:r>
-              <a:rPr lang="en-US" sz="1400" dirty="0">
-                <a:solidFill>
-                  <a:srgbClr val="181C1E"/>
-                </a:solidFill>
-                <a:latin typeface="Calibri" pitchFamily="34" charset="0"/>
-                <a:ea typeface="Calibri" pitchFamily="34" charset="-122"/>
-                <a:cs typeface="Calibri" pitchFamily="34" charset="-120"/>
-              </a:rPr>
-              <a:t>Subscription: the $100 a month plan covers it, with no charge per build. The run uses plan allowance worth S$12.51 at API rates, as Claude Code reports; limits reset weekly.</a:t>
-            </a:r>
-            <a:endParaRPr lang="en-US" sz="1400" dirty="0"/>
-          </a:p>
-          <a:p>
-            <a:pPr marL="342900" indent="-342900">
-              <a:spcAft>
-                <a:spcPts val="900"/>
-              </a:spcAft>
-              <a:buSzPct val="100000"/>
-              <a:buChar char="•"/>
-            </a:pPr>
-            <a:r>
-              <a:rPr lang="en-US" sz="1400" dirty="0">
-                <a:solidFill>
-                  <a:srgbClr val="181C1E"/>
-                </a:solidFill>
-                <a:latin typeface="Calibri" pitchFamily="34" charset="0"/>
-                <a:ea typeface="Calibri" pitchFamily="34" charset="-122"/>
-                <a:cs typeface="Calibri" pitchFamily="34" charset="-120"/>
-              </a:rPr>
-              <a:t>API key, same run: S$12.51 to S$12.80, billed per build.</a:t>
-            </a:r>
-            <a:endParaRPr lang="en-US" sz="1400" dirty="0"/>
-          </a:p>
-          <a:p>
-            <a:pPr marL="342900" indent="-342900">
-              <a:spcAft>
-                <a:spcPts val="900"/>
-              </a:spcAft>
-              <a:buSzPct val="100000"/>
-              <a:buChar char="•"/>
-            </a:pPr>
-            <a:r>
-              <a:rPr lang="en-US" sz="1400" dirty="0">
-                <a:solidFill>
-                  <a:srgbClr val="181C1E"/>
-                </a:solidFill>
-                <a:latin typeface="Calibri" pitchFamily="34" charset="0"/>
-                <a:ea typeface="Calibri" pitchFamily="34" charset="-122"/>
-                <a:cs typeface="Calibri" pitchFamily="34" charset="-120"/>
-              </a:rPr>
-              <a:t>Direct API agent: it builds comparisons only today, so it cannot make this estimate calculator yet.</a:t>
-            </a:r>
-            <a:endParaRPr lang="en-US" sz="1400" dirty="0"/>
-          </a:p>
-          <a:p>
-            <a:pPr marL="342900" indent="-342900">
-              <a:spcAft>
-                <a:spcPts val="900"/>
-              </a:spcAft>
-              <a:buSzPct val="100000"/>
-              <a:buChar char="•"/>
-            </a:pPr>
-            <a:r>
-              <a:rPr lang="en-US" sz="1400" dirty="0">
-                <a:solidFill>
-                  <a:srgbClr val="181C1E"/>
-                </a:solidFill>
-                <a:latin typeface="Calibri" pitchFamily="34" charset="0"/>
-                <a:ea typeface="Calibri" pitchFamily="34" charset="-122"/>
-                <a:cs typeface="Calibri" pitchFamily="34" charset="-120"/>
-              </a:rPr>
-              <a:t>Taking $100 as US$ (about S$128), the plan matches the API bill at about 10 large builds a month (S$12.80 each) or 64 small ones (S$2 each).</a:t>
-            </a:r>
-            <a:endParaRPr lang="en-US" sz="1400" dirty="0"/>
-          </a:p>
-        </p:txBody>
-      </p:sp>
-      <p:sp>
-        <p:nvSpPr>
-          <p:cNvPr id="10" name="Text 7"/>
-          <p:cNvSpPr txBox="1"/>
-          <p:nvPr/>
-        </p:nvSpPr>
-        <p:spPr>
-          <a:xfrm>
-            <a:off x="548640" y="6172200"/>
-            <a:ext cx="10607040" cy="365760"/>
-          </a:xfrm>
-          <a:prstGeom prst="rect">
-            <a:avLst/>
-          </a:prstGeom>
-          <a:noFill/>
-          <a:ln/>
-        </p:spPr>
-        <p:txBody>
-          <a:bodyPr wrap="square" lIns="0" tIns="0" rIns="0" bIns="0" rtlCol="0" anchor="t"/>
-          <a:lstStyle/>
-          <a:p>
-            <a:pPr indent="0" marL="0">
-              <a:buNone/>
-            </a:pPr>
-            <a:r>
-              <a:rPr lang="en-US" sz="1100" dirty="0">
-                <a:solidFill>
-                  <a:srgbClr val="3F484D"/>
-                </a:solidFill>
-                <a:latin typeface="Calibri" pitchFamily="34" charset="0"/>
-                <a:ea typeface="Calibri" pitchFamily="34" charset="-122"/>
-                <a:cs typeface="Calibri" pitchFamily="34" charset="-120"/>
-              </a:rPr>
-              <a:t>Measured: S$12.51 reported, S$12.80 estimated. Estimated: the direct API figure and the break-even (taking $100 as US$).</a:t>
-            </a:r>
-            <a:endParaRPr lang="en-US" sz="1100" dirty="0"/>
-          </a:p>
-        </p:txBody>
-      </p:sp>
-      <p:sp>
-        <p:nvSpPr>
-          <p:cNvPr id="25" name="Slide Number Placeholder 0"/>
-          <p:cNvSpPr>
-            <a:spLocks noGrp="1"/>
-          </p:cNvSpPr>
-          <p:nvPr>
-            <p:ph type="sldNum" sz="quarter" idx="4294967295"/>
-          </p:nvPr>
-        </p:nvSpPr>
-        <p:spPr>
-          <a:xfrm>
-            <a:off x="11247120" y="6446520"/>
-            <a:ext cx="548640" cy="274320"/>
-          </a:xfrm>
-          <a:prstGeom prst="rect">
-            <a:avLst/>
-          </a:prstGeom>
-          <a:extLst>
-            <a:ext uri="{C572A759-6A51-4108-AA02-DFA0A04FC94B}">
-              <ma14:wrappingTextBoxFlag xmlns:ma14="http://schemas.microsoft.com/office/mac/drawingml/2011/main" val="0"/>
-            </a:ext>
-          </a:extLst>
-        </p:spPr>
-        <p:txBody>
-          <a:bodyPr/>
-          <a:lstStyle>
-            <a:lvl1pPr>
-              <a:defRPr sz="1000">
-                <a:solidFill>
-                  <a:srgbClr val="3F484D"/>
-                </a:solidFill>
-              </a:defRPr>
-            </a:lvl1pPr>
-          </a:lstStyle>
-          <a:p>
-            <a:pPr algn="l"/>
-            <a:fld id="{F7021451-1387-4CA6-816F-3879F97B5CBC}" type="slidenum">
-              <a:rPr b="0" lang="en-US"/>
-              <a:t>10</a:t>
-            </a:fld>
-            <a:endParaRPr lang="en-US"/>
-          </a:p>
-        </p:txBody>
-      </p:sp>
-    </p:spTree>
-  </p:cSld>
-  <p:clrMapOvr>
-    <a:masterClrMapping/>
-  </p:clrMapOvr>
-</p:sld>
-</file>
-
-<file path=ppt/slides/slide11.xml><?xml version="1.0" encoding="utf-8"?>
-<p:sld xmlns:a="http://schemas.openxmlformats.org/drawingml/2006/main" xmlns:r="http://schemas.openxmlformats.org/officeDocument/2006/relationships" xmlns:p="http://schemas.openxmlformats.org/presentationml/2006/main">
-  <p:cSld name="Slide 11">
-    <p:spTree>
-      <p:nvGrpSpPr>
-        <p:cNvPr id="1" name=""/>
-        <p:cNvGrpSpPr/>
-        <p:nvPr/>
-      </p:nvGrpSpPr>
-      <p:grpSpPr>
-        <a:xfrm>
-          <a:off x="0" y="0"/>
-          <a:ext cx="0" cy="0"/>
-          <a:chOff x="0" y="0"/>
-          <a:chExt cx="0" cy="0"/>
-        </a:xfrm>
-      </p:grpSpPr>
-      <p:sp>
-        <p:nvSpPr>
-          <p:cNvPr id="2" name="Text 0"/>
-          <p:cNvSpPr/>
-          <p:nvPr>
-            <p:ph idx="100" type="title" hasCustomPrompt="1"/>
-          </p:nvPr>
-        </p:nvSpPr>
-        <p:spPr>
-          <a:xfrm>
-            <a:off x="548640" y="365760"/>
-            <a:ext cx="11064240" cy="822960"/>
-          </a:xfrm>
-          <a:prstGeom prst="rect">
-            <a:avLst/>
-          </a:prstGeom>
-          <a:noFill/>
-          <a:ln/>
-        </p:spPr>
-        <p:txBody>
-          <a:bodyPr wrap="square" lIns="0" tIns="0" rIns="0" bIns="0" rtlCol="0" anchor="ctr"/>
-          <a:lstStyle/>
-          <a:p>
-            <a:pPr algn="l" indent="0" marL="0">
-              <a:buNone/>
-            </a:pPr>
-            <a:r>
-              <a:rPr lang="en-US" sz="3200" b="1" dirty="0">
-                <a:solidFill>
-                  <a:srgbClr val="001F29"/>
-                </a:solidFill>
-                <a:latin typeface="Cambria" pitchFamily="34" charset="0"/>
-                <a:ea typeface="Cambria" pitchFamily="34" charset="-122"/>
-                <a:cs typeface="Cambria" pitchFamily="34" charset="-120"/>
-              </a:rPr>
               <a:t>API against Claude Code subscription</a:t>
             </a:r>
             <a:endParaRPr lang="en-US" sz="3200" dirty="0"/>
@@ -3784,7 +2881,7 @@
       </p:sp>
       <p:graphicFrame>
         <p:nvGraphicFramePr>
-          <p:cNvPr id="12" name="api vs subscription table"/>
+          <p:cNvPr id="11" name="api vs subscription table"/>
           <p:cNvGraphicFramePr>
             <a:graphicFrameLocks noGrp="1"/>
           </p:cNvGraphicFramePr>
@@ -5071,7 +4168,7 @@
             <a:pPr algn="l"/>
             <a:fld id="{F7021451-1387-4CA6-816F-3879F97B5CBC}" type="slidenum">
               <a:rPr b="0" lang="en-US"/>
-              <a:t>11</a:t>
+              <a:t>10</a:t>
             </a:fld>
             <a:endParaRPr lang="en-US"/>
           </a:p>
@@ -5085,9 +4182,9 @@
 </p:sld>
 </file>
 
-<file path=ppt/slides/slide12.xml><?xml version="1.0" encoding="utf-8"?>
+<file path=ppt/slides/slide11.xml><?xml version="1.0" encoding="utf-8"?>
 <p:sld xmlns:a="http://schemas.openxmlformats.org/drawingml/2006/main" xmlns:r="http://schemas.openxmlformats.org/officeDocument/2006/relationships" xmlns:p="http://schemas.openxmlformats.org/presentationml/2006/main">
-  <p:cSld name="Slide 12">
+  <p:cSld name="Slide 11">
     <p:spTree>
       <p:nvGrpSpPr>
         <p:cNvPr id="1" name=""/>
@@ -5881,7 +4978,7 @@
             <a:pPr algn="l"/>
             <a:fld id="{F7021451-1387-4CA6-816F-3879F97B5CBC}" type="slidenum">
               <a:rPr b="0" lang="en-US"/>
-              <a:t>12</a:t>
+              <a:t>11</a:t>
             </a:fld>
             <a:endParaRPr lang="en-US"/>
           </a:p>
@@ -5895,242 +4992,9 @@
 </p:sld>
 </file>
 
-<file path=ppt/slides/slide13.xml><?xml version="1.0" encoding="utf-8"?>
+<file path=ppt/slides/slide12.xml><?xml version="1.0" encoding="utf-8"?>
 <p:sld xmlns:a="http://schemas.openxmlformats.org/drawingml/2006/main" xmlns:r="http://schemas.openxmlformats.org/officeDocument/2006/relationships" xmlns:p="http://schemas.openxmlformats.org/presentationml/2006/main">
-  <p:cSld name="Slide 13">
-    <p:spTree>
-      <p:nvGrpSpPr>
-        <p:cNvPr id="1" name=""/>
-        <p:cNvGrpSpPr/>
-        <p:nvPr/>
-      </p:nvGrpSpPr>
-      <p:grpSpPr>
-        <a:xfrm>
-          <a:off x="0" y="0"/>
-          <a:ext cx="0" cy="0"/>
-          <a:chOff x="0" y="0"/>
-          <a:chExt cx="0" cy="0"/>
-        </a:xfrm>
-      </p:grpSpPr>
-      <p:sp>
-        <p:nvSpPr>
-          <p:cNvPr id="2" name="Text 0"/>
-          <p:cNvSpPr txBox="1"/>
-          <p:nvPr/>
-        </p:nvSpPr>
-        <p:spPr>
-          <a:xfrm>
-            <a:off x="731520" y="640080"/>
-            <a:ext cx="5486400" cy="365760"/>
-          </a:xfrm>
-          <a:prstGeom prst="rect">
-            <a:avLst/>
-          </a:prstGeom>
-          <a:noFill/>
-          <a:ln/>
-        </p:spPr>
-        <p:txBody>
-          <a:bodyPr wrap="square" lIns="0" tIns="0" rIns="0" bIns="0" rtlCol="0" anchor="t"/>
-          <a:lstStyle/>
-          <a:p>
-            <a:pPr indent="0" marL="0">
-              <a:buNone/>
-            </a:pPr>
-            <a:r>
-              <a:rPr lang="en-US" sz="1400" b="1" dirty="0">
-                <a:solidFill>
-                  <a:srgbClr val="B9EAFF"/>
-                </a:solidFill>
-                <a:latin typeface="Calibri" pitchFamily="34" charset="0"/>
-                <a:ea typeface="Calibri" pitchFamily="34" charset="-122"/>
-                <a:cs typeface="Calibri" pitchFamily="34" charset="-120"/>
-              </a:rPr>
-              <a:t>CONCLUSION</a:t>
-            </a:r>
-            <a:endParaRPr lang="en-US" sz="1400" dirty="0"/>
-          </a:p>
-        </p:txBody>
-      </p:sp>
-      <p:sp>
-        <p:nvSpPr>
-          <p:cNvPr id="3" name="Text 1"/>
-          <p:cNvSpPr txBox="1"/>
-          <p:nvPr/>
-        </p:nvSpPr>
-        <p:spPr>
-          <a:xfrm>
-            <a:off x="731520" y="1097280"/>
-            <a:ext cx="10515600" cy="1463040"/>
-          </a:xfrm>
-          <a:prstGeom prst="rect">
-            <a:avLst/>
-          </a:prstGeom>
-          <a:noFill/>
-          <a:ln/>
-        </p:spPr>
-        <p:txBody>
-          <a:bodyPr wrap="square" lIns="0" tIns="0" rIns="0" bIns="0" rtlCol="0" anchor="t"/>
-          <a:lstStyle/>
-          <a:p>
-            <a:pPr indent="0" marL="0">
-              <a:buNone/>
-            </a:pPr>
-            <a:r>
-              <a:rPr lang="en-US" sz="3600" b="1" dirty="0">
-                <a:solidFill>
-                  <a:srgbClr val="FFFFFF"/>
-                </a:solidFill>
-                <a:latin typeface="Cambria" pitchFamily="34" charset="0"/>
-                <a:ea typeface="Cambria" pitchFamily="34" charset="-122"/>
-                <a:cs typeface="Cambria" pitchFamily="34" charset="-120"/>
-              </a:rPr>
-              <a:t>Deeper research is worth its cost, and the new additions keep it in check</a:t>
-            </a:r>
-            <a:endParaRPr lang="en-US" sz="3600" dirty="0"/>
-          </a:p>
-        </p:txBody>
-      </p:sp>
-      <p:sp>
-        <p:nvSpPr>
-          <p:cNvPr id="4" name="Text 2"/>
-          <p:cNvSpPr txBox="1"/>
-          <p:nvPr/>
-        </p:nvSpPr>
-        <p:spPr>
-          <a:xfrm>
-            <a:off x="731520" y="2834640"/>
-            <a:ext cx="10515600" cy="2926080"/>
-          </a:xfrm>
-          <a:prstGeom prst="rect">
-            <a:avLst/>
-          </a:prstGeom>
-          <a:noFill/>
-          <a:ln/>
-        </p:spPr>
-        <p:txBody>
-          <a:bodyPr wrap="square" lIns="0" tIns="0" rIns="0" bIns="0" rtlCol="0" anchor="t"/>
-          <a:lstStyle/>
-          <a:p>
-            <a:pPr marL="342900" indent="-342900">
-              <a:spcAft>
-                <a:spcPts val="1400"/>
-              </a:spcAft>
-              <a:buSzPct val="100000"/>
-              <a:buChar char="•"/>
-            </a:pPr>
-            <a:r>
-              <a:rPr lang="en-US" sz="1900" dirty="0">
-                <a:solidFill>
-                  <a:srgbClr val="FFFFFF"/>
-                </a:solidFill>
-                <a:latin typeface="Calibri" pitchFamily="34" charset="0"/>
-                <a:ea typeface="Calibri" pitchFamily="34" charset="-122"/>
-                <a:cs typeface="Calibri" pitchFamily="34" charset="-120"/>
-              </a:rPr>
-              <a:t>Opus-level research turned one-price comparisons into dated, sourced, history-based calculators, with per-option cost inside the earlier S$0.04 to S$0.42 range.</a:t>
-            </a:r>
-            <a:endParaRPr lang="en-US" sz="1900" dirty="0"/>
-          </a:p>
-          <a:p>
-            <a:pPr marL="342900" indent="-342900">
-              <a:spcAft>
-                <a:spcPts val="1400"/>
-              </a:spcAft>
-              <a:buSzPct val="100000"/>
-              <a:buChar char="•"/>
-            </a:pPr>
-            <a:r>
-              <a:rPr lang="en-US" sz="1900" dirty="0">
-                <a:solidFill>
-                  <a:srgbClr val="FFFFFF"/>
-                </a:solidFill>
-                <a:latin typeface="Calibri" pitchFamily="34" charset="0"/>
-                <a:ea typeface="Calibri" pitchFamily="34" charset="-122"/>
-                <a:cs typeface="Calibri" pitchFamily="34" charset="-120"/>
-              </a:rPr>
-              <a:t>The $100 a month plan covers the HDB build, against S$12.80 on an API key; a direct API agent would likely cost nearer S$23.55.</a:t>
-            </a:r>
-            <a:endParaRPr lang="en-US" sz="1900" dirty="0"/>
-          </a:p>
-          <a:p>
-            <a:pPr marL="342900" indent="-342900">
-              <a:spcAft>
-                <a:spcPts val="1400"/>
-              </a:spcAft>
-              <a:buSzPct val="100000"/>
-              <a:buChar char="•"/>
-            </a:pPr>
-            <a:r>
-              <a:rPr lang="en-US" sz="1900" dirty="0">
-                <a:solidFill>
-                  <a:srgbClr val="FFFFFF"/>
-                </a:solidFill>
-                <a:latin typeface="Calibri" pitchFamily="34" charset="0"/>
-                <a:ea typeface="Calibri" pitchFamily="34" charset="-122"/>
-                <a:cs typeface="Calibri" pitchFamily="34" charset="-120"/>
-              </a:rPr>
-              <a:t>Templates, official data, the price cache and Sonnet edits cut repeated work. The scope-first upgrades are live but unmeasured; the next step is a vague-topic run to prove them.</a:t>
-            </a:r>
-            <a:endParaRPr lang="en-US" sz="1900" dirty="0"/>
-          </a:p>
-        </p:txBody>
-      </p:sp>
-      <p:sp>
-        <p:nvSpPr>
-          <p:cNvPr id="25" name="Slide Number Placeholder 0"/>
-          <p:cNvSpPr>
-            <a:spLocks noGrp="1"/>
-          </p:cNvSpPr>
-          <p:nvPr>
-            <p:ph type="sldNum" sz="quarter" idx="4294967295"/>
-          </p:nvPr>
-        </p:nvSpPr>
-        <p:spPr>
-          <a:xfrm>
-            <a:off x="11247120" y="6446520"/>
-            <a:ext cx="548640" cy="274320"/>
-          </a:xfrm>
-          <a:prstGeom prst="rect">
-            <a:avLst/>
-          </a:prstGeom>
-          <a:extLst>
-            <a:ext uri="{C572A759-6A51-4108-AA02-DFA0A04FC94B}">
-              <ma14:wrappingTextBoxFlag xmlns:ma14="http://schemas.microsoft.com/office/mac/drawingml/2011/main" val="0"/>
-            </a:ext>
-          </a:extLst>
-        </p:spPr>
-        <p:txBody>
-          <a:bodyPr/>
-          <a:lstStyle>
-            <a:lvl1pPr>
-              <a:defRPr sz="1000">
-                <a:solidFill>
-                  <a:srgbClr val="B9EAFF"/>
-                </a:solidFill>
-              </a:defRPr>
-            </a:lvl1pPr>
-          </a:lstStyle>
-          <a:p>
-            <a:pPr algn="l"/>
-            <a:fld id="{F7021451-1387-4CA6-816F-3879F97B5CBC}" type="slidenum">
-              <a:rPr b="0" lang="en-US"/>
-              <a:t>13</a:t>
-            </a:fld>
-            <a:endParaRPr lang="en-US"/>
-          </a:p>
-        </p:txBody>
-      </p:sp>
-    </p:spTree>
-  </p:cSld>
-  <p:clrMapOvr>
-    <a:masterClrMapping/>
-  </p:clrMapOvr>
-</p:sld>
-</file>
-
-<file path=ppt/slides/slide14.xml><?xml version="1.0" encoding="utf-8"?>
-<p:sld xmlns:a="http://schemas.openxmlformats.org/drawingml/2006/main" xmlns:r="http://schemas.openxmlformats.org/officeDocument/2006/relationships" xmlns:p="http://schemas.openxmlformats.org/presentationml/2006/main">
-  <p:cSld name="Slide 14">
+  <p:cSld name="Slide 12">
     <p:spTree>
       <p:nvGrpSpPr>
         <p:cNvPr id="1" name=""/>
@@ -6373,7 +5237,7 @@
             <a:pPr algn="l"/>
             <a:fld id="{F7021451-1387-4CA6-816F-3879F97B5CBC}" type="slidenum">
               <a:rPr b="0" lang="en-US"/>
-              <a:t>14</a:t>
+              <a:t>12</a:t>
             </a:fld>
             <a:endParaRPr lang="en-US"/>
           </a:p>
@@ -13583,7 +12447,7 @@
                 <a:ea typeface="Cambria" pitchFamily="34" charset="-122"/>
                 <a:cs typeface="Cambria" pitchFamily="34" charset="-120"/>
               </a:rPr>
-              <a:t>What each first build cost at API prices</a:t>
+              <a:t>HDB renovation build: line-by-line cost</a:t>
             </a:r>
             <a:endParaRPr lang="en-US" sz="3200" dirty="0"/>
           </a:p>
@@ -13591,195 +12455,3322 @@
       </p:sp>
       <p:graphicFrame>
         <p:nvGraphicFramePr>
-          <p:cNvPr id="3" name="Chart 0" descr=""/>
-          <p:cNvGraphicFramePr/>
-          <p:nvPr/>
+          <p:cNvPr id="9" name="line item table"/>
+          <p:cNvGraphicFramePr>
+            <a:graphicFrameLocks noGrp="1"/>
+          </p:cNvGraphicFramePr>
+          <p:nvPr>
+            <p:extLst>
+              <p:ext uri="{D42A27DB-BD31-4B8C-83A1-F6EECF244321}">
+                <p14:modId xmlns:p14="http://schemas.microsoft.com/office/powerpoint/2010/main" val="1579011935"/>
+              </p:ext>
+            </p:extLst>
+          </p:nvPr>
         </p:nvGraphicFramePr>
         <p:xfrm>
           <a:off x="548640" y="1371600"/>
-          <a:ext cx="6949440" cy="4572000"/>
+          <a:ext cx="11064240" cy="914400"/>
         </p:xfrm>
-        <a:graphic xmlns:a="http://schemas.openxmlformats.org/drawingml/2006/main">
-          <a:graphicData uri="http://schemas.openxmlformats.org/drawingml/2006/chart">
-            <c:chart xmlns:c="http://schemas.openxmlformats.org/drawingml/2006/chart" r:id="rId1"/>
+        <a:graphic>
+          <a:graphicData uri="http://schemas.openxmlformats.org/drawingml/2006/table">
+            <a:tbl>
+              <a:tblPr/>
+              <a:tblGrid>
+                <a:gridCol w="4023360"/>
+                <a:gridCol w="2926080"/>
+                <a:gridCol w="1645920"/>
+                <a:gridCol w="1097280"/>
+                <a:gridCol w="1371600"/>
+              </a:tblGrid>
+              <a:tr h="411480">
+                <a:tc>
+                  <a:txBody>
+                    <a:bodyPr/>
+                    <a:lstStyle/>
+                    <a:p>
+                      <a:pPr indent="0" marL="0">
+                        <a:buNone/>
+                      </a:pPr>
+                      <a:r>
+                        <a:rPr lang="en-US" sz="1300" b="1" dirty="0">
+                          <a:solidFill>
+                            <a:srgbClr val="FFFFFF"/>
+                          </a:solidFill>
+                          <a:latin typeface="Calibri" pitchFamily="34" charset="0"/>
+                          <a:ea typeface="Calibri" pitchFamily="34" charset="-122"/>
+                          <a:cs typeface="Calibri" pitchFamily="34" charset="-120"/>
+                        </a:rPr>
+                        <a:t>Step</a:t>
+                      </a:r>
+                      <a:endParaRPr lang="en-US" sz="1300" dirty="0">
+                        <a:latin typeface="Calibri" charset="0"/>
+                        <a:ea typeface="Calibri" charset="0"/>
+                        <a:cs typeface="Calibri" charset="0"/>
+                      </a:endParaRPr>
+                    </a:p>
+                  </a:txBody>
+                  <a:tcPr marL="91440" marR="91440" marT="45720" marB="45720" anchor="ctr">
+                    <a:lnL w="12700" cap="flat" cmpd="sng" algn="ctr">
+                      <a:solidFill>
+                        <a:srgbClr val="D5DADD"/>
+                      </a:solidFill>
+                      <a:prstDash val="solid"/>
+                      <a:round/>
+                      <a:headEnd type="none" w="med" len="med"/>
+                      <a:tailEnd type="none" w="med" len="med"/>
+                    </a:lnL>
+                    <a:lnR w="12700" cap="flat" cmpd="sng" algn="ctr">
+                      <a:solidFill>
+                        <a:srgbClr val="D5DADD"/>
+                      </a:solidFill>
+                      <a:prstDash val="solid"/>
+                      <a:round/>
+                      <a:headEnd type="none" w="med" len="med"/>
+                      <a:tailEnd type="none" w="med" len="med"/>
+                    </a:lnR>
+                    <a:lnT w="12700" cap="flat" cmpd="sng" algn="ctr">
+                      <a:solidFill>
+                        <a:srgbClr val="D5DADD"/>
+                      </a:solidFill>
+                      <a:prstDash val="solid"/>
+                      <a:round/>
+                      <a:headEnd type="none" w="med" len="med"/>
+                      <a:tailEnd type="none" w="med" len="med"/>
+                    </a:lnT>
+                    <a:lnB w="12700" cap="flat" cmpd="sng" algn="ctr">
+                      <a:solidFill>
+                        <a:srgbClr val="D5DADD"/>
+                      </a:solidFill>
+                      <a:prstDash val="solid"/>
+                      <a:round/>
+                      <a:headEnd type="none" w="med" len="med"/>
+                      <a:tailEnd type="none" w="med" len="med"/>
+                    </a:lnB>
+                    <a:solidFill>
+                      <a:srgbClr val="006781"/>
+                    </a:solidFill>
+                  </a:tcPr>
+                </a:tc>
+                <a:tc>
+                  <a:txBody>
+                    <a:bodyPr/>
+                    <a:lstStyle/>
+                    <a:p>
+                      <a:pPr indent="0" marL="0">
+                        <a:buNone/>
+                      </a:pPr>
+                      <a:r>
+                        <a:rPr lang="en-US" sz="1300" b="1" dirty="0">
+                          <a:solidFill>
+                            <a:srgbClr val="FFFFFF"/>
+                          </a:solidFill>
+                          <a:latin typeface="Calibri" pitchFamily="34" charset="0"/>
+                          <a:ea typeface="Calibri" pitchFamily="34" charset="-122"/>
+                          <a:cs typeface="Calibri" pitchFamily="34" charset="-120"/>
+                        </a:rPr>
+                        <a:t>Measured usage</a:t>
+                      </a:r>
+                      <a:endParaRPr lang="en-US" sz="1300" dirty="0">
+                        <a:latin typeface="Calibri" charset="0"/>
+                        <a:ea typeface="Calibri" charset="0"/>
+                        <a:cs typeface="Calibri" charset="0"/>
+                      </a:endParaRPr>
+                    </a:p>
+                  </a:txBody>
+                  <a:tcPr marL="91440" marR="91440" marT="45720" marB="45720" anchor="ctr">
+                    <a:lnL w="12700" cap="flat" cmpd="sng" algn="ctr">
+                      <a:solidFill>
+                        <a:srgbClr val="D5DADD"/>
+                      </a:solidFill>
+                      <a:prstDash val="solid"/>
+                      <a:round/>
+                      <a:headEnd type="none" w="med" len="med"/>
+                      <a:tailEnd type="none" w="med" len="med"/>
+                    </a:lnL>
+                    <a:lnR w="12700" cap="flat" cmpd="sng" algn="ctr">
+                      <a:solidFill>
+                        <a:srgbClr val="D5DADD"/>
+                      </a:solidFill>
+                      <a:prstDash val="solid"/>
+                      <a:round/>
+                      <a:headEnd type="none" w="med" len="med"/>
+                      <a:tailEnd type="none" w="med" len="med"/>
+                    </a:lnR>
+                    <a:lnT w="12700" cap="flat" cmpd="sng" algn="ctr">
+                      <a:solidFill>
+                        <a:srgbClr val="D5DADD"/>
+                      </a:solidFill>
+                      <a:prstDash val="solid"/>
+                      <a:round/>
+                      <a:headEnd type="none" w="med" len="med"/>
+                      <a:tailEnd type="none" w="med" len="med"/>
+                    </a:lnT>
+                    <a:lnB w="12700" cap="flat" cmpd="sng" algn="ctr">
+                      <a:solidFill>
+                        <a:srgbClr val="D5DADD"/>
+                      </a:solidFill>
+                      <a:prstDash val="solid"/>
+                      <a:round/>
+                      <a:headEnd type="none" w="med" len="med"/>
+                      <a:tailEnd type="none" w="med" len="med"/>
+                    </a:lnB>
+                    <a:solidFill>
+                      <a:srgbClr val="006781"/>
+                    </a:solidFill>
+                  </a:tcPr>
+                </a:tc>
+                <a:tc>
+                  <a:txBody>
+                    <a:bodyPr/>
+                    <a:lstStyle/>
+                    <a:p>
+                      <a:pPr indent="0" marL="0">
+                        <a:buNone/>
+                      </a:pPr>
+                      <a:r>
+                        <a:rPr lang="en-US" sz="1300" b="1" dirty="0">
+                          <a:solidFill>
+                            <a:srgbClr val="FFFFFF"/>
+                          </a:solidFill>
+                          <a:latin typeface="Calibri" pitchFamily="34" charset="0"/>
+                          <a:ea typeface="Calibri" pitchFamily="34" charset="-122"/>
+                          <a:cs typeface="Calibri" pitchFamily="34" charset="-120"/>
+                        </a:rPr>
+                        <a:t>API rate</a:t>
+                      </a:r>
+                      <a:endParaRPr lang="en-US" sz="1300" dirty="0">
+                        <a:latin typeface="Calibri" charset="0"/>
+                        <a:ea typeface="Calibri" charset="0"/>
+                        <a:cs typeface="Calibri" charset="0"/>
+                      </a:endParaRPr>
+                    </a:p>
+                  </a:txBody>
+                  <a:tcPr marL="91440" marR="91440" marT="45720" marB="45720" anchor="ctr">
+                    <a:lnL w="12700" cap="flat" cmpd="sng" algn="ctr">
+                      <a:solidFill>
+                        <a:srgbClr val="D5DADD"/>
+                      </a:solidFill>
+                      <a:prstDash val="solid"/>
+                      <a:round/>
+                      <a:headEnd type="none" w="med" len="med"/>
+                      <a:tailEnd type="none" w="med" len="med"/>
+                    </a:lnL>
+                    <a:lnR w="12700" cap="flat" cmpd="sng" algn="ctr">
+                      <a:solidFill>
+                        <a:srgbClr val="D5DADD"/>
+                      </a:solidFill>
+                      <a:prstDash val="solid"/>
+                      <a:round/>
+                      <a:headEnd type="none" w="med" len="med"/>
+                      <a:tailEnd type="none" w="med" len="med"/>
+                    </a:lnR>
+                    <a:lnT w="12700" cap="flat" cmpd="sng" algn="ctr">
+                      <a:solidFill>
+                        <a:srgbClr val="D5DADD"/>
+                      </a:solidFill>
+                      <a:prstDash val="solid"/>
+                      <a:round/>
+                      <a:headEnd type="none" w="med" len="med"/>
+                      <a:tailEnd type="none" w="med" len="med"/>
+                    </a:lnT>
+                    <a:lnB w="12700" cap="flat" cmpd="sng" algn="ctr">
+                      <a:solidFill>
+                        <a:srgbClr val="D5DADD"/>
+                      </a:solidFill>
+                      <a:prstDash val="solid"/>
+                      <a:round/>
+                      <a:headEnd type="none" w="med" len="med"/>
+                      <a:tailEnd type="none" w="med" len="med"/>
+                    </a:lnB>
+                    <a:solidFill>
+                      <a:srgbClr val="006781"/>
+                    </a:solidFill>
+                  </a:tcPr>
+                </a:tc>
+                <a:tc>
+                  <a:txBody>
+                    <a:bodyPr/>
+                    <a:lstStyle/>
+                    <a:p>
+                      <a:pPr indent="0" marL="0">
+                        <a:buNone/>
+                      </a:pPr>
+                      <a:r>
+                        <a:rPr lang="en-US" sz="1300" b="1" dirty="0">
+                          <a:solidFill>
+                            <a:srgbClr val="FFFFFF"/>
+                          </a:solidFill>
+                          <a:latin typeface="Calibri" pitchFamily="34" charset="0"/>
+                          <a:ea typeface="Calibri" pitchFamily="34" charset="-122"/>
+                          <a:cs typeface="Calibri" pitchFamily="34" charset="-120"/>
+                        </a:rPr>
+                        <a:t>US$</a:t>
+                      </a:r>
+                      <a:endParaRPr lang="en-US" sz="1300" dirty="0">
+                        <a:latin typeface="Calibri" charset="0"/>
+                        <a:ea typeface="Calibri" charset="0"/>
+                        <a:cs typeface="Calibri" charset="0"/>
+                      </a:endParaRPr>
+                    </a:p>
+                  </a:txBody>
+                  <a:tcPr marL="91440" marR="91440" marT="45720" marB="45720" anchor="ctr">
+                    <a:lnL w="12700" cap="flat" cmpd="sng" algn="ctr">
+                      <a:solidFill>
+                        <a:srgbClr val="D5DADD"/>
+                      </a:solidFill>
+                      <a:prstDash val="solid"/>
+                      <a:round/>
+                      <a:headEnd type="none" w="med" len="med"/>
+                      <a:tailEnd type="none" w="med" len="med"/>
+                    </a:lnL>
+                    <a:lnR w="12700" cap="flat" cmpd="sng" algn="ctr">
+                      <a:solidFill>
+                        <a:srgbClr val="D5DADD"/>
+                      </a:solidFill>
+                      <a:prstDash val="solid"/>
+                      <a:round/>
+                      <a:headEnd type="none" w="med" len="med"/>
+                      <a:tailEnd type="none" w="med" len="med"/>
+                    </a:lnR>
+                    <a:lnT w="12700" cap="flat" cmpd="sng" algn="ctr">
+                      <a:solidFill>
+                        <a:srgbClr val="D5DADD"/>
+                      </a:solidFill>
+                      <a:prstDash val="solid"/>
+                      <a:round/>
+                      <a:headEnd type="none" w="med" len="med"/>
+                      <a:tailEnd type="none" w="med" len="med"/>
+                    </a:lnT>
+                    <a:lnB w="12700" cap="flat" cmpd="sng" algn="ctr">
+                      <a:solidFill>
+                        <a:srgbClr val="D5DADD"/>
+                      </a:solidFill>
+                      <a:prstDash val="solid"/>
+                      <a:round/>
+                      <a:headEnd type="none" w="med" len="med"/>
+                      <a:tailEnd type="none" w="med" len="med"/>
+                    </a:lnB>
+                    <a:solidFill>
+                      <a:srgbClr val="006781"/>
+                    </a:solidFill>
+                  </a:tcPr>
+                </a:tc>
+                <a:tc>
+                  <a:txBody>
+                    <a:bodyPr/>
+                    <a:lstStyle/>
+                    <a:p>
+                      <a:pPr indent="0" marL="0">
+                        <a:buNone/>
+                      </a:pPr>
+                      <a:r>
+                        <a:rPr lang="en-US" sz="1300" b="1" dirty="0">
+                          <a:solidFill>
+                            <a:srgbClr val="FFFFFF"/>
+                          </a:solidFill>
+                          <a:latin typeface="Calibri" pitchFamily="34" charset="0"/>
+                          <a:ea typeface="Calibri" pitchFamily="34" charset="-122"/>
+                          <a:cs typeface="Calibri" pitchFamily="34" charset="-120"/>
+                        </a:rPr>
+                        <a:t>S$</a:t>
+                      </a:r>
+                      <a:endParaRPr lang="en-US" sz="1300" dirty="0">
+                        <a:latin typeface="Calibri" charset="0"/>
+                        <a:ea typeface="Calibri" charset="0"/>
+                        <a:cs typeface="Calibri" charset="0"/>
+                      </a:endParaRPr>
+                    </a:p>
+                  </a:txBody>
+                  <a:tcPr marL="91440" marR="91440" marT="45720" marB="45720" anchor="ctr">
+                    <a:lnL w="12700" cap="flat" cmpd="sng" algn="ctr">
+                      <a:solidFill>
+                        <a:srgbClr val="D5DADD"/>
+                      </a:solidFill>
+                      <a:prstDash val="solid"/>
+                      <a:round/>
+                      <a:headEnd type="none" w="med" len="med"/>
+                      <a:tailEnd type="none" w="med" len="med"/>
+                    </a:lnL>
+                    <a:lnR w="12700" cap="flat" cmpd="sng" algn="ctr">
+                      <a:solidFill>
+                        <a:srgbClr val="D5DADD"/>
+                      </a:solidFill>
+                      <a:prstDash val="solid"/>
+                      <a:round/>
+                      <a:headEnd type="none" w="med" len="med"/>
+                      <a:tailEnd type="none" w="med" len="med"/>
+                    </a:lnR>
+                    <a:lnT w="12700" cap="flat" cmpd="sng" algn="ctr">
+                      <a:solidFill>
+                        <a:srgbClr val="D5DADD"/>
+                      </a:solidFill>
+                      <a:prstDash val="solid"/>
+                      <a:round/>
+                      <a:headEnd type="none" w="med" len="med"/>
+                      <a:tailEnd type="none" w="med" len="med"/>
+                    </a:lnT>
+                    <a:lnB w="12700" cap="flat" cmpd="sng" algn="ctr">
+                      <a:solidFill>
+                        <a:srgbClr val="D5DADD"/>
+                      </a:solidFill>
+                      <a:prstDash val="solid"/>
+                      <a:round/>
+                      <a:headEnd type="none" w="med" len="med"/>
+                      <a:tailEnd type="none" w="med" len="med"/>
+                    </a:lnB>
+                    <a:solidFill>
+                      <a:srgbClr val="006781"/>
+                    </a:solidFill>
+                  </a:tcPr>
+                </a:tc>
+              </a:tr>
+              <a:tr h="411480">
+                <a:tc>
+                  <a:txBody>
+                    <a:bodyPr/>
+                    <a:lstStyle/>
+                    <a:p>
+                      <a:pPr algn="l" indent="0" marL="0">
+                        <a:buNone/>
+                      </a:pPr>
+                      <a:r>
+                        <a:rPr lang="en-US" sz="1300" dirty="0">
+                          <a:solidFill>
+                            <a:srgbClr val="181C1E"/>
+                          </a:solidFill>
+                          <a:latin typeface="Calibri" pitchFamily="34" charset="0"/>
+                          <a:ea typeface="Calibri" pitchFamily="34" charset="-122"/>
+                          <a:cs typeface="Calibri" pitchFamily="34" charset="-120"/>
+                        </a:rPr>
+                        <a:t>Haiku reads pages: input</a:t>
+                      </a:r>
+                      <a:endParaRPr lang="en-US" sz="1300" dirty="0">
+                        <a:latin typeface="Calibri" charset="0"/>
+                        <a:ea typeface="Calibri" charset="0"/>
+                        <a:cs typeface="Calibri" charset="0"/>
+                      </a:endParaRPr>
+                    </a:p>
+                  </a:txBody>
+                  <a:tcPr marL="91440" marR="91440" marT="45720" marB="45720" anchor="ctr">
+                    <a:lnL w="12700" cap="flat" cmpd="sng" algn="ctr">
+                      <a:solidFill>
+                        <a:srgbClr val="D5DADD"/>
+                      </a:solidFill>
+                      <a:prstDash val="solid"/>
+                      <a:round/>
+                      <a:headEnd type="none" w="med" len="med"/>
+                      <a:tailEnd type="none" w="med" len="med"/>
+                    </a:lnL>
+                    <a:lnR w="12700" cap="flat" cmpd="sng" algn="ctr">
+                      <a:solidFill>
+                        <a:srgbClr val="D5DADD"/>
+                      </a:solidFill>
+                      <a:prstDash val="solid"/>
+                      <a:round/>
+                      <a:headEnd type="none" w="med" len="med"/>
+                      <a:tailEnd type="none" w="med" len="med"/>
+                    </a:lnR>
+                    <a:lnT w="12700" cap="flat" cmpd="sng" algn="ctr">
+                      <a:solidFill>
+                        <a:srgbClr val="D5DADD"/>
+                      </a:solidFill>
+                      <a:prstDash val="solid"/>
+                      <a:round/>
+                      <a:headEnd type="none" w="med" len="med"/>
+                      <a:tailEnd type="none" w="med" len="med"/>
+                    </a:lnT>
+                    <a:lnB w="12700" cap="flat" cmpd="sng" algn="ctr">
+                      <a:solidFill>
+                        <a:srgbClr val="D5DADD"/>
+                      </a:solidFill>
+                      <a:prstDash val="solid"/>
+                      <a:round/>
+                      <a:headEnd type="none" w="med" len="med"/>
+                      <a:tailEnd type="none" w="med" len="med"/>
+                    </a:lnB>
+                  </a:tcPr>
+                </a:tc>
+                <a:tc>
+                  <a:txBody>
+                    <a:bodyPr/>
+                    <a:lstStyle/>
+                    <a:p>
+                      <a:pPr algn="l" indent="0" marL="0">
+                        <a:buNone/>
+                      </a:pPr>
+                      <a:r>
+                        <a:rPr lang="en-US" sz="1300" dirty="0">
+                          <a:solidFill>
+                            <a:srgbClr val="181C1E"/>
+                          </a:solidFill>
+                          <a:latin typeface="Calibri" pitchFamily="34" charset="0"/>
+                          <a:ea typeface="Calibri" pitchFamily="34" charset="-122"/>
+                          <a:cs typeface="Calibri" pitchFamily="34" charset="-120"/>
+                        </a:rPr>
+                        <a:t>3,264,933 tokens</a:t>
+                      </a:r>
+                      <a:endParaRPr lang="en-US" sz="1300" dirty="0">
+                        <a:latin typeface="Calibri" charset="0"/>
+                        <a:ea typeface="Calibri" charset="0"/>
+                        <a:cs typeface="Calibri" charset="0"/>
+                      </a:endParaRPr>
+                    </a:p>
+                  </a:txBody>
+                  <a:tcPr marL="91440" marR="91440" marT="45720" marB="45720" anchor="ctr">
+                    <a:lnL w="12700" cap="flat" cmpd="sng" algn="ctr">
+                      <a:solidFill>
+                        <a:srgbClr val="D5DADD"/>
+                      </a:solidFill>
+                      <a:prstDash val="solid"/>
+                      <a:round/>
+                      <a:headEnd type="none" w="med" len="med"/>
+                      <a:tailEnd type="none" w="med" len="med"/>
+                    </a:lnL>
+                    <a:lnR w="12700" cap="flat" cmpd="sng" algn="ctr">
+                      <a:solidFill>
+                        <a:srgbClr val="D5DADD"/>
+                      </a:solidFill>
+                      <a:prstDash val="solid"/>
+                      <a:round/>
+                      <a:headEnd type="none" w="med" len="med"/>
+                      <a:tailEnd type="none" w="med" len="med"/>
+                    </a:lnR>
+                    <a:lnT w="12700" cap="flat" cmpd="sng" algn="ctr">
+                      <a:solidFill>
+                        <a:srgbClr val="D5DADD"/>
+                      </a:solidFill>
+                      <a:prstDash val="solid"/>
+                      <a:round/>
+                      <a:headEnd type="none" w="med" len="med"/>
+                      <a:tailEnd type="none" w="med" len="med"/>
+                    </a:lnT>
+                    <a:lnB w="12700" cap="flat" cmpd="sng" algn="ctr">
+                      <a:solidFill>
+                        <a:srgbClr val="D5DADD"/>
+                      </a:solidFill>
+                      <a:prstDash val="solid"/>
+                      <a:round/>
+                      <a:headEnd type="none" w="med" len="med"/>
+                      <a:tailEnd type="none" w="med" len="med"/>
+                    </a:lnB>
+                  </a:tcPr>
+                </a:tc>
+                <a:tc>
+                  <a:txBody>
+                    <a:bodyPr/>
+                    <a:lstStyle/>
+                    <a:p>
+                      <a:pPr algn="l" indent="0" marL="0">
+                        <a:buNone/>
+                      </a:pPr>
+                      <a:r>
+                        <a:rPr lang="en-US" sz="1300" dirty="0">
+                          <a:solidFill>
+                            <a:srgbClr val="181C1E"/>
+                          </a:solidFill>
+                          <a:latin typeface="Calibri" pitchFamily="34" charset="0"/>
+                          <a:ea typeface="Calibri" pitchFamily="34" charset="-122"/>
+                          <a:cs typeface="Calibri" pitchFamily="34" charset="-120"/>
+                        </a:rPr>
+                        <a:t>$0.10 / M</a:t>
+                      </a:r>
+                      <a:endParaRPr lang="en-US" sz="1300" dirty="0">
+                        <a:latin typeface="Calibri" charset="0"/>
+                        <a:ea typeface="Calibri" charset="0"/>
+                        <a:cs typeface="Calibri" charset="0"/>
+                      </a:endParaRPr>
+                    </a:p>
+                  </a:txBody>
+                  <a:tcPr marL="91440" marR="91440" marT="45720" marB="45720" anchor="ctr">
+                    <a:lnL w="12700" cap="flat" cmpd="sng" algn="ctr">
+                      <a:solidFill>
+                        <a:srgbClr val="D5DADD"/>
+                      </a:solidFill>
+                      <a:prstDash val="solid"/>
+                      <a:round/>
+                      <a:headEnd type="none" w="med" len="med"/>
+                      <a:tailEnd type="none" w="med" len="med"/>
+                    </a:lnL>
+                    <a:lnR w="12700" cap="flat" cmpd="sng" algn="ctr">
+                      <a:solidFill>
+                        <a:srgbClr val="D5DADD"/>
+                      </a:solidFill>
+                      <a:prstDash val="solid"/>
+                      <a:round/>
+                      <a:headEnd type="none" w="med" len="med"/>
+                      <a:tailEnd type="none" w="med" len="med"/>
+                    </a:lnR>
+                    <a:lnT w="12700" cap="flat" cmpd="sng" algn="ctr">
+                      <a:solidFill>
+                        <a:srgbClr val="D5DADD"/>
+                      </a:solidFill>
+                      <a:prstDash val="solid"/>
+                      <a:round/>
+                      <a:headEnd type="none" w="med" len="med"/>
+                      <a:tailEnd type="none" w="med" len="med"/>
+                    </a:lnT>
+                    <a:lnB w="12700" cap="flat" cmpd="sng" algn="ctr">
+                      <a:solidFill>
+                        <a:srgbClr val="D5DADD"/>
+                      </a:solidFill>
+                      <a:prstDash val="solid"/>
+                      <a:round/>
+                      <a:headEnd type="none" w="med" len="med"/>
+                      <a:tailEnd type="none" w="med" len="med"/>
+                    </a:lnB>
+                  </a:tcPr>
+                </a:tc>
+                <a:tc>
+                  <a:txBody>
+                    <a:bodyPr/>
+                    <a:lstStyle/>
+                    <a:p>
+                      <a:pPr algn="r" indent="0" marL="0">
+                        <a:buNone/>
+                      </a:pPr>
+                      <a:r>
+                        <a:rPr lang="en-US" sz="1300" dirty="0">
+                          <a:solidFill>
+                            <a:srgbClr val="181C1E"/>
+                          </a:solidFill>
+                          <a:latin typeface="Calibri" pitchFamily="34" charset="0"/>
+                          <a:ea typeface="Calibri" pitchFamily="34" charset="-122"/>
+                          <a:cs typeface="Calibri" pitchFamily="34" charset="-120"/>
+                        </a:rPr>
+                        <a:t>0.33</a:t>
+                      </a:r>
+                      <a:endParaRPr lang="en-US" sz="1300" dirty="0">
+                        <a:latin typeface="Calibri" charset="0"/>
+                        <a:ea typeface="Calibri" charset="0"/>
+                        <a:cs typeface="Calibri" charset="0"/>
+                      </a:endParaRPr>
+                    </a:p>
+                  </a:txBody>
+                  <a:tcPr marL="91440" marR="91440" marT="45720" marB="45720" anchor="ctr">
+                    <a:lnL w="12700" cap="flat" cmpd="sng" algn="ctr">
+                      <a:solidFill>
+                        <a:srgbClr val="D5DADD"/>
+                      </a:solidFill>
+                      <a:prstDash val="solid"/>
+                      <a:round/>
+                      <a:headEnd type="none" w="med" len="med"/>
+                      <a:tailEnd type="none" w="med" len="med"/>
+                    </a:lnL>
+                    <a:lnR w="12700" cap="flat" cmpd="sng" algn="ctr">
+                      <a:solidFill>
+                        <a:srgbClr val="D5DADD"/>
+                      </a:solidFill>
+                      <a:prstDash val="solid"/>
+                      <a:round/>
+                      <a:headEnd type="none" w="med" len="med"/>
+                      <a:tailEnd type="none" w="med" len="med"/>
+                    </a:lnR>
+                    <a:lnT w="12700" cap="flat" cmpd="sng" algn="ctr">
+                      <a:solidFill>
+                        <a:srgbClr val="D5DADD"/>
+                      </a:solidFill>
+                      <a:prstDash val="solid"/>
+                      <a:round/>
+                      <a:headEnd type="none" w="med" len="med"/>
+                      <a:tailEnd type="none" w="med" len="med"/>
+                    </a:lnT>
+                    <a:lnB w="12700" cap="flat" cmpd="sng" algn="ctr">
+                      <a:solidFill>
+                        <a:srgbClr val="D5DADD"/>
+                      </a:solidFill>
+                      <a:prstDash val="solid"/>
+                      <a:round/>
+                      <a:headEnd type="none" w="med" len="med"/>
+                      <a:tailEnd type="none" w="med" len="med"/>
+                    </a:lnB>
+                  </a:tcPr>
+                </a:tc>
+                <a:tc>
+                  <a:txBody>
+                    <a:bodyPr/>
+                    <a:lstStyle/>
+                    <a:p>
+                      <a:pPr algn="r" indent="0" marL="0">
+                        <a:buNone/>
+                      </a:pPr>
+                      <a:r>
+                        <a:rPr lang="en-US" sz="1300" dirty="0">
+                          <a:solidFill>
+                            <a:srgbClr val="181C1E"/>
+                          </a:solidFill>
+                          <a:latin typeface="Calibri" pitchFamily="34" charset="0"/>
+                          <a:ea typeface="Calibri" pitchFamily="34" charset="-122"/>
+                          <a:cs typeface="Calibri" pitchFamily="34" charset="-120"/>
+                        </a:rPr>
+                        <a:t>0.42</a:t>
+                      </a:r>
+                      <a:endParaRPr lang="en-US" sz="1300" dirty="0">
+                        <a:latin typeface="Calibri" charset="0"/>
+                        <a:ea typeface="Calibri" charset="0"/>
+                        <a:cs typeface="Calibri" charset="0"/>
+                      </a:endParaRPr>
+                    </a:p>
+                  </a:txBody>
+                  <a:tcPr marL="91440" marR="91440" marT="45720" marB="45720" anchor="ctr">
+                    <a:lnL w="12700" cap="flat" cmpd="sng" algn="ctr">
+                      <a:solidFill>
+                        <a:srgbClr val="D5DADD"/>
+                      </a:solidFill>
+                      <a:prstDash val="solid"/>
+                      <a:round/>
+                      <a:headEnd type="none" w="med" len="med"/>
+                      <a:tailEnd type="none" w="med" len="med"/>
+                    </a:lnL>
+                    <a:lnR w="12700" cap="flat" cmpd="sng" algn="ctr">
+                      <a:solidFill>
+                        <a:srgbClr val="D5DADD"/>
+                      </a:solidFill>
+                      <a:prstDash val="solid"/>
+                      <a:round/>
+                      <a:headEnd type="none" w="med" len="med"/>
+                      <a:tailEnd type="none" w="med" len="med"/>
+                    </a:lnR>
+                    <a:lnT w="12700" cap="flat" cmpd="sng" algn="ctr">
+                      <a:solidFill>
+                        <a:srgbClr val="D5DADD"/>
+                      </a:solidFill>
+                      <a:prstDash val="solid"/>
+                      <a:round/>
+                      <a:headEnd type="none" w="med" len="med"/>
+                      <a:tailEnd type="none" w="med" len="med"/>
+                    </a:lnT>
+                    <a:lnB w="12700" cap="flat" cmpd="sng" algn="ctr">
+                      <a:solidFill>
+                        <a:srgbClr val="D5DADD"/>
+                      </a:solidFill>
+                      <a:prstDash val="solid"/>
+                      <a:round/>
+                      <a:headEnd type="none" w="med" len="med"/>
+                      <a:tailEnd type="none" w="med" len="med"/>
+                    </a:lnB>
+                  </a:tcPr>
+                </a:tc>
+              </a:tr>
+              <a:tr h="411480">
+                <a:tc>
+                  <a:txBody>
+                    <a:bodyPr/>
+                    <a:lstStyle/>
+                    <a:p>
+                      <a:pPr algn="l" indent="0" marL="0">
+                        <a:buNone/>
+                      </a:pPr>
+                      <a:r>
+                        <a:rPr lang="en-US" sz="1300" dirty="0">
+                          <a:solidFill>
+                            <a:srgbClr val="181C1E"/>
+                          </a:solidFill>
+                          <a:latin typeface="Calibri" pitchFamily="34" charset="0"/>
+                          <a:ea typeface="Calibri" pitchFamily="34" charset="-122"/>
+                          <a:cs typeface="Calibri" pitchFamily="34" charset="-120"/>
+                        </a:rPr>
+                        <a:t>Haiku reads pages: output</a:t>
+                      </a:r>
+                      <a:endParaRPr lang="en-US" sz="1300" dirty="0">
+                        <a:latin typeface="Calibri" charset="0"/>
+                        <a:ea typeface="Calibri" charset="0"/>
+                        <a:cs typeface="Calibri" charset="0"/>
+                      </a:endParaRPr>
+                    </a:p>
+                  </a:txBody>
+                  <a:tcPr marL="91440" marR="91440" marT="45720" marB="45720" anchor="ctr">
+                    <a:lnL w="12700" cap="flat" cmpd="sng" algn="ctr">
+                      <a:solidFill>
+                        <a:srgbClr val="D5DADD"/>
+                      </a:solidFill>
+                      <a:prstDash val="solid"/>
+                      <a:round/>
+                      <a:headEnd type="none" w="med" len="med"/>
+                      <a:tailEnd type="none" w="med" len="med"/>
+                    </a:lnL>
+                    <a:lnR w="12700" cap="flat" cmpd="sng" algn="ctr">
+                      <a:solidFill>
+                        <a:srgbClr val="D5DADD"/>
+                      </a:solidFill>
+                      <a:prstDash val="solid"/>
+                      <a:round/>
+                      <a:headEnd type="none" w="med" len="med"/>
+                      <a:tailEnd type="none" w="med" len="med"/>
+                    </a:lnR>
+                    <a:lnT w="12700" cap="flat" cmpd="sng" algn="ctr">
+                      <a:solidFill>
+                        <a:srgbClr val="D5DADD"/>
+                      </a:solidFill>
+                      <a:prstDash val="solid"/>
+                      <a:round/>
+                      <a:headEnd type="none" w="med" len="med"/>
+                      <a:tailEnd type="none" w="med" len="med"/>
+                    </a:lnT>
+                    <a:lnB w="12700" cap="flat" cmpd="sng" algn="ctr">
+                      <a:solidFill>
+                        <a:srgbClr val="D5DADD"/>
+                      </a:solidFill>
+                      <a:prstDash val="solid"/>
+                      <a:round/>
+                      <a:headEnd type="none" w="med" len="med"/>
+                      <a:tailEnd type="none" w="med" len="med"/>
+                    </a:lnB>
+                  </a:tcPr>
+                </a:tc>
+                <a:tc>
+                  <a:txBody>
+                    <a:bodyPr/>
+                    <a:lstStyle/>
+                    <a:p>
+                      <a:pPr algn="l" indent="0" marL="0">
+                        <a:buNone/>
+                      </a:pPr>
+                      <a:r>
+                        <a:rPr lang="en-US" sz="1300" dirty="0">
+                          <a:solidFill>
+                            <a:srgbClr val="181C1E"/>
+                          </a:solidFill>
+                          <a:latin typeface="Calibri" pitchFamily="34" charset="0"/>
+                          <a:ea typeface="Calibri" pitchFamily="34" charset="-122"/>
+                          <a:cs typeface="Calibri" pitchFamily="34" charset="-120"/>
+                        </a:rPr>
+                        <a:t>233,360 tokens</a:t>
+                      </a:r>
+                      <a:endParaRPr lang="en-US" sz="1300" dirty="0">
+                        <a:latin typeface="Calibri" charset="0"/>
+                        <a:ea typeface="Calibri" charset="0"/>
+                        <a:cs typeface="Calibri" charset="0"/>
+                      </a:endParaRPr>
+                    </a:p>
+                  </a:txBody>
+                  <a:tcPr marL="91440" marR="91440" marT="45720" marB="45720" anchor="ctr">
+                    <a:lnL w="12700" cap="flat" cmpd="sng" algn="ctr">
+                      <a:solidFill>
+                        <a:srgbClr val="D5DADD"/>
+                      </a:solidFill>
+                      <a:prstDash val="solid"/>
+                      <a:round/>
+                      <a:headEnd type="none" w="med" len="med"/>
+                      <a:tailEnd type="none" w="med" len="med"/>
+                    </a:lnL>
+                    <a:lnR w="12700" cap="flat" cmpd="sng" algn="ctr">
+                      <a:solidFill>
+                        <a:srgbClr val="D5DADD"/>
+                      </a:solidFill>
+                      <a:prstDash val="solid"/>
+                      <a:round/>
+                      <a:headEnd type="none" w="med" len="med"/>
+                      <a:tailEnd type="none" w="med" len="med"/>
+                    </a:lnR>
+                    <a:lnT w="12700" cap="flat" cmpd="sng" algn="ctr">
+                      <a:solidFill>
+                        <a:srgbClr val="D5DADD"/>
+                      </a:solidFill>
+                      <a:prstDash val="solid"/>
+                      <a:round/>
+                      <a:headEnd type="none" w="med" len="med"/>
+                      <a:tailEnd type="none" w="med" len="med"/>
+                    </a:lnT>
+                    <a:lnB w="12700" cap="flat" cmpd="sng" algn="ctr">
+                      <a:solidFill>
+                        <a:srgbClr val="D5DADD"/>
+                      </a:solidFill>
+                      <a:prstDash val="solid"/>
+                      <a:round/>
+                      <a:headEnd type="none" w="med" len="med"/>
+                      <a:tailEnd type="none" w="med" len="med"/>
+                    </a:lnB>
+                  </a:tcPr>
+                </a:tc>
+                <a:tc>
+                  <a:txBody>
+                    <a:bodyPr/>
+                    <a:lstStyle/>
+                    <a:p>
+                      <a:pPr algn="l" indent="0" marL="0">
+                        <a:buNone/>
+                      </a:pPr>
+                      <a:r>
+                        <a:rPr lang="en-US" sz="1300" dirty="0">
+                          <a:solidFill>
+                            <a:srgbClr val="181C1E"/>
+                          </a:solidFill>
+                          <a:latin typeface="Calibri" pitchFamily="34" charset="0"/>
+                          <a:ea typeface="Calibri" pitchFamily="34" charset="-122"/>
+                          <a:cs typeface="Calibri" pitchFamily="34" charset="-120"/>
+                        </a:rPr>
+                        <a:t>$0.50 / M</a:t>
+                      </a:r>
+                      <a:endParaRPr lang="en-US" sz="1300" dirty="0">
+                        <a:latin typeface="Calibri" charset="0"/>
+                        <a:ea typeface="Calibri" charset="0"/>
+                        <a:cs typeface="Calibri" charset="0"/>
+                      </a:endParaRPr>
+                    </a:p>
+                  </a:txBody>
+                  <a:tcPr marL="91440" marR="91440" marT="45720" marB="45720" anchor="ctr">
+                    <a:lnL w="12700" cap="flat" cmpd="sng" algn="ctr">
+                      <a:solidFill>
+                        <a:srgbClr val="D5DADD"/>
+                      </a:solidFill>
+                      <a:prstDash val="solid"/>
+                      <a:round/>
+                      <a:headEnd type="none" w="med" len="med"/>
+                      <a:tailEnd type="none" w="med" len="med"/>
+                    </a:lnL>
+                    <a:lnR w="12700" cap="flat" cmpd="sng" algn="ctr">
+                      <a:solidFill>
+                        <a:srgbClr val="D5DADD"/>
+                      </a:solidFill>
+                      <a:prstDash val="solid"/>
+                      <a:round/>
+                      <a:headEnd type="none" w="med" len="med"/>
+                      <a:tailEnd type="none" w="med" len="med"/>
+                    </a:lnR>
+                    <a:lnT w="12700" cap="flat" cmpd="sng" algn="ctr">
+                      <a:solidFill>
+                        <a:srgbClr val="D5DADD"/>
+                      </a:solidFill>
+                      <a:prstDash val="solid"/>
+                      <a:round/>
+                      <a:headEnd type="none" w="med" len="med"/>
+                      <a:tailEnd type="none" w="med" len="med"/>
+                    </a:lnT>
+                    <a:lnB w="12700" cap="flat" cmpd="sng" algn="ctr">
+                      <a:solidFill>
+                        <a:srgbClr val="D5DADD"/>
+                      </a:solidFill>
+                      <a:prstDash val="solid"/>
+                      <a:round/>
+                      <a:headEnd type="none" w="med" len="med"/>
+                      <a:tailEnd type="none" w="med" len="med"/>
+                    </a:lnB>
+                  </a:tcPr>
+                </a:tc>
+                <a:tc>
+                  <a:txBody>
+                    <a:bodyPr/>
+                    <a:lstStyle/>
+                    <a:p>
+                      <a:pPr algn="r" indent="0" marL="0">
+                        <a:buNone/>
+                      </a:pPr>
+                      <a:r>
+                        <a:rPr lang="en-US" sz="1300" dirty="0">
+                          <a:solidFill>
+                            <a:srgbClr val="181C1E"/>
+                          </a:solidFill>
+                          <a:latin typeface="Calibri" pitchFamily="34" charset="0"/>
+                          <a:ea typeface="Calibri" pitchFamily="34" charset="-122"/>
+                          <a:cs typeface="Calibri" pitchFamily="34" charset="-120"/>
+                        </a:rPr>
+                        <a:t>0.12</a:t>
+                      </a:r>
+                      <a:endParaRPr lang="en-US" sz="1300" dirty="0">
+                        <a:latin typeface="Calibri" charset="0"/>
+                        <a:ea typeface="Calibri" charset="0"/>
+                        <a:cs typeface="Calibri" charset="0"/>
+                      </a:endParaRPr>
+                    </a:p>
+                  </a:txBody>
+                  <a:tcPr marL="91440" marR="91440" marT="45720" marB="45720" anchor="ctr">
+                    <a:lnL w="12700" cap="flat" cmpd="sng" algn="ctr">
+                      <a:solidFill>
+                        <a:srgbClr val="D5DADD"/>
+                      </a:solidFill>
+                      <a:prstDash val="solid"/>
+                      <a:round/>
+                      <a:headEnd type="none" w="med" len="med"/>
+                      <a:tailEnd type="none" w="med" len="med"/>
+                    </a:lnL>
+                    <a:lnR w="12700" cap="flat" cmpd="sng" algn="ctr">
+                      <a:solidFill>
+                        <a:srgbClr val="D5DADD"/>
+                      </a:solidFill>
+                      <a:prstDash val="solid"/>
+                      <a:round/>
+                      <a:headEnd type="none" w="med" len="med"/>
+                      <a:tailEnd type="none" w="med" len="med"/>
+                    </a:lnR>
+                    <a:lnT w="12700" cap="flat" cmpd="sng" algn="ctr">
+                      <a:solidFill>
+                        <a:srgbClr val="D5DADD"/>
+                      </a:solidFill>
+                      <a:prstDash val="solid"/>
+                      <a:round/>
+                      <a:headEnd type="none" w="med" len="med"/>
+                      <a:tailEnd type="none" w="med" len="med"/>
+                    </a:lnT>
+                    <a:lnB w="12700" cap="flat" cmpd="sng" algn="ctr">
+                      <a:solidFill>
+                        <a:srgbClr val="D5DADD"/>
+                      </a:solidFill>
+                      <a:prstDash val="solid"/>
+                      <a:round/>
+                      <a:headEnd type="none" w="med" len="med"/>
+                      <a:tailEnd type="none" w="med" len="med"/>
+                    </a:lnB>
+                  </a:tcPr>
+                </a:tc>
+                <a:tc>
+                  <a:txBody>
+                    <a:bodyPr/>
+                    <a:lstStyle/>
+                    <a:p>
+                      <a:pPr algn="r" indent="0" marL="0">
+                        <a:buNone/>
+                      </a:pPr>
+                      <a:r>
+                        <a:rPr lang="en-US" sz="1300" dirty="0">
+                          <a:solidFill>
+                            <a:srgbClr val="181C1E"/>
+                          </a:solidFill>
+                          <a:latin typeface="Calibri" pitchFamily="34" charset="0"/>
+                          <a:ea typeface="Calibri" pitchFamily="34" charset="-122"/>
+                          <a:cs typeface="Calibri" pitchFamily="34" charset="-120"/>
+                        </a:rPr>
+                        <a:t>0.15</a:t>
+                      </a:r>
+                      <a:endParaRPr lang="en-US" sz="1300" dirty="0">
+                        <a:latin typeface="Calibri" charset="0"/>
+                        <a:ea typeface="Calibri" charset="0"/>
+                        <a:cs typeface="Calibri" charset="0"/>
+                      </a:endParaRPr>
+                    </a:p>
+                  </a:txBody>
+                  <a:tcPr marL="91440" marR="91440" marT="45720" marB="45720" anchor="ctr">
+                    <a:lnL w="12700" cap="flat" cmpd="sng" algn="ctr">
+                      <a:solidFill>
+                        <a:srgbClr val="D5DADD"/>
+                      </a:solidFill>
+                      <a:prstDash val="solid"/>
+                      <a:round/>
+                      <a:headEnd type="none" w="med" len="med"/>
+                      <a:tailEnd type="none" w="med" len="med"/>
+                    </a:lnL>
+                    <a:lnR w="12700" cap="flat" cmpd="sng" algn="ctr">
+                      <a:solidFill>
+                        <a:srgbClr val="D5DADD"/>
+                      </a:solidFill>
+                      <a:prstDash val="solid"/>
+                      <a:round/>
+                      <a:headEnd type="none" w="med" len="med"/>
+                      <a:tailEnd type="none" w="med" len="med"/>
+                    </a:lnR>
+                    <a:lnT w="12700" cap="flat" cmpd="sng" algn="ctr">
+                      <a:solidFill>
+                        <a:srgbClr val="D5DADD"/>
+                      </a:solidFill>
+                      <a:prstDash val="solid"/>
+                      <a:round/>
+                      <a:headEnd type="none" w="med" len="med"/>
+                      <a:tailEnd type="none" w="med" len="med"/>
+                    </a:lnT>
+                    <a:lnB w="12700" cap="flat" cmpd="sng" algn="ctr">
+                      <a:solidFill>
+                        <a:srgbClr val="D5DADD"/>
+                      </a:solidFill>
+                      <a:prstDash val="solid"/>
+                      <a:round/>
+                      <a:headEnd type="none" w="med" len="med"/>
+                      <a:tailEnd type="none" w="med" len="med"/>
+                    </a:lnB>
+                  </a:tcPr>
+                </a:tc>
+              </a:tr>
+              <a:tr h="411480">
+                <a:tc>
+                  <a:txBody>
+                    <a:bodyPr/>
+                    <a:lstStyle/>
+                    <a:p>
+                      <a:pPr algn="l" indent="0" marL="0">
+                        <a:buNone/>
+                      </a:pPr>
+                      <a:r>
+                        <a:rPr lang="en-US" sz="1300" dirty="0">
+                          <a:solidFill>
+                            <a:srgbClr val="181C1E"/>
+                          </a:solidFill>
+                          <a:latin typeface="Calibri" pitchFamily="34" charset="0"/>
+                          <a:ea typeface="Calibri" pitchFamily="34" charset="-122"/>
+                          <a:cs typeface="Calibri" pitchFamily="34" charset="-120"/>
+                        </a:rPr>
+                        <a:t>Web searches</a:t>
+                      </a:r>
+                      <a:endParaRPr lang="en-US" sz="1300" dirty="0">
+                        <a:latin typeface="Calibri" charset="0"/>
+                        <a:ea typeface="Calibri" charset="0"/>
+                        <a:cs typeface="Calibri" charset="0"/>
+                      </a:endParaRPr>
+                    </a:p>
+                  </a:txBody>
+                  <a:tcPr marL="91440" marR="91440" marT="45720" marB="45720" anchor="ctr">
+                    <a:lnL w="12700" cap="flat" cmpd="sng" algn="ctr">
+                      <a:solidFill>
+                        <a:srgbClr val="D5DADD"/>
+                      </a:solidFill>
+                      <a:prstDash val="solid"/>
+                      <a:round/>
+                      <a:headEnd type="none" w="med" len="med"/>
+                      <a:tailEnd type="none" w="med" len="med"/>
+                    </a:lnL>
+                    <a:lnR w="12700" cap="flat" cmpd="sng" algn="ctr">
+                      <a:solidFill>
+                        <a:srgbClr val="D5DADD"/>
+                      </a:solidFill>
+                      <a:prstDash val="solid"/>
+                      <a:round/>
+                      <a:headEnd type="none" w="med" len="med"/>
+                      <a:tailEnd type="none" w="med" len="med"/>
+                    </a:lnR>
+                    <a:lnT w="12700" cap="flat" cmpd="sng" algn="ctr">
+                      <a:solidFill>
+                        <a:srgbClr val="D5DADD"/>
+                      </a:solidFill>
+                      <a:prstDash val="solid"/>
+                      <a:round/>
+                      <a:headEnd type="none" w="med" len="med"/>
+                      <a:tailEnd type="none" w="med" len="med"/>
+                    </a:lnT>
+                    <a:lnB w="12700" cap="flat" cmpd="sng" algn="ctr">
+                      <a:solidFill>
+                        <a:srgbClr val="D5DADD"/>
+                      </a:solidFill>
+                      <a:prstDash val="solid"/>
+                      <a:round/>
+                      <a:headEnd type="none" w="med" len="med"/>
+                      <a:tailEnd type="none" w="med" len="med"/>
+                    </a:lnB>
+                  </a:tcPr>
+                </a:tc>
+                <a:tc>
+                  <a:txBody>
+                    <a:bodyPr/>
+                    <a:lstStyle/>
+                    <a:p>
+                      <a:pPr algn="l" indent="0" marL="0">
+                        <a:buNone/>
+                      </a:pPr>
+                      <a:r>
+                        <a:rPr lang="en-US" sz="1300" dirty="0">
+                          <a:solidFill>
+                            <a:srgbClr val="181C1E"/>
+                          </a:solidFill>
+                          <a:latin typeface="Calibri" pitchFamily="34" charset="0"/>
+                          <a:ea typeface="Calibri" pitchFamily="34" charset="-122"/>
+                          <a:cs typeface="Calibri" pitchFamily="34" charset="-120"/>
+                        </a:rPr>
+                        <a:t>172 searches</a:t>
+                      </a:r>
+                      <a:endParaRPr lang="en-US" sz="1300" dirty="0">
+                        <a:latin typeface="Calibri" charset="0"/>
+                        <a:ea typeface="Calibri" charset="0"/>
+                        <a:cs typeface="Calibri" charset="0"/>
+                      </a:endParaRPr>
+                    </a:p>
+                  </a:txBody>
+                  <a:tcPr marL="91440" marR="91440" marT="45720" marB="45720" anchor="ctr">
+                    <a:lnL w="12700" cap="flat" cmpd="sng" algn="ctr">
+                      <a:solidFill>
+                        <a:srgbClr val="D5DADD"/>
+                      </a:solidFill>
+                      <a:prstDash val="solid"/>
+                      <a:round/>
+                      <a:headEnd type="none" w="med" len="med"/>
+                      <a:tailEnd type="none" w="med" len="med"/>
+                    </a:lnL>
+                    <a:lnR w="12700" cap="flat" cmpd="sng" algn="ctr">
+                      <a:solidFill>
+                        <a:srgbClr val="D5DADD"/>
+                      </a:solidFill>
+                      <a:prstDash val="solid"/>
+                      <a:round/>
+                      <a:headEnd type="none" w="med" len="med"/>
+                      <a:tailEnd type="none" w="med" len="med"/>
+                    </a:lnR>
+                    <a:lnT w="12700" cap="flat" cmpd="sng" algn="ctr">
+                      <a:solidFill>
+                        <a:srgbClr val="D5DADD"/>
+                      </a:solidFill>
+                      <a:prstDash val="solid"/>
+                      <a:round/>
+                      <a:headEnd type="none" w="med" len="med"/>
+                      <a:tailEnd type="none" w="med" len="med"/>
+                    </a:lnT>
+                    <a:lnB w="12700" cap="flat" cmpd="sng" algn="ctr">
+                      <a:solidFill>
+                        <a:srgbClr val="D5DADD"/>
+                      </a:solidFill>
+                      <a:prstDash val="solid"/>
+                      <a:round/>
+                      <a:headEnd type="none" w="med" len="med"/>
+                      <a:tailEnd type="none" w="med" len="med"/>
+                    </a:lnB>
+                  </a:tcPr>
+                </a:tc>
+                <a:tc>
+                  <a:txBody>
+                    <a:bodyPr/>
+                    <a:lstStyle/>
+                    <a:p>
+                      <a:pPr algn="l" indent="0" marL="0">
+                        <a:buNone/>
+                      </a:pPr>
+                      <a:r>
+                        <a:rPr lang="en-US" sz="1300" dirty="0">
+                          <a:solidFill>
+                            <a:srgbClr val="181C1E"/>
+                          </a:solidFill>
+                          <a:latin typeface="Calibri" pitchFamily="34" charset="0"/>
+                          <a:ea typeface="Calibri" pitchFamily="34" charset="-122"/>
+                          <a:cs typeface="Calibri" pitchFamily="34" charset="-120"/>
+                        </a:rPr>
+                        <a:t>$10 / 1,000</a:t>
+                      </a:r>
+                      <a:endParaRPr lang="en-US" sz="1300" dirty="0">
+                        <a:latin typeface="Calibri" charset="0"/>
+                        <a:ea typeface="Calibri" charset="0"/>
+                        <a:cs typeface="Calibri" charset="0"/>
+                      </a:endParaRPr>
+                    </a:p>
+                  </a:txBody>
+                  <a:tcPr marL="91440" marR="91440" marT="45720" marB="45720" anchor="ctr">
+                    <a:lnL w="12700" cap="flat" cmpd="sng" algn="ctr">
+                      <a:solidFill>
+                        <a:srgbClr val="D5DADD"/>
+                      </a:solidFill>
+                      <a:prstDash val="solid"/>
+                      <a:round/>
+                      <a:headEnd type="none" w="med" len="med"/>
+                      <a:tailEnd type="none" w="med" len="med"/>
+                    </a:lnL>
+                    <a:lnR w="12700" cap="flat" cmpd="sng" algn="ctr">
+                      <a:solidFill>
+                        <a:srgbClr val="D5DADD"/>
+                      </a:solidFill>
+                      <a:prstDash val="solid"/>
+                      <a:round/>
+                      <a:headEnd type="none" w="med" len="med"/>
+                      <a:tailEnd type="none" w="med" len="med"/>
+                    </a:lnR>
+                    <a:lnT w="12700" cap="flat" cmpd="sng" algn="ctr">
+                      <a:solidFill>
+                        <a:srgbClr val="D5DADD"/>
+                      </a:solidFill>
+                      <a:prstDash val="solid"/>
+                      <a:round/>
+                      <a:headEnd type="none" w="med" len="med"/>
+                      <a:tailEnd type="none" w="med" len="med"/>
+                    </a:lnT>
+                    <a:lnB w="12700" cap="flat" cmpd="sng" algn="ctr">
+                      <a:solidFill>
+                        <a:srgbClr val="D5DADD"/>
+                      </a:solidFill>
+                      <a:prstDash val="solid"/>
+                      <a:round/>
+                      <a:headEnd type="none" w="med" len="med"/>
+                      <a:tailEnd type="none" w="med" len="med"/>
+                    </a:lnB>
+                  </a:tcPr>
+                </a:tc>
+                <a:tc>
+                  <a:txBody>
+                    <a:bodyPr/>
+                    <a:lstStyle/>
+                    <a:p>
+                      <a:pPr algn="r" indent="0" marL="0">
+                        <a:buNone/>
+                      </a:pPr>
+                      <a:r>
+                        <a:rPr lang="en-US" sz="1300" dirty="0">
+                          <a:solidFill>
+                            <a:srgbClr val="181C1E"/>
+                          </a:solidFill>
+                          <a:latin typeface="Calibri" pitchFamily="34" charset="0"/>
+                          <a:ea typeface="Calibri" pitchFamily="34" charset="-122"/>
+                          <a:cs typeface="Calibri" pitchFamily="34" charset="-120"/>
+                        </a:rPr>
+                        <a:t>1.72</a:t>
+                      </a:r>
+                      <a:endParaRPr lang="en-US" sz="1300" dirty="0">
+                        <a:latin typeface="Calibri" charset="0"/>
+                        <a:ea typeface="Calibri" charset="0"/>
+                        <a:cs typeface="Calibri" charset="0"/>
+                      </a:endParaRPr>
+                    </a:p>
+                  </a:txBody>
+                  <a:tcPr marL="91440" marR="91440" marT="45720" marB="45720" anchor="ctr">
+                    <a:lnL w="12700" cap="flat" cmpd="sng" algn="ctr">
+                      <a:solidFill>
+                        <a:srgbClr val="D5DADD"/>
+                      </a:solidFill>
+                      <a:prstDash val="solid"/>
+                      <a:round/>
+                      <a:headEnd type="none" w="med" len="med"/>
+                      <a:tailEnd type="none" w="med" len="med"/>
+                    </a:lnL>
+                    <a:lnR w="12700" cap="flat" cmpd="sng" algn="ctr">
+                      <a:solidFill>
+                        <a:srgbClr val="D5DADD"/>
+                      </a:solidFill>
+                      <a:prstDash val="solid"/>
+                      <a:round/>
+                      <a:headEnd type="none" w="med" len="med"/>
+                      <a:tailEnd type="none" w="med" len="med"/>
+                    </a:lnR>
+                    <a:lnT w="12700" cap="flat" cmpd="sng" algn="ctr">
+                      <a:solidFill>
+                        <a:srgbClr val="D5DADD"/>
+                      </a:solidFill>
+                      <a:prstDash val="solid"/>
+                      <a:round/>
+                      <a:headEnd type="none" w="med" len="med"/>
+                      <a:tailEnd type="none" w="med" len="med"/>
+                    </a:lnT>
+                    <a:lnB w="12700" cap="flat" cmpd="sng" algn="ctr">
+                      <a:solidFill>
+                        <a:srgbClr val="D5DADD"/>
+                      </a:solidFill>
+                      <a:prstDash val="solid"/>
+                      <a:round/>
+                      <a:headEnd type="none" w="med" len="med"/>
+                      <a:tailEnd type="none" w="med" len="med"/>
+                    </a:lnB>
+                  </a:tcPr>
+                </a:tc>
+                <a:tc>
+                  <a:txBody>
+                    <a:bodyPr/>
+                    <a:lstStyle/>
+                    <a:p>
+                      <a:pPr algn="r" indent="0" marL="0">
+                        <a:buNone/>
+                      </a:pPr>
+                      <a:r>
+                        <a:rPr lang="en-US" sz="1300" dirty="0">
+                          <a:solidFill>
+                            <a:srgbClr val="181C1E"/>
+                          </a:solidFill>
+                          <a:latin typeface="Calibri" pitchFamily="34" charset="0"/>
+                          <a:ea typeface="Calibri" pitchFamily="34" charset="-122"/>
+                          <a:cs typeface="Calibri" pitchFamily="34" charset="-120"/>
+                        </a:rPr>
+                        <a:t>2.20</a:t>
+                      </a:r>
+                      <a:endParaRPr lang="en-US" sz="1300" dirty="0">
+                        <a:latin typeface="Calibri" charset="0"/>
+                        <a:ea typeface="Calibri" charset="0"/>
+                        <a:cs typeface="Calibri" charset="0"/>
+                      </a:endParaRPr>
+                    </a:p>
+                  </a:txBody>
+                  <a:tcPr marL="91440" marR="91440" marT="45720" marB="45720" anchor="ctr">
+                    <a:lnL w="12700" cap="flat" cmpd="sng" algn="ctr">
+                      <a:solidFill>
+                        <a:srgbClr val="D5DADD"/>
+                      </a:solidFill>
+                      <a:prstDash val="solid"/>
+                      <a:round/>
+                      <a:headEnd type="none" w="med" len="med"/>
+                      <a:tailEnd type="none" w="med" len="med"/>
+                    </a:lnL>
+                    <a:lnR w="12700" cap="flat" cmpd="sng" algn="ctr">
+                      <a:solidFill>
+                        <a:srgbClr val="D5DADD"/>
+                      </a:solidFill>
+                      <a:prstDash val="solid"/>
+                      <a:round/>
+                      <a:headEnd type="none" w="med" len="med"/>
+                      <a:tailEnd type="none" w="med" len="med"/>
+                    </a:lnR>
+                    <a:lnT w="12700" cap="flat" cmpd="sng" algn="ctr">
+                      <a:solidFill>
+                        <a:srgbClr val="D5DADD"/>
+                      </a:solidFill>
+                      <a:prstDash val="solid"/>
+                      <a:round/>
+                      <a:headEnd type="none" w="med" len="med"/>
+                      <a:tailEnd type="none" w="med" len="med"/>
+                    </a:lnT>
+                    <a:lnB w="12700" cap="flat" cmpd="sng" algn="ctr">
+                      <a:solidFill>
+                        <a:srgbClr val="D5DADD"/>
+                      </a:solidFill>
+                      <a:prstDash val="solid"/>
+                      <a:round/>
+                      <a:headEnd type="none" w="med" len="med"/>
+                      <a:tailEnd type="none" w="med" len="med"/>
+                    </a:lnB>
+                  </a:tcPr>
+                </a:tc>
+              </a:tr>
+              <a:tr h="411480">
+                <a:tc>
+                  <a:txBody>
+                    <a:bodyPr/>
+                    <a:lstStyle/>
+                    <a:p>
+                      <a:pPr algn="l" indent="0" marL="0">
+                        <a:buNone/>
+                      </a:pPr>
+                      <a:r>
+                        <a:rPr lang="en-US" sz="1300" dirty="0">
+                          <a:solidFill>
+                            <a:srgbClr val="181C1E"/>
+                          </a:solidFill>
+                          <a:latin typeface="Calibri" pitchFamily="34" charset="0"/>
+                          <a:ea typeface="Calibri" pitchFamily="34" charset="-122"/>
+                          <a:cs typeface="Calibri" pitchFamily="34" charset="-120"/>
+                        </a:rPr>
+                        <a:t>Opus: new input</a:t>
+                      </a:r>
+                      <a:endParaRPr lang="en-US" sz="1300" dirty="0">
+                        <a:latin typeface="Calibri" charset="0"/>
+                        <a:ea typeface="Calibri" charset="0"/>
+                        <a:cs typeface="Calibri" charset="0"/>
+                      </a:endParaRPr>
+                    </a:p>
+                  </a:txBody>
+                  <a:tcPr marL="91440" marR="91440" marT="45720" marB="45720" anchor="ctr">
+                    <a:lnL w="12700" cap="flat" cmpd="sng" algn="ctr">
+                      <a:solidFill>
+                        <a:srgbClr val="D5DADD"/>
+                      </a:solidFill>
+                      <a:prstDash val="solid"/>
+                      <a:round/>
+                      <a:headEnd type="none" w="med" len="med"/>
+                      <a:tailEnd type="none" w="med" len="med"/>
+                    </a:lnL>
+                    <a:lnR w="12700" cap="flat" cmpd="sng" algn="ctr">
+                      <a:solidFill>
+                        <a:srgbClr val="D5DADD"/>
+                      </a:solidFill>
+                      <a:prstDash val="solid"/>
+                      <a:round/>
+                      <a:headEnd type="none" w="med" len="med"/>
+                      <a:tailEnd type="none" w="med" len="med"/>
+                    </a:lnR>
+                    <a:lnT w="12700" cap="flat" cmpd="sng" algn="ctr">
+                      <a:solidFill>
+                        <a:srgbClr val="D5DADD"/>
+                      </a:solidFill>
+                      <a:prstDash val="solid"/>
+                      <a:round/>
+                      <a:headEnd type="none" w="med" len="med"/>
+                      <a:tailEnd type="none" w="med" len="med"/>
+                    </a:lnT>
+                    <a:lnB w="12700" cap="flat" cmpd="sng" algn="ctr">
+                      <a:solidFill>
+                        <a:srgbClr val="D5DADD"/>
+                      </a:solidFill>
+                      <a:prstDash val="solid"/>
+                      <a:round/>
+                      <a:headEnd type="none" w="med" len="med"/>
+                      <a:tailEnd type="none" w="med" len="med"/>
+                    </a:lnB>
+                  </a:tcPr>
+                </a:tc>
+                <a:tc>
+                  <a:txBody>
+                    <a:bodyPr/>
+                    <a:lstStyle/>
+                    <a:p>
+                      <a:pPr algn="l" indent="0" marL="0">
+                        <a:buNone/>
+                      </a:pPr>
+                      <a:r>
+                        <a:rPr lang="en-US" sz="1300" dirty="0">
+                          <a:solidFill>
+                            <a:srgbClr val="181C1E"/>
+                          </a:solidFill>
+                          <a:latin typeface="Calibri" pitchFamily="34" charset="0"/>
+                          <a:ea typeface="Calibri" pitchFamily="34" charset="-122"/>
+                          <a:cs typeface="Calibri" pitchFamily="34" charset="-120"/>
+                        </a:rPr>
+                        <a:t>298 tokens</a:t>
+                      </a:r>
+                      <a:endParaRPr lang="en-US" sz="1300" dirty="0">
+                        <a:latin typeface="Calibri" charset="0"/>
+                        <a:ea typeface="Calibri" charset="0"/>
+                        <a:cs typeface="Calibri" charset="0"/>
+                      </a:endParaRPr>
+                    </a:p>
+                  </a:txBody>
+                  <a:tcPr marL="91440" marR="91440" marT="45720" marB="45720" anchor="ctr">
+                    <a:lnL w="12700" cap="flat" cmpd="sng" algn="ctr">
+                      <a:solidFill>
+                        <a:srgbClr val="D5DADD"/>
+                      </a:solidFill>
+                      <a:prstDash val="solid"/>
+                      <a:round/>
+                      <a:headEnd type="none" w="med" len="med"/>
+                      <a:tailEnd type="none" w="med" len="med"/>
+                    </a:lnL>
+                    <a:lnR w="12700" cap="flat" cmpd="sng" algn="ctr">
+                      <a:solidFill>
+                        <a:srgbClr val="D5DADD"/>
+                      </a:solidFill>
+                      <a:prstDash val="solid"/>
+                      <a:round/>
+                      <a:headEnd type="none" w="med" len="med"/>
+                      <a:tailEnd type="none" w="med" len="med"/>
+                    </a:lnR>
+                    <a:lnT w="12700" cap="flat" cmpd="sng" algn="ctr">
+                      <a:solidFill>
+                        <a:srgbClr val="D5DADD"/>
+                      </a:solidFill>
+                      <a:prstDash val="solid"/>
+                      <a:round/>
+                      <a:headEnd type="none" w="med" len="med"/>
+                      <a:tailEnd type="none" w="med" len="med"/>
+                    </a:lnT>
+                    <a:lnB w="12700" cap="flat" cmpd="sng" algn="ctr">
+                      <a:solidFill>
+                        <a:srgbClr val="D5DADD"/>
+                      </a:solidFill>
+                      <a:prstDash val="solid"/>
+                      <a:round/>
+                      <a:headEnd type="none" w="med" len="med"/>
+                      <a:tailEnd type="none" w="med" len="med"/>
+                    </a:lnB>
+                  </a:tcPr>
+                </a:tc>
+                <a:tc>
+                  <a:txBody>
+                    <a:bodyPr/>
+                    <a:lstStyle/>
+                    <a:p>
+                      <a:pPr algn="l" indent="0" marL="0">
+                        <a:buNone/>
+                      </a:pPr>
+                      <a:r>
+                        <a:rPr lang="en-US" sz="1300" dirty="0">
+                          <a:solidFill>
+                            <a:srgbClr val="181C1E"/>
+                          </a:solidFill>
+                          <a:latin typeface="Calibri" pitchFamily="34" charset="0"/>
+                          <a:ea typeface="Calibri" pitchFamily="34" charset="-122"/>
+                          <a:cs typeface="Calibri" pitchFamily="34" charset="-120"/>
+                        </a:rPr>
+                        <a:t>$4 / M</a:t>
+                      </a:r>
+                      <a:endParaRPr lang="en-US" sz="1300" dirty="0">
+                        <a:latin typeface="Calibri" charset="0"/>
+                        <a:ea typeface="Calibri" charset="0"/>
+                        <a:cs typeface="Calibri" charset="0"/>
+                      </a:endParaRPr>
+                    </a:p>
+                  </a:txBody>
+                  <a:tcPr marL="91440" marR="91440" marT="45720" marB="45720" anchor="ctr">
+                    <a:lnL w="12700" cap="flat" cmpd="sng" algn="ctr">
+                      <a:solidFill>
+                        <a:srgbClr val="D5DADD"/>
+                      </a:solidFill>
+                      <a:prstDash val="solid"/>
+                      <a:round/>
+                      <a:headEnd type="none" w="med" len="med"/>
+                      <a:tailEnd type="none" w="med" len="med"/>
+                    </a:lnL>
+                    <a:lnR w="12700" cap="flat" cmpd="sng" algn="ctr">
+                      <a:solidFill>
+                        <a:srgbClr val="D5DADD"/>
+                      </a:solidFill>
+                      <a:prstDash val="solid"/>
+                      <a:round/>
+                      <a:headEnd type="none" w="med" len="med"/>
+                      <a:tailEnd type="none" w="med" len="med"/>
+                    </a:lnR>
+                    <a:lnT w="12700" cap="flat" cmpd="sng" algn="ctr">
+                      <a:solidFill>
+                        <a:srgbClr val="D5DADD"/>
+                      </a:solidFill>
+                      <a:prstDash val="solid"/>
+                      <a:round/>
+                      <a:headEnd type="none" w="med" len="med"/>
+                      <a:tailEnd type="none" w="med" len="med"/>
+                    </a:lnT>
+                    <a:lnB w="12700" cap="flat" cmpd="sng" algn="ctr">
+                      <a:solidFill>
+                        <a:srgbClr val="D5DADD"/>
+                      </a:solidFill>
+                      <a:prstDash val="solid"/>
+                      <a:round/>
+                      <a:headEnd type="none" w="med" len="med"/>
+                      <a:tailEnd type="none" w="med" len="med"/>
+                    </a:lnB>
+                  </a:tcPr>
+                </a:tc>
+                <a:tc>
+                  <a:txBody>
+                    <a:bodyPr/>
+                    <a:lstStyle/>
+                    <a:p>
+                      <a:pPr algn="r" indent="0" marL="0">
+                        <a:buNone/>
+                      </a:pPr>
+                      <a:r>
+                        <a:rPr lang="en-US" sz="1300" dirty="0">
+                          <a:solidFill>
+                            <a:srgbClr val="181C1E"/>
+                          </a:solidFill>
+                          <a:latin typeface="Calibri" pitchFamily="34" charset="0"/>
+                          <a:ea typeface="Calibri" pitchFamily="34" charset="-122"/>
+                          <a:cs typeface="Calibri" pitchFamily="34" charset="-120"/>
+                        </a:rPr>
+                        <a:t>0.00</a:t>
+                      </a:r>
+                      <a:endParaRPr lang="en-US" sz="1300" dirty="0">
+                        <a:latin typeface="Calibri" charset="0"/>
+                        <a:ea typeface="Calibri" charset="0"/>
+                        <a:cs typeface="Calibri" charset="0"/>
+                      </a:endParaRPr>
+                    </a:p>
+                  </a:txBody>
+                  <a:tcPr marL="91440" marR="91440" marT="45720" marB="45720" anchor="ctr">
+                    <a:lnL w="12700" cap="flat" cmpd="sng" algn="ctr">
+                      <a:solidFill>
+                        <a:srgbClr val="D5DADD"/>
+                      </a:solidFill>
+                      <a:prstDash val="solid"/>
+                      <a:round/>
+                      <a:headEnd type="none" w="med" len="med"/>
+                      <a:tailEnd type="none" w="med" len="med"/>
+                    </a:lnL>
+                    <a:lnR w="12700" cap="flat" cmpd="sng" algn="ctr">
+                      <a:solidFill>
+                        <a:srgbClr val="D5DADD"/>
+                      </a:solidFill>
+                      <a:prstDash val="solid"/>
+                      <a:round/>
+                      <a:headEnd type="none" w="med" len="med"/>
+                      <a:tailEnd type="none" w="med" len="med"/>
+                    </a:lnR>
+                    <a:lnT w="12700" cap="flat" cmpd="sng" algn="ctr">
+                      <a:solidFill>
+                        <a:srgbClr val="D5DADD"/>
+                      </a:solidFill>
+                      <a:prstDash val="solid"/>
+                      <a:round/>
+                      <a:headEnd type="none" w="med" len="med"/>
+                      <a:tailEnd type="none" w="med" len="med"/>
+                    </a:lnT>
+                    <a:lnB w="12700" cap="flat" cmpd="sng" algn="ctr">
+                      <a:solidFill>
+                        <a:srgbClr val="D5DADD"/>
+                      </a:solidFill>
+                      <a:prstDash val="solid"/>
+                      <a:round/>
+                      <a:headEnd type="none" w="med" len="med"/>
+                      <a:tailEnd type="none" w="med" len="med"/>
+                    </a:lnB>
+                  </a:tcPr>
+                </a:tc>
+                <a:tc>
+                  <a:txBody>
+                    <a:bodyPr/>
+                    <a:lstStyle/>
+                    <a:p>
+                      <a:pPr algn="r" indent="0" marL="0">
+                        <a:buNone/>
+                      </a:pPr>
+                      <a:r>
+                        <a:rPr lang="en-US" sz="1300" dirty="0">
+                          <a:solidFill>
+                            <a:srgbClr val="181C1E"/>
+                          </a:solidFill>
+                          <a:latin typeface="Calibri" pitchFamily="34" charset="0"/>
+                          <a:ea typeface="Calibri" pitchFamily="34" charset="-122"/>
+                          <a:cs typeface="Calibri" pitchFamily="34" charset="-120"/>
+                        </a:rPr>
+                        <a:t>0.00</a:t>
+                      </a:r>
+                      <a:endParaRPr lang="en-US" sz="1300" dirty="0">
+                        <a:latin typeface="Calibri" charset="0"/>
+                        <a:ea typeface="Calibri" charset="0"/>
+                        <a:cs typeface="Calibri" charset="0"/>
+                      </a:endParaRPr>
+                    </a:p>
+                  </a:txBody>
+                  <a:tcPr marL="91440" marR="91440" marT="45720" marB="45720" anchor="ctr">
+                    <a:lnL w="12700" cap="flat" cmpd="sng" algn="ctr">
+                      <a:solidFill>
+                        <a:srgbClr val="D5DADD"/>
+                      </a:solidFill>
+                      <a:prstDash val="solid"/>
+                      <a:round/>
+                      <a:headEnd type="none" w="med" len="med"/>
+                      <a:tailEnd type="none" w="med" len="med"/>
+                    </a:lnL>
+                    <a:lnR w="12700" cap="flat" cmpd="sng" algn="ctr">
+                      <a:solidFill>
+                        <a:srgbClr val="D5DADD"/>
+                      </a:solidFill>
+                      <a:prstDash val="solid"/>
+                      <a:round/>
+                      <a:headEnd type="none" w="med" len="med"/>
+                      <a:tailEnd type="none" w="med" len="med"/>
+                    </a:lnR>
+                    <a:lnT w="12700" cap="flat" cmpd="sng" algn="ctr">
+                      <a:solidFill>
+                        <a:srgbClr val="D5DADD"/>
+                      </a:solidFill>
+                      <a:prstDash val="solid"/>
+                      <a:round/>
+                      <a:headEnd type="none" w="med" len="med"/>
+                      <a:tailEnd type="none" w="med" len="med"/>
+                    </a:lnT>
+                    <a:lnB w="12700" cap="flat" cmpd="sng" algn="ctr">
+                      <a:solidFill>
+                        <a:srgbClr val="D5DADD"/>
+                      </a:solidFill>
+                      <a:prstDash val="solid"/>
+                      <a:round/>
+                      <a:headEnd type="none" w="med" len="med"/>
+                      <a:tailEnd type="none" w="med" len="med"/>
+                    </a:lnB>
+                  </a:tcPr>
+                </a:tc>
+              </a:tr>
+              <a:tr h="411480">
+                <a:tc>
+                  <a:txBody>
+                    <a:bodyPr/>
+                    <a:lstStyle/>
+                    <a:p>
+                      <a:pPr algn="l" indent="0" marL="0">
+                        <a:buNone/>
+                      </a:pPr>
+                      <a:r>
+                        <a:rPr lang="en-US" sz="1300" dirty="0">
+                          <a:solidFill>
+                            <a:srgbClr val="181C1E"/>
+                          </a:solidFill>
+                          <a:latin typeface="Calibri" pitchFamily="34" charset="0"/>
+                          <a:ea typeface="Calibri" pitchFamily="34" charset="-122"/>
+                          <a:cs typeface="Calibri" pitchFamily="34" charset="-120"/>
+                        </a:rPr>
+                        <a:t>Opus: cache reads</a:t>
+                      </a:r>
+                      <a:endParaRPr lang="en-US" sz="1300" dirty="0">
+                        <a:latin typeface="Calibri" charset="0"/>
+                        <a:ea typeface="Calibri" charset="0"/>
+                        <a:cs typeface="Calibri" charset="0"/>
+                      </a:endParaRPr>
+                    </a:p>
+                  </a:txBody>
+                  <a:tcPr marL="91440" marR="91440" marT="45720" marB="45720" anchor="ctr">
+                    <a:lnL w="12700" cap="flat" cmpd="sng" algn="ctr">
+                      <a:solidFill>
+                        <a:srgbClr val="D5DADD"/>
+                      </a:solidFill>
+                      <a:prstDash val="solid"/>
+                      <a:round/>
+                      <a:headEnd type="none" w="med" len="med"/>
+                      <a:tailEnd type="none" w="med" len="med"/>
+                    </a:lnL>
+                    <a:lnR w="12700" cap="flat" cmpd="sng" algn="ctr">
+                      <a:solidFill>
+                        <a:srgbClr val="D5DADD"/>
+                      </a:solidFill>
+                      <a:prstDash val="solid"/>
+                      <a:round/>
+                      <a:headEnd type="none" w="med" len="med"/>
+                      <a:tailEnd type="none" w="med" len="med"/>
+                    </a:lnR>
+                    <a:lnT w="12700" cap="flat" cmpd="sng" algn="ctr">
+                      <a:solidFill>
+                        <a:srgbClr val="D5DADD"/>
+                      </a:solidFill>
+                      <a:prstDash val="solid"/>
+                      <a:round/>
+                      <a:headEnd type="none" w="med" len="med"/>
+                      <a:tailEnd type="none" w="med" len="med"/>
+                    </a:lnT>
+                    <a:lnB w="12700" cap="flat" cmpd="sng" algn="ctr">
+                      <a:solidFill>
+                        <a:srgbClr val="D5DADD"/>
+                      </a:solidFill>
+                      <a:prstDash val="solid"/>
+                      <a:round/>
+                      <a:headEnd type="none" w="med" len="med"/>
+                      <a:tailEnd type="none" w="med" len="med"/>
+                    </a:lnB>
+                  </a:tcPr>
+                </a:tc>
+                <a:tc>
+                  <a:txBody>
+                    <a:bodyPr/>
+                    <a:lstStyle/>
+                    <a:p>
+                      <a:pPr algn="l" indent="0" marL="0">
+                        <a:buNone/>
+                      </a:pPr>
+                      <a:r>
+                        <a:rPr lang="en-US" sz="1300" dirty="0">
+                          <a:solidFill>
+                            <a:srgbClr val="181C1E"/>
+                          </a:solidFill>
+                          <a:latin typeface="Calibri" pitchFamily="34" charset="0"/>
+                          <a:ea typeface="Calibri" pitchFamily="34" charset="-122"/>
+                          <a:cs typeface="Calibri" pitchFamily="34" charset="-120"/>
+                        </a:rPr>
+                        <a:t>3,551,008 tokens</a:t>
+                      </a:r>
+                      <a:endParaRPr lang="en-US" sz="1300" dirty="0">
+                        <a:latin typeface="Calibri" charset="0"/>
+                        <a:ea typeface="Calibri" charset="0"/>
+                        <a:cs typeface="Calibri" charset="0"/>
+                      </a:endParaRPr>
+                    </a:p>
+                  </a:txBody>
+                  <a:tcPr marL="91440" marR="91440" marT="45720" marB="45720" anchor="ctr">
+                    <a:lnL w="12700" cap="flat" cmpd="sng" algn="ctr">
+                      <a:solidFill>
+                        <a:srgbClr val="D5DADD"/>
+                      </a:solidFill>
+                      <a:prstDash val="solid"/>
+                      <a:round/>
+                      <a:headEnd type="none" w="med" len="med"/>
+                      <a:tailEnd type="none" w="med" len="med"/>
+                    </a:lnL>
+                    <a:lnR w="12700" cap="flat" cmpd="sng" algn="ctr">
+                      <a:solidFill>
+                        <a:srgbClr val="D5DADD"/>
+                      </a:solidFill>
+                      <a:prstDash val="solid"/>
+                      <a:round/>
+                      <a:headEnd type="none" w="med" len="med"/>
+                      <a:tailEnd type="none" w="med" len="med"/>
+                    </a:lnR>
+                    <a:lnT w="12700" cap="flat" cmpd="sng" algn="ctr">
+                      <a:solidFill>
+                        <a:srgbClr val="D5DADD"/>
+                      </a:solidFill>
+                      <a:prstDash val="solid"/>
+                      <a:round/>
+                      <a:headEnd type="none" w="med" len="med"/>
+                      <a:tailEnd type="none" w="med" len="med"/>
+                    </a:lnT>
+                    <a:lnB w="12700" cap="flat" cmpd="sng" algn="ctr">
+                      <a:solidFill>
+                        <a:srgbClr val="D5DADD"/>
+                      </a:solidFill>
+                      <a:prstDash val="solid"/>
+                      <a:round/>
+                      <a:headEnd type="none" w="med" len="med"/>
+                      <a:tailEnd type="none" w="med" len="med"/>
+                    </a:lnB>
+                  </a:tcPr>
+                </a:tc>
+                <a:tc>
+                  <a:txBody>
+                    <a:bodyPr/>
+                    <a:lstStyle/>
+                    <a:p>
+                      <a:pPr algn="l" indent="0" marL="0">
+                        <a:buNone/>
+                      </a:pPr>
+                      <a:r>
+                        <a:rPr lang="en-US" sz="1300" dirty="0">
+                          <a:solidFill>
+                            <a:srgbClr val="181C1E"/>
+                          </a:solidFill>
+                          <a:latin typeface="Calibri" pitchFamily="34" charset="0"/>
+                          <a:ea typeface="Calibri" pitchFamily="34" charset="-122"/>
+                          <a:cs typeface="Calibri" pitchFamily="34" charset="-120"/>
+                        </a:rPr>
+                        <a:t>$0.40 / M</a:t>
+                      </a:r>
+                      <a:endParaRPr lang="en-US" sz="1300" dirty="0">
+                        <a:latin typeface="Calibri" charset="0"/>
+                        <a:ea typeface="Calibri" charset="0"/>
+                        <a:cs typeface="Calibri" charset="0"/>
+                      </a:endParaRPr>
+                    </a:p>
+                  </a:txBody>
+                  <a:tcPr marL="91440" marR="91440" marT="45720" marB="45720" anchor="ctr">
+                    <a:lnL w="12700" cap="flat" cmpd="sng" algn="ctr">
+                      <a:solidFill>
+                        <a:srgbClr val="D5DADD"/>
+                      </a:solidFill>
+                      <a:prstDash val="solid"/>
+                      <a:round/>
+                      <a:headEnd type="none" w="med" len="med"/>
+                      <a:tailEnd type="none" w="med" len="med"/>
+                    </a:lnL>
+                    <a:lnR w="12700" cap="flat" cmpd="sng" algn="ctr">
+                      <a:solidFill>
+                        <a:srgbClr val="D5DADD"/>
+                      </a:solidFill>
+                      <a:prstDash val="solid"/>
+                      <a:round/>
+                      <a:headEnd type="none" w="med" len="med"/>
+                      <a:tailEnd type="none" w="med" len="med"/>
+                    </a:lnR>
+                    <a:lnT w="12700" cap="flat" cmpd="sng" algn="ctr">
+                      <a:solidFill>
+                        <a:srgbClr val="D5DADD"/>
+                      </a:solidFill>
+                      <a:prstDash val="solid"/>
+                      <a:round/>
+                      <a:headEnd type="none" w="med" len="med"/>
+                      <a:tailEnd type="none" w="med" len="med"/>
+                    </a:lnT>
+                    <a:lnB w="12700" cap="flat" cmpd="sng" algn="ctr">
+                      <a:solidFill>
+                        <a:srgbClr val="D5DADD"/>
+                      </a:solidFill>
+                      <a:prstDash val="solid"/>
+                      <a:round/>
+                      <a:headEnd type="none" w="med" len="med"/>
+                      <a:tailEnd type="none" w="med" len="med"/>
+                    </a:lnB>
+                  </a:tcPr>
+                </a:tc>
+                <a:tc>
+                  <a:txBody>
+                    <a:bodyPr/>
+                    <a:lstStyle/>
+                    <a:p>
+                      <a:pPr algn="r" indent="0" marL="0">
+                        <a:buNone/>
+                      </a:pPr>
+                      <a:r>
+                        <a:rPr lang="en-US" sz="1300" dirty="0">
+                          <a:solidFill>
+                            <a:srgbClr val="181C1E"/>
+                          </a:solidFill>
+                          <a:latin typeface="Calibri" pitchFamily="34" charset="0"/>
+                          <a:ea typeface="Calibri" pitchFamily="34" charset="-122"/>
+                          <a:cs typeface="Calibri" pitchFamily="34" charset="-120"/>
+                        </a:rPr>
+                        <a:t>1.42</a:t>
+                      </a:r>
+                      <a:endParaRPr lang="en-US" sz="1300" dirty="0">
+                        <a:latin typeface="Calibri" charset="0"/>
+                        <a:ea typeface="Calibri" charset="0"/>
+                        <a:cs typeface="Calibri" charset="0"/>
+                      </a:endParaRPr>
+                    </a:p>
+                  </a:txBody>
+                  <a:tcPr marL="91440" marR="91440" marT="45720" marB="45720" anchor="ctr">
+                    <a:lnL w="12700" cap="flat" cmpd="sng" algn="ctr">
+                      <a:solidFill>
+                        <a:srgbClr val="D5DADD"/>
+                      </a:solidFill>
+                      <a:prstDash val="solid"/>
+                      <a:round/>
+                      <a:headEnd type="none" w="med" len="med"/>
+                      <a:tailEnd type="none" w="med" len="med"/>
+                    </a:lnL>
+                    <a:lnR w="12700" cap="flat" cmpd="sng" algn="ctr">
+                      <a:solidFill>
+                        <a:srgbClr val="D5DADD"/>
+                      </a:solidFill>
+                      <a:prstDash val="solid"/>
+                      <a:round/>
+                      <a:headEnd type="none" w="med" len="med"/>
+                      <a:tailEnd type="none" w="med" len="med"/>
+                    </a:lnR>
+                    <a:lnT w="12700" cap="flat" cmpd="sng" algn="ctr">
+                      <a:solidFill>
+                        <a:srgbClr val="D5DADD"/>
+                      </a:solidFill>
+                      <a:prstDash val="solid"/>
+                      <a:round/>
+                      <a:headEnd type="none" w="med" len="med"/>
+                      <a:tailEnd type="none" w="med" len="med"/>
+                    </a:lnT>
+                    <a:lnB w="12700" cap="flat" cmpd="sng" algn="ctr">
+                      <a:solidFill>
+                        <a:srgbClr val="D5DADD"/>
+                      </a:solidFill>
+                      <a:prstDash val="solid"/>
+                      <a:round/>
+                      <a:headEnd type="none" w="med" len="med"/>
+                      <a:tailEnd type="none" w="med" len="med"/>
+                    </a:lnB>
+                  </a:tcPr>
+                </a:tc>
+                <a:tc>
+                  <a:txBody>
+                    <a:bodyPr/>
+                    <a:lstStyle/>
+                    <a:p>
+                      <a:pPr algn="r" indent="0" marL="0">
+                        <a:buNone/>
+                      </a:pPr>
+                      <a:r>
+                        <a:rPr lang="en-US" sz="1300" dirty="0">
+                          <a:solidFill>
+                            <a:srgbClr val="181C1E"/>
+                          </a:solidFill>
+                          <a:latin typeface="Calibri" pitchFamily="34" charset="0"/>
+                          <a:ea typeface="Calibri" pitchFamily="34" charset="-122"/>
+                          <a:cs typeface="Calibri" pitchFamily="34" charset="-120"/>
+                        </a:rPr>
+                        <a:t>1.81</a:t>
+                      </a:r>
+                      <a:endParaRPr lang="en-US" sz="1300" dirty="0">
+                        <a:latin typeface="Calibri" charset="0"/>
+                        <a:ea typeface="Calibri" charset="0"/>
+                        <a:cs typeface="Calibri" charset="0"/>
+                      </a:endParaRPr>
+                    </a:p>
+                  </a:txBody>
+                  <a:tcPr marL="91440" marR="91440" marT="45720" marB="45720" anchor="ctr">
+                    <a:lnL w="12700" cap="flat" cmpd="sng" algn="ctr">
+                      <a:solidFill>
+                        <a:srgbClr val="D5DADD"/>
+                      </a:solidFill>
+                      <a:prstDash val="solid"/>
+                      <a:round/>
+                      <a:headEnd type="none" w="med" len="med"/>
+                      <a:tailEnd type="none" w="med" len="med"/>
+                    </a:lnL>
+                    <a:lnR w="12700" cap="flat" cmpd="sng" algn="ctr">
+                      <a:solidFill>
+                        <a:srgbClr val="D5DADD"/>
+                      </a:solidFill>
+                      <a:prstDash val="solid"/>
+                      <a:round/>
+                      <a:headEnd type="none" w="med" len="med"/>
+                      <a:tailEnd type="none" w="med" len="med"/>
+                    </a:lnR>
+                    <a:lnT w="12700" cap="flat" cmpd="sng" algn="ctr">
+                      <a:solidFill>
+                        <a:srgbClr val="D5DADD"/>
+                      </a:solidFill>
+                      <a:prstDash val="solid"/>
+                      <a:round/>
+                      <a:headEnd type="none" w="med" len="med"/>
+                      <a:tailEnd type="none" w="med" len="med"/>
+                    </a:lnT>
+                    <a:lnB w="12700" cap="flat" cmpd="sng" algn="ctr">
+                      <a:solidFill>
+                        <a:srgbClr val="D5DADD"/>
+                      </a:solidFill>
+                      <a:prstDash val="solid"/>
+                      <a:round/>
+                      <a:headEnd type="none" w="med" len="med"/>
+                      <a:tailEnd type="none" w="med" len="med"/>
+                    </a:lnB>
+                  </a:tcPr>
+                </a:tc>
+              </a:tr>
+              <a:tr h="411480">
+                <a:tc>
+                  <a:txBody>
+                    <a:bodyPr/>
+                    <a:lstStyle/>
+                    <a:p>
+                      <a:pPr algn="l" indent="0" marL="0">
+                        <a:buNone/>
+                      </a:pPr>
+                      <a:r>
+                        <a:rPr lang="en-US" sz="1300" dirty="0">
+                          <a:solidFill>
+                            <a:srgbClr val="181C1E"/>
+                          </a:solidFill>
+                          <a:latin typeface="Calibri" pitchFamily="34" charset="0"/>
+                          <a:ea typeface="Calibri" pitchFamily="34" charset="-122"/>
+                          <a:cs typeface="Calibri" pitchFamily="34" charset="-120"/>
+                        </a:rPr>
+                        <a:t>Opus: cache writes</a:t>
+                      </a:r>
+                      <a:endParaRPr lang="en-US" sz="1300" dirty="0">
+                        <a:latin typeface="Calibri" charset="0"/>
+                        <a:ea typeface="Calibri" charset="0"/>
+                        <a:cs typeface="Calibri" charset="0"/>
+                      </a:endParaRPr>
+                    </a:p>
+                  </a:txBody>
+                  <a:tcPr marL="91440" marR="91440" marT="45720" marB="45720" anchor="ctr">
+                    <a:lnL w="12700" cap="flat" cmpd="sng" algn="ctr">
+                      <a:solidFill>
+                        <a:srgbClr val="D5DADD"/>
+                      </a:solidFill>
+                      <a:prstDash val="solid"/>
+                      <a:round/>
+                      <a:headEnd type="none" w="med" len="med"/>
+                      <a:tailEnd type="none" w="med" len="med"/>
+                    </a:lnL>
+                    <a:lnR w="12700" cap="flat" cmpd="sng" algn="ctr">
+                      <a:solidFill>
+                        <a:srgbClr val="D5DADD"/>
+                      </a:solidFill>
+                      <a:prstDash val="solid"/>
+                      <a:round/>
+                      <a:headEnd type="none" w="med" len="med"/>
+                      <a:tailEnd type="none" w="med" len="med"/>
+                    </a:lnR>
+                    <a:lnT w="12700" cap="flat" cmpd="sng" algn="ctr">
+                      <a:solidFill>
+                        <a:srgbClr val="D5DADD"/>
+                      </a:solidFill>
+                      <a:prstDash val="solid"/>
+                      <a:round/>
+                      <a:headEnd type="none" w="med" len="med"/>
+                      <a:tailEnd type="none" w="med" len="med"/>
+                    </a:lnT>
+                    <a:lnB w="12700" cap="flat" cmpd="sng" algn="ctr">
+                      <a:solidFill>
+                        <a:srgbClr val="D5DADD"/>
+                      </a:solidFill>
+                      <a:prstDash val="solid"/>
+                      <a:round/>
+                      <a:headEnd type="none" w="med" len="med"/>
+                      <a:tailEnd type="none" w="med" len="med"/>
+                    </a:lnB>
+                  </a:tcPr>
+                </a:tc>
+                <a:tc>
+                  <a:txBody>
+                    <a:bodyPr/>
+                    <a:lstStyle/>
+                    <a:p>
+                      <a:pPr algn="l" indent="0" marL="0">
+                        <a:buNone/>
+                      </a:pPr>
+                      <a:r>
+                        <a:rPr lang="en-US" sz="1300" dirty="0">
+                          <a:solidFill>
+                            <a:srgbClr val="181C1E"/>
+                          </a:solidFill>
+                          <a:latin typeface="Calibri" pitchFamily="34" charset="0"/>
+                          <a:ea typeface="Calibri" pitchFamily="34" charset="-122"/>
+                          <a:cs typeface="Calibri" pitchFamily="34" charset="-120"/>
+                        </a:rPr>
+                        <a:t>540,300 tokens</a:t>
+                      </a:r>
+                      <a:endParaRPr lang="en-US" sz="1300" dirty="0">
+                        <a:latin typeface="Calibri" charset="0"/>
+                        <a:ea typeface="Calibri" charset="0"/>
+                        <a:cs typeface="Calibri" charset="0"/>
+                      </a:endParaRPr>
+                    </a:p>
+                  </a:txBody>
+                  <a:tcPr marL="91440" marR="91440" marT="45720" marB="45720" anchor="ctr">
+                    <a:lnL w="12700" cap="flat" cmpd="sng" algn="ctr">
+                      <a:solidFill>
+                        <a:srgbClr val="D5DADD"/>
+                      </a:solidFill>
+                      <a:prstDash val="solid"/>
+                      <a:round/>
+                      <a:headEnd type="none" w="med" len="med"/>
+                      <a:tailEnd type="none" w="med" len="med"/>
+                    </a:lnL>
+                    <a:lnR w="12700" cap="flat" cmpd="sng" algn="ctr">
+                      <a:solidFill>
+                        <a:srgbClr val="D5DADD"/>
+                      </a:solidFill>
+                      <a:prstDash val="solid"/>
+                      <a:round/>
+                      <a:headEnd type="none" w="med" len="med"/>
+                      <a:tailEnd type="none" w="med" len="med"/>
+                    </a:lnR>
+                    <a:lnT w="12700" cap="flat" cmpd="sng" algn="ctr">
+                      <a:solidFill>
+                        <a:srgbClr val="D5DADD"/>
+                      </a:solidFill>
+                      <a:prstDash val="solid"/>
+                      <a:round/>
+                      <a:headEnd type="none" w="med" len="med"/>
+                      <a:tailEnd type="none" w="med" len="med"/>
+                    </a:lnT>
+                    <a:lnB w="12700" cap="flat" cmpd="sng" algn="ctr">
+                      <a:solidFill>
+                        <a:srgbClr val="D5DADD"/>
+                      </a:solidFill>
+                      <a:prstDash val="solid"/>
+                      <a:round/>
+                      <a:headEnd type="none" w="med" len="med"/>
+                      <a:tailEnd type="none" w="med" len="med"/>
+                    </a:lnB>
+                  </a:tcPr>
+                </a:tc>
+                <a:tc>
+                  <a:txBody>
+                    <a:bodyPr/>
+                    <a:lstStyle/>
+                    <a:p>
+                      <a:pPr algn="l" indent="0" marL="0">
+                        <a:buNone/>
+                      </a:pPr>
+                      <a:r>
+                        <a:rPr lang="en-US" sz="1300" dirty="0">
+                          <a:solidFill>
+                            <a:srgbClr val="181C1E"/>
+                          </a:solidFill>
+                          <a:latin typeface="Calibri" pitchFamily="34" charset="0"/>
+                          <a:ea typeface="Calibri" pitchFamily="34" charset="-122"/>
+                          <a:cs typeface="Calibri" pitchFamily="34" charset="-120"/>
+                        </a:rPr>
+                        <a:t>$5 / M</a:t>
+                      </a:r>
+                      <a:endParaRPr lang="en-US" sz="1300" dirty="0">
+                        <a:latin typeface="Calibri" charset="0"/>
+                        <a:ea typeface="Calibri" charset="0"/>
+                        <a:cs typeface="Calibri" charset="0"/>
+                      </a:endParaRPr>
+                    </a:p>
+                  </a:txBody>
+                  <a:tcPr marL="91440" marR="91440" marT="45720" marB="45720" anchor="ctr">
+                    <a:lnL w="12700" cap="flat" cmpd="sng" algn="ctr">
+                      <a:solidFill>
+                        <a:srgbClr val="D5DADD"/>
+                      </a:solidFill>
+                      <a:prstDash val="solid"/>
+                      <a:round/>
+                      <a:headEnd type="none" w="med" len="med"/>
+                      <a:tailEnd type="none" w="med" len="med"/>
+                    </a:lnL>
+                    <a:lnR w="12700" cap="flat" cmpd="sng" algn="ctr">
+                      <a:solidFill>
+                        <a:srgbClr val="D5DADD"/>
+                      </a:solidFill>
+                      <a:prstDash val="solid"/>
+                      <a:round/>
+                      <a:headEnd type="none" w="med" len="med"/>
+                      <a:tailEnd type="none" w="med" len="med"/>
+                    </a:lnR>
+                    <a:lnT w="12700" cap="flat" cmpd="sng" algn="ctr">
+                      <a:solidFill>
+                        <a:srgbClr val="D5DADD"/>
+                      </a:solidFill>
+                      <a:prstDash val="solid"/>
+                      <a:round/>
+                      <a:headEnd type="none" w="med" len="med"/>
+                      <a:tailEnd type="none" w="med" len="med"/>
+                    </a:lnT>
+                    <a:lnB w="12700" cap="flat" cmpd="sng" algn="ctr">
+                      <a:solidFill>
+                        <a:srgbClr val="D5DADD"/>
+                      </a:solidFill>
+                      <a:prstDash val="solid"/>
+                      <a:round/>
+                      <a:headEnd type="none" w="med" len="med"/>
+                      <a:tailEnd type="none" w="med" len="med"/>
+                    </a:lnB>
+                  </a:tcPr>
+                </a:tc>
+                <a:tc>
+                  <a:txBody>
+                    <a:bodyPr/>
+                    <a:lstStyle/>
+                    <a:p>
+                      <a:pPr algn="r" indent="0" marL="0">
+                        <a:buNone/>
+                      </a:pPr>
+                      <a:r>
+                        <a:rPr lang="en-US" sz="1300" dirty="0">
+                          <a:solidFill>
+                            <a:srgbClr val="181C1E"/>
+                          </a:solidFill>
+                          <a:latin typeface="Calibri" pitchFamily="34" charset="0"/>
+                          <a:ea typeface="Calibri" pitchFamily="34" charset="-122"/>
+                          <a:cs typeface="Calibri" pitchFamily="34" charset="-120"/>
+                        </a:rPr>
+                        <a:t>2.70</a:t>
+                      </a:r>
+                      <a:endParaRPr lang="en-US" sz="1300" dirty="0">
+                        <a:latin typeface="Calibri" charset="0"/>
+                        <a:ea typeface="Calibri" charset="0"/>
+                        <a:cs typeface="Calibri" charset="0"/>
+                      </a:endParaRPr>
+                    </a:p>
+                  </a:txBody>
+                  <a:tcPr marL="91440" marR="91440" marT="45720" marB="45720" anchor="ctr">
+                    <a:lnL w="12700" cap="flat" cmpd="sng" algn="ctr">
+                      <a:solidFill>
+                        <a:srgbClr val="D5DADD"/>
+                      </a:solidFill>
+                      <a:prstDash val="solid"/>
+                      <a:round/>
+                      <a:headEnd type="none" w="med" len="med"/>
+                      <a:tailEnd type="none" w="med" len="med"/>
+                    </a:lnL>
+                    <a:lnR w="12700" cap="flat" cmpd="sng" algn="ctr">
+                      <a:solidFill>
+                        <a:srgbClr val="D5DADD"/>
+                      </a:solidFill>
+                      <a:prstDash val="solid"/>
+                      <a:round/>
+                      <a:headEnd type="none" w="med" len="med"/>
+                      <a:tailEnd type="none" w="med" len="med"/>
+                    </a:lnR>
+                    <a:lnT w="12700" cap="flat" cmpd="sng" algn="ctr">
+                      <a:solidFill>
+                        <a:srgbClr val="D5DADD"/>
+                      </a:solidFill>
+                      <a:prstDash val="solid"/>
+                      <a:round/>
+                      <a:headEnd type="none" w="med" len="med"/>
+                      <a:tailEnd type="none" w="med" len="med"/>
+                    </a:lnT>
+                    <a:lnB w="12700" cap="flat" cmpd="sng" algn="ctr">
+                      <a:solidFill>
+                        <a:srgbClr val="D5DADD"/>
+                      </a:solidFill>
+                      <a:prstDash val="solid"/>
+                      <a:round/>
+                      <a:headEnd type="none" w="med" len="med"/>
+                      <a:tailEnd type="none" w="med" len="med"/>
+                    </a:lnB>
+                  </a:tcPr>
+                </a:tc>
+                <a:tc>
+                  <a:txBody>
+                    <a:bodyPr/>
+                    <a:lstStyle/>
+                    <a:p>
+                      <a:pPr algn="r" indent="0" marL="0">
+                        <a:buNone/>
+                      </a:pPr>
+                      <a:r>
+                        <a:rPr lang="en-US" sz="1300" dirty="0">
+                          <a:solidFill>
+                            <a:srgbClr val="181C1E"/>
+                          </a:solidFill>
+                          <a:latin typeface="Calibri" pitchFamily="34" charset="0"/>
+                          <a:ea typeface="Calibri" pitchFamily="34" charset="-122"/>
+                          <a:cs typeface="Calibri" pitchFamily="34" charset="-120"/>
+                        </a:rPr>
+                        <a:t>3.45</a:t>
+                      </a:r>
+                      <a:endParaRPr lang="en-US" sz="1300" dirty="0">
+                        <a:latin typeface="Calibri" charset="0"/>
+                        <a:ea typeface="Calibri" charset="0"/>
+                        <a:cs typeface="Calibri" charset="0"/>
+                      </a:endParaRPr>
+                    </a:p>
+                  </a:txBody>
+                  <a:tcPr marL="91440" marR="91440" marT="45720" marB="45720" anchor="ctr">
+                    <a:lnL w="12700" cap="flat" cmpd="sng" algn="ctr">
+                      <a:solidFill>
+                        <a:srgbClr val="D5DADD"/>
+                      </a:solidFill>
+                      <a:prstDash val="solid"/>
+                      <a:round/>
+                      <a:headEnd type="none" w="med" len="med"/>
+                      <a:tailEnd type="none" w="med" len="med"/>
+                    </a:lnL>
+                    <a:lnR w="12700" cap="flat" cmpd="sng" algn="ctr">
+                      <a:solidFill>
+                        <a:srgbClr val="D5DADD"/>
+                      </a:solidFill>
+                      <a:prstDash val="solid"/>
+                      <a:round/>
+                      <a:headEnd type="none" w="med" len="med"/>
+                      <a:tailEnd type="none" w="med" len="med"/>
+                    </a:lnR>
+                    <a:lnT w="12700" cap="flat" cmpd="sng" algn="ctr">
+                      <a:solidFill>
+                        <a:srgbClr val="D5DADD"/>
+                      </a:solidFill>
+                      <a:prstDash val="solid"/>
+                      <a:round/>
+                      <a:headEnd type="none" w="med" len="med"/>
+                      <a:tailEnd type="none" w="med" len="med"/>
+                    </a:lnT>
+                    <a:lnB w="12700" cap="flat" cmpd="sng" algn="ctr">
+                      <a:solidFill>
+                        <a:srgbClr val="D5DADD"/>
+                      </a:solidFill>
+                      <a:prstDash val="solid"/>
+                      <a:round/>
+                      <a:headEnd type="none" w="med" len="med"/>
+                      <a:tailEnd type="none" w="med" len="med"/>
+                    </a:lnB>
+                  </a:tcPr>
+                </a:tc>
+              </a:tr>
+              <a:tr h="411480">
+                <a:tc>
+                  <a:txBody>
+                    <a:bodyPr/>
+                    <a:lstStyle/>
+                    <a:p>
+                      <a:pPr algn="l" indent="0" marL="0">
+                        <a:buNone/>
+                      </a:pPr>
+                      <a:r>
+                        <a:rPr lang="en-US" sz="1300" dirty="0">
+                          <a:solidFill>
+                            <a:srgbClr val="181C1E"/>
+                          </a:solidFill>
+                          <a:latin typeface="Calibri" pitchFamily="34" charset="0"/>
+                          <a:ea typeface="Calibri" pitchFamily="34" charset="-122"/>
+                          <a:cs typeface="Calibri" pitchFamily="34" charset="-120"/>
+                        </a:rPr>
+                        <a:t>Opus: output (the data file and checks)</a:t>
+                      </a:r>
+                      <a:endParaRPr lang="en-US" sz="1300" dirty="0">
+                        <a:latin typeface="Calibri" charset="0"/>
+                        <a:ea typeface="Calibri" charset="0"/>
+                        <a:cs typeface="Calibri" charset="0"/>
+                      </a:endParaRPr>
+                    </a:p>
+                  </a:txBody>
+                  <a:tcPr marL="91440" marR="91440" marT="45720" marB="45720" anchor="ctr">
+                    <a:lnL w="12700" cap="flat" cmpd="sng" algn="ctr">
+                      <a:solidFill>
+                        <a:srgbClr val="D5DADD"/>
+                      </a:solidFill>
+                      <a:prstDash val="solid"/>
+                      <a:round/>
+                      <a:headEnd type="none" w="med" len="med"/>
+                      <a:tailEnd type="none" w="med" len="med"/>
+                    </a:lnL>
+                    <a:lnR w="12700" cap="flat" cmpd="sng" algn="ctr">
+                      <a:solidFill>
+                        <a:srgbClr val="D5DADD"/>
+                      </a:solidFill>
+                      <a:prstDash val="solid"/>
+                      <a:round/>
+                      <a:headEnd type="none" w="med" len="med"/>
+                      <a:tailEnd type="none" w="med" len="med"/>
+                    </a:lnR>
+                    <a:lnT w="12700" cap="flat" cmpd="sng" algn="ctr">
+                      <a:solidFill>
+                        <a:srgbClr val="D5DADD"/>
+                      </a:solidFill>
+                      <a:prstDash val="solid"/>
+                      <a:round/>
+                      <a:headEnd type="none" w="med" len="med"/>
+                      <a:tailEnd type="none" w="med" len="med"/>
+                    </a:lnT>
+                    <a:lnB w="12700" cap="flat" cmpd="sng" algn="ctr">
+                      <a:solidFill>
+                        <a:srgbClr val="D5DADD"/>
+                      </a:solidFill>
+                      <a:prstDash val="solid"/>
+                      <a:round/>
+                      <a:headEnd type="none" w="med" len="med"/>
+                      <a:tailEnd type="none" w="med" len="med"/>
+                    </a:lnB>
+                  </a:tcPr>
+                </a:tc>
+                <a:tc>
+                  <a:txBody>
+                    <a:bodyPr/>
+                    <a:lstStyle/>
+                    <a:p>
+                      <a:pPr algn="l" indent="0" marL="0">
+                        <a:buNone/>
+                      </a:pPr>
+                      <a:r>
+                        <a:rPr lang="en-US" sz="1300" dirty="0">
+                          <a:solidFill>
+                            <a:srgbClr val="181C1E"/>
+                          </a:solidFill>
+                          <a:latin typeface="Calibri" pitchFamily="34" charset="0"/>
+                          <a:ea typeface="Calibri" pitchFamily="34" charset="-122"/>
+                          <a:cs typeface="Calibri" pitchFamily="34" charset="-120"/>
+                        </a:rPr>
+                        <a:t>186,650 tokens</a:t>
+                      </a:r>
+                      <a:endParaRPr lang="en-US" sz="1300" dirty="0">
+                        <a:latin typeface="Calibri" charset="0"/>
+                        <a:ea typeface="Calibri" charset="0"/>
+                        <a:cs typeface="Calibri" charset="0"/>
+                      </a:endParaRPr>
+                    </a:p>
+                  </a:txBody>
+                  <a:tcPr marL="91440" marR="91440" marT="45720" marB="45720" anchor="ctr">
+                    <a:lnL w="12700" cap="flat" cmpd="sng" algn="ctr">
+                      <a:solidFill>
+                        <a:srgbClr val="D5DADD"/>
+                      </a:solidFill>
+                      <a:prstDash val="solid"/>
+                      <a:round/>
+                      <a:headEnd type="none" w="med" len="med"/>
+                      <a:tailEnd type="none" w="med" len="med"/>
+                    </a:lnL>
+                    <a:lnR w="12700" cap="flat" cmpd="sng" algn="ctr">
+                      <a:solidFill>
+                        <a:srgbClr val="D5DADD"/>
+                      </a:solidFill>
+                      <a:prstDash val="solid"/>
+                      <a:round/>
+                      <a:headEnd type="none" w="med" len="med"/>
+                      <a:tailEnd type="none" w="med" len="med"/>
+                    </a:lnR>
+                    <a:lnT w="12700" cap="flat" cmpd="sng" algn="ctr">
+                      <a:solidFill>
+                        <a:srgbClr val="D5DADD"/>
+                      </a:solidFill>
+                      <a:prstDash val="solid"/>
+                      <a:round/>
+                      <a:headEnd type="none" w="med" len="med"/>
+                      <a:tailEnd type="none" w="med" len="med"/>
+                    </a:lnT>
+                    <a:lnB w="12700" cap="flat" cmpd="sng" algn="ctr">
+                      <a:solidFill>
+                        <a:srgbClr val="D5DADD"/>
+                      </a:solidFill>
+                      <a:prstDash val="solid"/>
+                      <a:round/>
+                      <a:headEnd type="none" w="med" len="med"/>
+                      <a:tailEnd type="none" w="med" len="med"/>
+                    </a:lnB>
+                  </a:tcPr>
+                </a:tc>
+                <a:tc>
+                  <a:txBody>
+                    <a:bodyPr/>
+                    <a:lstStyle/>
+                    <a:p>
+                      <a:pPr algn="l" indent="0" marL="0">
+                        <a:buNone/>
+                      </a:pPr>
+                      <a:r>
+                        <a:rPr lang="en-US" sz="1300" dirty="0">
+                          <a:solidFill>
+                            <a:srgbClr val="181C1E"/>
+                          </a:solidFill>
+                          <a:latin typeface="Calibri" pitchFamily="34" charset="0"/>
+                          <a:ea typeface="Calibri" pitchFamily="34" charset="-122"/>
+                          <a:cs typeface="Calibri" pitchFamily="34" charset="-120"/>
+                        </a:rPr>
+                        <a:t>$20 / M</a:t>
+                      </a:r>
+                      <a:endParaRPr lang="en-US" sz="1300" dirty="0">
+                        <a:latin typeface="Calibri" charset="0"/>
+                        <a:ea typeface="Calibri" charset="0"/>
+                        <a:cs typeface="Calibri" charset="0"/>
+                      </a:endParaRPr>
+                    </a:p>
+                  </a:txBody>
+                  <a:tcPr marL="91440" marR="91440" marT="45720" marB="45720" anchor="ctr">
+                    <a:lnL w="12700" cap="flat" cmpd="sng" algn="ctr">
+                      <a:solidFill>
+                        <a:srgbClr val="D5DADD"/>
+                      </a:solidFill>
+                      <a:prstDash val="solid"/>
+                      <a:round/>
+                      <a:headEnd type="none" w="med" len="med"/>
+                      <a:tailEnd type="none" w="med" len="med"/>
+                    </a:lnL>
+                    <a:lnR w="12700" cap="flat" cmpd="sng" algn="ctr">
+                      <a:solidFill>
+                        <a:srgbClr val="D5DADD"/>
+                      </a:solidFill>
+                      <a:prstDash val="solid"/>
+                      <a:round/>
+                      <a:headEnd type="none" w="med" len="med"/>
+                      <a:tailEnd type="none" w="med" len="med"/>
+                    </a:lnR>
+                    <a:lnT w="12700" cap="flat" cmpd="sng" algn="ctr">
+                      <a:solidFill>
+                        <a:srgbClr val="D5DADD"/>
+                      </a:solidFill>
+                      <a:prstDash val="solid"/>
+                      <a:round/>
+                      <a:headEnd type="none" w="med" len="med"/>
+                      <a:tailEnd type="none" w="med" len="med"/>
+                    </a:lnT>
+                    <a:lnB w="12700" cap="flat" cmpd="sng" algn="ctr">
+                      <a:solidFill>
+                        <a:srgbClr val="D5DADD"/>
+                      </a:solidFill>
+                      <a:prstDash val="solid"/>
+                      <a:round/>
+                      <a:headEnd type="none" w="med" len="med"/>
+                      <a:tailEnd type="none" w="med" len="med"/>
+                    </a:lnB>
+                  </a:tcPr>
+                </a:tc>
+                <a:tc>
+                  <a:txBody>
+                    <a:bodyPr/>
+                    <a:lstStyle/>
+                    <a:p>
+                      <a:pPr algn="r" indent="0" marL="0">
+                        <a:buNone/>
+                      </a:pPr>
+                      <a:r>
+                        <a:rPr lang="en-US" sz="1300" dirty="0">
+                          <a:solidFill>
+                            <a:srgbClr val="181C1E"/>
+                          </a:solidFill>
+                          <a:latin typeface="Calibri" pitchFamily="34" charset="0"/>
+                          <a:ea typeface="Calibri" pitchFamily="34" charset="-122"/>
+                          <a:cs typeface="Calibri" pitchFamily="34" charset="-120"/>
+                        </a:rPr>
+                        <a:t>3.73</a:t>
+                      </a:r>
+                      <a:endParaRPr lang="en-US" sz="1300" dirty="0">
+                        <a:latin typeface="Calibri" charset="0"/>
+                        <a:ea typeface="Calibri" charset="0"/>
+                        <a:cs typeface="Calibri" charset="0"/>
+                      </a:endParaRPr>
+                    </a:p>
+                  </a:txBody>
+                  <a:tcPr marL="91440" marR="91440" marT="45720" marB="45720" anchor="ctr">
+                    <a:lnL w="12700" cap="flat" cmpd="sng" algn="ctr">
+                      <a:solidFill>
+                        <a:srgbClr val="D5DADD"/>
+                      </a:solidFill>
+                      <a:prstDash val="solid"/>
+                      <a:round/>
+                      <a:headEnd type="none" w="med" len="med"/>
+                      <a:tailEnd type="none" w="med" len="med"/>
+                    </a:lnL>
+                    <a:lnR w="12700" cap="flat" cmpd="sng" algn="ctr">
+                      <a:solidFill>
+                        <a:srgbClr val="D5DADD"/>
+                      </a:solidFill>
+                      <a:prstDash val="solid"/>
+                      <a:round/>
+                      <a:headEnd type="none" w="med" len="med"/>
+                      <a:tailEnd type="none" w="med" len="med"/>
+                    </a:lnR>
+                    <a:lnT w="12700" cap="flat" cmpd="sng" algn="ctr">
+                      <a:solidFill>
+                        <a:srgbClr val="D5DADD"/>
+                      </a:solidFill>
+                      <a:prstDash val="solid"/>
+                      <a:round/>
+                      <a:headEnd type="none" w="med" len="med"/>
+                      <a:tailEnd type="none" w="med" len="med"/>
+                    </a:lnT>
+                    <a:lnB w="12700" cap="flat" cmpd="sng" algn="ctr">
+                      <a:solidFill>
+                        <a:srgbClr val="D5DADD"/>
+                      </a:solidFill>
+                      <a:prstDash val="solid"/>
+                      <a:round/>
+                      <a:headEnd type="none" w="med" len="med"/>
+                      <a:tailEnd type="none" w="med" len="med"/>
+                    </a:lnB>
+                  </a:tcPr>
+                </a:tc>
+                <a:tc>
+                  <a:txBody>
+                    <a:bodyPr/>
+                    <a:lstStyle/>
+                    <a:p>
+                      <a:pPr algn="r" indent="0" marL="0">
+                        <a:buNone/>
+                      </a:pPr>
+                      <a:r>
+                        <a:rPr lang="en-US" sz="1300" dirty="0">
+                          <a:solidFill>
+                            <a:srgbClr val="181C1E"/>
+                          </a:solidFill>
+                          <a:latin typeface="Calibri" pitchFamily="34" charset="0"/>
+                          <a:ea typeface="Calibri" pitchFamily="34" charset="-122"/>
+                          <a:cs typeface="Calibri" pitchFamily="34" charset="-120"/>
+                        </a:rPr>
+                        <a:t>4.77</a:t>
+                      </a:r>
+                      <a:endParaRPr lang="en-US" sz="1300" dirty="0">
+                        <a:latin typeface="Calibri" charset="0"/>
+                        <a:ea typeface="Calibri" charset="0"/>
+                        <a:cs typeface="Calibri" charset="0"/>
+                      </a:endParaRPr>
+                    </a:p>
+                  </a:txBody>
+                  <a:tcPr marL="91440" marR="91440" marT="45720" marB="45720" anchor="ctr">
+                    <a:lnL w="12700" cap="flat" cmpd="sng" algn="ctr">
+                      <a:solidFill>
+                        <a:srgbClr val="D5DADD"/>
+                      </a:solidFill>
+                      <a:prstDash val="solid"/>
+                      <a:round/>
+                      <a:headEnd type="none" w="med" len="med"/>
+                      <a:tailEnd type="none" w="med" len="med"/>
+                    </a:lnL>
+                    <a:lnR w="12700" cap="flat" cmpd="sng" algn="ctr">
+                      <a:solidFill>
+                        <a:srgbClr val="D5DADD"/>
+                      </a:solidFill>
+                      <a:prstDash val="solid"/>
+                      <a:round/>
+                      <a:headEnd type="none" w="med" len="med"/>
+                      <a:tailEnd type="none" w="med" len="med"/>
+                    </a:lnR>
+                    <a:lnT w="12700" cap="flat" cmpd="sng" algn="ctr">
+                      <a:solidFill>
+                        <a:srgbClr val="D5DADD"/>
+                      </a:solidFill>
+                      <a:prstDash val="solid"/>
+                      <a:round/>
+                      <a:headEnd type="none" w="med" len="med"/>
+                      <a:tailEnd type="none" w="med" len="med"/>
+                    </a:lnT>
+                    <a:lnB w="12700" cap="flat" cmpd="sng" algn="ctr">
+                      <a:solidFill>
+                        <a:srgbClr val="D5DADD"/>
+                      </a:solidFill>
+                      <a:prstDash val="solid"/>
+                      <a:round/>
+                      <a:headEnd type="none" w="med" len="med"/>
+                      <a:tailEnd type="none" w="med" len="med"/>
+                    </a:lnB>
+                  </a:tcPr>
+                </a:tc>
+              </a:tr>
+              <a:tr h="411480">
+                <a:tc>
+                  <a:txBody>
+                    <a:bodyPr/>
+                    <a:lstStyle/>
+                    <a:p>
+                      <a:pPr algn="l" indent="0" marL="0">
+                        <a:buNone/>
+                      </a:pPr>
+                      <a:r>
+                        <a:rPr lang="en-US" sz="1300" b="1" dirty="0">
+                          <a:solidFill>
+                            <a:srgbClr val="181C1E"/>
+                          </a:solidFill>
+                          <a:latin typeface="Calibri" pitchFamily="34" charset="0"/>
+                          <a:ea typeface="Calibri" pitchFamily="34" charset="-122"/>
+                          <a:cs typeface="Calibri" pitchFamily="34" charset="-120"/>
+                        </a:rPr>
+                        <a:t>Total, our estimate</a:t>
+                      </a:r>
+                      <a:endParaRPr lang="en-US" sz="1300" dirty="0">
+                        <a:latin typeface="Calibri" charset="0"/>
+                        <a:ea typeface="Calibri" charset="0"/>
+                        <a:cs typeface="Calibri" charset="0"/>
+                      </a:endParaRPr>
+                    </a:p>
+                  </a:txBody>
+                  <a:tcPr marL="91440" marR="91440" marT="45720" marB="45720" anchor="ctr">
+                    <a:lnL w="12700" cap="flat" cmpd="sng" algn="ctr">
+                      <a:solidFill>
+                        <a:srgbClr val="D5DADD"/>
+                      </a:solidFill>
+                      <a:prstDash val="solid"/>
+                      <a:round/>
+                      <a:headEnd type="none" w="med" len="med"/>
+                      <a:tailEnd type="none" w="med" len="med"/>
+                    </a:lnL>
+                    <a:lnR w="12700" cap="flat" cmpd="sng" algn="ctr">
+                      <a:solidFill>
+                        <a:srgbClr val="D5DADD"/>
+                      </a:solidFill>
+                      <a:prstDash val="solid"/>
+                      <a:round/>
+                      <a:headEnd type="none" w="med" len="med"/>
+                      <a:tailEnd type="none" w="med" len="med"/>
+                    </a:lnR>
+                    <a:lnT w="12700" cap="flat" cmpd="sng" algn="ctr">
+                      <a:solidFill>
+                        <a:srgbClr val="D5DADD"/>
+                      </a:solidFill>
+                      <a:prstDash val="solid"/>
+                      <a:round/>
+                      <a:headEnd type="none" w="med" len="med"/>
+                      <a:tailEnd type="none" w="med" len="med"/>
+                    </a:lnT>
+                    <a:lnB w="12700" cap="flat" cmpd="sng" algn="ctr">
+                      <a:solidFill>
+                        <a:srgbClr val="D5DADD"/>
+                      </a:solidFill>
+                      <a:prstDash val="solid"/>
+                      <a:round/>
+                      <a:headEnd type="none" w="med" len="med"/>
+                      <a:tailEnd type="none" w="med" len="med"/>
+                    </a:lnB>
+                    <a:solidFill>
+                      <a:srgbClr val="EEF1F3"/>
+                    </a:solidFill>
+                  </a:tcPr>
+                </a:tc>
+                <a:tc>
+                  <a:txBody>
+                    <a:bodyPr/>
+                    <a:lstStyle/>
+                    <a:p>
+                      <a:pPr algn="l" indent="0" marL="0">
+                        <a:buNone/>
+                      </a:pPr>
+                      <a:endParaRPr lang="en-US" sz="1300" dirty="0">
+                        <a:latin typeface="Calibri" charset="0"/>
+                        <a:ea typeface="Calibri" charset="0"/>
+                        <a:cs typeface="Calibri" charset="0"/>
+                      </a:endParaRPr>
+                    </a:p>
+                  </a:txBody>
+                  <a:tcPr marL="91440" marR="91440" marT="45720" marB="45720" anchor="ctr">
+                    <a:lnL w="12700" cap="flat" cmpd="sng" algn="ctr">
+                      <a:solidFill>
+                        <a:srgbClr val="D5DADD"/>
+                      </a:solidFill>
+                      <a:prstDash val="solid"/>
+                      <a:round/>
+                      <a:headEnd type="none" w="med" len="med"/>
+                      <a:tailEnd type="none" w="med" len="med"/>
+                    </a:lnL>
+                    <a:lnR w="12700" cap="flat" cmpd="sng" algn="ctr">
+                      <a:solidFill>
+                        <a:srgbClr val="D5DADD"/>
+                      </a:solidFill>
+                      <a:prstDash val="solid"/>
+                      <a:round/>
+                      <a:headEnd type="none" w="med" len="med"/>
+                      <a:tailEnd type="none" w="med" len="med"/>
+                    </a:lnR>
+                    <a:lnT w="12700" cap="flat" cmpd="sng" algn="ctr">
+                      <a:solidFill>
+                        <a:srgbClr val="D5DADD"/>
+                      </a:solidFill>
+                      <a:prstDash val="solid"/>
+                      <a:round/>
+                      <a:headEnd type="none" w="med" len="med"/>
+                      <a:tailEnd type="none" w="med" len="med"/>
+                    </a:lnT>
+                    <a:lnB w="12700" cap="flat" cmpd="sng" algn="ctr">
+                      <a:solidFill>
+                        <a:srgbClr val="D5DADD"/>
+                      </a:solidFill>
+                      <a:prstDash val="solid"/>
+                      <a:round/>
+                      <a:headEnd type="none" w="med" len="med"/>
+                      <a:tailEnd type="none" w="med" len="med"/>
+                    </a:lnB>
+                    <a:solidFill>
+                      <a:srgbClr val="EEF1F3"/>
+                    </a:solidFill>
+                  </a:tcPr>
+                </a:tc>
+                <a:tc>
+                  <a:txBody>
+                    <a:bodyPr/>
+                    <a:lstStyle/>
+                    <a:p>
+                      <a:pPr algn="l" indent="0" marL="0">
+                        <a:buNone/>
+                      </a:pPr>
+                      <a:endParaRPr lang="en-US" sz="1300" dirty="0">
+                        <a:latin typeface="Calibri" charset="0"/>
+                        <a:ea typeface="Calibri" charset="0"/>
+                        <a:cs typeface="Calibri" charset="0"/>
+                      </a:endParaRPr>
+                    </a:p>
+                  </a:txBody>
+                  <a:tcPr marL="91440" marR="91440" marT="45720" marB="45720" anchor="ctr">
+                    <a:lnL w="12700" cap="flat" cmpd="sng" algn="ctr">
+                      <a:solidFill>
+                        <a:srgbClr val="D5DADD"/>
+                      </a:solidFill>
+                      <a:prstDash val="solid"/>
+                      <a:round/>
+                      <a:headEnd type="none" w="med" len="med"/>
+                      <a:tailEnd type="none" w="med" len="med"/>
+                    </a:lnL>
+                    <a:lnR w="12700" cap="flat" cmpd="sng" algn="ctr">
+                      <a:solidFill>
+                        <a:srgbClr val="D5DADD"/>
+                      </a:solidFill>
+                      <a:prstDash val="solid"/>
+                      <a:round/>
+                      <a:headEnd type="none" w="med" len="med"/>
+                      <a:tailEnd type="none" w="med" len="med"/>
+                    </a:lnR>
+                    <a:lnT w="12700" cap="flat" cmpd="sng" algn="ctr">
+                      <a:solidFill>
+                        <a:srgbClr val="D5DADD"/>
+                      </a:solidFill>
+                      <a:prstDash val="solid"/>
+                      <a:round/>
+                      <a:headEnd type="none" w="med" len="med"/>
+                      <a:tailEnd type="none" w="med" len="med"/>
+                    </a:lnT>
+                    <a:lnB w="12700" cap="flat" cmpd="sng" algn="ctr">
+                      <a:solidFill>
+                        <a:srgbClr val="D5DADD"/>
+                      </a:solidFill>
+                      <a:prstDash val="solid"/>
+                      <a:round/>
+                      <a:headEnd type="none" w="med" len="med"/>
+                      <a:tailEnd type="none" w="med" len="med"/>
+                    </a:lnB>
+                    <a:solidFill>
+                      <a:srgbClr val="EEF1F3"/>
+                    </a:solidFill>
+                  </a:tcPr>
+                </a:tc>
+                <a:tc>
+                  <a:txBody>
+                    <a:bodyPr/>
+                    <a:lstStyle/>
+                    <a:p>
+                      <a:pPr algn="r" indent="0" marL="0">
+                        <a:buNone/>
+                      </a:pPr>
+                      <a:r>
+                        <a:rPr lang="en-US" sz="1300" b="1" dirty="0">
+                          <a:solidFill>
+                            <a:srgbClr val="181C1E"/>
+                          </a:solidFill>
+                          <a:latin typeface="Calibri" pitchFamily="34" charset="0"/>
+                          <a:ea typeface="Calibri" pitchFamily="34" charset="-122"/>
+                          <a:cs typeface="Calibri" pitchFamily="34" charset="-120"/>
+                        </a:rPr>
+                        <a:t>10.02</a:t>
+                      </a:r>
+                      <a:endParaRPr lang="en-US" sz="1300" dirty="0">
+                        <a:latin typeface="Calibri" charset="0"/>
+                        <a:ea typeface="Calibri" charset="0"/>
+                        <a:cs typeface="Calibri" charset="0"/>
+                      </a:endParaRPr>
+                    </a:p>
+                  </a:txBody>
+                  <a:tcPr marL="91440" marR="91440" marT="45720" marB="45720" anchor="ctr">
+                    <a:lnL w="12700" cap="flat" cmpd="sng" algn="ctr">
+                      <a:solidFill>
+                        <a:srgbClr val="D5DADD"/>
+                      </a:solidFill>
+                      <a:prstDash val="solid"/>
+                      <a:round/>
+                      <a:headEnd type="none" w="med" len="med"/>
+                      <a:tailEnd type="none" w="med" len="med"/>
+                    </a:lnL>
+                    <a:lnR w="12700" cap="flat" cmpd="sng" algn="ctr">
+                      <a:solidFill>
+                        <a:srgbClr val="D5DADD"/>
+                      </a:solidFill>
+                      <a:prstDash val="solid"/>
+                      <a:round/>
+                      <a:headEnd type="none" w="med" len="med"/>
+                      <a:tailEnd type="none" w="med" len="med"/>
+                    </a:lnR>
+                    <a:lnT w="12700" cap="flat" cmpd="sng" algn="ctr">
+                      <a:solidFill>
+                        <a:srgbClr val="D5DADD"/>
+                      </a:solidFill>
+                      <a:prstDash val="solid"/>
+                      <a:round/>
+                      <a:headEnd type="none" w="med" len="med"/>
+                      <a:tailEnd type="none" w="med" len="med"/>
+                    </a:lnT>
+                    <a:lnB w="12700" cap="flat" cmpd="sng" algn="ctr">
+                      <a:solidFill>
+                        <a:srgbClr val="D5DADD"/>
+                      </a:solidFill>
+                      <a:prstDash val="solid"/>
+                      <a:round/>
+                      <a:headEnd type="none" w="med" len="med"/>
+                      <a:tailEnd type="none" w="med" len="med"/>
+                    </a:lnB>
+                    <a:solidFill>
+                      <a:srgbClr val="EEF1F3"/>
+                    </a:solidFill>
+                  </a:tcPr>
+                </a:tc>
+                <a:tc>
+                  <a:txBody>
+                    <a:bodyPr/>
+                    <a:lstStyle/>
+                    <a:p>
+                      <a:pPr algn="r" indent="0" marL="0">
+                        <a:buNone/>
+                      </a:pPr>
+                      <a:r>
+                        <a:rPr lang="en-US" sz="1300" b="1" dirty="0">
+                          <a:solidFill>
+                            <a:srgbClr val="181C1E"/>
+                          </a:solidFill>
+                          <a:latin typeface="Calibri" pitchFamily="34" charset="0"/>
+                          <a:ea typeface="Calibri" pitchFamily="34" charset="-122"/>
+                          <a:cs typeface="Calibri" pitchFamily="34" charset="-120"/>
+                        </a:rPr>
+                        <a:t>12.80</a:t>
+                      </a:r>
+                      <a:endParaRPr lang="en-US" sz="1300" dirty="0">
+                        <a:latin typeface="Calibri" charset="0"/>
+                        <a:ea typeface="Calibri" charset="0"/>
+                        <a:cs typeface="Calibri" charset="0"/>
+                      </a:endParaRPr>
+                    </a:p>
+                  </a:txBody>
+                  <a:tcPr marL="91440" marR="91440" marT="45720" marB="45720" anchor="ctr">
+                    <a:lnL w="12700" cap="flat" cmpd="sng" algn="ctr">
+                      <a:solidFill>
+                        <a:srgbClr val="D5DADD"/>
+                      </a:solidFill>
+                      <a:prstDash val="solid"/>
+                      <a:round/>
+                      <a:headEnd type="none" w="med" len="med"/>
+                      <a:tailEnd type="none" w="med" len="med"/>
+                    </a:lnL>
+                    <a:lnR w="12700" cap="flat" cmpd="sng" algn="ctr">
+                      <a:solidFill>
+                        <a:srgbClr val="D5DADD"/>
+                      </a:solidFill>
+                      <a:prstDash val="solid"/>
+                      <a:round/>
+                      <a:headEnd type="none" w="med" len="med"/>
+                      <a:tailEnd type="none" w="med" len="med"/>
+                    </a:lnR>
+                    <a:lnT w="12700" cap="flat" cmpd="sng" algn="ctr">
+                      <a:solidFill>
+                        <a:srgbClr val="D5DADD"/>
+                      </a:solidFill>
+                      <a:prstDash val="solid"/>
+                      <a:round/>
+                      <a:headEnd type="none" w="med" len="med"/>
+                      <a:tailEnd type="none" w="med" len="med"/>
+                    </a:lnT>
+                    <a:lnB w="12700" cap="flat" cmpd="sng" algn="ctr">
+                      <a:solidFill>
+                        <a:srgbClr val="D5DADD"/>
+                      </a:solidFill>
+                      <a:prstDash val="solid"/>
+                      <a:round/>
+                      <a:headEnd type="none" w="med" len="med"/>
+                      <a:tailEnd type="none" w="med" len="med"/>
+                    </a:lnB>
+                    <a:solidFill>
+                      <a:srgbClr val="EEF1F3"/>
+                    </a:solidFill>
+                  </a:tcPr>
+                </a:tc>
+              </a:tr>
+              <a:tr h="411480">
+                <a:tc>
+                  <a:txBody>
+                    <a:bodyPr/>
+                    <a:lstStyle/>
+                    <a:p>
+                      <a:pPr algn="l" indent="0" marL="0">
+                        <a:buNone/>
+                      </a:pPr>
+                      <a:r>
+                        <a:rPr lang="en-US" sz="1300" b="1" dirty="0">
+                          <a:solidFill>
+                            <a:srgbClr val="181C1E"/>
+                          </a:solidFill>
+                          <a:latin typeface="Calibri" pitchFamily="34" charset="0"/>
+                          <a:ea typeface="Calibri" pitchFamily="34" charset="-122"/>
+                          <a:cs typeface="Calibri" pitchFamily="34" charset="-120"/>
+                        </a:rPr>
+                        <a:t>Claude Code’s own reported cost</a:t>
+                      </a:r>
+                      <a:endParaRPr lang="en-US" sz="1300" dirty="0">
+                        <a:latin typeface="Calibri" charset="0"/>
+                        <a:ea typeface="Calibri" charset="0"/>
+                        <a:cs typeface="Calibri" charset="0"/>
+                      </a:endParaRPr>
+                    </a:p>
+                  </a:txBody>
+                  <a:tcPr marL="91440" marR="91440" marT="45720" marB="45720" anchor="ctr">
+                    <a:lnL w="12700" cap="flat" cmpd="sng" algn="ctr">
+                      <a:solidFill>
+                        <a:srgbClr val="D5DADD"/>
+                      </a:solidFill>
+                      <a:prstDash val="solid"/>
+                      <a:round/>
+                      <a:headEnd type="none" w="med" len="med"/>
+                      <a:tailEnd type="none" w="med" len="med"/>
+                    </a:lnL>
+                    <a:lnR w="12700" cap="flat" cmpd="sng" algn="ctr">
+                      <a:solidFill>
+                        <a:srgbClr val="D5DADD"/>
+                      </a:solidFill>
+                      <a:prstDash val="solid"/>
+                      <a:round/>
+                      <a:headEnd type="none" w="med" len="med"/>
+                      <a:tailEnd type="none" w="med" len="med"/>
+                    </a:lnR>
+                    <a:lnT w="12700" cap="flat" cmpd="sng" algn="ctr">
+                      <a:solidFill>
+                        <a:srgbClr val="D5DADD"/>
+                      </a:solidFill>
+                      <a:prstDash val="solid"/>
+                      <a:round/>
+                      <a:headEnd type="none" w="med" len="med"/>
+                      <a:tailEnd type="none" w="med" len="med"/>
+                    </a:lnT>
+                    <a:lnB w="12700" cap="flat" cmpd="sng" algn="ctr">
+                      <a:solidFill>
+                        <a:srgbClr val="D5DADD"/>
+                      </a:solidFill>
+                      <a:prstDash val="solid"/>
+                      <a:round/>
+                      <a:headEnd type="none" w="med" len="med"/>
+                      <a:tailEnd type="none" w="med" len="med"/>
+                    </a:lnB>
+                    <a:solidFill>
+                      <a:srgbClr val="EEF1F3"/>
+                    </a:solidFill>
+                  </a:tcPr>
+                </a:tc>
+                <a:tc>
+                  <a:txBody>
+                    <a:bodyPr/>
+                    <a:lstStyle/>
+                    <a:p>
+                      <a:pPr algn="l" indent="0" marL="0">
+                        <a:buNone/>
+                      </a:pPr>
+                      <a:r>
+                        <a:rPr lang="en-US" sz="1300" b="1" dirty="0">
+                          <a:solidFill>
+                            <a:srgbClr val="181C1E"/>
+                          </a:solidFill>
+                          <a:latin typeface="Calibri" pitchFamily="34" charset="0"/>
+                          <a:ea typeface="Calibri" pitchFamily="34" charset="-122"/>
+                          <a:cs typeface="Calibri" pitchFamily="34" charset="-120"/>
+                        </a:rPr>
+                        <a:t>Haiku $2.16 + Opus $7.63</a:t>
+                      </a:r>
+                      <a:endParaRPr lang="en-US" sz="1300" dirty="0">
+                        <a:latin typeface="Calibri" charset="0"/>
+                        <a:ea typeface="Calibri" charset="0"/>
+                        <a:cs typeface="Calibri" charset="0"/>
+                      </a:endParaRPr>
+                    </a:p>
+                  </a:txBody>
+                  <a:tcPr marL="91440" marR="91440" marT="45720" marB="45720" anchor="ctr">
+                    <a:lnL w="12700" cap="flat" cmpd="sng" algn="ctr">
+                      <a:solidFill>
+                        <a:srgbClr val="D5DADD"/>
+                      </a:solidFill>
+                      <a:prstDash val="solid"/>
+                      <a:round/>
+                      <a:headEnd type="none" w="med" len="med"/>
+                      <a:tailEnd type="none" w="med" len="med"/>
+                    </a:lnL>
+                    <a:lnR w="12700" cap="flat" cmpd="sng" algn="ctr">
+                      <a:solidFill>
+                        <a:srgbClr val="D5DADD"/>
+                      </a:solidFill>
+                      <a:prstDash val="solid"/>
+                      <a:round/>
+                      <a:headEnd type="none" w="med" len="med"/>
+                      <a:tailEnd type="none" w="med" len="med"/>
+                    </a:lnR>
+                    <a:lnT w="12700" cap="flat" cmpd="sng" algn="ctr">
+                      <a:solidFill>
+                        <a:srgbClr val="D5DADD"/>
+                      </a:solidFill>
+                      <a:prstDash val="solid"/>
+                      <a:round/>
+                      <a:headEnd type="none" w="med" len="med"/>
+                      <a:tailEnd type="none" w="med" len="med"/>
+                    </a:lnT>
+                    <a:lnB w="12700" cap="flat" cmpd="sng" algn="ctr">
+                      <a:solidFill>
+                        <a:srgbClr val="D5DADD"/>
+                      </a:solidFill>
+                      <a:prstDash val="solid"/>
+                      <a:round/>
+                      <a:headEnd type="none" w="med" len="med"/>
+                      <a:tailEnd type="none" w="med" len="med"/>
+                    </a:lnB>
+                    <a:solidFill>
+                      <a:srgbClr val="EEF1F3"/>
+                    </a:solidFill>
+                  </a:tcPr>
+                </a:tc>
+                <a:tc>
+                  <a:txBody>
+                    <a:bodyPr/>
+                    <a:lstStyle/>
+                    <a:p>
+                      <a:pPr algn="l" indent="0" marL="0">
+                        <a:buNone/>
+                      </a:pPr>
+                      <a:endParaRPr lang="en-US" sz="1300" dirty="0">
+                        <a:latin typeface="Calibri" charset="0"/>
+                        <a:ea typeface="Calibri" charset="0"/>
+                        <a:cs typeface="Calibri" charset="0"/>
+                      </a:endParaRPr>
+                    </a:p>
+                  </a:txBody>
+                  <a:tcPr marL="91440" marR="91440" marT="45720" marB="45720" anchor="ctr">
+                    <a:lnL w="12700" cap="flat" cmpd="sng" algn="ctr">
+                      <a:solidFill>
+                        <a:srgbClr val="D5DADD"/>
+                      </a:solidFill>
+                      <a:prstDash val="solid"/>
+                      <a:round/>
+                      <a:headEnd type="none" w="med" len="med"/>
+                      <a:tailEnd type="none" w="med" len="med"/>
+                    </a:lnL>
+                    <a:lnR w="12700" cap="flat" cmpd="sng" algn="ctr">
+                      <a:solidFill>
+                        <a:srgbClr val="D5DADD"/>
+                      </a:solidFill>
+                      <a:prstDash val="solid"/>
+                      <a:round/>
+                      <a:headEnd type="none" w="med" len="med"/>
+                      <a:tailEnd type="none" w="med" len="med"/>
+                    </a:lnR>
+                    <a:lnT w="12700" cap="flat" cmpd="sng" algn="ctr">
+                      <a:solidFill>
+                        <a:srgbClr val="D5DADD"/>
+                      </a:solidFill>
+                      <a:prstDash val="solid"/>
+                      <a:round/>
+                      <a:headEnd type="none" w="med" len="med"/>
+                      <a:tailEnd type="none" w="med" len="med"/>
+                    </a:lnT>
+                    <a:lnB w="12700" cap="flat" cmpd="sng" algn="ctr">
+                      <a:solidFill>
+                        <a:srgbClr val="D5DADD"/>
+                      </a:solidFill>
+                      <a:prstDash val="solid"/>
+                      <a:round/>
+                      <a:headEnd type="none" w="med" len="med"/>
+                      <a:tailEnd type="none" w="med" len="med"/>
+                    </a:lnB>
+                    <a:solidFill>
+                      <a:srgbClr val="EEF1F3"/>
+                    </a:solidFill>
+                  </a:tcPr>
+                </a:tc>
+                <a:tc>
+                  <a:txBody>
+                    <a:bodyPr/>
+                    <a:lstStyle/>
+                    <a:p>
+                      <a:pPr algn="r" indent="0" marL="0">
+                        <a:buNone/>
+                      </a:pPr>
+                      <a:r>
+                        <a:rPr lang="en-US" sz="1300" b="1" dirty="0">
+                          <a:solidFill>
+                            <a:srgbClr val="181C1E"/>
+                          </a:solidFill>
+                          <a:latin typeface="Calibri" pitchFamily="34" charset="0"/>
+                          <a:ea typeface="Calibri" pitchFamily="34" charset="-122"/>
+                          <a:cs typeface="Calibri" pitchFamily="34" charset="-120"/>
+                        </a:rPr>
+                        <a:t>9.80</a:t>
+                      </a:r>
+                      <a:endParaRPr lang="en-US" sz="1300" dirty="0">
+                        <a:latin typeface="Calibri" charset="0"/>
+                        <a:ea typeface="Calibri" charset="0"/>
+                        <a:cs typeface="Calibri" charset="0"/>
+                      </a:endParaRPr>
+                    </a:p>
+                  </a:txBody>
+                  <a:tcPr marL="91440" marR="91440" marT="45720" marB="45720" anchor="ctr">
+                    <a:lnL w="12700" cap="flat" cmpd="sng" algn="ctr">
+                      <a:solidFill>
+                        <a:srgbClr val="D5DADD"/>
+                      </a:solidFill>
+                      <a:prstDash val="solid"/>
+                      <a:round/>
+                      <a:headEnd type="none" w="med" len="med"/>
+                      <a:tailEnd type="none" w="med" len="med"/>
+                    </a:lnL>
+                    <a:lnR w="12700" cap="flat" cmpd="sng" algn="ctr">
+                      <a:solidFill>
+                        <a:srgbClr val="D5DADD"/>
+                      </a:solidFill>
+                      <a:prstDash val="solid"/>
+                      <a:round/>
+                      <a:headEnd type="none" w="med" len="med"/>
+                      <a:tailEnd type="none" w="med" len="med"/>
+                    </a:lnR>
+                    <a:lnT w="12700" cap="flat" cmpd="sng" algn="ctr">
+                      <a:solidFill>
+                        <a:srgbClr val="D5DADD"/>
+                      </a:solidFill>
+                      <a:prstDash val="solid"/>
+                      <a:round/>
+                      <a:headEnd type="none" w="med" len="med"/>
+                      <a:tailEnd type="none" w="med" len="med"/>
+                    </a:lnT>
+                    <a:lnB w="12700" cap="flat" cmpd="sng" algn="ctr">
+                      <a:solidFill>
+                        <a:srgbClr val="D5DADD"/>
+                      </a:solidFill>
+                      <a:prstDash val="solid"/>
+                      <a:round/>
+                      <a:headEnd type="none" w="med" len="med"/>
+                      <a:tailEnd type="none" w="med" len="med"/>
+                    </a:lnB>
+                    <a:solidFill>
+                      <a:srgbClr val="EEF1F3"/>
+                    </a:solidFill>
+                  </a:tcPr>
+                </a:tc>
+                <a:tc>
+                  <a:txBody>
+                    <a:bodyPr/>
+                    <a:lstStyle/>
+                    <a:p>
+                      <a:pPr algn="r" indent="0" marL="0">
+                        <a:buNone/>
+                      </a:pPr>
+                      <a:r>
+                        <a:rPr lang="en-US" sz="1300" b="1" dirty="0">
+                          <a:solidFill>
+                            <a:srgbClr val="181C1E"/>
+                          </a:solidFill>
+                          <a:latin typeface="Calibri" pitchFamily="34" charset="0"/>
+                          <a:ea typeface="Calibri" pitchFamily="34" charset="-122"/>
+                          <a:cs typeface="Calibri" pitchFamily="34" charset="-120"/>
+                        </a:rPr>
+                        <a:t>12.51</a:t>
+                      </a:r>
+                      <a:endParaRPr lang="en-US" sz="1300" dirty="0">
+                        <a:latin typeface="Calibri" charset="0"/>
+                        <a:ea typeface="Calibri" charset="0"/>
+                        <a:cs typeface="Calibri" charset="0"/>
+                      </a:endParaRPr>
+                    </a:p>
+                  </a:txBody>
+                  <a:tcPr marL="91440" marR="91440" marT="45720" marB="45720" anchor="ctr">
+                    <a:lnL w="12700" cap="flat" cmpd="sng" algn="ctr">
+                      <a:solidFill>
+                        <a:srgbClr val="D5DADD"/>
+                      </a:solidFill>
+                      <a:prstDash val="solid"/>
+                      <a:round/>
+                      <a:headEnd type="none" w="med" len="med"/>
+                      <a:tailEnd type="none" w="med" len="med"/>
+                    </a:lnL>
+                    <a:lnR w="12700" cap="flat" cmpd="sng" algn="ctr">
+                      <a:solidFill>
+                        <a:srgbClr val="D5DADD"/>
+                      </a:solidFill>
+                      <a:prstDash val="solid"/>
+                      <a:round/>
+                      <a:headEnd type="none" w="med" len="med"/>
+                      <a:tailEnd type="none" w="med" len="med"/>
+                    </a:lnR>
+                    <a:lnT w="12700" cap="flat" cmpd="sng" algn="ctr">
+                      <a:solidFill>
+                        <a:srgbClr val="D5DADD"/>
+                      </a:solidFill>
+                      <a:prstDash val="solid"/>
+                      <a:round/>
+                      <a:headEnd type="none" w="med" len="med"/>
+                      <a:tailEnd type="none" w="med" len="med"/>
+                    </a:lnT>
+                    <a:lnB w="12700" cap="flat" cmpd="sng" algn="ctr">
+                      <a:solidFill>
+                        <a:srgbClr val="D5DADD"/>
+                      </a:solidFill>
+                      <a:prstDash val="solid"/>
+                      <a:round/>
+                      <a:headEnd type="none" w="med" len="med"/>
+                      <a:tailEnd type="none" w="med" len="med"/>
+                    </a:lnB>
+                    <a:solidFill>
+                      <a:srgbClr val="EEF1F3"/>
+                    </a:solidFill>
+                  </a:tcPr>
+                </a:tc>
+              </a:tr>
+            </a:tbl>
           </a:graphicData>
         </a:graphic>
       </p:graphicFrame>
       <p:sp>
         <p:nvSpPr>
-          <p:cNvPr id="4" name="cost card"/>
-          <p:cNvSpPr/>
-          <p:nvPr/>
-        </p:nvSpPr>
-        <p:spPr>
-          <a:xfrm>
-            <a:off x="7772400" y="1463040"/>
-            <a:ext cx="3840480" cy="4389120"/>
-          </a:xfrm>
-          <a:prstGeom prst="roundRect">
-            <a:avLst>
-              <a:gd name="adj" fmla="val 1905"/>
-            </a:avLst>
-          </a:prstGeom>
-          <a:solidFill>
-            <a:srgbClr val="EEF1F3"/>
-          </a:solidFill>
-          <a:ln w="12700">
-            <a:solidFill>
-              <a:srgbClr val="EEF1F3"/>
-            </a:solidFill>
-            <a:prstDash val="solid"/>
-          </a:ln>
-        </p:spPr>
-      </p:sp>
-      <p:sp>
-        <p:nvSpPr>
-          <p:cNvPr id="5" name="Text 2"/>
-          <p:cNvSpPr txBox="1"/>
-          <p:nvPr/>
-        </p:nvSpPr>
-        <p:spPr>
-          <a:xfrm>
-            <a:off x="8001000" y="1645920"/>
-            <a:ext cx="3383280" cy="365760"/>
-          </a:xfrm>
-          <a:prstGeom prst="rect">
-            <a:avLst/>
-          </a:prstGeom>
-          <a:noFill/>
-          <a:ln/>
-        </p:spPr>
-        <p:txBody>
-          <a:bodyPr wrap="square" lIns="0" tIns="0" rIns="0" bIns="0" rtlCol="0" anchor="t"/>
-          <a:lstStyle/>
-          <a:p>
-            <a:pPr indent="0" marL="0">
-              <a:buNone/>
-            </a:pPr>
-            <a:r>
-              <a:rPr lang="en-US" sz="1800" b="1" dirty="0">
-                <a:solidFill>
-                  <a:srgbClr val="001F29"/>
-                </a:solidFill>
-                <a:latin typeface="Calibri" pitchFamily="34" charset="0"/>
-                <a:ea typeface="Calibri" pitchFamily="34" charset="-122"/>
-                <a:cs typeface="Calibri" pitchFamily="34" charset="-120"/>
-              </a:rPr>
-              <a:t>Cost per option</a:t>
-            </a:r>
-            <a:endParaRPr lang="en-US" sz="1800" dirty="0"/>
-          </a:p>
-        </p:txBody>
-      </p:sp>
-      <p:sp>
-        <p:nvSpPr>
-          <p:cNvPr id="6" name="Text 3"/>
-          <p:cNvSpPr txBox="1"/>
-          <p:nvPr/>
-        </p:nvSpPr>
-        <p:spPr>
-          <a:xfrm>
-            <a:off x="8001000" y="2148840"/>
-            <a:ext cx="3383280" cy="3474720"/>
-          </a:xfrm>
-          <a:prstGeom prst="rect">
-            <a:avLst/>
-          </a:prstGeom>
-          <a:noFill/>
-          <a:ln/>
-        </p:spPr>
-        <p:txBody>
-          <a:bodyPr wrap="square" lIns="0" tIns="0" rIns="0" bIns="0" rtlCol="0" anchor="t"/>
-          <a:lstStyle/>
-          <a:p>
-            <a:pPr marL="342900" indent="-342900">
-              <a:spcAft>
-                <a:spcPts val="1000"/>
-              </a:spcAft>
-              <a:buSzPct val="100000"/>
-              <a:buChar char="•"/>
-            </a:pPr>
-            <a:r>
-              <a:rPr lang="en-US" sz="1400" dirty="0">
-                <a:solidFill>
-                  <a:srgbClr val="181C1E"/>
-                </a:solidFill>
-                <a:latin typeface="Calibri" pitchFamily="34" charset="0"/>
-                <a:ea typeface="Calibri" pitchFamily="34" charset="-122"/>
-                <a:cs typeface="Calibri" pitchFamily="34" charset="-120"/>
-              </a:rPr>
-              <a:t>Sonnet era: S$0.04 (Pokémon cards, 90 items) to S$0.42 (wedding)</a:t>
-            </a:r>
-            <a:endParaRPr lang="en-US" sz="1400" dirty="0"/>
-          </a:p>
-          <a:p>
-            <a:pPr marL="342900" indent="-342900">
-              <a:spcAft>
-                <a:spcPts val="1000"/>
-              </a:spcAft>
-              <a:buSzPct val="100000"/>
-              <a:buChar char="•"/>
-            </a:pPr>
-            <a:r>
-              <a:rPr lang="en-US" sz="1400" dirty="0">
-                <a:solidFill>
-                  <a:srgbClr val="181C1E"/>
-                </a:solidFill>
-                <a:latin typeface="Calibri" pitchFamily="34" charset="0"/>
-                <a:ea typeface="Calibri" pitchFamily="34" charset="-122"/>
-                <a:cs typeface="Calibri" pitchFamily="34" charset="-120"/>
-              </a:rPr>
-              <a:t>HDB renovation: S$0.22 per line</a:t>
-            </a:r>
-            <a:endParaRPr lang="en-US" sz="1400" dirty="0"/>
-          </a:p>
-          <a:p>
-            <a:pPr marL="342900" indent="-342900">
-              <a:spcAft>
-                <a:spcPts val="1000"/>
-              </a:spcAft>
-              <a:buSzPct val="100000"/>
-              <a:buChar char="•"/>
-            </a:pPr>
-            <a:r>
-              <a:rPr lang="en-US" sz="1400" dirty="0">
-                <a:solidFill>
-                  <a:srgbClr val="181C1E"/>
-                </a:solidFill>
-                <a:latin typeface="Calibri" pitchFamily="34" charset="0"/>
-                <a:ea typeface="Calibri" pitchFamily="34" charset="-122"/>
-                <a:cs typeface="Calibri" pitchFamily="34" charset="-120"/>
-              </a:rPr>
-              <a:t>Property value: S$0.04 per item, as official data costs few tokens</a:t>
-            </a:r>
-            <a:endParaRPr lang="en-US" sz="1400" dirty="0"/>
-          </a:p>
-          <a:p>
-            <a:pPr marL="342900" indent="-342900">
-              <a:spcAft>
-                <a:spcPts val="1000"/>
-              </a:spcAft>
-              <a:buSzPct val="100000"/>
-              <a:buChar char="•"/>
-            </a:pPr>
-            <a:r>
-              <a:rPr lang="en-US" sz="1400" dirty="0">
-                <a:solidFill>
-                  <a:srgbClr val="181C1E"/>
-                </a:solidFill>
-                <a:latin typeface="Calibri" pitchFamily="34" charset="0"/>
-                <a:ea typeface="Calibri" pitchFamily="34" charset="-122"/>
-                <a:cs typeface="Calibri" pitchFamily="34" charset="-120"/>
-              </a:rPr>
-              <a:t>Follow-up edits: S$0.09 to S$0.20 (JB), vs S$1.36 first build</a:t>
-            </a:r>
-            <a:endParaRPr lang="en-US" sz="1400" dirty="0"/>
-          </a:p>
-        </p:txBody>
-      </p:sp>
-      <p:sp>
-        <p:nvSpPr>
-          <p:cNvPr id="7" name="Text 4"/>
+          <p:cNvPr id="4" name="Text 1"/>
           <p:cNvSpPr txBox="1"/>
           <p:nvPr/>
         </p:nvSpPr>
@@ -13810,7 +15801,7 @@
                 <a:ea typeface="Calibri" pitchFamily="34" charset="-122"/>
                 <a:cs typeface="Calibri" pitchFamily="34" charset="-120"/>
               </a:rPr>
-              <a:t>Measured token counts from each build log; SGD price is our estimate. The Pokémon build had 4 later refinements (S$8.9 more).</a:t>
+              <a:t>Token counts are measured (28 Oct build log). Rates: lib/pricing.ts. Ours runs 2.2% above Claude Code’s figure, all in the Opus part.</a:t>
             </a:r>
             <a:endParaRPr lang="en-US" sz="1100" dirty="0"/>
           </a:p>
@@ -13921,3330 +15912,308 @@
                 <a:ea typeface="Cambria" pitchFamily="34" charset="-122"/>
                 <a:cs typeface="Cambria" pitchFamily="34" charset="-120"/>
               </a:rPr>
-              <a:t>HDB renovation build: line-by-line cost</a:t>
+              <a:t>Claude Code against API only, same build</a:t>
             </a:r>
             <a:endParaRPr lang="en-US" sz="3200" dirty="0"/>
           </a:p>
         </p:txBody>
       </p:sp>
+      <p:sp>
+        <p:nvSpPr>
+          <p:cNvPr id="3" name="scenario a"/>
+          <p:cNvSpPr/>
+          <p:nvPr/>
+        </p:nvSpPr>
+        <p:spPr>
+          <a:xfrm>
+            <a:off x="548640" y="1371600"/>
+            <a:ext cx="5852160" cy="4480560"/>
+          </a:xfrm>
+          <a:prstGeom prst="roundRect">
+            <a:avLst>
+              <a:gd name="adj" fmla="val 1633"/>
+            </a:avLst>
+          </a:prstGeom>
+          <a:solidFill>
+            <a:srgbClr val="EEF1F3"/>
+          </a:solidFill>
+          <a:ln w="12700">
+            <a:solidFill>
+              <a:srgbClr val="EEF1F3"/>
+            </a:solidFill>
+            <a:prstDash val="solid"/>
+          </a:ln>
+        </p:spPr>
+      </p:sp>
+      <p:sp>
+        <p:nvSpPr>
+          <p:cNvPr id="4" name="Text 2"/>
+          <p:cNvSpPr txBox="1"/>
+          <p:nvPr/>
+        </p:nvSpPr>
+        <p:spPr>
+          <a:xfrm>
+            <a:off x="822960" y="1554480"/>
+            <a:ext cx="5303520" cy="365760"/>
+          </a:xfrm>
+          <a:prstGeom prst="rect">
+            <a:avLst/>
+          </a:prstGeom>
+          <a:noFill/>
+          <a:ln/>
+        </p:spPr>
+        <p:txBody>
+          <a:bodyPr wrap="square" lIns="0" tIns="0" rIns="0" bIns="0" rtlCol="0" anchor="t"/>
+          <a:lstStyle/>
+          <a:p>
+            <a:pPr indent="0" marL="0">
+              <a:buNone/>
+            </a:pPr>
+            <a:r>
+              <a:rPr lang="en-US" sz="1800" b="1" dirty="0">
+                <a:solidFill>
+                  <a:srgbClr val="001F29"/>
+                </a:solidFill>
+                <a:latin typeface="Cambria" pitchFamily="34" charset="0"/>
+                <a:ea typeface="Cambria" pitchFamily="34" charset="-122"/>
+                <a:cs typeface="Cambria" pitchFamily="34" charset="-120"/>
+              </a:rPr>
+              <a:t>What the HDB build costs, S$</a:t>
+            </a:r>
+            <a:endParaRPr lang="en-US" sz="1800" dirty="0"/>
+          </a:p>
+        </p:txBody>
+      </p:sp>
       <p:graphicFrame>
         <p:nvGraphicFramePr>
-          <p:cNvPr id="10" name="line item table"/>
-          <p:cNvGraphicFramePr>
-            <a:graphicFrameLocks noGrp="1"/>
-          </p:cNvGraphicFramePr>
-          <p:nvPr>
-            <p:extLst>
-              <p:ext uri="{D42A27DB-BD31-4B8C-83A1-F6EECF244321}">
-                <p14:modId xmlns:p14="http://schemas.microsoft.com/office/powerpoint/2010/main" val="1579011935"/>
-              </p:ext>
-            </p:extLst>
-          </p:nvPr>
+          <p:cNvPr id="5" name="Chart 0" descr=""/>
+          <p:cNvGraphicFramePr/>
+          <p:nvPr/>
         </p:nvGraphicFramePr>
         <p:xfrm>
-          <a:off x="548640" y="1371600"/>
-          <a:ext cx="11064240" cy="914400"/>
+          <a:off x="731520" y="1965960"/>
+          <a:ext cx="5486400" cy="3017520"/>
         </p:xfrm>
-        <a:graphic>
-          <a:graphicData uri="http://schemas.openxmlformats.org/drawingml/2006/table">
-            <a:tbl>
-              <a:tblPr/>
-              <a:tblGrid>
-                <a:gridCol w="4023360"/>
-                <a:gridCol w="2926080"/>
-                <a:gridCol w="1645920"/>
-                <a:gridCol w="1097280"/>
-                <a:gridCol w="1371600"/>
-              </a:tblGrid>
-              <a:tr h="411480">
-                <a:tc>
-                  <a:txBody>
-                    <a:bodyPr/>
-                    <a:lstStyle/>
-                    <a:p>
-                      <a:pPr indent="0" marL="0">
-                        <a:buNone/>
-                      </a:pPr>
-                      <a:r>
-                        <a:rPr lang="en-US" sz="1300" b="1" dirty="0">
-                          <a:solidFill>
-                            <a:srgbClr val="FFFFFF"/>
-                          </a:solidFill>
-                          <a:latin typeface="Calibri" pitchFamily="34" charset="0"/>
-                          <a:ea typeface="Calibri" pitchFamily="34" charset="-122"/>
-                          <a:cs typeface="Calibri" pitchFamily="34" charset="-120"/>
-                        </a:rPr>
-                        <a:t>Step</a:t>
-                      </a:r>
-                      <a:endParaRPr lang="en-US" sz="1300" dirty="0">
-                        <a:latin typeface="Calibri" charset="0"/>
-                        <a:ea typeface="Calibri" charset="0"/>
-                        <a:cs typeface="Calibri" charset="0"/>
-                      </a:endParaRPr>
-                    </a:p>
-                  </a:txBody>
-                  <a:tcPr marL="91440" marR="91440" marT="45720" marB="45720" anchor="ctr">
-                    <a:lnL w="12700" cap="flat" cmpd="sng" algn="ctr">
-                      <a:solidFill>
-                        <a:srgbClr val="D5DADD"/>
-                      </a:solidFill>
-                      <a:prstDash val="solid"/>
-                      <a:round/>
-                      <a:headEnd type="none" w="med" len="med"/>
-                      <a:tailEnd type="none" w="med" len="med"/>
-                    </a:lnL>
-                    <a:lnR w="12700" cap="flat" cmpd="sng" algn="ctr">
-                      <a:solidFill>
-                        <a:srgbClr val="D5DADD"/>
-                      </a:solidFill>
-                      <a:prstDash val="solid"/>
-                      <a:round/>
-                      <a:headEnd type="none" w="med" len="med"/>
-                      <a:tailEnd type="none" w="med" len="med"/>
-                    </a:lnR>
-                    <a:lnT w="12700" cap="flat" cmpd="sng" algn="ctr">
-                      <a:solidFill>
-                        <a:srgbClr val="D5DADD"/>
-                      </a:solidFill>
-                      <a:prstDash val="solid"/>
-                      <a:round/>
-                      <a:headEnd type="none" w="med" len="med"/>
-                      <a:tailEnd type="none" w="med" len="med"/>
-                    </a:lnT>
-                    <a:lnB w="12700" cap="flat" cmpd="sng" algn="ctr">
-                      <a:solidFill>
-                        <a:srgbClr val="D5DADD"/>
-                      </a:solidFill>
-                      <a:prstDash val="solid"/>
-                      <a:round/>
-                      <a:headEnd type="none" w="med" len="med"/>
-                      <a:tailEnd type="none" w="med" len="med"/>
-                    </a:lnB>
-                    <a:solidFill>
-                      <a:srgbClr val="006781"/>
-                    </a:solidFill>
-                  </a:tcPr>
-                </a:tc>
-                <a:tc>
-                  <a:txBody>
-                    <a:bodyPr/>
-                    <a:lstStyle/>
-                    <a:p>
-                      <a:pPr indent="0" marL="0">
-                        <a:buNone/>
-                      </a:pPr>
-                      <a:r>
-                        <a:rPr lang="en-US" sz="1300" b="1" dirty="0">
-                          <a:solidFill>
-                            <a:srgbClr val="FFFFFF"/>
-                          </a:solidFill>
-                          <a:latin typeface="Calibri" pitchFamily="34" charset="0"/>
-                          <a:ea typeface="Calibri" pitchFamily="34" charset="-122"/>
-                          <a:cs typeface="Calibri" pitchFamily="34" charset="-120"/>
-                        </a:rPr>
-                        <a:t>Measured usage</a:t>
-                      </a:r>
-                      <a:endParaRPr lang="en-US" sz="1300" dirty="0">
-                        <a:latin typeface="Calibri" charset="0"/>
-                        <a:ea typeface="Calibri" charset="0"/>
-                        <a:cs typeface="Calibri" charset="0"/>
-                      </a:endParaRPr>
-                    </a:p>
-                  </a:txBody>
-                  <a:tcPr marL="91440" marR="91440" marT="45720" marB="45720" anchor="ctr">
-                    <a:lnL w="12700" cap="flat" cmpd="sng" algn="ctr">
-                      <a:solidFill>
-                        <a:srgbClr val="D5DADD"/>
-                      </a:solidFill>
-                      <a:prstDash val="solid"/>
-                      <a:round/>
-                      <a:headEnd type="none" w="med" len="med"/>
-                      <a:tailEnd type="none" w="med" len="med"/>
-                    </a:lnL>
-                    <a:lnR w="12700" cap="flat" cmpd="sng" algn="ctr">
-                      <a:solidFill>
-                        <a:srgbClr val="D5DADD"/>
-                      </a:solidFill>
-                      <a:prstDash val="solid"/>
-                      <a:round/>
-                      <a:headEnd type="none" w="med" len="med"/>
-                      <a:tailEnd type="none" w="med" len="med"/>
-                    </a:lnR>
-                    <a:lnT w="12700" cap="flat" cmpd="sng" algn="ctr">
-                      <a:solidFill>
-                        <a:srgbClr val="D5DADD"/>
-                      </a:solidFill>
-                      <a:prstDash val="solid"/>
-                      <a:round/>
-                      <a:headEnd type="none" w="med" len="med"/>
-                      <a:tailEnd type="none" w="med" len="med"/>
-                    </a:lnT>
-                    <a:lnB w="12700" cap="flat" cmpd="sng" algn="ctr">
-                      <a:solidFill>
-                        <a:srgbClr val="D5DADD"/>
-                      </a:solidFill>
-                      <a:prstDash val="solid"/>
-                      <a:round/>
-                      <a:headEnd type="none" w="med" len="med"/>
-                      <a:tailEnd type="none" w="med" len="med"/>
-                    </a:lnB>
-                    <a:solidFill>
-                      <a:srgbClr val="006781"/>
-                    </a:solidFill>
-                  </a:tcPr>
-                </a:tc>
-                <a:tc>
-                  <a:txBody>
-                    <a:bodyPr/>
-                    <a:lstStyle/>
-                    <a:p>
-                      <a:pPr indent="0" marL="0">
-                        <a:buNone/>
-                      </a:pPr>
-                      <a:r>
-                        <a:rPr lang="en-US" sz="1300" b="1" dirty="0">
-                          <a:solidFill>
-                            <a:srgbClr val="FFFFFF"/>
-                          </a:solidFill>
-                          <a:latin typeface="Calibri" pitchFamily="34" charset="0"/>
-                          <a:ea typeface="Calibri" pitchFamily="34" charset="-122"/>
-                          <a:cs typeface="Calibri" pitchFamily="34" charset="-120"/>
-                        </a:rPr>
-                        <a:t>API rate</a:t>
-                      </a:r>
-                      <a:endParaRPr lang="en-US" sz="1300" dirty="0">
-                        <a:latin typeface="Calibri" charset="0"/>
-                        <a:ea typeface="Calibri" charset="0"/>
-                        <a:cs typeface="Calibri" charset="0"/>
-                      </a:endParaRPr>
-                    </a:p>
-                  </a:txBody>
-                  <a:tcPr marL="91440" marR="91440" marT="45720" marB="45720" anchor="ctr">
-                    <a:lnL w="12700" cap="flat" cmpd="sng" algn="ctr">
-                      <a:solidFill>
-                        <a:srgbClr val="D5DADD"/>
-                      </a:solidFill>
-                      <a:prstDash val="solid"/>
-                      <a:round/>
-                      <a:headEnd type="none" w="med" len="med"/>
-                      <a:tailEnd type="none" w="med" len="med"/>
-                    </a:lnL>
-                    <a:lnR w="12700" cap="flat" cmpd="sng" algn="ctr">
-                      <a:solidFill>
-                        <a:srgbClr val="D5DADD"/>
-                      </a:solidFill>
-                      <a:prstDash val="solid"/>
-                      <a:round/>
-                      <a:headEnd type="none" w="med" len="med"/>
-                      <a:tailEnd type="none" w="med" len="med"/>
-                    </a:lnR>
-                    <a:lnT w="12700" cap="flat" cmpd="sng" algn="ctr">
-                      <a:solidFill>
-                        <a:srgbClr val="D5DADD"/>
-                      </a:solidFill>
-                      <a:prstDash val="solid"/>
-                      <a:round/>
-                      <a:headEnd type="none" w="med" len="med"/>
-                      <a:tailEnd type="none" w="med" len="med"/>
-                    </a:lnT>
-                    <a:lnB w="12700" cap="flat" cmpd="sng" algn="ctr">
-                      <a:solidFill>
-                        <a:srgbClr val="D5DADD"/>
-                      </a:solidFill>
-                      <a:prstDash val="solid"/>
-                      <a:round/>
-                      <a:headEnd type="none" w="med" len="med"/>
-                      <a:tailEnd type="none" w="med" len="med"/>
-                    </a:lnB>
-                    <a:solidFill>
-                      <a:srgbClr val="006781"/>
-                    </a:solidFill>
-                  </a:tcPr>
-                </a:tc>
-                <a:tc>
-                  <a:txBody>
-                    <a:bodyPr/>
-                    <a:lstStyle/>
-                    <a:p>
-                      <a:pPr indent="0" marL="0">
-                        <a:buNone/>
-                      </a:pPr>
-                      <a:r>
-                        <a:rPr lang="en-US" sz="1300" b="1" dirty="0">
-                          <a:solidFill>
-                            <a:srgbClr val="FFFFFF"/>
-                          </a:solidFill>
-                          <a:latin typeface="Calibri" pitchFamily="34" charset="0"/>
-                          <a:ea typeface="Calibri" pitchFamily="34" charset="-122"/>
-                          <a:cs typeface="Calibri" pitchFamily="34" charset="-120"/>
-                        </a:rPr>
-                        <a:t>US$</a:t>
-                      </a:r>
-                      <a:endParaRPr lang="en-US" sz="1300" dirty="0">
-                        <a:latin typeface="Calibri" charset="0"/>
-                        <a:ea typeface="Calibri" charset="0"/>
-                        <a:cs typeface="Calibri" charset="0"/>
-                      </a:endParaRPr>
-                    </a:p>
-                  </a:txBody>
-                  <a:tcPr marL="91440" marR="91440" marT="45720" marB="45720" anchor="ctr">
-                    <a:lnL w="12700" cap="flat" cmpd="sng" algn="ctr">
-                      <a:solidFill>
-                        <a:srgbClr val="D5DADD"/>
-                      </a:solidFill>
-                      <a:prstDash val="solid"/>
-                      <a:round/>
-                      <a:headEnd type="none" w="med" len="med"/>
-                      <a:tailEnd type="none" w="med" len="med"/>
-                    </a:lnL>
-                    <a:lnR w="12700" cap="flat" cmpd="sng" algn="ctr">
-                      <a:solidFill>
-                        <a:srgbClr val="D5DADD"/>
-                      </a:solidFill>
-                      <a:prstDash val="solid"/>
-                      <a:round/>
-                      <a:headEnd type="none" w="med" len="med"/>
-                      <a:tailEnd type="none" w="med" len="med"/>
-                    </a:lnR>
-                    <a:lnT w="12700" cap="flat" cmpd="sng" algn="ctr">
-                      <a:solidFill>
-                        <a:srgbClr val="D5DADD"/>
-                      </a:solidFill>
-                      <a:prstDash val="solid"/>
-                      <a:round/>
-                      <a:headEnd type="none" w="med" len="med"/>
-                      <a:tailEnd type="none" w="med" len="med"/>
-                    </a:lnT>
-                    <a:lnB w="12700" cap="flat" cmpd="sng" algn="ctr">
-                      <a:solidFill>
-                        <a:srgbClr val="D5DADD"/>
-                      </a:solidFill>
-                      <a:prstDash val="solid"/>
-                      <a:round/>
-                      <a:headEnd type="none" w="med" len="med"/>
-                      <a:tailEnd type="none" w="med" len="med"/>
-                    </a:lnB>
-                    <a:solidFill>
-                      <a:srgbClr val="006781"/>
-                    </a:solidFill>
-                  </a:tcPr>
-                </a:tc>
-                <a:tc>
-                  <a:txBody>
-                    <a:bodyPr/>
-                    <a:lstStyle/>
-                    <a:p>
-                      <a:pPr indent="0" marL="0">
-                        <a:buNone/>
-                      </a:pPr>
-                      <a:r>
-                        <a:rPr lang="en-US" sz="1300" b="1" dirty="0">
-                          <a:solidFill>
-                            <a:srgbClr val="FFFFFF"/>
-                          </a:solidFill>
-                          <a:latin typeface="Calibri" pitchFamily="34" charset="0"/>
-                          <a:ea typeface="Calibri" pitchFamily="34" charset="-122"/>
-                          <a:cs typeface="Calibri" pitchFamily="34" charset="-120"/>
-                        </a:rPr>
-                        <a:t>S$</a:t>
-                      </a:r>
-                      <a:endParaRPr lang="en-US" sz="1300" dirty="0">
-                        <a:latin typeface="Calibri" charset="0"/>
-                        <a:ea typeface="Calibri" charset="0"/>
-                        <a:cs typeface="Calibri" charset="0"/>
-                      </a:endParaRPr>
-                    </a:p>
-                  </a:txBody>
-                  <a:tcPr marL="91440" marR="91440" marT="45720" marB="45720" anchor="ctr">
-                    <a:lnL w="12700" cap="flat" cmpd="sng" algn="ctr">
-                      <a:solidFill>
-                        <a:srgbClr val="D5DADD"/>
-                      </a:solidFill>
-                      <a:prstDash val="solid"/>
-                      <a:round/>
-                      <a:headEnd type="none" w="med" len="med"/>
-                      <a:tailEnd type="none" w="med" len="med"/>
-                    </a:lnL>
-                    <a:lnR w="12700" cap="flat" cmpd="sng" algn="ctr">
-                      <a:solidFill>
-                        <a:srgbClr val="D5DADD"/>
-                      </a:solidFill>
-                      <a:prstDash val="solid"/>
-                      <a:round/>
-                      <a:headEnd type="none" w="med" len="med"/>
-                      <a:tailEnd type="none" w="med" len="med"/>
-                    </a:lnR>
-                    <a:lnT w="12700" cap="flat" cmpd="sng" algn="ctr">
-                      <a:solidFill>
-                        <a:srgbClr val="D5DADD"/>
-                      </a:solidFill>
-                      <a:prstDash val="solid"/>
-                      <a:round/>
-                      <a:headEnd type="none" w="med" len="med"/>
-                      <a:tailEnd type="none" w="med" len="med"/>
-                    </a:lnT>
-                    <a:lnB w="12700" cap="flat" cmpd="sng" algn="ctr">
-                      <a:solidFill>
-                        <a:srgbClr val="D5DADD"/>
-                      </a:solidFill>
-                      <a:prstDash val="solid"/>
-                      <a:round/>
-                      <a:headEnd type="none" w="med" len="med"/>
-                      <a:tailEnd type="none" w="med" len="med"/>
-                    </a:lnB>
-                    <a:solidFill>
-                      <a:srgbClr val="006781"/>
-                    </a:solidFill>
-                  </a:tcPr>
-                </a:tc>
-              </a:tr>
-              <a:tr h="411480">
-                <a:tc>
-                  <a:txBody>
-                    <a:bodyPr/>
-                    <a:lstStyle/>
-                    <a:p>
-                      <a:pPr algn="l" indent="0" marL="0">
-                        <a:buNone/>
-                      </a:pPr>
-                      <a:r>
-                        <a:rPr lang="en-US" sz="1300" dirty="0">
-                          <a:solidFill>
-                            <a:srgbClr val="181C1E"/>
-                          </a:solidFill>
-                          <a:latin typeface="Calibri" pitchFamily="34" charset="0"/>
-                          <a:ea typeface="Calibri" pitchFamily="34" charset="-122"/>
-                          <a:cs typeface="Calibri" pitchFamily="34" charset="-120"/>
-                        </a:rPr>
-                        <a:t>Haiku reads pages: input</a:t>
-                      </a:r>
-                      <a:endParaRPr lang="en-US" sz="1300" dirty="0">
-                        <a:latin typeface="Calibri" charset="0"/>
-                        <a:ea typeface="Calibri" charset="0"/>
-                        <a:cs typeface="Calibri" charset="0"/>
-                      </a:endParaRPr>
-                    </a:p>
-                  </a:txBody>
-                  <a:tcPr marL="91440" marR="91440" marT="45720" marB="45720" anchor="ctr">
-                    <a:lnL w="12700" cap="flat" cmpd="sng" algn="ctr">
-                      <a:solidFill>
-                        <a:srgbClr val="D5DADD"/>
-                      </a:solidFill>
-                      <a:prstDash val="solid"/>
-                      <a:round/>
-                      <a:headEnd type="none" w="med" len="med"/>
-                      <a:tailEnd type="none" w="med" len="med"/>
-                    </a:lnL>
-                    <a:lnR w="12700" cap="flat" cmpd="sng" algn="ctr">
-                      <a:solidFill>
-                        <a:srgbClr val="D5DADD"/>
-                      </a:solidFill>
-                      <a:prstDash val="solid"/>
-                      <a:round/>
-                      <a:headEnd type="none" w="med" len="med"/>
-                      <a:tailEnd type="none" w="med" len="med"/>
-                    </a:lnR>
-                    <a:lnT w="12700" cap="flat" cmpd="sng" algn="ctr">
-                      <a:solidFill>
-                        <a:srgbClr val="D5DADD"/>
-                      </a:solidFill>
-                      <a:prstDash val="solid"/>
-                      <a:round/>
-                      <a:headEnd type="none" w="med" len="med"/>
-                      <a:tailEnd type="none" w="med" len="med"/>
-                    </a:lnT>
-                    <a:lnB w="12700" cap="flat" cmpd="sng" algn="ctr">
-                      <a:solidFill>
-                        <a:srgbClr val="D5DADD"/>
-                      </a:solidFill>
-                      <a:prstDash val="solid"/>
-                      <a:round/>
-                      <a:headEnd type="none" w="med" len="med"/>
-                      <a:tailEnd type="none" w="med" len="med"/>
-                    </a:lnB>
-                  </a:tcPr>
-                </a:tc>
-                <a:tc>
-                  <a:txBody>
-                    <a:bodyPr/>
-                    <a:lstStyle/>
-                    <a:p>
-                      <a:pPr algn="l" indent="0" marL="0">
-                        <a:buNone/>
-                      </a:pPr>
-                      <a:r>
-                        <a:rPr lang="en-US" sz="1300" dirty="0">
-                          <a:solidFill>
-                            <a:srgbClr val="181C1E"/>
-                          </a:solidFill>
-                          <a:latin typeface="Calibri" pitchFamily="34" charset="0"/>
-                          <a:ea typeface="Calibri" pitchFamily="34" charset="-122"/>
-                          <a:cs typeface="Calibri" pitchFamily="34" charset="-120"/>
-                        </a:rPr>
-                        <a:t>3,264,933 tokens</a:t>
-                      </a:r>
-                      <a:endParaRPr lang="en-US" sz="1300" dirty="0">
-                        <a:latin typeface="Calibri" charset="0"/>
-                        <a:ea typeface="Calibri" charset="0"/>
-                        <a:cs typeface="Calibri" charset="0"/>
-                      </a:endParaRPr>
-                    </a:p>
-                  </a:txBody>
-                  <a:tcPr marL="91440" marR="91440" marT="45720" marB="45720" anchor="ctr">
-                    <a:lnL w="12700" cap="flat" cmpd="sng" algn="ctr">
-                      <a:solidFill>
-                        <a:srgbClr val="D5DADD"/>
-                      </a:solidFill>
-                      <a:prstDash val="solid"/>
-                      <a:round/>
-                      <a:headEnd type="none" w="med" len="med"/>
-                      <a:tailEnd type="none" w="med" len="med"/>
-                    </a:lnL>
-                    <a:lnR w="12700" cap="flat" cmpd="sng" algn="ctr">
-                      <a:solidFill>
-                        <a:srgbClr val="D5DADD"/>
-                      </a:solidFill>
-                      <a:prstDash val="solid"/>
-                      <a:round/>
-                      <a:headEnd type="none" w="med" len="med"/>
-                      <a:tailEnd type="none" w="med" len="med"/>
-                    </a:lnR>
-                    <a:lnT w="12700" cap="flat" cmpd="sng" algn="ctr">
-                      <a:solidFill>
-                        <a:srgbClr val="D5DADD"/>
-                      </a:solidFill>
-                      <a:prstDash val="solid"/>
-                      <a:round/>
-                      <a:headEnd type="none" w="med" len="med"/>
-                      <a:tailEnd type="none" w="med" len="med"/>
-                    </a:lnT>
-                    <a:lnB w="12700" cap="flat" cmpd="sng" algn="ctr">
-                      <a:solidFill>
-                        <a:srgbClr val="D5DADD"/>
-                      </a:solidFill>
-                      <a:prstDash val="solid"/>
-                      <a:round/>
-                      <a:headEnd type="none" w="med" len="med"/>
-                      <a:tailEnd type="none" w="med" len="med"/>
-                    </a:lnB>
-                  </a:tcPr>
-                </a:tc>
-                <a:tc>
-                  <a:txBody>
-                    <a:bodyPr/>
-                    <a:lstStyle/>
-                    <a:p>
-                      <a:pPr algn="l" indent="0" marL="0">
-                        <a:buNone/>
-                      </a:pPr>
-                      <a:r>
-                        <a:rPr lang="en-US" sz="1300" dirty="0">
-                          <a:solidFill>
-                            <a:srgbClr val="181C1E"/>
-                          </a:solidFill>
-                          <a:latin typeface="Calibri" pitchFamily="34" charset="0"/>
-                          <a:ea typeface="Calibri" pitchFamily="34" charset="-122"/>
-                          <a:cs typeface="Calibri" pitchFamily="34" charset="-120"/>
-                        </a:rPr>
-                        <a:t>$0.10 / M</a:t>
-                      </a:r>
-                      <a:endParaRPr lang="en-US" sz="1300" dirty="0">
-                        <a:latin typeface="Calibri" charset="0"/>
-                        <a:ea typeface="Calibri" charset="0"/>
-                        <a:cs typeface="Calibri" charset="0"/>
-                      </a:endParaRPr>
-                    </a:p>
-                  </a:txBody>
-                  <a:tcPr marL="91440" marR="91440" marT="45720" marB="45720" anchor="ctr">
-                    <a:lnL w="12700" cap="flat" cmpd="sng" algn="ctr">
-                      <a:solidFill>
-                        <a:srgbClr val="D5DADD"/>
-                      </a:solidFill>
-                      <a:prstDash val="solid"/>
-                      <a:round/>
-                      <a:headEnd type="none" w="med" len="med"/>
-                      <a:tailEnd type="none" w="med" len="med"/>
-                    </a:lnL>
-                    <a:lnR w="12700" cap="flat" cmpd="sng" algn="ctr">
-                      <a:solidFill>
-                        <a:srgbClr val="D5DADD"/>
-                      </a:solidFill>
-                      <a:prstDash val="solid"/>
-                      <a:round/>
-                      <a:headEnd type="none" w="med" len="med"/>
-                      <a:tailEnd type="none" w="med" len="med"/>
-                    </a:lnR>
-                    <a:lnT w="12700" cap="flat" cmpd="sng" algn="ctr">
-                      <a:solidFill>
-                        <a:srgbClr val="D5DADD"/>
-                      </a:solidFill>
-                      <a:prstDash val="solid"/>
-                      <a:round/>
-                      <a:headEnd type="none" w="med" len="med"/>
-                      <a:tailEnd type="none" w="med" len="med"/>
-                    </a:lnT>
-                    <a:lnB w="12700" cap="flat" cmpd="sng" algn="ctr">
-                      <a:solidFill>
-                        <a:srgbClr val="D5DADD"/>
-                      </a:solidFill>
-                      <a:prstDash val="solid"/>
-                      <a:round/>
-                      <a:headEnd type="none" w="med" len="med"/>
-                      <a:tailEnd type="none" w="med" len="med"/>
-                    </a:lnB>
-                  </a:tcPr>
-                </a:tc>
-                <a:tc>
-                  <a:txBody>
-                    <a:bodyPr/>
-                    <a:lstStyle/>
-                    <a:p>
-                      <a:pPr algn="r" indent="0" marL="0">
-                        <a:buNone/>
-                      </a:pPr>
-                      <a:r>
-                        <a:rPr lang="en-US" sz="1300" dirty="0">
-                          <a:solidFill>
-                            <a:srgbClr val="181C1E"/>
-                          </a:solidFill>
-                          <a:latin typeface="Calibri" pitchFamily="34" charset="0"/>
-                          <a:ea typeface="Calibri" pitchFamily="34" charset="-122"/>
-                          <a:cs typeface="Calibri" pitchFamily="34" charset="-120"/>
-                        </a:rPr>
-                        <a:t>0.33</a:t>
-                      </a:r>
-                      <a:endParaRPr lang="en-US" sz="1300" dirty="0">
-                        <a:latin typeface="Calibri" charset="0"/>
-                        <a:ea typeface="Calibri" charset="0"/>
-                        <a:cs typeface="Calibri" charset="0"/>
-                      </a:endParaRPr>
-                    </a:p>
-                  </a:txBody>
-                  <a:tcPr marL="91440" marR="91440" marT="45720" marB="45720" anchor="ctr">
-                    <a:lnL w="12700" cap="flat" cmpd="sng" algn="ctr">
-                      <a:solidFill>
-                        <a:srgbClr val="D5DADD"/>
-                      </a:solidFill>
-                      <a:prstDash val="solid"/>
-                      <a:round/>
-                      <a:headEnd type="none" w="med" len="med"/>
-                      <a:tailEnd type="none" w="med" len="med"/>
-                    </a:lnL>
-                    <a:lnR w="12700" cap="flat" cmpd="sng" algn="ctr">
-                      <a:solidFill>
-                        <a:srgbClr val="D5DADD"/>
-                      </a:solidFill>
-                      <a:prstDash val="solid"/>
-                      <a:round/>
-                      <a:headEnd type="none" w="med" len="med"/>
-                      <a:tailEnd type="none" w="med" len="med"/>
-                    </a:lnR>
-                    <a:lnT w="12700" cap="flat" cmpd="sng" algn="ctr">
-                      <a:solidFill>
-                        <a:srgbClr val="D5DADD"/>
-                      </a:solidFill>
-                      <a:prstDash val="solid"/>
-                      <a:round/>
-                      <a:headEnd type="none" w="med" len="med"/>
-                      <a:tailEnd type="none" w="med" len="med"/>
-                    </a:lnT>
-                    <a:lnB w="12700" cap="flat" cmpd="sng" algn="ctr">
-                      <a:solidFill>
-                        <a:srgbClr val="D5DADD"/>
-                      </a:solidFill>
-                      <a:prstDash val="solid"/>
-                      <a:round/>
-                      <a:headEnd type="none" w="med" len="med"/>
-                      <a:tailEnd type="none" w="med" len="med"/>
-                    </a:lnB>
-                  </a:tcPr>
-                </a:tc>
-                <a:tc>
-                  <a:txBody>
-                    <a:bodyPr/>
-                    <a:lstStyle/>
-                    <a:p>
-                      <a:pPr algn="r" indent="0" marL="0">
-                        <a:buNone/>
-                      </a:pPr>
-                      <a:r>
-                        <a:rPr lang="en-US" sz="1300" dirty="0">
-                          <a:solidFill>
-                            <a:srgbClr val="181C1E"/>
-                          </a:solidFill>
-                          <a:latin typeface="Calibri" pitchFamily="34" charset="0"/>
-                          <a:ea typeface="Calibri" pitchFamily="34" charset="-122"/>
-                          <a:cs typeface="Calibri" pitchFamily="34" charset="-120"/>
-                        </a:rPr>
-                        <a:t>0.42</a:t>
-                      </a:r>
-                      <a:endParaRPr lang="en-US" sz="1300" dirty="0">
-                        <a:latin typeface="Calibri" charset="0"/>
-                        <a:ea typeface="Calibri" charset="0"/>
-                        <a:cs typeface="Calibri" charset="0"/>
-                      </a:endParaRPr>
-                    </a:p>
-                  </a:txBody>
-                  <a:tcPr marL="91440" marR="91440" marT="45720" marB="45720" anchor="ctr">
-                    <a:lnL w="12700" cap="flat" cmpd="sng" algn="ctr">
-                      <a:solidFill>
-                        <a:srgbClr val="D5DADD"/>
-                      </a:solidFill>
-                      <a:prstDash val="solid"/>
-                      <a:round/>
-                      <a:headEnd type="none" w="med" len="med"/>
-                      <a:tailEnd type="none" w="med" len="med"/>
-                    </a:lnL>
-                    <a:lnR w="12700" cap="flat" cmpd="sng" algn="ctr">
-                      <a:solidFill>
-                        <a:srgbClr val="D5DADD"/>
-                      </a:solidFill>
-                      <a:prstDash val="solid"/>
-                      <a:round/>
-                      <a:headEnd type="none" w="med" len="med"/>
-                      <a:tailEnd type="none" w="med" len="med"/>
-                    </a:lnR>
-                    <a:lnT w="12700" cap="flat" cmpd="sng" algn="ctr">
-                      <a:solidFill>
-                        <a:srgbClr val="D5DADD"/>
-                      </a:solidFill>
-                      <a:prstDash val="solid"/>
-                      <a:round/>
-                      <a:headEnd type="none" w="med" len="med"/>
-                      <a:tailEnd type="none" w="med" len="med"/>
-                    </a:lnT>
-                    <a:lnB w="12700" cap="flat" cmpd="sng" algn="ctr">
-                      <a:solidFill>
-                        <a:srgbClr val="D5DADD"/>
-                      </a:solidFill>
-                      <a:prstDash val="solid"/>
-                      <a:round/>
-                      <a:headEnd type="none" w="med" len="med"/>
-                      <a:tailEnd type="none" w="med" len="med"/>
-                    </a:lnB>
-                  </a:tcPr>
-                </a:tc>
-              </a:tr>
-              <a:tr h="411480">
-                <a:tc>
-                  <a:txBody>
-                    <a:bodyPr/>
-                    <a:lstStyle/>
-                    <a:p>
-                      <a:pPr algn="l" indent="0" marL="0">
-                        <a:buNone/>
-                      </a:pPr>
-                      <a:r>
-                        <a:rPr lang="en-US" sz="1300" dirty="0">
-                          <a:solidFill>
-                            <a:srgbClr val="181C1E"/>
-                          </a:solidFill>
-                          <a:latin typeface="Calibri" pitchFamily="34" charset="0"/>
-                          <a:ea typeface="Calibri" pitchFamily="34" charset="-122"/>
-                          <a:cs typeface="Calibri" pitchFamily="34" charset="-120"/>
-                        </a:rPr>
-                        <a:t>Haiku reads pages: output</a:t>
-                      </a:r>
-                      <a:endParaRPr lang="en-US" sz="1300" dirty="0">
-                        <a:latin typeface="Calibri" charset="0"/>
-                        <a:ea typeface="Calibri" charset="0"/>
-                        <a:cs typeface="Calibri" charset="0"/>
-                      </a:endParaRPr>
-                    </a:p>
-                  </a:txBody>
-                  <a:tcPr marL="91440" marR="91440" marT="45720" marB="45720" anchor="ctr">
-                    <a:lnL w="12700" cap="flat" cmpd="sng" algn="ctr">
-                      <a:solidFill>
-                        <a:srgbClr val="D5DADD"/>
-                      </a:solidFill>
-                      <a:prstDash val="solid"/>
-                      <a:round/>
-                      <a:headEnd type="none" w="med" len="med"/>
-                      <a:tailEnd type="none" w="med" len="med"/>
-                    </a:lnL>
-                    <a:lnR w="12700" cap="flat" cmpd="sng" algn="ctr">
-                      <a:solidFill>
-                        <a:srgbClr val="D5DADD"/>
-                      </a:solidFill>
-                      <a:prstDash val="solid"/>
-                      <a:round/>
-                      <a:headEnd type="none" w="med" len="med"/>
-                      <a:tailEnd type="none" w="med" len="med"/>
-                    </a:lnR>
-                    <a:lnT w="12700" cap="flat" cmpd="sng" algn="ctr">
-                      <a:solidFill>
-                        <a:srgbClr val="D5DADD"/>
-                      </a:solidFill>
-                      <a:prstDash val="solid"/>
-                      <a:round/>
-                      <a:headEnd type="none" w="med" len="med"/>
-                      <a:tailEnd type="none" w="med" len="med"/>
-                    </a:lnT>
-                    <a:lnB w="12700" cap="flat" cmpd="sng" algn="ctr">
-                      <a:solidFill>
-                        <a:srgbClr val="D5DADD"/>
-                      </a:solidFill>
-                      <a:prstDash val="solid"/>
-                      <a:round/>
-                      <a:headEnd type="none" w="med" len="med"/>
-                      <a:tailEnd type="none" w="med" len="med"/>
-                    </a:lnB>
-                  </a:tcPr>
-                </a:tc>
-                <a:tc>
-                  <a:txBody>
-                    <a:bodyPr/>
-                    <a:lstStyle/>
-                    <a:p>
-                      <a:pPr algn="l" indent="0" marL="0">
-                        <a:buNone/>
-                      </a:pPr>
-                      <a:r>
-                        <a:rPr lang="en-US" sz="1300" dirty="0">
-                          <a:solidFill>
-                            <a:srgbClr val="181C1E"/>
-                          </a:solidFill>
-                          <a:latin typeface="Calibri" pitchFamily="34" charset="0"/>
-                          <a:ea typeface="Calibri" pitchFamily="34" charset="-122"/>
-                          <a:cs typeface="Calibri" pitchFamily="34" charset="-120"/>
-                        </a:rPr>
-                        <a:t>233,360 tokens</a:t>
-                      </a:r>
-                      <a:endParaRPr lang="en-US" sz="1300" dirty="0">
-                        <a:latin typeface="Calibri" charset="0"/>
-                        <a:ea typeface="Calibri" charset="0"/>
-                        <a:cs typeface="Calibri" charset="0"/>
-                      </a:endParaRPr>
-                    </a:p>
-                  </a:txBody>
-                  <a:tcPr marL="91440" marR="91440" marT="45720" marB="45720" anchor="ctr">
-                    <a:lnL w="12700" cap="flat" cmpd="sng" algn="ctr">
-                      <a:solidFill>
-                        <a:srgbClr val="D5DADD"/>
-                      </a:solidFill>
-                      <a:prstDash val="solid"/>
-                      <a:round/>
-                      <a:headEnd type="none" w="med" len="med"/>
-                      <a:tailEnd type="none" w="med" len="med"/>
-                    </a:lnL>
-                    <a:lnR w="12700" cap="flat" cmpd="sng" algn="ctr">
-                      <a:solidFill>
-                        <a:srgbClr val="D5DADD"/>
-                      </a:solidFill>
-                      <a:prstDash val="solid"/>
-                      <a:round/>
-                      <a:headEnd type="none" w="med" len="med"/>
-                      <a:tailEnd type="none" w="med" len="med"/>
-                    </a:lnR>
-                    <a:lnT w="12700" cap="flat" cmpd="sng" algn="ctr">
-                      <a:solidFill>
-                        <a:srgbClr val="D5DADD"/>
-                      </a:solidFill>
-                      <a:prstDash val="solid"/>
-                      <a:round/>
-                      <a:headEnd type="none" w="med" len="med"/>
-                      <a:tailEnd type="none" w="med" len="med"/>
-                    </a:lnT>
-                    <a:lnB w="12700" cap="flat" cmpd="sng" algn="ctr">
-                      <a:solidFill>
-                        <a:srgbClr val="D5DADD"/>
-                      </a:solidFill>
-                      <a:prstDash val="solid"/>
-                      <a:round/>
-                      <a:headEnd type="none" w="med" len="med"/>
-                      <a:tailEnd type="none" w="med" len="med"/>
-                    </a:lnB>
-                  </a:tcPr>
-                </a:tc>
-                <a:tc>
-                  <a:txBody>
-                    <a:bodyPr/>
-                    <a:lstStyle/>
-                    <a:p>
-                      <a:pPr algn="l" indent="0" marL="0">
-                        <a:buNone/>
-                      </a:pPr>
-                      <a:r>
-                        <a:rPr lang="en-US" sz="1300" dirty="0">
-                          <a:solidFill>
-                            <a:srgbClr val="181C1E"/>
-                          </a:solidFill>
-                          <a:latin typeface="Calibri" pitchFamily="34" charset="0"/>
-                          <a:ea typeface="Calibri" pitchFamily="34" charset="-122"/>
-                          <a:cs typeface="Calibri" pitchFamily="34" charset="-120"/>
-                        </a:rPr>
-                        <a:t>$0.50 / M</a:t>
-                      </a:r>
-                      <a:endParaRPr lang="en-US" sz="1300" dirty="0">
-                        <a:latin typeface="Calibri" charset="0"/>
-                        <a:ea typeface="Calibri" charset="0"/>
-                        <a:cs typeface="Calibri" charset="0"/>
-                      </a:endParaRPr>
-                    </a:p>
-                  </a:txBody>
-                  <a:tcPr marL="91440" marR="91440" marT="45720" marB="45720" anchor="ctr">
-                    <a:lnL w="12700" cap="flat" cmpd="sng" algn="ctr">
-                      <a:solidFill>
-                        <a:srgbClr val="D5DADD"/>
-                      </a:solidFill>
-                      <a:prstDash val="solid"/>
-                      <a:round/>
-                      <a:headEnd type="none" w="med" len="med"/>
-                      <a:tailEnd type="none" w="med" len="med"/>
-                    </a:lnL>
-                    <a:lnR w="12700" cap="flat" cmpd="sng" algn="ctr">
-                      <a:solidFill>
-                        <a:srgbClr val="D5DADD"/>
-                      </a:solidFill>
-                      <a:prstDash val="solid"/>
-                      <a:round/>
-                      <a:headEnd type="none" w="med" len="med"/>
-                      <a:tailEnd type="none" w="med" len="med"/>
-                    </a:lnR>
-                    <a:lnT w="12700" cap="flat" cmpd="sng" algn="ctr">
-                      <a:solidFill>
-                        <a:srgbClr val="D5DADD"/>
-                      </a:solidFill>
-                      <a:prstDash val="solid"/>
-                      <a:round/>
-                      <a:headEnd type="none" w="med" len="med"/>
-                      <a:tailEnd type="none" w="med" len="med"/>
-                    </a:lnT>
-                    <a:lnB w="12700" cap="flat" cmpd="sng" algn="ctr">
-                      <a:solidFill>
-                        <a:srgbClr val="D5DADD"/>
-                      </a:solidFill>
-                      <a:prstDash val="solid"/>
-                      <a:round/>
-                      <a:headEnd type="none" w="med" len="med"/>
-                      <a:tailEnd type="none" w="med" len="med"/>
-                    </a:lnB>
-                  </a:tcPr>
-                </a:tc>
-                <a:tc>
-                  <a:txBody>
-                    <a:bodyPr/>
-                    <a:lstStyle/>
-                    <a:p>
-                      <a:pPr algn="r" indent="0" marL="0">
-                        <a:buNone/>
-                      </a:pPr>
-                      <a:r>
-                        <a:rPr lang="en-US" sz="1300" dirty="0">
-                          <a:solidFill>
-                            <a:srgbClr val="181C1E"/>
-                          </a:solidFill>
-                          <a:latin typeface="Calibri" pitchFamily="34" charset="0"/>
-                          <a:ea typeface="Calibri" pitchFamily="34" charset="-122"/>
-                          <a:cs typeface="Calibri" pitchFamily="34" charset="-120"/>
-                        </a:rPr>
-                        <a:t>0.12</a:t>
-                      </a:r>
-                      <a:endParaRPr lang="en-US" sz="1300" dirty="0">
-                        <a:latin typeface="Calibri" charset="0"/>
-                        <a:ea typeface="Calibri" charset="0"/>
-                        <a:cs typeface="Calibri" charset="0"/>
-                      </a:endParaRPr>
-                    </a:p>
-                  </a:txBody>
-                  <a:tcPr marL="91440" marR="91440" marT="45720" marB="45720" anchor="ctr">
-                    <a:lnL w="12700" cap="flat" cmpd="sng" algn="ctr">
-                      <a:solidFill>
-                        <a:srgbClr val="D5DADD"/>
-                      </a:solidFill>
-                      <a:prstDash val="solid"/>
-                      <a:round/>
-                      <a:headEnd type="none" w="med" len="med"/>
-                      <a:tailEnd type="none" w="med" len="med"/>
-                    </a:lnL>
-                    <a:lnR w="12700" cap="flat" cmpd="sng" algn="ctr">
-                      <a:solidFill>
-                        <a:srgbClr val="D5DADD"/>
-                      </a:solidFill>
-                      <a:prstDash val="solid"/>
-                      <a:round/>
-                      <a:headEnd type="none" w="med" len="med"/>
-                      <a:tailEnd type="none" w="med" len="med"/>
-                    </a:lnR>
-                    <a:lnT w="12700" cap="flat" cmpd="sng" algn="ctr">
-                      <a:solidFill>
-                        <a:srgbClr val="D5DADD"/>
-                      </a:solidFill>
-                      <a:prstDash val="solid"/>
-                      <a:round/>
-                      <a:headEnd type="none" w="med" len="med"/>
-                      <a:tailEnd type="none" w="med" len="med"/>
-                    </a:lnT>
-                    <a:lnB w="12700" cap="flat" cmpd="sng" algn="ctr">
-                      <a:solidFill>
-                        <a:srgbClr val="D5DADD"/>
-                      </a:solidFill>
-                      <a:prstDash val="solid"/>
-                      <a:round/>
-                      <a:headEnd type="none" w="med" len="med"/>
-                      <a:tailEnd type="none" w="med" len="med"/>
-                    </a:lnB>
-                  </a:tcPr>
-                </a:tc>
-                <a:tc>
-                  <a:txBody>
-                    <a:bodyPr/>
-                    <a:lstStyle/>
-                    <a:p>
-                      <a:pPr algn="r" indent="0" marL="0">
-                        <a:buNone/>
-                      </a:pPr>
-                      <a:r>
-                        <a:rPr lang="en-US" sz="1300" dirty="0">
-                          <a:solidFill>
-                            <a:srgbClr val="181C1E"/>
-                          </a:solidFill>
-                          <a:latin typeface="Calibri" pitchFamily="34" charset="0"/>
-                          <a:ea typeface="Calibri" pitchFamily="34" charset="-122"/>
-                          <a:cs typeface="Calibri" pitchFamily="34" charset="-120"/>
-                        </a:rPr>
-                        <a:t>0.15</a:t>
-                      </a:r>
-                      <a:endParaRPr lang="en-US" sz="1300" dirty="0">
-                        <a:latin typeface="Calibri" charset="0"/>
-                        <a:ea typeface="Calibri" charset="0"/>
-                        <a:cs typeface="Calibri" charset="0"/>
-                      </a:endParaRPr>
-                    </a:p>
-                  </a:txBody>
-                  <a:tcPr marL="91440" marR="91440" marT="45720" marB="45720" anchor="ctr">
-                    <a:lnL w="12700" cap="flat" cmpd="sng" algn="ctr">
-                      <a:solidFill>
-                        <a:srgbClr val="D5DADD"/>
-                      </a:solidFill>
-                      <a:prstDash val="solid"/>
-                      <a:round/>
-                      <a:headEnd type="none" w="med" len="med"/>
-                      <a:tailEnd type="none" w="med" len="med"/>
-                    </a:lnL>
-                    <a:lnR w="12700" cap="flat" cmpd="sng" algn="ctr">
-                      <a:solidFill>
-                        <a:srgbClr val="D5DADD"/>
-                      </a:solidFill>
-                      <a:prstDash val="solid"/>
-                      <a:round/>
-                      <a:headEnd type="none" w="med" len="med"/>
-                      <a:tailEnd type="none" w="med" len="med"/>
-                    </a:lnR>
-                    <a:lnT w="12700" cap="flat" cmpd="sng" algn="ctr">
-                      <a:solidFill>
-                        <a:srgbClr val="D5DADD"/>
-                      </a:solidFill>
-                      <a:prstDash val="solid"/>
-                      <a:round/>
-                      <a:headEnd type="none" w="med" len="med"/>
-                      <a:tailEnd type="none" w="med" len="med"/>
-                    </a:lnT>
-                    <a:lnB w="12700" cap="flat" cmpd="sng" algn="ctr">
-                      <a:solidFill>
-                        <a:srgbClr val="D5DADD"/>
-                      </a:solidFill>
-                      <a:prstDash val="solid"/>
-                      <a:round/>
-                      <a:headEnd type="none" w="med" len="med"/>
-                      <a:tailEnd type="none" w="med" len="med"/>
-                    </a:lnB>
-                  </a:tcPr>
-                </a:tc>
-              </a:tr>
-              <a:tr h="411480">
-                <a:tc>
-                  <a:txBody>
-                    <a:bodyPr/>
-                    <a:lstStyle/>
-                    <a:p>
-                      <a:pPr algn="l" indent="0" marL="0">
-                        <a:buNone/>
-                      </a:pPr>
-                      <a:r>
-                        <a:rPr lang="en-US" sz="1300" dirty="0">
-                          <a:solidFill>
-                            <a:srgbClr val="181C1E"/>
-                          </a:solidFill>
-                          <a:latin typeface="Calibri" pitchFamily="34" charset="0"/>
-                          <a:ea typeface="Calibri" pitchFamily="34" charset="-122"/>
-                          <a:cs typeface="Calibri" pitchFamily="34" charset="-120"/>
-                        </a:rPr>
-                        <a:t>Web searches</a:t>
-                      </a:r>
-                      <a:endParaRPr lang="en-US" sz="1300" dirty="0">
-                        <a:latin typeface="Calibri" charset="0"/>
-                        <a:ea typeface="Calibri" charset="0"/>
-                        <a:cs typeface="Calibri" charset="0"/>
-                      </a:endParaRPr>
-                    </a:p>
-                  </a:txBody>
-                  <a:tcPr marL="91440" marR="91440" marT="45720" marB="45720" anchor="ctr">
-                    <a:lnL w="12700" cap="flat" cmpd="sng" algn="ctr">
-                      <a:solidFill>
-                        <a:srgbClr val="D5DADD"/>
-                      </a:solidFill>
-                      <a:prstDash val="solid"/>
-                      <a:round/>
-                      <a:headEnd type="none" w="med" len="med"/>
-                      <a:tailEnd type="none" w="med" len="med"/>
-                    </a:lnL>
-                    <a:lnR w="12700" cap="flat" cmpd="sng" algn="ctr">
-                      <a:solidFill>
-                        <a:srgbClr val="D5DADD"/>
-                      </a:solidFill>
-                      <a:prstDash val="solid"/>
-                      <a:round/>
-                      <a:headEnd type="none" w="med" len="med"/>
-                      <a:tailEnd type="none" w="med" len="med"/>
-                    </a:lnR>
-                    <a:lnT w="12700" cap="flat" cmpd="sng" algn="ctr">
-                      <a:solidFill>
-                        <a:srgbClr val="D5DADD"/>
-                      </a:solidFill>
-                      <a:prstDash val="solid"/>
-                      <a:round/>
-                      <a:headEnd type="none" w="med" len="med"/>
-                      <a:tailEnd type="none" w="med" len="med"/>
-                    </a:lnT>
-                    <a:lnB w="12700" cap="flat" cmpd="sng" algn="ctr">
-                      <a:solidFill>
-                        <a:srgbClr val="D5DADD"/>
-                      </a:solidFill>
-                      <a:prstDash val="solid"/>
-                      <a:round/>
-                      <a:headEnd type="none" w="med" len="med"/>
-                      <a:tailEnd type="none" w="med" len="med"/>
-                    </a:lnB>
-                  </a:tcPr>
-                </a:tc>
-                <a:tc>
-                  <a:txBody>
-                    <a:bodyPr/>
-                    <a:lstStyle/>
-                    <a:p>
-                      <a:pPr algn="l" indent="0" marL="0">
-                        <a:buNone/>
-                      </a:pPr>
-                      <a:r>
-                        <a:rPr lang="en-US" sz="1300" dirty="0">
-                          <a:solidFill>
-                            <a:srgbClr val="181C1E"/>
-                          </a:solidFill>
-                          <a:latin typeface="Calibri" pitchFamily="34" charset="0"/>
-                          <a:ea typeface="Calibri" pitchFamily="34" charset="-122"/>
-                          <a:cs typeface="Calibri" pitchFamily="34" charset="-120"/>
-                        </a:rPr>
-                        <a:t>172 searches</a:t>
-                      </a:r>
-                      <a:endParaRPr lang="en-US" sz="1300" dirty="0">
-                        <a:latin typeface="Calibri" charset="0"/>
-                        <a:ea typeface="Calibri" charset="0"/>
-                        <a:cs typeface="Calibri" charset="0"/>
-                      </a:endParaRPr>
-                    </a:p>
-                  </a:txBody>
-                  <a:tcPr marL="91440" marR="91440" marT="45720" marB="45720" anchor="ctr">
-                    <a:lnL w="12700" cap="flat" cmpd="sng" algn="ctr">
-                      <a:solidFill>
-                        <a:srgbClr val="D5DADD"/>
-                      </a:solidFill>
-                      <a:prstDash val="solid"/>
-                      <a:round/>
-                      <a:headEnd type="none" w="med" len="med"/>
-                      <a:tailEnd type="none" w="med" len="med"/>
-                    </a:lnL>
-                    <a:lnR w="12700" cap="flat" cmpd="sng" algn="ctr">
-                      <a:solidFill>
-                        <a:srgbClr val="D5DADD"/>
-                      </a:solidFill>
-                      <a:prstDash val="solid"/>
-                      <a:round/>
-                      <a:headEnd type="none" w="med" len="med"/>
-                      <a:tailEnd type="none" w="med" len="med"/>
-                    </a:lnR>
-                    <a:lnT w="12700" cap="flat" cmpd="sng" algn="ctr">
-                      <a:solidFill>
-                        <a:srgbClr val="D5DADD"/>
-                      </a:solidFill>
-                      <a:prstDash val="solid"/>
-                      <a:round/>
-                      <a:headEnd type="none" w="med" len="med"/>
-                      <a:tailEnd type="none" w="med" len="med"/>
-                    </a:lnT>
-                    <a:lnB w="12700" cap="flat" cmpd="sng" algn="ctr">
-                      <a:solidFill>
-                        <a:srgbClr val="D5DADD"/>
-                      </a:solidFill>
-                      <a:prstDash val="solid"/>
-                      <a:round/>
-                      <a:headEnd type="none" w="med" len="med"/>
-                      <a:tailEnd type="none" w="med" len="med"/>
-                    </a:lnB>
-                  </a:tcPr>
-                </a:tc>
-                <a:tc>
-                  <a:txBody>
-                    <a:bodyPr/>
-                    <a:lstStyle/>
-                    <a:p>
-                      <a:pPr algn="l" indent="0" marL="0">
-                        <a:buNone/>
-                      </a:pPr>
-                      <a:r>
-                        <a:rPr lang="en-US" sz="1300" dirty="0">
-                          <a:solidFill>
-                            <a:srgbClr val="181C1E"/>
-                          </a:solidFill>
-                          <a:latin typeface="Calibri" pitchFamily="34" charset="0"/>
-                          <a:ea typeface="Calibri" pitchFamily="34" charset="-122"/>
-                          <a:cs typeface="Calibri" pitchFamily="34" charset="-120"/>
-                        </a:rPr>
-                        <a:t>$10 / 1,000</a:t>
-                      </a:r>
-                      <a:endParaRPr lang="en-US" sz="1300" dirty="0">
-                        <a:latin typeface="Calibri" charset="0"/>
-                        <a:ea typeface="Calibri" charset="0"/>
-                        <a:cs typeface="Calibri" charset="0"/>
-                      </a:endParaRPr>
-                    </a:p>
-                  </a:txBody>
-                  <a:tcPr marL="91440" marR="91440" marT="45720" marB="45720" anchor="ctr">
-                    <a:lnL w="12700" cap="flat" cmpd="sng" algn="ctr">
-                      <a:solidFill>
-                        <a:srgbClr val="D5DADD"/>
-                      </a:solidFill>
-                      <a:prstDash val="solid"/>
-                      <a:round/>
-                      <a:headEnd type="none" w="med" len="med"/>
-                      <a:tailEnd type="none" w="med" len="med"/>
-                    </a:lnL>
-                    <a:lnR w="12700" cap="flat" cmpd="sng" algn="ctr">
-                      <a:solidFill>
-                        <a:srgbClr val="D5DADD"/>
-                      </a:solidFill>
-                      <a:prstDash val="solid"/>
-                      <a:round/>
-                      <a:headEnd type="none" w="med" len="med"/>
-                      <a:tailEnd type="none" w="med" len="med"/>
-                    </a:lnR>
-                    <a:lnT w="12700" cap="flat" cmpd="sng" algn="ctr">
-                      <a:solidFill>
-                        <a:srgbClr val="D5DADD"/>
-                      </a:solidFill>
-                      <a:prstDash val="solid"/>
-                      <a:round/>
-                      <a:headEnd type="none" w="med" len="med"/>
-                      <a:tailEnd type="none" w="med" len="med"/>
-                    </a:lnT>
-                    <a:lnB w="12700" cap="flat" cmpd="sng" algn="ctr">
-                      <a:solidFill>
-                        <a:srgbClr val="D5DADD"/>
-                      </a:solidFill>
-                      <a:prstDash val="solid"/>
-                      <a:round/>
-                      <a:headEnd type="none" w="med" len="med"/>
-                      <a:tailEnd type="none" w="med" len="med"/>
-                    </a:lnB>
-                  </a:tcPr>
-                </a:tc>
-                <a:tc>
-                  <a:txBody>
-                    <a:bodyPr/>
-                    <a:lstStyle/>
-                    <a:p>
-                      <a:pPr algn="r" indent="0" marL="0">
-                        <a:buNone/>
-                      </a:pPr>
-                      <a:r>
-                        <a:rPr lang="en-US" sz="1300" dirty="0">
-                          <a:solidFill>
-                            <a:srgbClr val="181C1E"/>
-                          </a:solidFill>
-                          <a:latin typeface="Calibri" pitchFamily="34" charset="0"/>
-                          <a:ea typeface="Calibri" pitchFamily="34" charset="-122"/>
-                          <a:cs typeface="Calibri" pitchFamily="34" charset="-120"/>
-                        </a:rPr>
-                        <a:t>1.72</a:t>
-                      </a:r>
-                      <a:endParaRPr lang="en-US" sz="1300" dirty="0">
-                        <a:latin typeface="Calibri" charset="0"/>
-                        <a:ea typeface="Calibri" charset="0"/>
-                        <a:cs typeface="Calibri" charset="0"/>
-                      </a:endParaRPr>
-                    </a:p>
-                  </a:txBody>
-                  <a:tcPr marL="91440" marR="91440" marT="45720" marB="45720" anchor="ctr">
-                    <a:lnL w="12700" cap="flat" cmpd="sng" algn="ctr">
-                      <a:solidFill>
-                        <a:srgbClr val="D5DADD"/>
-                      </a:solidFill>
-                      <a:prstDash val="solid"/>
-                      <a:round/>
-                      <a:headEnd type="none" w="med" len="med"/>
-                      <a:tailEnd type="none" w="med" len="med"/>
-                    </a:lnL>
-                    <a:lnR w="12700" cap="flat" cmpd="sng" algn="ctr">
-                      <a:solidFill>
-                        <a:srgbClr val="D5DADD"/>
-                      </a:solidFill>
-                      <a:prstDash val="solid"/>
-                      <a:round/>
-                      <a:headEnd type="none" w="med" len="med"/>
-                      <a:tailEnd type="none" w="med" len="med"/>
-                    </a:lnR>
-                    <a:lnT w="12700" cap="flat" cmpd="sng" algn="ctr">
-                      <a:solidFill>
-                        <a:srgbClr val="D5DADD"/>
-                      </a:solidFill>
-                      <a:prstDash val="solid"/>
-                      <a:round/>
-                      <a:headEnd type="none" w="med" len="med"/>
-                      <a:tailEnd type="none" w="med" len="med"/>
-                    </a:lnT>
-                    <a:lnB w="12700" cap="flat" cmpd="sng" algn="ctr">
-                      <a:solidFill>
-                        <a:srgbClr val="D5DADD"/>
-                      </a:solidFill>
-                      <a:prstDash val="solid"/>
-                      <a:round/>
-                      <a:headEnd type="none" w="med" len="med"/>
-                      <a:tailEnd type="none" w="med" len="med"/>
-                    </a:lnB>
-                  </a:tcPr>
-                </a:tc>
-                <a:tc>
-                  <a:txBody>
-                    <a:bodyPr/>
-                    <a:lstStyle/>
-                    <a:p>
-                      <a:pPr algn="r" indent="0" marL="0">
-                        <a:buNone/>
-                      </a:pPr>
-                      <a:r>
-                        <a:rPr lang="en-US" sz="1300" dirty="0">
-                          <a:solidFill>
-                            <a:srgbClr val="181C1E"/>
-                          </a:solidFill>
-                          <a:latin typeface="Calibri" pitchFamily="34" charset="0"/>
-                          <a:ea typeface="Calibri" pitchFamily="34" charset="-122"/>
-                          <a:cs typeface="Calibri" pitchFamily="34" charset="-120"/>
-                        </a:rPr>
-                        <a:t>2.20</a:t>
-                      </a:r>
-                      <a:endParaRPr lang="en-US" sz="1300" dirty="0">
-                        <a:latin typeface="Calibri" charset="0"/>
-                        <a:ea typeface="Calibri" charset="0"/>
-                        <a:cs typeface="Calibri" charset="0"/>
-                      </a:endParaRPr>
-                    </a:p>
-                  </a:txBody>
-                  <a:tcPr marL="91440" marR="91440" marT="45720" marB="45720" anchor="ctr">
-                    <a:lnL w="12700" cap="flat" cmpd="sng" algn="ctr">
-                      <a:solidFill>
-                        <a:srgbClr val="D5DADD"/>
-                      </a:solidFill>
-                      <a:prstDash val="solid"/>
-                      <a:round/>
-                      <a:headEnd type="none" w="med" len="med"/>
-                      <a:tailEnd type="none" w="med" len="med"/>
-                    </a:lnL>
-                    <a:lnR w="12700" cap="flat" cmpd="sng" algn="ctr">
-                      <a:solidFill>
-                        <a:srgbClr val="D5DADD"/>
-                      </a:solidFill>
-                      <a:prstDash val="solid"/>
-                      <a:round/>
-                      <a:headEnd type="none" w="med" len="med"/>
-                      <a:tailEnd type="none" w="med" len="med"/>
-                    </a:lnR>
-                    <a:lnT w="12700" cap="flat" cmpd="sng" algn="ctr">
-                      <a:solidFill>
-                        <a:srgbClr val="D5DADD"/>
-                      </a:solidFill>
-                      <a:prstDash val="solid"/>
-                      <a:round/>
-                      <a:headEnd type="none" w="med" len="med"/>
-                      <a:tailEnd type="none" w="med" len="med"/>
-                    </a:lnT>
-                    <a:lnB w="12700" cap="flat" cmpd="sng" algn="ctr">
-                      <a:solidFill>
-                        <a:srgbClr val="D5DADD"/>
-                      </a:solidFill>
-                      <a:prstDash val="solid"/>
-                      <a:round/>
-                      <a:headEnd type="none" w="med" len="med"/>
-                      <a:tailEnd type="none" w="med" len="med"/>
-                    </a:lnB>
-                  </a:tcPr>
-                </a:tc>
-              </a:tr>
-              <a:tr h="411480">
-                <a:tc>
-                  <a:txBody>
-                    <a:bodyPr/>
-                    <a:lstStyle/>
-                    <a:p>
-                      <a:pPr algn="l" indent="0" marL="0">
-                        <a:buNone/>
-                      </a:pPr>
-                      <a:r>
-                        <a:rPr lang="en-US" sz="1300" dirty="0">
-                          <a:solidFill>
-                            <a:srgbClr val="181C1E"/>
-                          </a:solidFill>
-                          <a:latin typeface="Calibri" pitchFamily="34" charset="0"/>
-                          <a:ea typeface="Calibri" pitchFamily="34" charset="-122"/>
-                          <a:cs typeface="Calibri" pitchFamily="34" charset="-120"/>
-                        </a:rPr>
-                        <a:t>Opus: new input</a:t>
-                      </a:r>
-                      <a:endParaRPr lang="en-US" sz="1300" dirty="0">
-                        <a:latin typeface="Calibri" charset="0"/>
-                        <a:ea typeface="Calibri" charset="0"/>
-                        <a:cs typeface="Calibri" charset="0"/>
-                      </a:endParaRPr>
-                    </a:p>
-                  </a:txBody>
-                  <a:tcPr marL="91440" marR="91440" marT="45720" marB="45720" anchor="ctr">
-                    <a:lnL w="12700" cap="flat" cmpd="sng" algn="ctr">
-                      <a:solidFill>
-                        <a:srgbClr val="D5DADD"/>
-                      </a:solidFill>
-                      <a:prstDash val="solid"/>
-                      <a:round/>
-                      <a:headEnd type="none" w="med" len="med"/>
-                      <a:tailEnd type="none" w="med" len="med"/>
-                    </a:lnL>
-                    <a:lnR w="12700" cap="flat" cmpd="sng" algn="ctr">
-                      <a:solidFill>
-                        <a:srgbClr val="D5DADD"/>
-                      </a:solidFill>
-                      <a:prstDash val="solid"/>
-                      <a:round/>
-                      <a:headEnd type="none" w="med" len="med"/>
-                      <a:tailEnd type="none" w="med" len="med"/>
-                    </a:lnR>
-                    <a:lnT w="12700" cap="flat" cmpd="sng" algn="ctr">
-                      <a:solidFill>
-                        <a:srgbClr val="D5DADD"/>
-                      </a:solidFill>
-                      <a:prstDash val="solid"/>
-                      <a:round/>
-                      <a:headEnd type="none" w="med" len="med"/>
-                      <a:tailEnd type="none" w="med" len="med"/>
-                    </a:lnT>
-                    <a:lnB w="12700" cap="flat" cmpd="sng" algn="ctr">
-                      <a:solidFill>
-                        <a:srgbClr val="D5DADD"/>
-                      </a:solidFill>
-                      <a:prstDash val="solid"/>
-                      <a:round/>
-                      <a:headEnd type="none" w="med" len="med"/>
-                      <a:tailEnd type="none" w="med" len="med"/>
-                    </a:lnB>
-                  </a:tcPr>
-                </a:tc>
-                <a:tc>
-                  <a:txBody>
-                    <a:bodyPr/>
-                    <a:lstStyle/>
-                    <a:p>
-                      <a:pPr algn="l" indent="0" marL="0">
-                        <a:buNone/>
-                      </a:pPr>
-                      <a:r>
-                        <a:rPr lang="en-US" sz="1300" dirty="0">
-                          <a:solidFill>
-                            <a:srgbClr val="181C1E"/>
-                          </a:solidFill>
-                          <a:latin typeface="Calibri" pitchFamily="34" charset="0"/>
-                          <a:ea typeface="Calibri" pitchFamily="34" charset="-122"/>
-                          <a:cs typeface="Calibri" pitchFamily="34" charset="-120"/>
-                        </a:rPr>
-                        <a:t>298 tokens</a:t>
-                      </a:r>
-                      <a:endParaRPr lang="en-US" sz="1300" dirty="0">
-                        <a:latin typeface="Calibri" charset="0"/>
-                        <a:ea typeface="Calibri" charset="0"/>
-                        <a:cs typeface="Calibri" charset="0"/>
-                      </a:endParaRPr>
-                    </a:p>
-                  </a:txBody>
-                  <a:tcPr marL="91440" marR="91440" marT="45720" marB="45720" anchor="ctr">
-                    <a:lnL w="12700" cap="flat" cmpd="sng" algn="ctr">
-                      <a:solidFill>
-                        <a:srgbClr val="D5DADD"/>
-                      </a:solidFill>
-                      <a:prstDash val="solid"/>
-                      <a:round/>
-                      <a:headEnd type="none" w="med" len="med"/>
-                      <a:tailEnd type="none" w="med" len="med"/>
-                    </a:lnL>
-                    <a:lnR w="12700" cap="flat" cmpd="sng" algn="ctr">
-                      <a:solidFill>
-                        <a:srgbClr val="D5DADD"/>
-                      </a:solidFill>
-                      <a:prstDash val="solid"/>
-                      <a:round/>
-                      <a:headEnd type="none" w="med" len="med"/>
-                      <a:tailEnd type="none" w="med" len="med"/>
-                    </a:lnR>
-                    <a:lnT w="12700" cap="flat" cmpd="sng" algn="ctr">
-                      <a:solidFill>
-                        <a:srgbClr val="D5DADD"/>
-                      </a:solidFill>
-                      <a:prstDash val="solid"/>
-                      <a:round/>
-                      <a:headEnd type="none" w="med" len="med"/>
-                      <a:tailEnd type="none" w="med" len="med"/>
-                    </a:lnT>
-                    <a:lnB w="12700" cap="flat" cmpd="sng" algn="ctr">
-                      <a:solidFill>
-                        <a:srgbClr val="D5DADD"/>
-                      </a:solidFill>
-                      <a:prstDash val="solid"/>
-                      <a:round/>
-                      <a:headEnd type="none" w="med" len="med"/>
-                      <a:tailEnd type="none" w="med" len="med"/>
-                    </a:lnB>
-                  </a:tcPr>
-                </a:tc>
-                <a:tc>
-                  <a:txBody>
-                    <a:bodyPr/>
-                    <a:lstStyle/>
-                    <a:p>
-                      <a:pPr algn="l" indent="0" marL="0">
-                        <a:buNone/>
-                      </a:pPr>
-                      <a:r>
-                        <a:rPr lang="en-US" sz="1300" dirty="0">
-                          <a:solidFill>
-                            <a:srgbClr val="181C1E"/>
-                          </a:solidFill>
-                          <a:latin typeface="Calibri" pitchFamily="34" charset="0"/>
-                          <a:ea typeface="Calibri" pitchFamily="34" charset="-122"/>
-                          <a:cs typeface="Calibri" pitchFamily="34" charset="-120"/>
-                        </a:rPr>
-                        <a:t>$4 / M</a:t>
-                      </a:r>
-                      <a:endParaRPr lang="en-US" sz="1300" dirty="0">
-                        <a:latin typeface="Calibri" charset="0"/>
-                        <a:ea typeface="Calibri" charset="0"/>
-                        <a:cs typeface="Calibri" charset="0"/>
-                      </a:endParaRPr>
-                    </a:p>
-                  </a:txBody>
-                  <a:tcPr marL="91440" marR="91440" marT="45720" marB="45720" anchor="ctr">
-                    <a:lnL w="12700" cap="flat" cmpd="sng" algn="ctr">
-                      <a:solidFill>
-                        <a:srgbClr val="D5DADD"/>
-                      </a:solidFill>
-                      <a:prstDash val="solid"/>
-                      <a:round/>
-                      <a:headEnd type="none" w="med" len="med"/>
-                      <a:tailEnd type="none" w="med" len="med"/>
-                    </a:lnL>
-                    <a:lnR w="12700" cap="flat" cmpd="sng" algn="ctr">
-                      <a:solidFill>
-                        <a:srgbClr val="D5DADD"/>
-                      </a:solidFill>
-                      <a:prstDash val="solid"/>
-                      <a:round/>
-                      <a:headEnd type="none" w="med" len="med"/>
-                      <a:tailEnd type="none" w="med" len="med"/>
-                    </a:lnR>
-                    <a:lnT w="12700" cap="flat" cmpd="sng" algn="ctr">
-                      <a:solidFill>
-                        <a:srgbClr val="D5DADD"/>
-                      </a:solidFill>
-                      <a:prstDash val="solid"/>
-                      <a:round/>
-                      <a:headEnd type="none" w="med" len="med"/>
-                      <a:tailEnd type="none" w="med" len="med"/>
-                    </a:lnT>
-                    <a:lnB w="12700" cap="flat" cmpd="sng" algn="ctr">
-                      <a:solidFill>
-                        <a:srgbClr val="D5DADD"/>
-                      </a:solidFill>
-                      <a:prstDash val="solid"/>
-                      <a:round/>
-                      <a:headEnd type="none" w="med" len="med"/>
-                      <a:tailEnd type="none" w="med" len="med"/>
-                    </a:lnB>
-                  </a:tcPr>
-                </a:tc>
-                <a:tc>
-                  <a:txBody>
-                    <a:bodyPr/>
-                    <a:lstStyle/>
-                    <a:p>
-                      <a:pPr algn="r" indent="0" marL="0">
-                        <a:buNone/>
-                      </a:pPr>
-                      <a:r>
-                        <a:rPr lang="en-US" sz="1300" dirty="0">
-                          <a:solidFill>
-                            <a:srgbClr val="181C1E"/>
-                          </a:solidFill>
-                          <a:latin typeface="Calibri" pitchFamily="34" charset="0"/>
-                          <a:ea typeface="Calibri" pitchFamily="34" charset="-122"/>
-                          <a:cs typeface="Calibri" pitchFamily="34" charset="-120"/>
-                        </a:rPr>
-                        <a:t>0.00</a:t>
-                      </a:r>
-                      <a:endParaRPr lang="en-US" sz="1300" dirty="0">
-                        <a:latin typeface="Calibri" charset="0"/>
-                        <a:ea typeface="Calibri" charset="0"/>
-                        <a:cs typeface="Calibri" charset="0"/>
-                      </a:endParaRPr>
-                    </a:p>
-                  </a:txBody>
-                  <a:tcPr marL="91440" marR="91440" marT="45720" marB="45720" anchor="ctr">
-                    <a:lnL w="12700" cap="flat" cmpd="sng" algn="ctr">
-                      <a:solidFill>
-                        <a:srgbClr val="D5DADD"/>
-                      </a:solidFill>
-                      <a:prstDash val="solid"/>
-                      <a:round/>
-                      <a:headEnd type="none" w="med" len="med"/>
-                      <a:tailEnd type="none" w="med" len="med"/>
-                    </a:lnL>
-                    <a:lnR w="12700" cap="flat" cmpd="sng" algn="ctr">
-                      <a:solidFill>
-                        <a:srgbClr val="D5DADD"/>
-                      </a:solidFill>
-                      <a:prstDash val="solid"/>
-                      <a:round/>
-                      <a:headEnd type="none" w="med" len="med"/>
-                      <a:tailEnd type="none" w="med" len="med"/>
-                    </a:lnR>
-                    <a:lnT w="12700" cap="flat" cmpd="sng" algn="ctr">
-                      <a:solidFill>
-                        <a:srgbClr val="D5DADD"/>
-                      </a:solidFill>
-                      <a:prstDash val="solid"/>
-                      <a:round/>
-                      <a:headEnd type="none" w="med" len="med"/>
-                      <a:tailEnd type="none" w="med" len="med"/>
-                    </a:lnT>
-                    <a:lnB w="12700" cap="flat" cmpd="sng" algn="ctr">
-                      <a:solidFill>
-                        <a:srgbClr val="D5DADD"/>
-                      </a:solidFill>
-                      <a:prstDash val="solid"/>
-                      <a:round/>
-                      <a:headEnd type="none" w="med" len="med"/>
-                      <a:tailEnd type="none" w="med" len="med"/>
-                    </a:lnB>
-                  </a:tcPr>
-                </a:tc>
-                <a:tc>
-                  <a:txBody>
-                    <a:bodyPr/>
-                    <a:lstStyle/>
-                    <a:p>
-                      <a:pPr algn="r" indent="0" marL="0">
-                        <a:buNone/>
-                      </a:pPr>
-                      <a:r>
-                        <a:rPr lang="en-US" sz="1300" dirty="0">
-                          <a:solidFill>
-                            <a:srgbClr val="181C1E"/>
-                          </a:solidFill>
-                          <a:latin typeface="Calibri" pitchFamily="34" charset="0"/>
-                          <a:ea typeface="Calibri" pitchFamily="34" charset="-122"/>
-                          <a:cs typeface="Calibri" pitchFamily="34" charset="-120"/>
-                        </a:rPr>
-                        <a:t>0.00</a:t>
-                      </a:r>
-                      <a:endParaRPr lang="en-US" sz="1300" dirty="0">
-                        <a:latin typeface="Calibri" charset="0"/>
-                        <a:ea typeface="Calibri" charset="0"/>
-                        <a:cs typeface="Calibri" charset="0"/>
-                      </a:endParaRPr>
-                    </a:p>
-                  </a:txBody>
-                  <a:tcPr marL="91440" marR="91440" marT="45720" marB="45720" anchor="ctr">
-                    <a:lnL w="12700" cap="flat" cmpd="sng" algn="ctr">
-                      <a:solidFill>
-                        <a:srgbClr val="D5DADD"/>
-                      </a:solidFill>
-                      <a:prstDash val="solid"/>
-                      <a:round/>
-                      <a:headEnd type="none" w="med" len="med"/>
-                      <a:tailEnd type="none" w="med" len="med"/>
-                    </a:lnL>
-                    <a:lnR w="12700" cap="flat" cmpd="sng" algn="ctr">
-                      <a:solidFill>
-                        <a:srgbClr val="D5DADD"/>
-                      </a:solidFill>
-                      <a:prstDash val="solid"/>
-                      <a:round/>
-                      <a:headEnd type="none" w="med" len="med"/>
-                      <a:tailEnd type="none" w="med" len="med"/>
-                    </a:lnR>
-                    <a:lnT w="12700" cap="flat" cmpd="sng" algn="ctr">
-                      <a:solidFill>
-                        <a:srgbClr val="D5DADD"/>
-                      </a:solidFill>
-                      <a:prstDash val="solid"/>
-                      <a:round/>
-                      <a:headEnd type="none" w="med" len="med"/>
-                      <a:tailEnd type="none" w="med" len="med"/>
-                    </a:lnT>
-                    <a:lnB w="12700" cap="flat" cmpd="sng" algn="ctr">
-                      <a:solidFill>
-                        <a:srgbClr val="D5DADD"/>
-                      </a:solidFill>
-                      <a:prstDash val="solid"/>
-                      <a:round/>
-                      <a:headEnd type="none" w="med" len="med"/>
-                      <a:tailEnd type="none" w="med" len="med"/>
-                    </a:lnB>
-                  </a:tcPr>
-                </a:tc>
-              </a:tr>
-              <a:tr h="411480">
-                <a:tc>
-                  <a:txBody>
-                    <a:bodyPr/>
-                    <a:lstStyle/>
-                    <a:p>
-                      <a:pPr algn="l" indent="0" marL="0">
-                        <a:buNone/>
-                      </a:pPr>
-                      <a:r>
-                        <a:rPr lang="en-US" sz="1300" dirty="0">
-                          <a:solidFill>
-                            <a:srgbClr val="181C1E"/>
-                          </a:solidFill>
-                          <a:latin typeface="Calibri" pitchFamily="34" charset="0"/>
-                          <a:ea typeface="Calibri" pitchFamily="34" charset="-122"/>
-                          <a:cs typeface="Calibri" pitchFamily="34" charset="-120"/>
-                        </a:rPr>
-                        <a:t>Opus: cache reads</a:t>
-                      </a:r>
-                      <a:endParaRPr lang="en-US" sz="1300" dirty="0">
-                        <a:latin typeface="Calibri" charset="0"/>
-                        <a:ea typeface="Calibri" charset="0"/>
-                        <a:cs typeface="Calibri" charset="0"/>
-                      </a:endParaRPr>
-                    </a:p>
-                  </a:txBody>
-                  <a:tcPr marL="91440" marR="91440" marT="45720" marB="45720" anchor="ctr">
-                    <a:lnL w="12700" cap="flat" cmpd="sng" algn="ctr">
-                      <a:solidFill>
-                        <a:srgbClr val="D5DADD"/>
-                      </a:solidFill>
-                      <a:prstDash val="solid"/>
-                      <a:round/>
-                      <a:headEnd type="none" w="med" len="med"/>
-                      <a:tailEnd type="none" w="med" len="med"/>
-                    </a:lnL>
-                    <a:lnR w="12700" cap="flat" cmpd="sng" algn="ctr">
-                      <a:solidFill>
-                        <a:srgbClr val="D5DADD"/>
-                      </a:solidFill>
-                      <a:prstDash val="solid"/>
-                      <a:round/>
-                      <a:headEnd type="none" w="med" len="med"/>
-                      <a:tailEnd type="none" w="med" len="med"/>
-                    </a:lnR>
-                    <a:lnT w="12700" cap="flat" cmpd="sng" algn="ctr">
-                      <a:solidFill>
-                        <a:srgbClr val="D5DADD"/>
-                      </a:solidFill>
-                      <a:prstDash val="solid"/>
-                      <a:round/>
-                      <a:headEnd type="none" w="med" len="med"/>
-                      <a:tailEnd type="none" w="med" len="med"/>
-                    </a:lnT>
-                    <a:lnB w="12700" cap="flat" cmpd="sng" algn="ctr">
-                      <a:solidFill>
-                        <a:srgbClr val="D5DADD"/>
-                      </a:solidFill>
-                      <a:prstDash val="solid"/>
-                      <a:round/>
-                      <a:headEnd type="none" w="med" len="med"/>
-                      <a:tailEnd type="none" w="med" len="med"/>
-                    </a:lnB>
-                  </a:tcPr>
-                </a:tc>
-                <a:tc>
-                  <a:txBody>
-                    <a:bodyPr/>
-                    <a:lstStyle/>
-                    <a:p>
-                      <a:pPr algn="l" indent="0" marL="0">
-                        <a:buNone/>
-                      </a:pPr>
-                      <a:r>
-                        <a:rPr lang="en-US" sz="1300" dirty="0">
-                          <a:solidFill>
-                            <a:srgbClr val="181C1E"/>
-                          </a:solidFill>
-                          <a:latin typeface="Calibri" pitchFamily="34" charset="0"/>
-                          <a:ea typeface="Calibri" pitchFamily="34" charset="-122"/>
-                          <a:cs typeface="Calibri" pitchFamily="34" charset="-120"/>
-                        </a:rPr>
-                        <a:t>3,551,008 tokens</a:t>
-                      </a:r>
-                      <a:endParaRPr lang="en-US" sz="1300" dirty="0">
-                        <a:latin typeface="Calibri" charset="0"/>
-                        <a:ea typeface="Calibri" charset="0"/>
-                        <a:cs typeface="Calibri" charset="0"/>
-                      </a:endParaRPr>
-                    </a:p>
-                  </a:txBody>
-                  <a:tcPr marL="91440" marR="91440" marT="45720" marB="45720" anchor="ctr">
-                    <a:lnL w="12700" cap="flat" cmpd="sng" algn="ctr">
-                      <a:solidFill>
-                        <a:srgbClr val="D5DADD"/>
-                      </a:solidFill>
-                      <a:prstDash val="solid"/>
-                      <a:round/>
-                      <a:headEnd type="none" w="med" len="med"/>
-                      <a:tailEnd type="none" w="med" len="med"/>
-                    </a:lnL>
-                    <a:lnR w="12700" cap="flat" cmpd="sng" algn="ctr">
-                      <a:solidFill>
-                        <a:srgbClr val="D5DADD"/>
-                      </a:solidFill>
-                      <a:prstDash val="solid"/>
-                      <a:round/>
-                      <a:headEnd type="none" w="med" len="med"/>
-                      <a:tailEnd type="none" w="med" len="med"/>
-                    </a:lnR>
-                    <a:lnT w="12700" cap="flat" cmpd="sng" algn="ctr">
-                      <a:solidFill>
-                        <a:srgbClr val="D5DADD"/>
-                      </a:solidFill>
-                      <a:prstDash val="solid"/>
-                      <a:round/>
-                      <a:headEnd type="none" w="med" len="med"/>
-                      <a:tailEnd type="none" w="med" len="med"/>
-                    </a:lnT>
-                    <a:lnB w="12700" cap="flat" cmpd="sng" algn="ctr">
-                      <a:solidFill>
-                        <a:srgbClr val="D5DADD"/>
-                      </a:solidFill>
-                      <a:prstDash val="solid"/>
-                      <a:round/>
-                      <a:headEnd type="none" w="med" len="med"/>
-                      <a:tailEnd type="none" w="med" len="med"/>
-                    </a:lnB>
-                  </a:tcPr>
-                </a:tc>
-                <a:tc>
-                  <a:txBody>
-                    <a:bodyPr/>
-                    <a:lstStyle/>
-                    <a:p>
-                      <a:pPr algn="l" indent="0" marL="0">
-                        <a:buNone/>
-                      </a:pPr>
-                      <a:r>
-                        <a:rPr lang="en-US" sz="1300" dirty="0">
-                          <a:solidFill>
-                            <a:srgbClr val="181C1E"/>
-                          </a:solidFill>
-                          <a:latin typeface="Calibri" pitchFamily="34" charset="0"/>
-                          <a:ea typeface="Calibri" pitchFamily="34" charset="-122"/>
-                          <a:cs typeface="Calibri" pitchFamily="34" charset="-120"/>
-                        </a:rPr>
-                        <a:t>$0.40 / M</a:t>
-                      </a:r>
-                      <a:endParaRPr lang="en-US" sz="1300" dirty="0">
-                        <a:latin typeface="Calibri" charset="0"/>
-                        <a:ea typeface="Calibri" charset="0"/>
-                        <a:cs typeface="Calibri" charset="0"/>
-                      </a:endParaRPr>
-                    </a:p>
-                  </a:txBody>
-                  <a:tcPr marL="91440" marR="91440" marT="45720" marB="45720" anchor="ctr">
-                    <a:lnL w="12700" cap="flat" cmpd="sng" algn="ctr">
-                      <a:solidFill>
-                        <a:srgbClr val="D5DADD"/>
-                      </a:solidFill>
-                      <a:prstDash val="solid"/>
-                      <a:round/>
-                      <a:headEnd type="none" w="med" len="med"/>
-                      <a:tailEnd type="none" w="med" len="med"/>
-                    </a:lnL>
-                    <a:lnR w="12700" cap="flat" cmpd="sng" algn="ctr">
-                      <a:solidFill>
-                        <a:srgbClr val="D5DADD"/>
-                      </a:solidFill>
-                      <a:prstDash val="solid"/>
-                      <a:round/>
-                      <a:headEnd type="none" w="med" len="med"/>
-                      <a:tailEnd type="none" w="med" len="med"/>
-                    </a:lnR>
-                    <a:lnT w="12700" cap="flat" cmpd="sng" algn="ctr">
-                      <a:solidFill>
-                        <a:srgbClr val="D5DADD"/>
-                      </a:solidFill>
-                      <a:prstDash val="solid"/>
-                      <a:round/>
-                      <a:headEnd type="none" w="med" len="med"/>
-                      <a:tailEnd type="none" w="med" len="med"/>
-                    </a:lnT>
-                    <a:lnB w="12700" cap="flat" cmpd="sng" algn="ctr">
-                      <a:solidFill>
-                        <a:srgbClr val="D5DADD"/>
-                      </a:solidFill>
-                      <a:prstDash val="solid"/>
-                      <a:round/>
-                      <a:headEnd type="none" w="med" len="med"/>
-                      <a:tailEnd type="none" w="med" len="med"/>
-                    </a:lnB>
-                  </a:tcPr>
-                </a:tc>
-                <a:tc>
-                  <a:txBody>
-                    <a:bodyPr/>
-                    <a:lstStyle/>
-                    <a:p>
-                      <a:pPr algn="r" indent="0" marL="0">
-                        <a:buNone/>
-                      </a:pPr>
-                      <a:r>
-                        <a:rPr lang="en-US" sz="1300" dirty="0">
-                          <a:solidFill>
-                            <a:srgbClr val="181C1E"/>
-                          </a:solidFill>
-                          <a:latin typeface="Calibri" pitchFamily="34" charset="0"/>
-                          <a:ea typeface="Calibri" pitchFamily="34" charset="-122"/>
-                          <a:cs typeface="Calibri" pitchFamily="34" charset="-120"/>
-                        </a:rPr>
-                        <a:t>1.42</a:t>
-                      </a:r>
-                      <a:endParaRPr lang="en-US" sz="1300" dirty="0">
-                        <a:latin typeface="Calibri" charset="0"/>
-                        <a:ea typeface="Calibri" charset="0"/>
-                        <a:cs typeface="Calibri" charset="0"/>
-                      </a:endParaRPr>
-                    </a:p>
-                  </a:txBody>
-                  <a:tcPr marL="91440" marR="91440" marT="45720" marB="45720" anchor="ctr">
-                    <a:lnL w="12700" cap="flat" cmpd="sng" algn="ctr">
-                      <a:solidFill>
-                        <a:srgbClr val="D5DADD"/>
-                      </a:solidFill>
-                      <a:prstDash val="solid"/>
-                      <a:round/>
-                      <a:headEnd type="none" w="med" len="med"/>
-                      <a:tailEnd type="none" w="med" len="med"/>
-                    </a:lnL>
-                    <a:lnR w="12700" cap="flat" cmpd="sng" algn="ctr">
-                      <a:solidFill>
-                        <a:srgbClr val="D5DADD"/>
-                      </a:solidFill>
-                      <a:prstDash val="solid"/>
-                      <a:round/>
-                      <a:headEnd type="none" w="med" len="med"/>
-                      <a:tailEnd type="none" w="med" len="med"/>
-                    </a:lnR>
-                    <a:lnT w="12700" cap="flat" cmpd="sng" algn="ctr">
-                      <a:solidFill>
-                        <a:srgbClr val="D5DADD"/>
-                      </a:solidFill>
-                      <a:prstDash val="solid"/>
-                      <a:round/>
-                      <a:headEnd type="none" w="med" len="med"/>
-                      <a:tailEnd type="none" w="med" len="med"/>
-                    </a:lnT>
-                    <a:lnB w="12700" cap="flat" cmpd="sng" algn="ctr">
-                      <a:solidFill>
-                        <a:srgbClr val="D5DADD"/>
-                      </a:solidFill>
-                      <a:prstDash val="solid"/>
-                      <a:round/>
-                      <a:headEnd type="none" w="med" len="med"/>
-                      <a:tailEnd type="none" w="med" len="med"/>
-                    </a:lnB>
-                  </a:tcPr>
-                </a:tc>
-                <a:tc>
-                  <a:txBody>
-                    <a:bodyPr/>
-                    <a:lstStyle/>
-                    <a:p>
-                      <a:pPr algn="r" indent="0" marL="0">
-                        <a:buNone/>
-                      </a:pPr>
-                      <a:r>
-                        <a:rPr lang="en-US" sz="1300" dirty="0">
-                          <a:solidFill>
-                            <a:srgbClr val="181C1E"/>
-                          </a:solidFill>
-                          <a:latin typeface="Calibri" pitchFamily="34" charset="0"/>
-                          <a:ea typeface="Calibri" pitchFamily="34" charset="-122"/>
-                          <a:cs typeface="Calibri" pitchFamily="34" charset="-120"/>
-                        </a:rPr>
-                        <a:t>1.81</a:t>
-                      </a:r>
-                      <a:endParaRPr lang="en-US" sz="1300" dirty="0">
-                        <a:latin typeface="Calibri" charset="0"/>
-                        <a:ea typeface="Calibri" charset="0"/>
-                        <a:cs typeface="Calibri" charset="0"/>
-                      </a:endParaRPr>
-                    </a:p>
-                  </a:txBody>
-                  <a:tcPr marL="91440" marR="91440" marT="45720" marB="45720" anchor="ctr">
-                    <a:lnL w="12700" cap="flat" cmpd="sng" algn="ctr">
-                      <a:solidFill>
-                        <a:srgbClr val="D5DADD"/>
-                      </a:solidFill>
-                      <a:prstDash val="solid"/>
-                      <a:round/>
-                      <a:headEnd type="none" w="med" len="med"/>
-                      <a:tailEnd type="none" w="med" len="med"/>
-                    </a:lnL>
-                    <a:lnR w="12700" cap="flat" cmpd="sng" algn="ctr">
-                      <a:solidFill>
-                        <a:srgbClr val="D5DADD"/>
-                      </a:solidFill>
-                      <a:prstDash val="solid"/>
-                      <a:round/>
-                      <a:headEnd type="none" w="med" len="med"/>
-                      <a:tailEnd type="none" w="med" len="med"/>
-                    </a:lnR>
-                    <a:lnT w="12700" cap="flat" cmpd="sng" algn="ctr">
-                      <a:solidFill>
-                        <a:srgbClr val="D5DADD"/>
-                      </a:solidFill>
-                      <a:prstDash val="solid"/>
-                      <a:round/>
-                      <a:headEnd type="none" w="med" len="med"/>
-                      <a:tailEnd type="none" w="med" len="med"/>
-                    </a:lnT>
-                    <a:lnB w="12700" cap="flat" cmpd="sng" algn="ctr">
-                      <a:solidFill>
-                        <a:srgbClr val="D5DADD"/>
-                      </a:solidFill>
-                      <a:prstDash val="solid"/>
-                      <a:round/>
-                      <a:headEnd type="none" w="med" len="med"/>
-                      <a:tailEnd type="none" w="med" len="med"/>
-                    </a:lnB>
-                  </a:tcPr>
-                </a:tc>
-              </a:tr>
-              <a:tr h="411480">
-                <a:tc>
-                  <a:txBody>
-                    <a:bodyPr/>
-                    <a:lstStyle/>
-                    <a:p>
-                      <a:pPr algn="l" indent="0" marL="0">
-                        <a:buNone/>
-                      </a:pPr>
-                      <a:r>
-                        <a:rPr lang="en-US" sz="1300" dirty="0">
-                          <a:solidFill>
-                            <a:srgbClr val="181C1E"/>
-                          </a:solidFill>
-                          <a:latin typeface="Calibri" pitchFamily="34" charset="0"/>
-                          <a:ea typeface="Calibri" pitchFamily="34" charset="-122"/>
-                          <a:cs typeface="Calibri" pitchFamily="34" charset="-120"/>
-                        </a:rPr>
-                        <a:t>Opus: cache writes</a:t>
-                      </a:r>
-                      <a:endParaRPr lang="en-US" sz="1300" dirty="0">
-                        <a:latin typeface="Calibri" charset="0"/>
-                        <a:ea typeface="Calibri" charset="0"/>
-                        <a:cs typeface="Calibri" charset="0"/>
-                      </a:endParaRPr>
-                    </a:p>
-                  </a:txBody>
-                  <a:tcPr marL="91440" marR="91440" marT="45720" marB="45720" anchor="ctr">
-                    <a:lnL w="12700" cap="flat" cmpd="sng" algn="ctr">
-                      <a:solidFill>
-                        <a:srgbClr val="D5DADD"/>
-                      </a:solidFill>
-                      <a:prstDash val="solid"/>
-                      <a:round/>
-                      <a:headEnd type="none" w="med" len="med"/>
-                      <a:tailEnd type="none" w="med" len="med"/>
-                    </a:lnL>
-                    <a:lnR w="12700" cap="flat" cmpd="sng" algn="ctr">
-                      <a:solidFill>
-                        <a:srgbClr val="D5DADD"/>
-                      </a:solidFill>
-                      <a:prstDash val="solid"/>
-                      <a:round/>
-                      <a:headEnd type="none" w="med" len="med"/>
-                      <a:tailEnd type="none" w="med" len="med"/>
-                    </a:lnR>
-                    <a:lnT w="12700" cap="flat" cmpd="sng" algn="ctr">
-                      <a:solidFill>
-                        <a:srgbClr val="D5DADD"/>
-                      </a:solidFill>
-                      <a:prstDash val="solid"/>
-                      <a:round/>
-                      <a:headEnd type="none" w="med" len="med"/>
-                      <a:tailEnd type="none" w="med" len="med"/>
-                    </a:lnT>
-                    <a:lnB w="12700" cap="flat" cmpd="sng" algn="ctr">
-                      <a:solidFill>
-                        <a:srgbClr val="D5DADD"/>
-                      </a:solidFill>
-                      <a:prstDash val="solid"/>
-                      <a:round/>
-                      <a:headEnd type="none" w="med" len="med"/>
-                      <a:tailEnd type="none" w="med" len="med"/>
-                    </a:lnB>
-                  </a:tcPr>
-                </a:tc>
-                <a:tc>
-                  <a:txBody>
-                    <a:bodyPr/>
-                    <a:lstStyle/>
-                    <a:p>
-                      <a:pPr algn="l" indent="0" marL="0">
-                        <a:buNone/>
-                      </a:pPr>
-                      <a:r>
-                        <a:rPr lang="en-US" sz="1300" dirty="0">
-                          <a:solidFill>
-                            <a:srgbClr val="181C1E"/>
-                          </a:solidFill>
-                          <a:latin typeface="Calibri" pitchFamily="34" charset="0"/>
-                          <a:ea typeface="Calibri" pitchFamily="34" charset="-122"/>
-                          <a:cs typeface="Calibri" pitchFamily="34" charset="-120"/>
-                        </a:rPr>
-                        <a:t>540,300 tokens</a:t>
-                      </a:r>
-                      <a:endParaRPr lang="en-US" sz="1300" dirty="0">
-                        <a:latin typeface="Calibri" charset="0"/>
-                        <a:ea typeface="Calibri" charset="0"/>
-                        <a:cs typeface="Calibri" charset="0"/>
-                      </a:endParaRPr>
-                    </a:p>
-                  </a:txBody>
-                  <a:tcPr marL="91440" marR="91440" marT="45720" marB="45720" anchor="ctr">
-                    <a:lnL w="12700" cap="flat" cmpd="sng" algn="ctr">
-                      <a:solidFill>
-                        <a:srgbClr val="D5DADD"/>
-                      </a:solidFill>
-                      <a:prstDash val="solid"/>
-                      <a:round/>
-                      <a:headEnd type="none" w="med" len="med"/>
-                      <a:tailEnd type="none" w="med" len="med"/>
-                    </a:lnL>
-                    <a:lnR w="12700" cap="flat" cmpd="sng" algn="ctr">
-                      <a:solidFill>
-                        <a:srgbClr val="D5DADD"/>
-                      </a:solidFill>
-                      <a:prstDash val="solid"/>
-                      <a:round/>
-                      <a:headEnd type="none" w="med" len="med"/>
-                      <a:tailEnd type="none" w="med" len="med"/>
-                    </a:lnR>
-                    <a:lnT w="12700" cap="flat" cmpd="sng" algn="ctr">
-                      <a:solidFill>
-                        <a:srgbClr val="D5DADD"/>
-                      </a:solidFill>
-                      <a:prstDash val="solid"/>
-                      <a:round/>
-                      <a:headEnd type="none" w="med" len="med"/>
-                      <a:tailEnd type="none" w="med" len="med"/>
-                    </a:lnT>
-                    <a:lnB w="12700" cap="flat" cmpd="sng" algn="ctr">
-                      <a:solidFill>
-                        <a:srgbClr val="D5DADD"/>
-                      </a:solidFill>
-                      <a:prstDash val="solid"/>
-                      <a:round/>
-                      <a:headEnd type="none" w="med" len="med"/>
-                      <a:tailEnd type="none" w="med" len="med"/>
-                    </a:lnB>
-                  </a:tcPr>
-                </a:tc>
-                <a:tc>
-                  <a:txBody>
-                    <a:bodyPr/>
-                    <a:lstStyle/>
-                    <a:p>
-                      <a:pPr algn="l" indent="0" marL="0">
-                        <a:buNone/>
-                      </a:pPr>
-                      <a:r>
-                        <a:rPr lang="en-US" sz="1300" dirty="0">
-                          <a:solidFill>
-                            <a:srgbClr val="181C1E"/>
-                          </a:solidFill>
-                          <a:latin typeface="Calibri" pitchFamily="34" charset="0"/>
-                          <a:ea typeface="Calibri" pitchFamily="34" charset="-122"/>
-                          <a:cs typeface="Calibri" pitchFamily="34" charset="-120"/>
-                        </a:rPr>
-                        <a:t>$5 / M</a:t>
-                      </a:r>
-                      <a:endParaRPr lang="en-US" sz="1300" dirty="0">
-                        <a:latin typeface="Calibri" charset="0"/>
-                        <a:ea typeface="Calibri" charset="0"/>
-                        <a:cs typeface="Calibri" charset="0"/>
-                      </a:endParaRPr>
-                    </a:p>
-                  </a:txBody>
-                  <a:tcPr marL="91440" marR="91440" marT="45720" marB="45720" anchor="ctr">
-                    <a:lnL w="12700" cap="flat" cmpd="sng" algn="ctr">
-                      <a:solidFill>
-                        <a:srgbClr val="D5DADD"/>
-                      </a:solidFill>
-                      <a:prstDash val="solid"/>
-                      <a:round/>
-                      <a:headEnd type="none" w="med" len="med"/>
-                      <a:tailEnd type="none" w="med" len="med"/>
-                    </a:lnL>
-                    <a:lnR w="12700" cap="flat" cmpd="sng" algn="ctr">
-                      <a:solidFill>
-                        <a:srgbClr val="D5DADD"/>
-                      </a:solidFill>
-                      <a:prstDash val="solid"/>
-                      <a:round/>
-                      <a:headEnd type="none" w="med" len="med"/>
-                      <a:tailEnd type="none" w="med" len="med"/>
-                    </a:lnR>
-                    <a:lnT w="12700" cap="flat" cmpd="sng" algn="ctr">
-                      <a:solidFill>
-                        <a:srgbClr val="D5DADD"/>
-                      </a:solidFill>
-                      <a:prstDash val="solid"/>
-                      <a:round/>
-                      <a:headEnd type="none" w="med" len="med"/>
-                      <a:tailEnd type="none" w="med" len="med"/>
-                    </a:lnT>
-                    <a:lnB w="12700" cap="flat" cmpd="sng" algn="ctr">
-                      <a:solidFill>
-                        <a:srgbClr val="D5DADD"/>
-                      </a:solidFill>
-                      <a:prstDash val="solid"/>
-                      <a:round/>
-                      <a:headEnd type="none" w="med" len="med"/>
-                      <a:tailEnd type="none" w="med" len="med"/>
-                    </a:lnB>
-                  </a:tcPr>
-                </a:tc>
-                <a:tc>
-                  <a:txBody>
-                    <a:bodyPr/>
-                    <a:lstStyle/>
-                    <a:p>
-                      <a:pPr algn="r" indent="0" marL="0">
-                        <a:buNone/>
-                      </a:pPr>
-                      <a:r>
-                        <a:rPr lang="en-US" sz="1300" dirty="0">
-                          <a:solidFill>
-                            <a:srgbClr val="181C1E"/>
-                          </a:solidFill>
-                          <a:latin typeface="Calibri" pitchFamily="34" charset="0"/>
-                          <a:ea typeface="Calibri" pitchFamily="34" charset="-122"/>
-                          <a:cs typeface="Calibri" pitchFamily="34" charset="-120"/>
-                        </a:rPr>
-                        <a:t>2.70</a:t>
-                      </a:r>
-                      <a:endParaRPr lang="en-US" sz="1300" dirty="0">
-                        <a:latin typeface="Calibri" charset="0"/>
-                        <a:ea typeface="Calibri" charset="0"/>
-                        <a:cs typeface="Calibri" charset="0"/>
-                      </a:endParaRPr>
-                    </a:p>
-                  </a:txBody>
-                  <a:tcPr marL="91440" marR="91440" marT="45720" marB="45720" anchor="ctr">
-                    <a:lnL w="12700" cap="flat" cmpd="sng" algn="ctr">
-                      <a:solidFill>
-                        <a:srgbClr val="D5DADD"/>
-                      </a:solidFill>
-                      <a:prstDash val="solid"/>
-                      <a:round/>
-                      <a:headEnd type="none" w="med" len="med"/>
-                      <a:tailEnd type="none" w="med" len="med"/>
-                    </a:lnL>
-                    <a:lnR w="12700" cap="flat" cmpd="sng" algn="ctr">
-                      <a:solidFill>
-                        <a:srgbClr val="D5DADD"/>
-                      </a:solidFill>
-                      <a:prstDash val="solid"/>
-                      <a:round/>
-                      <a:headEnd type="none" w="med" len="med"/>
-                      <a:tailEnd type="none" w="med" len="med"/>
-                    </a:lnR>
-                    <a:lnT w="12700" cap="flat" cmpd="sng" algn="ctr">
-                      <a:solidFill>
-                        <a:srgbClr val="D5DADD"/>
-                      </a:solidFill>
-                      <a:prstDash val="solid"/>
-                      <a:round/>
-                      <a:headEnd type="none" w="med" len="med"/>
-                      <a:tailEnd type="none" w="med" len="med"/>
-                    </a:lnT>
-                    <a:lnB w="12700" cap="flat" cmpd="sng" algn="ctr">
-                      <a:solidFill>
-                        <a:srgbClr val="D5DADD"/>
-                      </a:solidFill>
-                      <a:prstDash val="solid"/>
-                      <a:round/>
-                      <a:headEnd type="none" w="med" len="med"/>
-                      <a:tailEnd type="none" w="med" len="med"/>
-                    </a:lnB>
-                  </a:tcPr>
-                </a:tc>
-                <a:tc>
-                  <a:txBody>
-                    <a:bodyPr/>
-                    <a:lstStyle/>
-                    <a:p>
-                      <a:pPr algn="r" indent="0" marL="0">
-                        <a:buNone/>
-                      </a:pPr>
-                      <a:r>
-                        <a:rPr lang="en-US" sz="1300" dirty="0">
-                          <a:solidFill>
-                            <a:srgbClr val="181C1E"/>
-                          </a:solidFill>
-                          <a:latin typeface="Calibri" pitchFamily="34" charset="0"/>
-                          <a:ea typeface="Calibri" pitchFamily="34" charset="-122"/>
-                          <a:cs typeface="Calibri" pitchFamily="34" charset="-120"/>
-                        </a:rPr>
-                        <a:t>3.45</a:t>
-                      </a:r>
-                      <a:endParaRPr lang="en-US" sz="1300" dirty="0">
-                        <a:latin typeface="Calibri" charset="0"/>
-                        <a:ea typeface="Calibri" charset="0"/>
-                        <a:cs typeface="Calibri" charset="0"/>
-                      </a:endParaRPr>
-                    </a:p>
-                  </a:txBody>
-                  <a:tcPr marL="91440" marR="91440" marT="45720" marB="45720" anchor="ctr">
-                    <a:lnL w="12700" cap="flat" cmpd="sng" algn="ctr">
-                      <a:solidFill>
-                        <a:srgbClr val="D5DADD"/>
-                      </a:solidFill>
-                      <a:prstDash val="solid"/>
-                      <a:round/>
-                      <a:headEnd type="none" w="med" len="med"/>
-                      <a:tailEnd type="none" w="med" len="med"/>
-                    </a:lnL>
-                    <a:lnR w="12700" cap="flat" cmpd="sng" algn="ctr">
-                      <a:solidFill>
-                        <a:srgbClr val="D5DADD"/>
-                      </a:solidFill>
-                      <a:prstDash val="solid"/>
-                      <a:round/>
-                      <a:headEnd type="none" w="med" len="med"/>
-                      <a:tailEnd type="none" w="med" len="med"/>
-                    </a:lnR>
-                    <a:lnT w="12700" cap="flat" cmpd="sng" algn="ctr">
-                      <a:solidFill>
-                        <a:srgbClr val="D5DADD"/>
-                      </a:solidFill>
-                      <a:prstDash val="solid"/>
-                      <a:round/>
-                      <a:headEnd type="none" w="med" len="med"/>
-                      <a:tailEnd type="none" w="med" len="med"/>
-                    </a:lnT>
-                    <a:lnB w="12700" cap="flat" cmpd="sng" algn="ctr">
-                      <a:solidFill>
-                        <a:srgbClr val="D5DADD"/>
-                      </a:solidFill>
-                      <a:prstDash val="solid"/>
-                      <a:round/>
-                      <a:headEnd type="none" w="med" len="med"/>
-                      <a:tailEnd type="none" w="med" len="med"/>
-                    </a:lnB>
-                  </a:tcPr>
-                </a:tc>
-              </a:tr>
-              <a:tr h="411480">
-                <a:tc>
-                  <a:txBody>
-                    <a:bodyPr/>
-                    <a:lstStyle/>
-                    <a:p>
-                      <a:pPr algn="l" indent="0" marL="0">
-                        <a:buNone/>
-                      </a:pPr>
-                      <a:r>
-                        <a:rPr lang="en-US" sz="1300" dirty="0">
-                          <a:solidFill>
-                            <a:srgbClr val="181C1E"/>
-                          </a:solidFill>
-                          <a:latin typeface="Calibri" pitchFamily="34" charset="0"/>
-                          <a:ea typeface="Calibri" pitchFamily="34" charset="-122"/>
-                          <a:cs typeface="Calibri" pitchFamily="34" charset="-120"/>
-                        </a:rPr>
-                        <a:t>Opus: output (the data file and checks)</a:t>
-                      </a:r>
-                      <a:endParaRPr lang="en-US" sz="1300" dirty="0">
-                        <a:latin typeface="Calibri" charset="0"/>
-                        <a:ea typeface="Calibri" charset="0"/>
-                        <a:cs typeface="Calibri" charset="0"/>
-                      </a:endParaRPr>
-                    </a:p>
-                  </a:txBody>
-                  <a:tcPr marL="91440" marR="91440" marT="45720" marB="45720" anchor="ctr">
-                    <a:lnL w="12700" cap="flat" cmpd="sng" algn="ctr">
-                      <a:solidFill>
-                        <a:srgbClr val="D5DADD"/>
-                      </a:solidFill>
-                      <a:prstDash val="solid"/>
-                      <a:round/>
-                      <a:headEnd type="none" w="med" len="med"/>
-                      <a:tailEnd type="none" w="med" len="med"/>
-                    </a:lnL>
-                    <a:lnR w="12700" cap="flat" cmpd="sng" algn="ctr">
-                      <a:solidFill>
-                        <a:srgbClr val="D5DADD"/>
-                      </a:solidFill>
-                      <a:prstDash val="solid"/>
-                      <a:round/>
-                      <a:headEnd type="none" w="med" len="med"/>
-                      <a:tailEnd type="none" w="med" len="med"/>
-                    </a:lnR>
-                    <a:lnT w="12700" cap="flat" cmpd="sng" algn="ctr">
-                      <a:solidFill>
-                        <a:srgbClr val="D5DADD"/>
-                      </a:solidFill>
-                      <a:prstDash val="solid"/>
-                      <a:round/>
-                      <a:headEnd type="none" w="med" len="med"/>
-                      <a:tailEnd type="none" w="med" len="med"/>
-                    </a:lnT>
-                    <a:lnB w="12700" cap="flat" cmpd="sng" algn="ctr">
-                      <a:solidFill>
-                        <a:srgbClr val="D5DADD"/>
-                      </a:solidFill>
-                      <a:prstDash val="solid"/>
-                      <a:round/>
-                      <a:headEnd type="none" w="med" len="med"/>
-                      <a:tailEnd type="none" w="med" len="med"/>
-                    </a:lnB>
-                  </a:tcPr>
-                </a:tc>
-                <a:tc>
-                  <a:txBody>
-                    <a:bodyPr/>
-                    <a:lstStyle/>
-                    <a:p>
-                      <a:pPr algn="l" indent="0" marL="0">
-                        <a:buNone/>
-                      </a:pPr>
-                      <a:r>
-                        <a:rPr lang="en-US" sz="1300" dirty="0">
-                          <a:solidFill>
-                            <a:srgbClr val="181C1E"/>
-                          </a:solidFill>
-                          <a:latin typeface="Calibri" pitchFamily="34" charset="0"/>
-                          <a:ea typeface="Calibri" pitchFamily="34" charset="-122"/>
-                          <a:cs typeface="Calibri" pitchFamily="34" charset="-120"/>
-                        </a:rPr>
-                        <a:t>186,650 tokens</a:t>
-                      </a:r>
-                      <a:endParaRPr lang="en-US" sz="1300" dirty="0">
-                        <a:latin typeface="Calibri" charset="0"/>
-                        <a:ea typeface="Calibri" charset="0"/>
-                        <a:cs typeface="Calibri" charset="0"/>
-                      </a:endParaRPr>
-                    </a:p>
-                  </a:txBody>
-                  <a:tcPr marL="91440" marR="91440" marT="45720" marB="45720" anchor="ctr">
-                    <a:lnL w="12700" cap="flat" cmpd="sng" algn="ctr">
-                      <a:solidFill>
-                        <a:srgbClr val="D5DADD"/>
-                      </a:solidFill>
-                      <a:prstDash val="solid"/>
-                      <a:round/>
-                      <a:headEnd type="none" w="med" len="med"/>
-                      <a:tailEnd type="none" w="med" len="med"/>
-                    </a:lnL>
-                    <a:lnR w="12700" cap="flat" cmpd="sng" algn="ctr">
-                      <a:solidFill>
-                        <a:srgbClr val="D5DADD"/>
-                      </a:solidFill>
-                      <a:prstDash val="solid"/>
-                      <a:round/>
-                      <a:headEnd type="none" w="med" len="med"/>
-                      <a:tailEnd type="none" w="med" len="med"/>
-                    </a:lnR>
-                    <a:lnT w="12700" cap="flat" cmpd="sng" algn="ctr">
-                      <a:solidFill>
-                        <a:srgbClr val="D5DADD"/>
-                      </a:solidFill>
-                      <a:prstDash val="solid"/>
-                      <a:round/>
-                      <a:headEnd type="none" w="med" len="med"/>
-                      <a:tailEnd type="none" w="med" len="med"/>
-                    </a:lnT>
-                    <a:lnB w="12700" cap="flat" cmpd="sng" algn="ctr">
-                      <a:solidFill>
-                        <a:srgbClr val="D5DADD"/>
-                      </a:solidFill>
-                      <a:prstDash val="solid"/>
-                      <a:round/>
-                      <a:headEnd type="none" w="med" len="med"/>
-                      <a:tailEnd type="none" w="med" len="med"/>
-                    </a:lnB>
-                  </a:tcPr>
-                </a:tc>
-                <a:tc>
-                  <a:txBody>
-                    <a:bodyPr/>
-                    <a:lstStyle/>
-                    <a:p>
-                      <a:pPr algn="l" indent="0" marL="0">
-                        <a:buNone/>
-                      </a:pPr>
-                      <a:r>
-                        <a:rPr lang="en-US" sz="1300" dirty="0">
-                          <a:solidFill>
-                            <a:srgbClr val="181C1E"/>
-                          </a:solidFill>
-                          <a:latin typeface="Calibri" pitchFamily="34" charset="0"/>
-                          <a:ea typeface="Calibri" pitchFamily="34" charset="-122"/>
-                          <a:cs typeface="Calibri" pitchFamily="34" charset="-120"/>
-                        </a:rPr>
-                        <a:t>$20 / M</a:t>
-                      </a:r>
-                      <a:endParaRPr lang="en-US" sz="1300" dirty="0">
-                        <a:latin typeface="Calibri" charset="0"/>
-                        <a:ea typeface="Calibri" charset="0"/>
-                        <a:cs typeface="Calibri" charset="0"/>
-                      </a:endParaRPr>
-                    </a:p>
-                  </a:txBody>
-                  <a:tcPr marL="91440" marR="91440" marT="45720" marB="45720" anchor="ctr">
-                    <a:lnL w="12700" cap="flat" cmpd="sng" algn="ctr">
-                      <a:solidFill>
-                        <a:srgbClr val="D5DADD"/>
-                      </a:solidFill>
-                      <a:prstDash val="solid"/>
-                      <a:round/>
-                      <a:headEnd type="none" w="med" len="med"/>
-                      <a:tailEnd type="none" w="med" len="med"/>
-                    </a:lnL>
-                    <a:lnR w="12700" cap="flat" cmpd="sng" algn="ctr">
-                      <a:solidFill>
-                        <a:srgbClr val="D5DADD"/>
-                      </a:solidFill>
-                      <a:prstDash val="solid"/>
-                      <a:round/>
-                      <a:headEnd type="none" w="med" len="med"/>
-                      <a:tailEnd type="none" w="med" len="med"/>
-                    </a:lnR>
-                    <a:lnT w="12700" cap="flat" cmpd="sng" algn="ctr">
-                      <a:solidFill>
-                        <a:srgbClr val="D5DADD"/>
-                      </a:solidFill>
-                      <a:prstDash val="solid"/>
-                      <a:round/>
-                      <a:headEnd type="none" w="med" len="med"/>
-                      <a:tailEnd type="none" w="med" len="med"/>
-                    </a:lnT>
-                    <a:lnB w="12700" cap="flat" cmpd="sng" algn="ctr">
-                      <a:solidFill>
-                        <a:srgbClr val="D5DADD"/>
-                      </a:solidFill>
-                      <a:prstDash val="solid"/>
-                      <a:round/>
-                      <a:headEnd type="none" w="med" len="med"/>
-                      <a:tailEnd type="none" w="med" len="med"/>
-                    </a:lnB>
-                  </a:tcPr>
-                </a:tc>
-                <a:tc>
-                  <a:txBody>
-                    <a:bodyPr/>
-                    <a:lstStyle/>
-                    <a:p>
-                      <a:pPr algn="r" indent="0" marL="0">
-                        <a:buNone/>
-                      </a:pPr>
-                      <a:r>
-                        <a:rPr lang="en-US" sz="1300" dirty="0">
-                          <a:solidFill>
-                            <a:srgbClr val="181C1E"/>
-                          </a:solidFill>
-                          <a:latin typeface="Calibri" pitchFamily="34" charset="0"/>
-                          <a:ea typeface="Calibri" pitchFamily="34" charset="-122"/>
-                          <a:cs typeface="Calibri" pitchFamily="34" charset="-120"/>
-                        </a:rPr>
-                        <a:t>3.73</a:t>
-                      </a:r>
-                      <a:endParaRPr lang="en-US" sz="1300" dirty="0">
-                        <a:latin typeface="Calibri" charset="0"/>
-                        <a:ea typeface="Calibri" charset="0"/>
-                        <a:cs typeface="Calibri" charset="0"/>
-                      </a:endParaRPr>
-                    </a:p>
-                  </a:txBody>
-                  <a:tcPr marL="91440" marR="91440" marT="45720" marB="45720" anchor="ctr">
-                    <a:lnL w="12700" cap="flat" cmpd="sng" algn="ctr">
-                      <a:solidFill>
-                        <a:srgbClr val="D5DADD"/>
-                      </a:solidFill>
-                      <a:prstDash val="solid"/>
-                      <a:round/>
-                      <a:headEnd type="none" w="med" len="med"/>
-                      <a:tailEnd type="none" w="med" len="med"/>
-                    </a:lnL>
-                    <a:lnR w="12700" cap="flat" cmpd="sng" algn="ctr">
-                      <a:solidFill>
-                        <a:srgbClr val="D5DADD"/>
-                      </a:solidFill>
-                      <a:prstDash val="solid"/>
-                      <a:round/>
-                      <a:headEnd type="none" w="med" len="med"/>
-                      <a:tailEnd type="none" w="med" len="med"/>
-                    </a:lnR>
-                    <a:lnT w="12700" cap="flat" cmpd="sng" algn="ctr">
-                      <a:solidFill>
-                        <a:srgbClr val="D5DADD"/>
-                      </a:solidFill>
-                      <a:prstDash val="solid"/>
-                      <a:round/>
-                      <a:headEnd type="none" w="med" len="med"/>
-                      <a:tailEnd type="none" w="med" len="med"/>
-                    </a:lnT>
-                    <a:lnB w="12700" cap="flat" cmpd="sng" algn="ctr">
-                      <a:solidFill>
-                        <a:srgbClr val="D5DADD"/>
-                      </a:solidFill>
-                      <a:prstDash val="solid"/>
-                      <a:round/>
-                      <a:headEnd type="none" w="med" len="med"/>
-                      <a:tailEnd type="none" w="med" len="med"/>
-                    </a:lnB>
-                  </a:tcPr>
-                </a:tc>
-                <a:tc>
-                  <a:txBody>
-                    <a:bodyPr/>
-                    <a:lstStyle/>
-                    <a:p>
-                      <a:pPr algn="r" indent="0" marL="0">
-                        <a:buNone/>
-                      </a:pPr>
-                      <a:r>
-                        <a:rPr lang="en-US" sz="1300" dirty="0">
-                          <a:solidFill>
-                            <a:srgbClr val="181C1E"/>
-                          </a:solidFill>
-                          <a:latin typeface="Calibri" pitchFamily="34" charset="0"/>
-                          <a:ea typeface="Calibri" pitchFamily="34" charset="-122"/>
-                          <a:cs typeface="Calibri" pitchFamily="34" charset="-120"/>
-                        </a:rPr>
-                        <a:t>4.77</a:t>
-                      </a:r>
-                      <a:endParaRPr lang="en-US" sz="1300" dirty="0">
-                        <a:latin typeface="Calibri" charset="0"/>
-                        <a:ea typeface="Calibri" charset="0"/>
-                        <a:cs typeface="Calibri" charset="0"/>
-                      </a:endParaRPr>
-                    </a:p>
-                  </a:txBody>
-                  <a:tcPr marL="91440" marR="91440" marT="45720" marB="45720" anchor="ctr">
-                    <a:lnL w="12700" cap="flat" cmpd="sng" algn="ctr">
-                      <a:solidFill>
-                        <a:srgbClr val="D5DADD"/>
-                      </a:solidFill>
-                      <a:prstDash val="solid"/>
-                      <a:round/>
-                      <a:headEnd type="none" w="med" len="med"/>
-                      <a:tailEnd type="none" w="med" len="med"/>
-                    </a:lnL>
-                    <a:lnR w="12700" cap="flat" cmpd="sng" algn="ctr">
-                      <a:solidFill>
-                        <a:srgbClr val="D5DADD"/>
-                      </a:solidFill>
-                      <a:prstDash val="solid"/>
-                      <a:round/>
-                      <a:headEnd type="none" w="med" len="med"/>
-                      <a:tailEnd type="none" w="med" len="med"/>
-                    </a:lnR>
-                    <a:lnT w="12700" cap="flat" cmpd="sng" algn="ctr">
-                      <a:solidFill>
-                        <a:srgbClr val="D5DADD"/>
-                      </a:solidFill>
-                      <a:prstDash val="solid"/>
-                      <a:round/>
-                      <a:headEnd type="none" w="med" len="med"/>
-                      <a:tailEnd type="none" w="med" len="med"/>
-                    </a:lnT>
-                    <a:lnB w="12700" cap="flat" cmpd="sng" algn="ctr">
-                      <a:solidFill>
-                        <a:srgbClr val="D5DADD"/>
-                      </a:solidFill>
-                      <a:prstDash val="solid"/>
-                      <a:round/>
-                      <a:headEnd type="none" w="med" len="med"/>
-                      <a:tailEnd type="none" w="med" len="med"/>
-                    </a:lnB>
-                  </a:tcPr>
-                </a:tc>
-              </a:tr>
-              <a:tr h="411480">
-                <a:tc>
-                  <a:txBody>
-                    <a:bodyPr/>
-                    <a:lstStyle/>
-                    <a:p>
-                      <a:pPr algn="l" indent="0" marL="0">
-                        <a:buNone/>
-                      </a:pPr>
-                      <a:r>
-                        <a:rPr lang="en-US" sz="1300" b="1" dirty="0">
-                          <a:solidFill>
-                            <a:srgbClr val="181C1E"/>
-                          </a:solidFill>
-                          <a:latin typeface="Calibri" pitchFamily="34" charset="0"/>
-                          <a:ea typeface="Calibri" pitchFamily="34" charset="-122"/>
-                          <a:cs typeface="Calibri" pitchFamily="34" charset="-120"/>
-                        </a:rPr>
-                        <a:t>Total, our estimate</a:t>
-                      </a:r>
-                      <a:endParaRPr lang="en-US" sz="1300" dirty="0">
-                        <a:latin typeface="Calibri" charset="0"/>
-                        <a:ea typeface="Calibri" charset="0"/>
-                        <a:cs typeface="Calibri" charset="0"/>
-                      </a:endParaRPr>
-                    </a:p>
-                  </a:txBody>
-                  <a:tcPr marL="91440" marR="91440" marT="45720" marB="45720" anchor="ctr">
-                    <a:lnL w="12700" cap="flat" cmpd="sng" algn="ctr">
-                      <a:solidFill>
-                        <a:srgbClr val="D5DADD"/>
-                      </a:solidFill>
-                      <a:prstDash val="solid"/>
-                      <a:round/>
-                      <a:headEnd type="none" w="med" len="med"/>
-                      <a:tailEnd type="none" w="med" len="med"/>
-                    </a:lnL>
-                    <a:lnR w="12700" cap="flat" cmpd="sng" algn="ctr">
-                      <a:solidFill>
-                        <a:srgbClr val="D5DADD"/>
-                      </a:solidFill>
-                      <a:prstDash val="solid"/>
-                      <a:round/>
-                      <a:headEnd type="none" w="med" len="med"/>
-                      <a:tailEnd type="none" w="med" len="med"/>
-                    </a:lnR>
-                    <a:lnT w="12700" cap="flat" cmpd="sng" algn="ctr">
-                      <a:solidFill>
-                        <a:srgbClr val="D5DADD"/>
-                      </a:solidFill>
-                      <a:prstDash val="solid"/>
-                      <a:round/>
-                      <a:headEnd type="none" w="med" len="med"/>
-                      <a:tailEnd type="none" w="med" len="med"/>
-                    </a:lnT>
-                    <a:lnB w="12700" cap="flat" cmpd="sng" algn="ctr">
-                      <a:solidFill>
-                        <a:srgbClr val="D5DADD"/>
-                      </a:solidFill>
-                      <a:prstDash val="solid"/>
-                      <a:round/>
-                      <a:headEnd type="none" w="med" len="med"/>
-                      <a:tailEnd type="none" w="med" len="med"/>
-                    </a:lnB>
-                    <a:solidFill>
-                      <a:srgbClr val="EEF1F3"/>
-                    </a:solidFill>
-                  </a:tcPr>
-                </a:tc>
-                <a:tc>
-                  <a:txBody>
-                    <a:bodyPr/>
-                    <a:lstStyle/>
-                    <a:p>
-                      <a:pPr algn="l" indent="0" marL="0">
-                        <a:buNone/>
-                      </a:pPr>
-                      <a:endParaRPr lang="en-US" sz="1300" dirty="0">
-                        <a:latin typeface="Calibri" charset="0"/>
-                        <a:ea typeface="Calibri" charset="0"/>
-                        <a:cs typeface="Calibri" charset="0"/>
-                      </a:endParaRPr>
-                    </a:p>
-                  </a:txBody>
-                  <a:tcPr marL="91440" marR="91440" marT="45720" marB="45720" anchor="ctr">
-                    <a:lnL w="12700" cap="flat" cmpd="sng" algn="ctr">
-                      <a:solidFill>
-                        <a:srgbClr val="D5DADD"/>
-                      </a:solidFill>
-                      <a:prstDash val="solid"/>
-                      <a:round/>
-                      <a:headEnd type="none" w="med" len="med"/>
-                      <a:tailEnd type="none" w="med" len="med"/>
-                    </a:lnL>
-                    <a:lnR w="12700" cap="flat" cmpd="sng" algn="ctr">
-                      <a:solidFill>
-                        <a:srgbClr val="D5DADD"/>
-                      </a:solidFill>
-                      <a:prstDash val="solid"/>
-                      <a:round/>
-                      <a:headEnd type="none" w="med" len="med"/>
-                      <a:tailEnd type="none" w="med" len="med"/>
-                    </a:lnR>
-                    <a:lnT w="12700" cap="flat" cmpd="sng" algn="ctr">
-                      <a:solidFill>
-                        <a:srgbClr val="D5DADD"/>
-                      </a:solidFill>
-                      <a:prstDash val="solid"/>
-                      <a:round/>
-                      <a:headEnd type="none" w="med" len="med"/>
-                      <a:tailEnd type="none" w="med" len="med"/>
-                    </a:lnT>
-                    <a:lnB w="12700" cap="flat" cmpd="sng" algn="ctr">
-                      <a:solidFill>
-                        <a:srgbClr val="D5DADD"/>
-                      </a:solidFill>
-                      <a:prstDash val="solid"/>
-                      <a:round/>
-                      <a:headEnd type="none" w="med" len="med"/>
-                      <a:tailEnd type="none" w="med" len="med"/>
-                    </a:lnB>
-                    <a:solidFill>
-                      <a:srgbClr val="EEF1F3"/>
-                    </a:solidFill>
-                  </a:tcPr>
-                </a:tc>
-                <a:tc>
-                  <a:txBody>
-                    <a:bodyPr/>
-                    <a:lstStyle/>
-                    <a:p>
-                      <a:pPr algn="l" indent="0" marL="0">
-                        <a:buNone/>
-                      </a:pPr>
-                      <a:endParaRPr lang="en-US" sz="1300" dirty="0">
-                        <a:latin typeface="Calibri" charset="0"/>
-                        <a:ea typeface="Calibri" charset="0"/>
-                        <a:cs typeface="Calibri" charset="0"/>
-                      </a:endParaRPr>
-                    </a:p>
-                  </a:txBody>
-                  <a:tcPr marL="91440" marR="91440" marT="45720" marB="45720" anchor="ctr">
-                    <a:lnL w="12700" cap="flat" cmpd="sng" algn="ctr">
-                      <a:solidFill>
-                        <a:srgbClr val="D5DADD"/>
-                      </a:solidFill>
-                      <a:prstDash val="solid"/>
-                      <a:round/>
-                      <a:headEnd type="none" w="med" len="med"/>
-                      <a:tailEnd type="none" w="med" len="med"/>
-                    </a:lnL>
-                    <a:lnR w="12700" cap="flat" cmpd="sng" algn="ctr">
-                      <a:solidFill>
-                        <a:srgbClr val="D5DADD"/>
-                      </a:solidFill>
-                      <a:prstDash val="solid"/>
-                      <a:round/>
-                      <a:headEnd type="none" w="med" len="med"/>
-                      <a:tailEnd type="none" w="med" len="med"/>
-                    </a:lnR>
-                    <a:lnT w="12700" cap="flat" cmpd="sng" algn="ctr">
-                      <a:solidFill>
-                        <a:srgbClr val="D5DADD"/>
-                      </a:solidFill>
-                      <a:prstDash val="solid"/>
-                      <a:round/>
-                      <a:headEnd type="none" w="med" len="med"/>
-                      <a:tailEnd type="none" w="med" len="med"/>
-                    </a:lnT>
-                    <a:lnB w="12700" cap="flat" cmpd="sng" algn="ctr">
-                      <a:solidFill>
-                        <a:srgbClr val="D5DADD"/>
-                      </a:solidFill>
-                      <a:prstDash val="solid"/>
-                      <a:round/>
-                      <a:headEnd type="none" w="med" len="med"/>
-                      <a:tailEnd type="none" w="med" len="med"/>
-                    </a:lnB>
-                    <a:solidFill>
-                      <a:srgbClr val="EEF1F3"/>
-                    </a:solidFill>
-                  </a:tcPr>
-                </a:tc>
-                <a:tc>
-                  <a:txBody>
-                    <a:bodyPr/>
-                    <a:lstStyle/>
-                    <a:p>
-                      <a:pPr algn="r" indent="0" marL="0">
-                        <a:buNone/>
-                      </a:pPr>
-                      <a:r>
-                        <a:rPr lang="en-US" sz="1300" b="1" dirty="0">
-                          <a:solidFill>
-                            <a:srgbClr val="181C1E"/>
-                          </a:solidFill>
-                          <a:latin typeface="Calibri" pitchFamily="34" charset="0"/>
-                          <a:ea typeface="Calibri" pitchFamily="34" charset="-122"/>
-                          <a:cs typeface="Calibri" pitchFamily="34" charset="-120"/>
-                        </a:rPr>
-                        <a:t>10.02</a:t>
-                      </a:r>
-                      <a:endParaRPr lang="en-US" sz="1300" dirty="0">
-                        <a:latin typeface="Calibri" charset="0"/>
-                        <a:ea typeface="Calibri" charset="0"/>
-                        <a:cs typeface="Calibri" charset="0"/>
-                      </a:endParaRPr>
-                    </a:p>
-                  </a:txBody>
-                  <a:tcPr marL="91440" marR="91440" marT="45720" marB="45720" anchor="ctr">
-                    <a:lnL w="12700" cap="flat" cmpd="sng" algn="ctr">
-                      <a:solidFill>
-                        <a:srgbClr val="D5DADD"/>
-                      </a:solidFill>
-                      <a:prstDash val="solid"/>
-                      <a:round/>
-                      <a:headEnd type="none" w="med" len="med"/>
-                      <a:tailEnd type="none" w="med" len="med"/>
-                    </a:lnL>
-                    <a:lnR w="12700" cap="flat" cmpd="sng" algn="ctr">
-                      <a:solidFill>
-                        <a:srgbClr val="D5DADD"/>
-                      </a:solidFill>
-                      <a:prstDash val="solid"/>
-                      <a:round/>
-                      <a:headEnd type="none" w="med" len="med"/>
-                      <a:tailEnd type="none" w="med" len="med"/>
-                    </a:lnR>
-                    <a:lnT w="12700" cap="flat" cmpd="sng" algn="ctr">
-                      <a:solidFill>
-                        <a:srgbClr val="D5DADD"/>
-                      </a:solidFill>
-                      <a:prstDash val="solid"/>
-                      <a:round/>
-                      <a:headEnd type="none" w="med" len="med"/>
-                      <a:tailEnd type="none" w="med" len="med"/>
-                    </a:lnT>
-                    <a:lnB w="12700" cap="flat" cmpd="sng" algn="ctr">
-                      <a:solidFill>
-                        <a:srgbClr val="D5DADD"/>
-                      </a:solidFill>
-                      <a:prstDash val="solid"/>
-                      <a:round/>
-                      <a:headEnd type="none" w="med" len="med"/>
-                      <a:tailEnd type="none" w="med" len="med"/>
-                    </a:lnB>
-                    <a:solidFill>
-                      <a:srgbClr val="EEF1F3"/>
-                    </a:solidFill>
-                  </a:tcPr>
-                </a:tc>
-                <a:tc>
-                  <a:txBody>
-                    <a:bodyPr/>
-                    <a:lstStyle/>
-                    <a:p>
-                      <a:pPr algn="r" indent="0" marL="0">
-                        <a:buNone/>
-                      </a:pPr>
-                      <a:r>
-                        <a:rPr lang="en-US" sz="1300" b="1" dirty="0">
-                          <a:solidFill>
-                            <a:srgbClr val="181C1E"/>
-                          </a:solidFill>
-                          <a:latin typeface="Calibri" pitchFamily="34" charset="0"/>
-                          <a:ea typeface="Calibri" pitchFamily="34" charset="-122"/>
-                          <a:cs typeface="Calibri" pitchFamily="34" charset="-120"/>
-                        </a:rPr>
-                        <a:t>12.80</a:t>
-                      </a:r>
-                      <a:endParaRPr lang="en-US" sz="1300" dirty="0">
-                        <a:latin typeface="Calibri" charset="0"/>
-                        <a:ea typeface="Calibri" charset="0"/>
-                        <a:cs typeface="Calibri" charset="0"/>
-                      </a:endParaRPr>
-                    </a:p>
-                  </a:txBody>
-                  <a:tcPr marL="91440" marR="91440" marT="45720" marB="45720" anchor="ctr">
-                    <a:lnL w="12700" cap="flat" cmpd="sng" algn="ctr">
-                      <a:solidFill>
-                        <a:srgbClr val="D5DADD"/>
-                      </a:solidFill>
-                      <a:prstDash val="solid"/>
-                      <a:round/>
-                      <a:headEnd type="none" w="med" len="med"/>
-                      <a:tailEnd type="none" w="med" len="med"/>
-                    </a:lnL>
-                    <a:lnR w="12700" cap="flat" cmpd="sng" algn="ctr">
-                      <a:solidFill>
-                        <a:srgbClr val="D5DADD"/>
-                      </a:solidFill>
-                      <a:prstDash val="solid"/>
-                      <a:round/>
-                      <a:headEnd type="none" w="med" len="med"/>
-                      <a:tailEnd type="none" w="med" len="med"/>
-                    </a:lnR>
-                    <a:lnT w="12700" cap="flat" cmpd="sng" algn="ctr">
-                      <a:solidFill>
-                        <a:srgbClr val="D5DADD"/>
-                      </a:solidFill>
-                      <a:prstDash val="solid"/>
-                      <a:round/>
-                      <a:headEnd type="none" w="med" len="med"/>
-                      <a:tailEnd type="none" w="med" len="med"/>
-                    </a:lnT>
-                    <a:lnB w="12700" cap="flat" cmpd="sng" algn="ctr">
-                      <a:solidFill>
-                        <a:srgbClr val="D5DADD"/>
-                      </a:solidFill>
-                      <a:prstDash val="solid"/>
-                      <a:round/>
-                      <a:headEnd type="none" w="med" len="med"/>
-                      <a:tailEnd type="none" w="med" len="med"/>
-                    </a:lnB>
-                    <a:solidFill>
-                      <a:srgbClr val="EEF1F3"/>
-                    </a:solidFill>
-                  </a:tcPr>
-                </a:tc>
-              </a:tr>
-              <a:tr h="411480">
-                <a:tc>
-                  <a:txBody>
-                    <a:bodyPr/>
-                    <a:lstStyle/>
-                    <a:p>
-                      <a:pPr algn="l" indent="0" marL="0">
-                        <a:buNone/>
-                      </a:pPr>
-                      <a:r>
-                        <a:rPr lang="en-US" sz="1300" b="1" dirty="0">
-                          <a:solidFill>
-                            <a:srgbClr val="181C1E"/>
-                          </a:solidFill>
-                          <a:latin typeface="Calibri" pitchFamily="34" charset="0"/>
-                          <a:ea typeface="Calibri" pitchFamily="34" charset="-122"/>
-                          <a:cs typeface="Calibri" pitchFamily="34" charset="-120"/>
-                        </a:rPr>
-                        <a:t>Claude Code’s own reported cost</a:t>
-                      </a:r>
-                      <a:endParaRPr lang="en-US" sz="1300" dirty="0">
-                        <a:latin typeface="Calibri" charset="0"/>
-                        <a:ea typeface="Calibri" charset="0"/>
-                        <a:cs typeface="Calibri" charset="0"/>
-                      </a:endParaRPr>
-                    </a:p>
-                  </a:txBody>
-                  <a:tcPr marL="91440" marR="91440" marT="45720" marB="45720" anchor="ctr">
-                    <a:lnL w="12700" cap="flat" cmpd="sng" algn="ctr">
-                      <a:solidFill>
-                        <a:srgbClr val="D5DADD"/>
-                      </a:solidFill>
-                      <a:prstDash val="solid"/>
-                      <a:round/>
-                      <a:headEnd type="none" w="med" len="med"/>
-                      <a:tailEnd type="none" w="med" len="med"/>
-                    </a:lnL>
-                    <a:lnR w="12700" cap="flat" cmpd="sng" algn="ctr">
-                      <a:solidFill>
-                        <a:srgbClr val="D5DADD"/>
-                      </a:solidFill>
-                      <a:prstDash val="solid"/>
-                      <a:round/>
-                      <a:headEnd type="none" w="med" len="med"/>
-                      <a:tailEnd type="none" w="med" len="med"/>
-                    </a:lnR>
-                    <a:lnT w="12700" cap="flat" cmpd="sng" algn="ctr">
-                      <a:solidFill>
-                        <a:srgbClr val="D5DADD"/>
-                      </a:solidFill>
-                      <a:prstDash val="solid"/>
-                      <a:round/>
-                      <a:headEnd type="none" w="med" len="med"/>
-                      <a:tailEnd type="none" w="med" len="med"/>
-                    </a:lnT>
-                    <a:lnB w="12700" cap="flat" cmpd="sng" algn="ctr">
-                      <a:solidFill>
-                        <a:srgbClr val="D5DADD"/>
-                      </a:solidFill>
-                      <a:prstDash val="solid"/>
-                      <a:round/>
-                      <a:headEnd type="none" w="med" len="med"/>
-                      <a:tailEnd type="none" w="med" len="med"/>
-                    </a:lnB>
-                    <a:solidFill>
-                      <a:srgbClr val="EEF1F3"/>
-                    </a:solidFill>
-                  </a:tcPr>
-                </a:tc>
-                <a:tc>
-                  <a:txBody>
-                    <a:bodyPr/>
-                    <a:lstStyle/>
-                    <a:p>
-                      <a:pPr algn="l" indent="0" marL="0">
-                        <a:buNone/>
-                      </a:pPr>
-                      <a:r>
-                        <a:rPr lang="en-US" sz="1300" b="1" dirty="0">
-                          <a:solidFill>
-                            <a:srgbClr val="181C1E"/>
-                          </a:solidFill>
-                          <a:latin typeface="Calibri" pitchFamily="34" charset="0"/>
-                          <a:ea typeface="Calibri" pitchFamily="34" charset="-122"/>
-                          <a:cs typeface="Calibri" pitchFamily="34" charset="-120"/>
-                        </a:rPr>
-                        <a:t>Haiku $2.16 + Opus $7.63</a:t>
-                      </a:r>
-                      <a:endParaRPr lang="en-US" sz="1300" dirty="0">
-                        <a:latin typeface="Calibri" charset="0"/>
-                        <a:ea typeface="Calibri" charset="0"/>
-                        <a:cs typeface="Calibri" charset="0"/>
-                      </a:endParaRPr>
-                    </a:p>
-                  </a:txBody>
-                  <a:tcPr marL="91440" marR="91440" marT="45720" marB="45720" anchor="ctr">
-                    <a:lnL w="12700" cap="flat" cmpd="sng" algn="ctr">
-                      <a:solidFill>
-                        <a:srgbClr val="D5DADD"/>
-                      </a:solidFill>
-                      <a:prstDash val="solid"/>
-                      <a:round/>
-                      <a:headEnd type="none" w="med" len="med"/>
-                      <a:tailEnd type="none" w="med" len="med"/>
-                    </a:lnL>
-                    <a:lnR w="12700" cap="flat" cmpd="sng" algn="ctr">
-                      <a:solidFill>
-                        <a:srgbClr val="D5DADD"/>
-                      </a:solidFill>
-                      <a:prstDash val="solid"/>
-                      <a:round/>
-                      <a:headEnd type="none" w="med" len="med"/>
-                      <a:tailEnd type="none" w="med" len="med"/>
-                    </a:lnR>
-                    <a:lnT w="12700" cap="flat" cmpd="sng" algn="ctr">
-                      <a:solidFill>
-                        <a:srgbClr val="D5DADD"/>
-                      </a:solidFill>
-                      <a:prstDash val="solid"/>
-                      <a:round/>
-                      <a:headEnd type="none" w="med" len="med"/>
-                      <a:tailEnd type="none" w="med" len="med"/>
-                    </a:lnT>
-                    <a:lnB w="12700" cap="flat" cmpd="sng" algn="ctr">
-                      <a:solidFill>
-                        <a:srgbClr val="D5DADD"/>
-                      </a:solidFill>
-                      <a:prstDash val="solid"/>
-                      <a:round/>
-                      <a:headEnd type="none" w="med" len="med"/>
-                      <a:tailEnd type="none" w="med" len="med"/>
-                    </a:lnB>
-                    <a:solidFill>
-                      <a:srgbClr val="EEF1F3"/>
-                    </a:solidFill>
-                  </a:tcPr>
-                </a:tc>
-                <a:tc>
-                  <a:txBody>
-                    <a:bodyPr/>
-                    <a:lstStyle/>
-                    <a:p>
-                      <a:pPr algn="l" indent="0" marL="0">
-                        <a:buNone/>
-                      </a:pPr>
-                      <a:endParaRPr lang="en-US" sz="1300" dirty="0">
-                        <a:latin typeface="Calibri" charset="0"/>
-                        <a:ea typeface="Calibri" charset="0"/>
-                        <a:cs typeface="Calibri" charset="0"/>
-                      </a:endParaRPr>
-                    </a:p>
-                  </a:txBody>
-                  <a:tcPr marL="91440" marR="91440" marT="45720" marB="45720" anchor="ctr">
-                    <a:lnL w="12700" cap="flat" cmpd="sng" algn="ctr">
-                      <a:solidFill>
-                        <a:srgbClr val="D5DADD"/>
-                      </a:solidFill>
-                      <a:prstDash val="solid"/>
-                      <a:round/>
-                      <a:headEnd type="none" w="med" len="med"/>
-                      <a:tailEnd type="none" w="med" len="med"/>
-                    </a:lnL>
-                    <a:lnR w="12700" cap="flat" cmpd="sng" algn="ctr">
-                      <a:solidFill>
-                        <a:srgbClr val="D5DADD"/>
-                      </a:solidFill>
-                      <a:prstDash val="solid"/>
-                      <a:round/>
-                      <a:headEnd type="none" w="med" len="med"/>
-                      <a:tailEnd type="none" w="med" len="med"/>
-                    </a:lnR>
-                    <a:lnT w="12700" cap="flat" cmpd="sng" algn="ctr">
-                      <a:solidFill>
-                        <a:srgbClr val="D5DADD"/>
-                      </a:solidFill>
-                      <a:prstDash val="solid"/>
-                      <a:round/>
-                      <a:headEnd type="none" w="med" len="med"/>
-                      <a:tailEnd type="none" w="med" len="med"/>
-                    </a:lnT>
-                    <a:lnB w="12700" cap="flat" cmpd="sng" algn="ctr">
-                      <a:solidFill>
-                        <a:srgbClr val="D5DADD"/>
-                      </a:solidFill>
-                      <a:prstDash val="solid"/>
-                      <a:round/>
-                      <a:headEnd type="none" w="med" len="med"/>
-                      <a:tailEnd type="none" w="med" len="med"/>
-                    </a:lnB>
-                    <a:solidFill>
-                      <a:srgbClr val="EEF1F3"/>
-                    </a:solidFill>
-                  </a:tcPr>
-                </a:tc>
-                <a:tc>
-                  <a:txBody>
-                    <a:bodyPr/>
-                    <a:lstStyle/>
-                    <a:p>
-                      <a:pPr algn="r" indent="0" marL="0">
-                        <a:buNone/>
-                      </a:pPr>
-                      <a:r>
-                        <a:rPr lang="en-US" sz="1300" b="1" dirty="0">
-                          <a:solidFill>
-                            <a:srgbClr val="181C1E"/>
-                          </a:solidFill>
-                          <a:latin typeface="Calibri" pitchFamily="34" charset="0"/>
-                          <a:ea typeface="Calibri" pitchFamily="34" charset="-122"/>
-                          <a:cs typeface="Calibri" pitchFamily="34" charset="-120"/>
-                        </a:rPr>
-                        <a:t>9.80</a:t>
-                      </a:r>
-                      <a:endParaRPr lang="en-US" sz="1300" dirty="0">
-                        <a:latin typeface="Calibri" charset="0"/>
-                        <a:ea typeface="Calibri" charset="0"/>
-                        <a:cs typeface="Calibri" charset="0"/>
-                      </a:endParaRPr>
-                    </a:p>
-                  </a:txBody>
-                  <a:tcPr marL="91440" marR="91440" marT="45720" marB="45720" anchor="ctr">
-                    <a:lnL w="12700" cap="flat" cmpd="sng" algn="ctr">
-                      <a:solidFill>
-                        <a:srgbClr val="D5DADD"/>
-                      </a:solidFill>
-                      <a:prstDash val="solid"/>
-                      <a:round/>
-                      <a:headEnd type="none" w="med" len="med"/>
-                      <a:tailEnd type="none" w="med" len="med"/>
-                    </a:lnL>
-                    <a:lnR w="12700" cap="flat" cmpd="sng" algn="ctr">
-                      <a:solidFill>
-                        <a:srgbClr val="D5DADD"/>
-                      </a:solidFill>
-                      <a:prstDash val="solid"/>
-                      <a:round/>
-                      <a:headEnd type="none" w="med" len="med"/>
-                      <a:tailEnd type="none" w="med" len="med"/>
-                    </a:lnR>
-                    <a:lnT w="12700" cap="flat" cmpd="sng" algn="ctr">
-                      <a:solidFill>
-                        <a:srgbClr val="D5DADD"/>
-                      </a:solidFill>
-                      <a:prstDash val="solid"/>
-                      <a:round/>
-                      <a:headEnd type="none" w="med" len="med"/>
-                      <a:tailEnd type="none" w="med" len="med"/>
-                    </a:lnT>
-                    <a:lnB w="12700" cap="flat" cmpd="sng" algn="ctr">
-                      <a:solidFill>
-                        <a:srgbClr val="D5DADD"/>
-                      </a:solidFill>
-                      <a:prstDash val="solid"/>
-                      <a:round/>
-                      <a:headEnd type="none" w="med" len="med"/>
-                      <a:tailEnd type="none" w="med" len="med"/>
-                    </a:lnB>
-                    <a:solidFill>
-                      <a:srgbClr val="EEF1F3"/>
-                    </a:solidFill>
-                  </a:tcPr>
-                </a:tc>
-                <a:tc>
-                  <a:txBody>
-                    <a:bodyPr/>
-                    <a:lstStyle/>
-                    <a:p>
-                      <a:pPr algn="r" indent="0" marL="0">
-                        <a:buNone/>
-                      </a:pPr>
-                      <a:r>
-                        <a:rPr lang="en-US" sz="1300" b="1" dirty="0">
-                          <a:solidFill>
-                            <a:srgbClr val="181C1E"/>
-                          </a:solidFill>
-                          <a:latin typeface="Calibri" pitchFamily="34" charset="0"/>
-                          <a:ea typeface="Calibri" pitchFamily="34" charset="-122"/>
-                          <a:cs typeface="Calibri" pitchFamily="34" charset="-120"/>
-                        </a:rPr>
-                        <a:t>12.51</a:t>
-                      </a:r>
-                      <a:endParaRPr lang="en-US" sz="1300" dirty="0">
-                        <a:latin typeface="Calibri" charset="0"/>
-                        <a:ea typeface="Calibri" charset="0"/>
-                        <a:cs typeface="Calibri" charset="0"/>
-                      </a:endParaRPr>
-                    </a:p>
-                  </a:txBody>
-                  <a:tcPr marL="91440" marR="91440" marT="45720" marB="45720" anchor="ctr">
-                    <a:lnL w="12700" cap="flat" cmpd="sng" algn="ctr">
-                      <a:solidFill>
-                        <a:srgbClr val="D5DADD"/>
-                      </a:solidFill>
-                      <a:prstDash val="solid"/>
-                      <a:round/>
-                      <a:headEnd type="none" w="med" len="med"/>
-                      <a:tailEnd type="none" w="med" len="med"/>
-                    </a:lnL>
-                    <a:lnR w="12700" cap="flat" cmpd="sng" algn="ctr">
-                      <a:solidFill>
-                        <a:srgbClr val="D5DADD"/>
-                      </a:solidFill>
-                      <a:prstDash val="solid"/>
-                      <a:round/>
-                      <a:headEnd type="none" w="med" len="med"/>
-                      <a:tailEnd type="none" w="med" len="med"/>
-                    </a:lnR>
-                    <a:lnT w="12700" cap="flat" cmpd="sng" algn="ctr">
-                      <a:solidFill>
-                        <a:srgbClr val="D5DADD"/>
-                      </a:solidFill>
-                      <a:prstDash val="solid"/>
-                      <a:round/>
-                      <a:headEnd type="none" w="med" len="med"/>
-                      <a:tailEnd type="none" w="med" len="med"/>
-                    </a:lnT>
-                    <a:lnB w="12700" cap="flat" cmpd="sng" algn="ctr">
-                      <a:solidFill>
-                        <a:srgbClr val="D5DADD"/>
-                      </a:solidFill>
-                      <a:prstDash val="solid"/>
-                      <a:round/>
-                      <a:headEnd type="none" w="med" len="med"/>
-                      <a:tailEnd type="none" w="med" len="med"/>
-                    </a:lnB>
-                    <a:solidFill>
-                      <a:srgbClr val="EEF1F3"/>
-                    </a:solidFill>
-                  </a:tcPr>
-                </a:tc>
-              </a:tr>
-            </a:tbl>
+        <a:graphic xmlns:a="http://schemas.openxmlformats.org/drawingml/2006/main">
+          <a:graphicData uri="http://schemas.openxmlformats.org/drawingml/2006/chart">
+            <c:chart xmlns:c="http://schemas.openxmlformats.org/drawingml/2006/chart" r:id="rId1"/>
           </a:graphicData>
         </a:graphic>
       </p:graphicFrame>
       <p:sp>
         <p:nvSpPr>
-          <p:cNvPr id="4" name="Text 1"/>
+          <p:cNvPr id="6" name="Text 3"/>
+          <p:cNvSpPr txBox="1"/>
+          <p:nvPr/>
+        </p:nvSpPr>
+        <p:spPr>
+          <a:xfrm>
+            <a:off x="822960" y="5029200"/>
+            <a:ext cx="5303520" cy="777240"/>
+          </a:xfrm>
+          <a:prstGeom prst="rect">
+            <a:avLst/>
+          </a:prstGeom>
+          <a:noFill/>
+          <a:ln/>
+        </p:spPr>
+        <p:txBody>
+          <a:bodyPr wrap="square" lIns="0" tIns="0" rIns="0" bIns="0" rtlCol="0" anchor="t"/>
+          <a:lstStyle/>
+          <a:p>
+            <a:pPr indent="0" marL="0">
+              <a:buNone/>
+            </a:pPr>
+            <a:r>
+              <a:rPr lang="en-US" sz="1200" dirty="0">
+                <a:solidFill>
+                  <a:srgbClr val="3F484D"/>
+                </a:solidFill>
+                <a:latin typeface="Calibri" pitchFamily="34" charset="0"/>
+                <a:ea typeface="Calibri" pitchFamily="34" charset="-122"/>
+                <a:cs typeface="Calibri" pitchFamily="34" charset="-120"/>
+              </a:rPr>
+              <a:t>The third bar swaps Haiku page reading for Sonnet at the same token counts ($2 / $10 per million): S$23.55. It is an estimate, not a run, and sits close to the agent’s default S$25 spending cap.</a:t>
+            </a:r>
+            <a:endParaRPr lang="en-US" sz="1200" dirty="0"/>
+          </a:p>
+        </p:txBody>
+      </p:sp>
+      <p:sp>
+        <p:nvSpPr>
+          <p:cNvPr id="7" name="scenario b"/>
+          <p:cNvSpPr/>
+          <p:nvPr/>
+        </p:nvSpPr>
+        <p:spPr>
+          <a:xfrm>
+            <a:off x="6675120" y="1371600"/>
+            <a:ext cx="4937760" cy="4480560"/>
+          </a:xfrm>
+          <a:prstGeom prst="roundRect">
+            <a:avLst>
+              <a:gd name="adj" fmla="val 1633"/>
+            </a:avLst>
+          </a:prstGeom>
+          <a:solidFill>
+            <a:srgbClr val="EEF1F3"/>
+          </a:solidFill>
+          <a:ln w="12700">
+            <a:solidFill>
+              <a:srgbClr val="EEF1F3"/>
+            </a:solidFill>
+            <a:prstDash val="solid"/>
+          </a:ln>
+        </p:spPr>
+      </p:sp>
+      <p:sp>
+        <p:nvSpPr>
+          <p:cNvPr id="8" name="Text 5"/>
+          <p:cNvSpPr txBox="1"/>
+          <p:nvPr/>
+        </p:nvSpPr>
+        <p:spPr>
+          <a:xfrm>
+            <a:off x="6949440" y="1554480"/>
+            <a:ext cx="4389120" cy="365760"/>
+          </a:xfrm>
+          <a:prstGeom prst="rect">
+            <a:avLst/>
+          </a:prstGeom>
+          <a:noFill/>
+          <a:ln/>
+        </p:spPr>
+        <p:txBody>
+          <a:bodyPr wrap="square" lIns="0" tIns="0" rIns="0" bIns="0" rtlCol="0" anchor="t"/>
+          <a:lstStyle/>
+          <a:p>
+            <a:pPr indent="0" marL="0">
+              <a:buNone/>
+            </a:pPr>
+            <a:r>
+              <a:rPr lang="en-US" sz="1800" b="1" dirty="0">
+                <a:solidFill>
+                  <a:srgbClr val="001F29"/>
+                </a:solidFill>
+                <a:latin typeface="Cambria" pitchFamily="34" charset="0"/>
+                <a:ea typeface="Cambria" pitchFamily="34" charset="-122"/>
+                <a:cs typeface="Cambria" pitchFamily="34" charset="-120"/>
+              </a:rPr>
+              <a:t>What the figures mean</a:t>
+            </a:r>
+            <a:endParaRPr lang="en-US" sz="1800" dirty="0"/>
+          </a:p>
+        </p:txBody>
+      </p:sp>
+      <p:sp>
+        <p:nvSpPr>
+          <p:cNvPr id="9" name="Text 6"/>
+          <p:cNvSpPr txBox="1"/>
+          <p:nvPr/>
+        </p:nvSpPr>
+        <p:spPr>
+          <a:xfrm>
+            <a:off x="6949440" y="2103120"/>
+            <a:ext cx="4389120" cy="3657600"/>
+          </a:xfrm>
+          <a:prstGeom prst="rect">
+            <a:avLst/>
+          </a:prstGeom>
+          <a:noFill/>
+          <a:ln/>
+        </p:spPr>
+        <p:txBody>
+          <a:bodyPr wrap="square" lIns="0" tIns="0" rIns="0" bIns="0" rtlCol="0" anchor="t"/>
+          <a:lstStyle/>
+          <a:p>
+            <a:pPr marL="342900" indent="-342900">
+              <a:spcAft>
+                <a:spcPts val="900"/>
+              </a:spcAft>
+              <a:buSzPct val="100000"/>
+              <a:buChar char="•"/>
+            </a:pPr>
+            <a:r>
+              <a:rPr lang="en-US" sz="1400" dirty="0">
+                <a:solidFill>
+                  <a:srgbClr val="181C1E"/>
+                </a:solidFill>
+                <a:latin typeface="Calibri" pitchFamily="34" charset="0"/>
+                <a:ea typeface="Calibri" pitchFamily="34" charset="-122"/>
+                <a:cs typeface="Calibri" pitchFamily="34" charset="-120"/>
+              </a:rPr>
+              <a:t>Subscription: the $100 a month plan covers it, with no charge per build. The run uses plan allowance worth S$12.51 at API rates, as Claude Code reports; limits reset weekly.</a:t>
+            </a:r>
+            <a:endParaRPr lang="en-US" sz="1400" dirty="0"/>
+          </a:p>
+          <a:p>
+            <a:pPr marL="342900" indent="-342900">
+              <a:spcAft>
+                <a:spcPts val="900"/>
+              </a:spcAft>
+              <a:buSzPct val="100000"/>
+              <a:buChar char="•"/>
+            </a:pPr>
+            <a:r>
+              <a:rPr lang="en-US" sz="1400" dirty="0">
+                <a:solidFill>
+                  <a:srgbClr val="181C1E"/>
+                </a:solidFill>
+                <a:latin typeface="Calibri" pitchFamily="34" charset="0"/>
+                <a:ea typeface="Calibri" pitchFamily="34" charset="-122"/>
+                <a:cs typeface="Calibri" pitchFamily="34" charset="-120"/>
+              </a:rPr>
+              <a:t>API key, same run: S$12.51 to S$12.80, billed per build.</a:t>
+            </a:r>
+            <a:endParaRPr lang="en-US" sz="1400" dirty="0"/>
+          </a:p>
+          <a:p>
+            <a:pPr marL="342900" indent="-342900">
+              <a:spcAft>
+                <a:spcPts val="900"/>
+              </a:spcAft>
+              <a:buSzPct val="100000"/>
+              <a:buChar char="•"/>
+            </a:pPr>
+            <a:r>
+              <a:rPr lang="en-US" sz="1400" dirty="0">
+                <a:solidFill>
+                  <a:srgbClr val="181C1E"/>
+                </a:solidFill>
+                <a:latin typeface="Calibri" pitchFamily="34" charset="0"/>
+                <a:ea typeface="Calibri" pitchFamily="34" charset="-122"/>
+                <a:cs typeface="Calibri" pitchFamily="34" charset="-120"/>
+              </a:rPr>
+              <a:t>Direct API agent: it builds comparisons only today, so it cannot make this estimate calculator yet.</a:t>
+            </a:r>
+            <a:endParaRPr lang="en-US" sz="1400" dirty="0"/>
+          </a:p>
+          <a:p>
+            <a:pPr marL="342900" indent="-342900">
+              <a:spcAft>
+                <a:spcPts val="900"/>
+              </a:spcAft>
+              <a:buSzPct val="100000"/>
+              <a:buChar char="•"/>
+            </a:pPr>
+            <a:r>
+              <a:rPr lang="en-US" sz="1400" dirty="0">
+                <a:solidFill>
+                  <a:srgbClr val="181C1E"/>
+                </a:solidFill>
+                <a:latin typeface="Calibri" pitchFamily="34" charset="0"/>
+                <a:ea typeface="Calibri" pitchFamily="34" charset="-122"/>
+                <a:cs typeface="Calibri" pitchFamily="34" charset="-120"/>
+              </a:rPr>
+              <a:t>Taking $100 as US$ (about S$128), the plan matches the API bill at about 10 large builds a month (S$12.80 each) or 64 small ones (S$2 each).</a:t>
+            </a:r>
+            <a:endParaRPr lang="en-US" sz="1400" dirty="0"/>
+          </a:p>
+        </p:txBody>
+      </p:sp>
+      <p:sp>
+        <p:nvSpPr>
+          <p:cNvPr id="10" name="Text 7"/>
           <p:cNvSpPr txBox="1"/>
           <p:nvPr/>
         </p:nvSpPr>
@@ -17275,7 +16244,7 @@
                 <a:ea typeface="Calibri" pitchFamily="34" charset="-122"/>
                 <a:cs typeface="Calibri" pitchFamily="34" charset="-120"/>
               </a:rPr>
-              <a:t>Token counts are measured (28 Oct build log). Rates: lib/pricing.ts. Ours runs 2.2% above Claude Code’s figure, all in the Opus part.</a:t>
+              <a:t>Measured: S$12.51 reported, S$12.80 estimated. Estimated: the direct API figure and the break-even (taking $100 as US$).</a:t>
             </a:r>
             <a:endParaRPr lang="en-US" sz="1100" dirty="0"/>
           </a:p>

--- a/FinWebBuilder-changes-made.pptx
+++ b/FinWebBuilder-changes-made.pptx
@@ -470,18 +470,21 @@
           </c:dLbls>
           <c:cat>
             <c:multiLvlStrRef>
-              <c:f>Sheet1!$A$2:$A$4</c:f>
+              <c:f>Sheet1!$A$2:$A$5</c:f>
               <c:multiLvlStrCache>
-                <c:ptCount val="3"/>
+                <c:ptCount val="4"/>
                 <c:lvl>
                   <c:pt idx="0">
-                    <c:v>Claude Code, $100/month plan (no charge per build)</c:v>
+                    <c:v>Claude Code billed to an API key</c:v>
                   </c:pt>
                   <c:pt idx="1">
-                    <c:v>Claude Code billed to an API key</c:v>
+                    <c:v>On the plan: high case (55M weekly tokens)</c:v>
                   </c:pt>
                   <c:pt idx="2">
-                    <c:v>Direct API agent, Sonnet reads pages (estimate)</c:v>
+                    <c:v>On the plan: mid case (110M)</c:v>
+                  </c:pt>
+                  <c:pt idx="3">
+                    <c:v>On the plan: low case (220M)</c:v>
                   </c:pt>
                 </c:lvl>
               </c:multiLvlStrCache>
@@ -489,18 +492,21 @@
           </c:cat>
           <c:val>
             <c:numRef>
-              <c:f>Sheet1!$B$2:$B$4</c:f>
+              <c:f>Sheet1!$B$2:$B$5</c:f>
               <c:numCache>
                 <c:formatCode>General</c:formatCode>
-                <c:ptCount val="3"/>
+                <c:ptCount val="4"/>
                 <c:pt idx="0">
-                  <c:v>0</c:v>
+                  <c:v>12.8</c:v>
                 </c:pt>
                 <c:pt idx="1">
-                  <c:v>12.8</c:v>
+                  <c:v>4.6</c:v>
                 </c:pt>
                 <c:pt idx="2">
-                  <c:v>23.55</c:v>
+                  <c:v>2.3</c:v>
+                </c:pt>
+                <c:pt idx="3">
+                  <c:v>1.15</c:v>
                 </c:pt>
               </c:numCache>
             </c:numRef>
@@ -2003,7 +2009,7 @@
           <a:p>
             <a:r>
               <a:rPr lang="en-US" dirty="0"/>
-              <a:t>Assumptions for the direct API agent: same tokens as the Claude Code run, Haiku page reading replaced by Sonnet at $2 input and $10 output per million, searches unchanged at $10 per 1,000, Opus lead unchanged with caching. Actual API-agent token counts would differ. The plan fee is $100 a month as Kumar stated; treated as US$ at the deck exchange rate (S$127.7), so break-even is 127.7 / 12.80 = about 10 large builds or 127.7 / 2 = 64 small ones.</a:t>
+              <a:t>Plan share method: S$130 per month divided by 4 gives S$32.50 per week. The build used 7,776,549 tokens (Haiku 3.26M input and 0.23M output; Opus 0.54M cache writes, 3.55M cache reads, 0.19M output). Anthropic publishes no weekly token cap for the plan, so three caps are assumed: 55M, 110M and 220M tokens. Cost = tokens used / cap x S$32.50, which gives S$4.60, S$2.30 and S$1.15. All tokens are counted equally; a plan may weigh Opus and cached tokens differently.</a:t>
             </a:r>
             <a:endParaRPr lang="en-US" dirty="0"/>
           </a:p>
@@ -3249,7 +3255,7 @@
                           <a:ea typeface="Calibri" pitchFamily="34" charset="-122"/>
                           <a:cs typeface="Calibri" pitchFamily="34" charset="-120"/>
                         </a:rPr>
-                        <a:t>$100 a month for the plan, however many builds you run</a:t>
+                        <a:t>S$130 a month for the plan, however many builds you run</a:t>
                       </a:r>
                       <a:endParaRPr lang="en-US" sz="1400" dirty="0">
                         <a:latin typeface="Calibri" charset="0"/>
@@ -5150,7 +5156,7 @@
                 <a:ea typeface="Calibri" pitchFamily="34" charset="-122"/>
                 <a:cs typeface="Calibri" pitchFamily="34" charset="-120"/>
               </a:rPr>
-              <a:t>Estimated: every S$ figure other than reported ones, the direct API agent, the cache savings and the plan break-even.</a:t>
+              <a:t>Estimated: every S$ figure other than reported ones, the plan-share bars (assumed weekly token cap), the cache savings and the plan break-even.</a:t>
             </a:r>
             <a:endParaRPr lang="en-US" sz="1600" dirty="0"/>
           </a:p>
@@ -5856,7 +5862,7 @@
                 <a:ea typeface="Calibri" pitchFamily="34" charset="-122"/>
                 <a:cs typeface="Calibri" pitchFamily="34" charset="-120"/>
               </a:rPr>
-              <a:t>the $100 a month plan covers the HDB build with no charge per build; billed to an API key it is S$12.80 (Claude Code reported S$12.51).</a:t>
+              <a:t>on the S$130 a month plan the HDB build is an estimated S$2.30 (range S$1.15 to S$4.60) of plan allowance; billed to an API key it is S$12.80 (Claude Code reported S$12.51).</a:t>
             </a:r>
             <a:endParaRPr lang="en-US" sz="1800" dirty="0"/>
           </a:p>
@@ -16033,7 +16039,7 @@
                 <a:ea typeface="Calibri" pitchFamily="34" charset="-122"/>
                 <a:cs typeface="Calibri" pitchFamily="34" charset="-120"/>
               </a:rPr>
-              <a:t>The third bar swaps Haiku page reading for Sonnet at the same token counts ($2 / $10 per million): S$23.55. It is an estimate, not a run, and sits close to the agent’s default S$25 spending cap.</a:t>
+              <a:t>Plan bars: S$130 ÷ 4 = S$32.50 a week, times the build’s 7.78M tokens as a share of an assumed weekly token cap. The cap is unpublished, so these are estimates.</a:t>
             </a:r>
             <a:endParaRPr lang="en-US" sz="1200" dirty="0"/>
           </a:p>
@@ -16142,7 +16148,7 @@
                 <a:ea typeface="Calibri" pitchFamily="34" charset="-122"/>
                 <a:cs typeface="Calibri" pitchFamily="34" charset="-120"/>
               </a:rPr>
-              <a:t>Subscription: the $100 a month plan covers it, with no charge per build. The run uses plan allowance worth S$12.51 at API rates, as Claude Code reports; limits reset weekly.</a:t>
+              <a:t>Plan: S$130 a month is S$32.50 a week. The build’s 7.78M tokens are 3.5% to 14.1% of an assumed weekly allowance, so about S$1.15 to S$4.60 (mid S$2.30). Limits reset weekly.</a:t>
             </a:r>
             <a:endParaRPr lang="en-US" sz="1400" dirty="0"/>
           </a:p>
@@ -16184,28 +16190,7 @@
                 <a:ea typeface="Calibri" pitchFamily="34" charset="-122"/>
                 <a:cs typeface="Calibri" pitchFamily="34" charset="-120"/>
               </a:rPr>
-              <a:t>Direct API agent: it builds comparisons only today, so it cannot make this estimate calculator yet.</a:t>
-            </a:r>
-            <a:endParaRPr lang="en-US" sz="1400" dirty="0"/>
-          </a:p>
-          <a:p>
-            <a:pPr marL="342900" indent="-342900">
-              <a:spcAft>
-                <a:spcPts val="900"/>
-              </a:spcAft>
-              <a:buSzPct val="100000"/>
-              <a:buChar char="•"/>
-            </a:pPr>
-            <a:r>
-              <a:rPr lang="en-US" sz="1400" dirty="0">
-                <a:solidFill>
-                  <a:srgbClr val="181C1E"/>
-                </a:solidFill>
-                <a:latin typeface="Calibri" pitchFamily="34" charset="0"/>
-                <a:ea typeface="Calibri" pitchFamily="34" charset="-122"/>
-                <a:cs typeface="Calibri" pitchFamily="34" charset="-120"/>
-              </a:rPr>
-              <a:t>Taking $100 as US$ (about S$128), the plan matches the API bill at about 10 large builds a month (S$12.80 each) or 64 small ones (S$2 each).</a:t>
+              <a:t>At S$130 a month, the plan matches the API bill at about 10 large builds a month (S$12.80 each) or 65 small ones (S$2 each).</a:t>
             </a:r>
             <a:endParaRPr lang="en-US" sz="1400" dirty="0"/>
           </a:p>
@@ -16244,7 +16229,7 @@
                 <a:ea typeface="Calibri" pitchFamily="34" charset="-122"/>
                 <a:cs typeface="Calibri" pitchFamily="34" charset="-120"/>
               </a:rPr>
-              <a:t>Measured: S$12.51 reported, S$12.80 estimated. Estimated: the direct API figure and the break-even (taking $100 as US$).</a:t>
+              <a:t>Measured: S$12.51 reported, S$12.80 estimated. Estimated: the plan bars (assumed weekly token cap) and the break-even.</a:t>
             </a:r>
             <a:endParaRPr lang="en-US" sz="1100" dirty="0"/>
           </a:p>
